--- a/dchat-项目介绍.pptx
+++ b/dchat-项目介绍.pptx
@@ -23,6 +23,11 @@
     <p:sldId id="271" r:id="rId22"/>
     <p:sldId id="272" r:id="rId23"/>
     <p:sldId id="273" r:id="rId24"/>
+    <p:sldId id="274" r:id="rId25"/>
+    <p:sldId id="275" r:id="rId26"/>
+    <p:sldId id="276" r:id="rId27"/>
+    <p:sldId id="277" r:id="rId28"/>
+    <p:sldId id="278" r:id="rId29"/>
   </p:sldIdLst>
   <p:sldSz cx="12191695" cy="6858000" type="screen4x3"/>
   <p:notesSz cx="6858000" cy="9144000"/>
@@ -3388,7 +3393,49 @@
         </p:nvSpPr>
         <p:spPr>
           <a:xfrm>
-            <a:off x="1051560" y="5989320"/>
+            <a:off x="1051560" y="5870448"/>
+            <a:ext cx="10058400" cy="548640"/>
+          </a:xfrm>
+          <a:prstGeom prst="rect">
+            <a:avLst/>
+          </a:prstGeom>
+          <a:noFill/>
+        </p:spPr>
+        <p:txBody>
+          <a:bodyPr wrap="square">
+            <a:spAutoFit/>
+          </a:bodyPr>
+          <a:lstStyle/>
+          <a:p>
+            <a:pPr algn="l">
+              <a:lnSpc>
+                <a:spcPct val="115000"/>
+              </a:lnSpc>
+              <a:spcAft>
+                <a:spcPts val="200"/>
+              </a:spcAft>
+            </a:pPr>
+            <a:r>
+              <a:rPr sz="1200">
+                <a:solidFill>
+                  <a:srgbClr val="7E9BC6"/>
+                </a:solidFill>
+                <a:latin typeface="微软雅黑"/>
+              </a:rPr>
+              <a:t>github.com/dongfang20101113/DChat   ·   53 次提交 / 9 天   ·   三端共 2.7 万行自有代码</a:t>
+            </a:r>
+          </a:p>
+        </p:txBody>
+      </p:sp>
+      <p:sp>
+        <p:nvSpPr>
+          <p:cNvPr id="9" name="TextBox 8"/>
+          <p:cNvSpPr txBox="1"/>
+          <p:nvPr/>
+        </p:nvSpPr>
+        <p:spPr>
+          <a:xfrm>
+            <a:off x="1051560" y="6199632"/>
             <a:ext cx="10058400" cy="457200"/>
           </a:xfrm>
           <a:prstGeom prst="rect">
@@ -3417,7 +3464,7 @@
                 </a:solidFill>
                 <a:latin typeface="微软雅黑"/>
               </a:rPr>
-              <a:t>github.com/dongfang20101113/DChat   ·   53 次提交 / 9 天   ·   三端共 2.7 万行自有代码</a:t>
+              <a:t>990+ 项测试全过   ·   端到端加密   ·   压测与攻击实测防护生效   ·   内存稳定 10 MB</a:t>
             </a:r>
           </a:p>
         </p:txBody>
@@ -5634,6 +5681,3975 @@
                 </a:solidFill>
                 <a:latin typeface="微软雅黑"/>
               </a:rPr>
+              <a:t>安全设计：纵深防御</a:t>
+            </a:r>
+          </a:p>
+          <a:p>
+            <a:r>
+              <a:rPr sz="1300">
+                <a:solidFill>
+                  <a:srgbClr val="A9C2E8"/>
+                </a:solidFill>
+                <a:latin typeface="微软雅黑"/>
+              </a:rPr>
+              <a:t>没有单点神话，是四层叠起来——每一层都假设上一层可能被绕过</a:t>
+            </a:r>
+          </a:p>
+        </p:txBody>
+      </p:sp>
+      <p:sp>
+        <p:nvSpPr>
+          <p:cNvPr id="3" name="Rectangle 2"/>
+          <p:cNvSpPr/>
+          <p:nvPr/>
+        </p:nvSpPr>
+        <p:spPr>
+          <a:xfrm>
+            <a:off x="566928" y="1170432"/>
+            <a:ext cx="11064240" cy="1042415"/>
+          </a:xfrm>
+          <a:prstGeom prst="rect">
+            <a:avLst/>
+          </a:prstGeom>
+          <a:solidFill>
+            <a:srgbClr val="E8F1FE"/>
+          </a:solidFill>
+          <a:ln w="15875">
+            <a:solidFill>
+              <a:srgbClr val="1F6FEB"/>
+            </a:solidFill>
+          </a:ln>
+          <a:effectLst/>
+        </p:spPr>
+        <p:style>
+          <a:lnRef idx="1">
+            <a:schemeClr val="accent1"/>
+          </a:lnRef>
+          <a:fillRef idx="3">
+            <a:schemeClr val="accent1"/>
+          </a:fillRef>
+          <a:effectRef idx="2">
+            <a:schemeClr val="accent1"/>
+          </a:effectRef>
+          <a:fontRef idx="minor">
+            <a:schemeClr val="lt1"/>
+          </a:fontRef>
+        </p:style>
+        <p:txBody>
+          <a:bodyPr rtlCol="0" anchor="ctr"/>
+          <a:lstStyle/>
+          <a:p/>
+        </p:txBody>
+      </p:sp>
+      <p:sp>
+        <p:nvSpPr>
+          <p:cNvPr id="4" name="TextBox 3"/>
+          <p:cNvSpPr txBox="1"/>
+          <p:nvPr/>
+        </p:nvSpPr>
+        <p:spPr>
+          <a:xfrm>
+            <a:off x="777240" y="1216152"/>
+            <a:ext cx="3931920" cy="384048"/>
+          </a:xfrm>
+          <a:prstGeom prst="rect">
+            <a:avLst/>
+          </a:prstGeom>
+          <a:noFill/>
+        </p:spPr>
+        <p:txBody>
+          <a:bodyPr wrap="square">
+            <a:spAutoFit/>
+          </a:bodyPr>
+          <a:lstStyle/>
+          <a:p>
+            <a:pPr algn="l">
+              <a:lnSpc>
+                <a:spcPct val="115000"/>
+              </a:lnSpc>
+              <a:spcAft>
+                <a:spcPts val="0"/>
+              </a:spcAft>
+            </a:pPr>
+            <a:r>
+              <a:rPr sz="1500">
+                <a:solidFill>
+                  <a:srgbClr val="1F6FEB"/>
+                </a:solidFill>
+                <a:latin typeface="微软雅黑"/>
+              </a:rPr>
+              <a:t>第 1 层  传输加密</a:t>
+            </a:r>
+          </a:p>
+        </p:txBody>
+      </p:sp>
+      <p:sp>
+        <p:nvSpPr>
+          <p:cNvPr id="5" name="TextBox 4"/>
+          <p:cNvSpPr txBox="1"/>
+          <p:nvPr/>
+        </p:nvSpPr>
+        <p:spPr>
+          <a:xfrm>
+            <a:off x="777240" y="1618488"/>
+            <a:ext cx="5760720" cy="548640"/>
+          </a:xfrm>
+          <a:prstGeom prst="rect">
+            <a:avLst/>
+          </a:prstGeom>
+          <a:noFill/>
+        </p:spPr>
+        <p:txBody>
+          <a:bodyPr wrap="square">
+            <a:spAutoFit/>
+          </a:bodyPr>
+          <a:lstStyle/>
+          <a:p>
+            <a:pPr algn="l">
+              <a:lnSpc>
+                <a:spcPct val="115000"/>
+              </a:lnSpc>
+              <a:spcAft>
+                <a:spcPts val="0"/>
+              </a:spcAft>
+            </a:pPr>
+            <a:r>
+              <a:rPr sz="1150">
+                <a:solidFill>
+                  <a:srgbClr val="202938"/>
+                </a:solidFill>
+                <a:latin typeface="微软雅黑"/>
+              </a:rPr>
+              <a:t>ECDH P-256 握手 · HKDF-SHA256 派生 · AES-256-GCM 逐条认证</a:t>
+            </a:r>
+          </a:p>
+        </p:txBody>
+      </p:sp>
+      <p:sp>
+        <p:nvSpPr>
+          <p:cNvPr id="6" name="TextBox 5"/>
+          <p:cNvSpPr txBox="1"/>
+          <p:nvPr/>
+        </p:nvSpPr>
+        <p:spPr>
+          <a:xfrm>
+            <a:off x="6720840" y="1444752"/>
+            <a:ext cx="4754880" cy="640080"/>
+          </a:xfrm>
+          <a:prstGeom prst="rect">
+            <a:avLst/>
+          </a:prstGeom>
+          <a:noFill/>
+        </p:spPr>
+        <p:txBody>
+          <a:bodyPr wrap="square">
+            <a:spAutoFit/>
+          </a:bodyPr>
+          <a:lstStyle/>
+          <a:p>
+            <a:pPr algn="l">
+              <a:lnSpc>
+                <a:spcPct val="115000"/>
+              </a:lnSpc>
+              <a:spcAft>
+                <a:spcPts val="0"/>
+              </a:spcAft>
+            </a:pPr>
+            <a:r>
+              <a:rPr sz="1150">
+                <a:solidFill>
+                  <a:srgbClr val="6C7584"/>
+                </a:solidFill>
+                <a:latin typeface="微软雅黑"/>
+              </a:rPr>
+              <a:t>抓包看不到密码与聊天内容；改一个字节就解不开</a:t>
+            </a:r>
+          </a:p>
+        </p:txBody>
+      </p:sp>
+      <p:sp>
+        <p:nvSpPr>
+          <p:cNvPr id="7" name="Rectangle 6"/>
+          <p:cNvSpPr/>
+          <p:nvPr/>
+        </p:nvSpPr>
+        <p:spPr>
+          <a:xfrm>
+            <a:off x="566928" y="2322576"/>
+            <a:ext cx="11064240" cy="1042415"/>
+          </a:xfrm>
+          <a:prstGeom prst="rect">
+            <a:avLst/>
+          </a:prstGeom>
+          <a:solidFill>
+            <a:srgbClr val="E6F6EE"/>
+          </a:solidFill>
+          <a:ln w="15875">
+            <a:solidFill>
+              <a:srgbClr val="168A57"/>
+            </a:solidFill>
+          </a:ln>
+          <a:effectLst/>
+        </p:spPr>
+        <p:style>
+          <a:lnRef idx="1">
+            <a:schemeClr val="accent1"/>
+          </a:lnRef>
+          <a:fillRef idx="3">
+            <a:schemeClr val="accent1"/>
+          </a:fillRef>
+          <a:effectRef idx="2">
+            <a:schemeClr val="accent1"/>
+          </a:effectRef>
+          <a:fontRef idx="minor">
+            <a:schemeClr val="lt1"/>
+          </a:fontRef>
+        </p:style>
+        <p:txBody>
+          <a:bodyPr rtlCol="0" anchor="ctr"/>
+          <a:lstStyle/>
+          <a:p/>
+        </p:txBody>
+      </p:sp>
+      <p:sp>
+        <p:nvSpPr>
+          <p:cNvPr id="8" name="TextBox 7"/>
+          <p:cNvSpPr txBox="1"/>
+          <p:nvPr/>
+        </p:nvSpPr>
+        <p:spPr>
+          <a:xfrm>
+            <a:off x="777240" y="2368296"/>
+            <a:ext cx="3931920" cy="384048"/>
+          </a:xfrm>
+          <a:prstGeom prst="rect">
+            <a:avLst/>
+          </a:prstGeom>
+          <a:noFill/>
+        </p:spPr>
+        <p:txBody>
+          <a:bodyPr wrap="square">
+            <a:spAutoFit/>
+          </a:bodyPr>
+          <a:lstStyle/>
+          <a:p>
+            <a:pPr algn="l">
+              <a:lnSpc>
+                <a:spcPct val="115000"/>
+              </a:lnSpc>
+              <a:spcAft>
+                <a:spcPts val="0"/>
+              </a:spcAft>
+            </a:pPr>
+            <a:r>
+              <a:rPr sz="1500">
+                <a:solidFill>
+                  <a:srgbClr val="168A57"/>
+                </a:solidFill>
+                <a:latin typeface="微软雅黑"/>
+              </a:rPr>
+              <a:t>第 2 层  身份与信任</a:t>
+            </a:r>
+          </a:p>
+        </p:txBody>
+      </p:sp>
+      <p:sp>
+        <p:nvSpPr>
+          <p:cNvPr id="9" name="TextBox 8"/>
+          <p:cNvSpPr txBox="1"/>
+          <p:nvPr/>
+        </p:nvSpPr>
+        <p:spPr>
+          <a:xfrm>
+            <a:off x="777240" y="2770632"/>
+            <a:ext cx="5760720" cy="548640"/>
+          </a:xfrm>
+          <a:prstGeom prst="rect">
+            <a:avLst/>
+          </a:prstGeom>
+          <a:noFill/>
+        </p:spPr>
+        <p:txBody>
+          <a:bodyPr wrap="square">
+            <a:spAutoFit/>
+          </a:bodyPr>
+          <a:lstStyle/>
+          <a:p>
+            <a:pPr algn="l">
+              <a:lnSpc>
+                <a:spcPct val="115000"/>
+              </a:lnSpc>
+              <a:spcAft>
+                <a:spcPts val="0"/>
+              </a:spcAft>
+            </a:pPr>
+            <a:r>
+              <a:rPr sz="1150">
+                <a:solidFill>
+                  <a:srgbClr val="202938"/>
+                </a:solidFill>
+                <a:latin typeface="微软雅黑"/>
+              </a:rPr>
+              <a:t>TOFU 指纹：第一次记住，之后每次比对，变了就中止连接</a:t>
+            </a:r>
+          </a:p>
+        </p:txBody>
+      </p:sp>
+      <p:sp>
+        <p:nvSpPr>
+          <p:cNvPr id="10" name="TextBox 9"/>
+          <p:cNvSpPr txBox="1"/>
+          <p:nvPr/>
+        </p:nvSpPr>
+        <p:spPr>
+          <a:xfrm>
+            <a:off x="6720840" y="2596896"/>
+            <a:ext cx="4754880" cy="640080"/>
+          </a:xfrm>
+          <a:prstGeom prst="rect">
+            <a:avLst/>
+          </a:prstGeom>
+          <a:noFill/>
+        </p:spPr>
+        <p:txBody>
+          <a:bodyPr wrap="square">
+            <a:spAutoFit/>
+          </a:bodyPr>
+          <a:lstStyle/>
+          <a:p>
+            <a:pPr algn="l">
+              <a:lnSpc>
+                <a:spcPct val="115000"/>
+              </a:lnSpc>
+              <a:spcAft>
+                <a:spcPts val="0"/>
+              </a:spcAft>
+            </a:pPr>
+            <a:r>
+              <a:rPr sz="1150">
+                <a:solidFill>
+                  <a:srgbClr val="6C7584"/>
+                </a:solidFill>
+                <a:latin typeface="微软雅黑"/>
+              </a:rPr>
+              <a:t>服务器密钥被换掉时，用户会立刻看到明确警告</a:t>
+            </a:r>
+          </a:p>
+        </p:txBody>
+      </p:sp>
+      <p:sp>
+        <p:nvSpPr>
+          <p:cNvPr id="11" name="Rectangle 10"/>
+          <p:cNvSpPr/>
+          <p:nvPr/>
+        </p:nvSpPr>
+        <p:spPr>
+          <a:xfrm>
+            <a:off x="566928" y="3474720"/>
+            <a:ext cx="11064240" cy="1042415"/>
+          </a:xfrm>
+          <a:prstGeom prst="rect">
+            <a:avLst/>
+          </a:prstGeom>
+          <a:solidFill>
+            <a:srgbClr val="FDF4E2"/>
+          </a:solidFill>
+          <a:ln w="15875">
+            <a:solidFill>
+              <a:srgbClr val="B06C0C"/>
+            </a:solidFill>
+          </a:ln>
+          <a:effectLst/>
+        </p:spPr>
+        <p:style>
+          <a:lnRef idx="1">
+            <a:schemeClr val="accent1"/>
+          </a:lnRef>
+          <a:fillRef idx="3">
+            <a:schemeClr val="accent1"/>
+          </a:fillRef>
+          <a:effectRef idx="2">
+            <a:schemeClr val="accent1"/>
+          </a:effectRef>
+          <a:fontRef idx="minor">
+            <a:schemeClr val="lt1"/>
+          </a:fontRef>
+        </p:style>
+        <p:txBody>
+          <a:bodyPr rtlCol="0" anchor="ctr"/>
+          <a:lstStyle/>
+          <a:p/>
+        </p:txBody>
+      </p:sp>
+      <p:sp>
+        <p:nvSpPr>
+          <p:cNvPr id="12" name="TextBox 11"/>
+          <p:cNvSpPr txBox="1"/>
+          <p:nvPr/>
+        </p:nvSpPr>
+        <p:spPr>
+          <a:xfrm>
+            <a:off x="777240" y="3520439"/>
+            <a:ext cx="3931920" cy="384048"/>
+          </a:xfrm>
+          <a:prstGeom prst="rect">
+            <a:avLst/>
+          </a:prstGeom>
+          <a:noFill/>
+        </p:spPr>
+        <p:txBody>
+          <a:bodyPr wrap="square">
+            <a:spAutoFit/>
+          </a:bodyPr>
+          <a:lstStyle/>
+          <a:p>
+            <a:pPr algn="l">
+              <a:lnSpc>
+                <a:spcPct val="115000"/>
+              </a:lnSpc>
+              <a:spcAft>
+                <a:spcPts val="0"/>
+              </a:spcAft>
+            </a:pPr>
+            <a:r>
+              <a:rPr sz="1500">
+                <a:solidFill>
+                  <a:srgbClr val="B06C0C"/>
+                </a:solidFill>
+                <a:latin typeface="微软雅黑"/>
+              </a:rPr>
+              <a:t>第 3 层  资源与准入</a:t>
+            </a:r>
+          </a:p>
+        </p:txBody>
+      </p:sp>
+      <p:sp>
+        <p:nvSpPr>
+          <p:cNvPr id="13" name="TextBox 12"/>
+          <p:cNvSpPr txBox="1"/>
+          <p:nvPr/>
+        </p:nvSpPr>
+        <p:spPr>
+          <a:xfrm>
+            <a:off x="777240" y="3922776"/>
+            <a:ext cx="5760720" cy="548640"/>
+          </a:xfrm>
+          <a:prstGeom prst="rect">
+            <a:avLst/>
+          </a:prstGeom>
+          <a:noFill/>
+        </p:spPr>
+        <p:txBody>
+          <a:bodyPr wrap="square">
+            <a:spAutoFit/>
+          </a:bodyPr>
+          <a:lstStyle/>
+          <a:p>
+            <a:pPr algn="l">
+              <a:lnSpc>
+                <a:spcPct val="115000"/>
+              </a:lnSpc>
+              <a:spcAft>
+                <a:spcPts val="0"/>
+              </a:spcAft>
+            </a:pPr>
+            <a:r>
+              <a:rPr sz="1150">
+                <a:solidFill>
+                  <a:srgbClr val="202938"/>
+                </a:solidFill>
+                <a:latin typeface="微软雅黑"/>
+              </a:rPr>
+              <a:t>连接数上限 · 单 IP 上限 · 握手超时 · 上传下载限速 · 发言间隔</a:t>
+            </a:r>
+          </a:p>
+        </p:txBody>
+      </p:sp>
+      <p:sp>
+        <p:nvSpPr>
+          <p:cNvPr id="14" name="TextBox 13"/>
+          <p:cNvSpPr txBox="1"/>
+          <p:nvPr/>
+        </p:nvSpPr>
+        <p:spPr>
+          <a:xfrm>
+            <a:off x="6720840" y="3749039"/>
+            <a:ext cx="4754880" cy="640080"/>
+          </a:xfrm>
+          <a:prstGeom prst="rect">
+            <a:avLst/>
+          </a:prstGeom>
+          <a:noFill/>
+        </p:spPr>
+        <p:txBody>
+          <a:bodyPr wrap="square">
+            <a:spAutoFit/>
+          </a:bodyPr>
+          <a:lstStyle/>
+          <a:p>
+            <a:pPr algn="l">
+              <a:lnSpc>
+                <a:spcPct val="115000"/>
+              </a:lnSpc>
+              <a:spcAft>
+                <a:spcPts val="0"/>
+              </a:spcAft>
+            </a:pPr>
+            <a:r>
+              <a:rPr sz="1150">
+                <a:solidFill>
+                  <a:srgbClr val="6C7584"/>
+                </a:solidFill>
+                <a:latin typeface="微软雅黑"/>
+              </a:rPr>
+              <a:t>把「占着连接不说话」和「狂建连接」在入口掐掉</a:t>
+            </a:r>
+          </a:p>
+        </p:txBody>
+      </p:sp>
+      <p:sp>
+        <p:nvSpPr>
+          <p:cNvPr id="15" name="Rectangle 14"/>
+          <p:cNvSpPr/>
+          <p:nvPr/>
+        </p:nvSpPr>
+        <p:spPr>
+          <a:xfrm>
+            <a:off x="566928" y="4626864"/>
+            <a:ext cx="11064240" cy="1042415"/>
+          </a:xfrm>
+          <a:prstGeom prst="rect">
+            <a:avLst/>
+          </a:prstGeom>
+          <a:solidFill>
+            <a:srgbClr val="FDECEA"/>
+          </a:solidFill>
+          <a:ln w="15875">
+            <a:solidFill>
+              <a:srgbClr val="B03A2B"/>
+            </a:solidFill>
+          </a:ln>
+          <a:effectLst/>
+        </p:spPr>
+        <p:style>
+          <a:lnRef idx="1">
+            <a:schemeClr val="accent1"/>
+          </a:lnRef>
+          <a:fillRef idx="3">
+            <a:schemeClr val="accent1"/>
+          </a:fillRef>
+          <a:effectRef idx="2">
+            <a:schemeClr val="accent1"/>
+          </a:effectRef>
+          <a:fontRef idx="minor">
+            <a:schemeClr val="lt1"/>
+          </a:fontRef>
+        </p:style>
+        <p:txBody>
+          <a:bodyPr rtlCol="0" anchor="ctr"/>
+          <a:lstStyle/>
+          <a:p/>
+        </p:txBody>
+      </p:sp>
+      <p:sp>
+        <p:nvSpPr>
+          <p:cNvPr id="16" name="TextBox 15"/>
+          <p:cNvSpPr txBox="1"/>
+          <p:nvPr/>
+        </p:nvSpPr>
+        <p:spPr>
+          <a:xfrm>
+            <a:off x="777240" y="4672583"/>
+            <a:ext cx="3931920" cy="384048"/>
+          </a:xfrm>
+          <a:prstGeom prst="rect">
+            <a:avLst/>
+          </a:prstGeom>
+          <a:noFill/>
+        </p:spPr>
+        <p:txBody>
+          <a:bodyPr wrap="square">
+            <a:spAutoFit/>
+          </a:bodyPr>
+          <a:lstStyle/>
+          <a:p>
+            <a:pPr algn="l">
+              <a:lnSpc>
+                <a:spcPct val="115000"/>
+              </a:lnSpc>
+              <a:spcAft>
+                <a:spcPts val="0"/>
+              </a:spcAft>
+            </a:pPr>
+            <a:r>
+              <a:rPr sz="1500">
+                <a:solidFill>
+                  <a:srgbClr val="B03A2B"/>
+                </a:solidFill>
+                <a:latin typeface="微软雅黑"/>
+              </a:rPr>
+              <a:t>第 4 层  凭据保护</a:t>
+            </a:r>
+          </a:p>
+        </p:txBody>
+      </p:sp>
+      <p:sp>
+        <p:nvSpPr>
+          <p:cNvPr id="17" name="TextBox 16"/>
+          <p:cNvSpPr txBox="1"/>
+          <p:nvPr/>
+        </p:nvSpPr>
+        <p:spPr>
+          <a:xfrm>
+            <a:off x="777240" y="5074920"/>
+            <a:ext cx="5760720" cy="548640"/>
+          </a:xfrm>
+          <a:prstGeom prst="rect">
+            <a:avLst/>
+          </a:prstGeom>
+          <a:noFill/>
+        </p:spPr>
+        <p:txBody>
+          <a:bodyPr wrap="square">
+            <a:spAutoFit/>
+          </a:bodyPr>
+          <a:lstStyle/>
+          <a:p>
+            <a:pPr algn="l">
+              <a:lnSpc>
+                <a:spcPct val="115000"/>
+              </a:lnSpc>
+              <a:spcAft>
+                <a:spcPts val="0"/>
+              </a:spcAft>
+            </a:pPr>
+            <a:r>
+              <a:rPr sz="1150">
+                <a:solidFill>
+                  <a:srgbClr val="202938"/>
+                </a:solidFill>
+                <a:latin typeface="微软雅黑"/>
+              </a:rPr>
+              <a:t>PBKDF2-HMAC-SHA256 加盐 · 登录失败窗口封禁 · 密码不落盘</a:t>
+            </a:r>
+          </a:p>
+        </p:txBody>
+      </p:sp>
+      <p:sp>
+        <p:nvSpPr>
+          <p:cNvPr id="18" name="TextBox 17"/>
+          <p:cNvSpPr txBox="1"/>
+          <p:nvPr/>
+        </p:nvSpPr>
+        <p:spPr>
+          <a:xfrm>
+            <a:off x="6720840" y="4901183"/>
+            <a:ext cx="4754880" cy="640080"/>
+          </a:xfrm>
+          <a:prstGeom prst="rect">
+            <a:avLst/>
+          </a:prstGeom>
+          <a:noFill/>
+        </p:spPr>
+        <p:txBody>
+          <a:bodyPr wrap="square">
+            <a:spAutoFit/>
+          </a:bodyPr>
+          <a:lstStyle/>
+          <a:p>
+            <a:pPr algn="l">
+              <a:lnSpc>
+                <a:spcPct val="115000"/>
+              </a:lnSpc>
+              <a:spcAft>
+                <a:spcPts val="0"/>
+              </a:spcAft>
+            </a:pPr>
+            <a:r>
+              <a:rPr sz="1150">
+                <a:solidFill>
+                  <a:srgbClr val="6C7584"/>
+                </a:solidFill>
+                <a:latin typeface="微软雅黑"/>
+              </a:rPr>
+              <a:t>拖走账号文件也拿不到密码；在线暴破被时间窗限住</a:t>
+            </a:r>
+          </a:p>
+        </p:txBody>
+      </p:sp>
+      <p:sp>
+        <p:nvSpPr>
+          <p:cNvPr id="19" name="TextBox 18"/>
+          <p:cNvSpPr txBox="1"/>
+          <p:nvPr/>
+        </p:nvSpPr>
+        <p:spPr>
+          <a:xfrm>
+            <a:off x="566928" y="6053328"/>
+            <a:ext cx="11064240" cy="548640"/>
+          </a:xfrm>
+          <a:prstGeom prst="rect">
+            <a:avLst/>
+          </a:prstGeom>
+          <a:noFill/>
+        </p:spPr>
+        <p:txBody>
+          <a:bodyPr wrap="square">
+            <a:spAutoFit/>
+          </a:bodyPr>
+          <a:lstStyle/>
+          <a:p>
+            <a:pPr algn="l">
+              <a:lnSpc>
+                <a:spcPct val="115000"/>
+              </a:lnSpc>
+              <a:spcAft>
+                <a:spcPts val="800"/>
+              </a:spcAft>
+            </a:pPr>
+            <a:r>
+              <a:rPr sz="1200">
+                <a:solidFill>
+                  <a:srgbClr val="6C7584"/>
+                </a:solidFill>
+                <a:latin typeface="微软雅黑"/>
+              </a:rPr>
+              <a:t>四层互相独立：加密被绕过仍有指纹，指纹被忽略仍有连接上限，上限被绕开仍有凭据哈希</a:t>
+            </a:r>
+          </a:p>
+        </p:txBody>
+      </p:sp>
+    </p:spTree>
+  </p:cSld>
+  <p:clrMapOvr>
+    <a:masterClrMapping/>
+  </p:clrMapOvr>
+</p:sld>
+</file>
+
+<file path=ppt/slides/slide14.xml><?xml version="1.0" encoding="utf-8"?>
+<p:sld xmlns:a="http://schemas.openxmlformats.org/drawingml/2006/main" xmlns:p="http://schemas.openxmlformats.org/presentationml/2006/main" xmlns:r="http://schemas.openxmlformats.org/officeDocument/2006/relationships">
+  <p:cSld>
+    <p:spTree>
+      <p:nvGrpSpPr>
+        <p:cNvPr id="1" name=""/>
+        <p:cNvGrpSpPr/>
+        <p:nvPr/>
+      </p:nvGrpSpPr>
+      <p:grpSpPr/>
+      <p:sp>
+        <p:nvSpPr>
+          <p:cNvPr id="2" name="Rectangle 1"/>
+          <p:cNvSpPr/>
+          <p:nvPr/>
+        </p:nvSpPr>
+        <p:spPr>
+          <a:xfrm>
+            <a:off x="0" y="0"/>
+            <a:ext cx="12191695" cy="932688"/>
+          </a:xfrm>
+          <a:prstGeom prst="rect">
+            <a:avLst/>
+          </a:prstGeom>
+          <a:solidFill>
+            <a:srgbClr val="16284A"/>
+          </a:solidFill>
+          <a:ln>
+            <a:noFill/>
+          </a:ln>
+          <a:effectLst/>
+        </p:spPr>
+        <p:style>
+          <a:lnRef idx="1">
+            <a:schemeClr val="accent1"/>
+          </a:lnRef>
+          <a:fillRef idx="3">
+            <a:schemeClr val="accent1"/>
+          </a:fillRef>
+          <a:effectRef idx="2">
+            <a:schemeClr val="accent1"/>
+          </a:effectRef>
+          <a:fontRef idx="minor">
+            <a:schemeClr val="lt1"/>
+          </a:fontRef>
+        </p:style>
+        <p:txBody>
+          <a:bodyPr rtlCol="0" anchor="ctr" lIns="411480" tIns="91440"/>
+          <a:lstStyle/>
+          <a:p>
+            <a:pPr algn="ctr"/>
+            <a:r>
+              <a:rPr sz="2800" b="1">
+                <a:solidFill>
+                  <a:srgbClr val="FFFFFF"/>
+                </a:solidFill>
+                <a:latin typeface="微软雅黑"/>
+              </a:rPr>
+              <a:t>压力与攻击实测（一）：防护是否真的生效</a:t>
+            </a:r>
+          </a:p>
+          <a:p>
+            <a:r>
+              <a:rPr sz="1300">
+                <a:solidFill>
+                  <a:srgbClr val="A9C2E8"/>
+                </a:solidFill>
+                <a:latin typeface="微软雅黑"/>
+              </a:rPr>
+              <a:t>在 Kali 虚拟机上对着真服务端打出来的，不是估算值</a:t>
+            </a:r>
+          </a:p>
+        </p:txBody>
+      </p:sp>
+      <p:graphicFrame>
+        <p:nvGraphicFramePr>
+          <p:cNvPr id="3" name="Table 2"/>
+          <p:cNvGraphicFramePr>
+            <a:graphicFrameLocks noGrp="1"/>
+          </p:cNvGraphicFramePr>
+          <p:nvPr/>
+        </p:nvGraphicFramePr>
+        <p:xfrm>
+          <a:off x="566928" y="1188720"/>
+          <a:ext cx="11064240" cy="3977639"/>
+        </p:xfrm>
+        <a:graphic>
+          <a:graphicData uri="http://schemas.openxmlformats.org/drawingml/2006/table">
+            <a:tbl>
+              <a:tblPr firstRow="1" bandRow="1">
+                <a:tableStyleId>{5C22544A-7EE6-4342-B048-85BDC9FD1C3A}</a:tableStyleId>
+              </a:tblPr>
+              <a:tblGrid>
+                <a:gridCol w="2651760"/>
+                <a:gridCol w="2286000"/>
+                <a:gridCol w="6126480"/>
+              </a:tblGrid>
+              <a:tr h="568234">
+                <a:tc>
+                  <a:txBody>
+                    <a:bodyPr/>
+                    <a:lstStyle/>
+                    <a:p>
+                      <a:pPr>
+                        <a:lnSpc>
+                          <a:spcPct val="100000"/>
+                        </a:lnSpc>
+                      </a:pPr>
+                      <a:r>
+                        <a:rPr sz="1100" b="1">
+                          <a:solidFill>
+                            <a:srgbClr val="FFFFFF"/>
+                          </a:solidFill>
+                          <a:latin typeface="微软雅黑"/>
+                        </a:rPr>
+                        <a:t>攻击方式</a:t>
+                      </a:r>
+                    </a:p>
+                  </a:txBody>
+                  <a:tcPr marL="73152" marR="54864" marT="18288" marB="18288" anchor="ctr">
+                    <a:solidFill>
+                      <a:srgbClr val="16284A"/>
+                    </a:solidFill>
+                  </a:tcPr>
+                </a:tc>
+                <a:tc>
+                  <a:txBody>
+                    <a:bodyPr/>
+                    <a:lstStyle/>
+                    <a:p>
+                      <a:pPr>
+                        <a:lnSpc>
+                          <a:spcPct val="100000"/>
+                        </a:lnSpc>
+                      </a:pPr>
+                      <a:r>
+                        <a:rPr sz="1100" b="1">
+                          <a:solidFill>
+                            <a:srgbClr val="FFFFFF"/>
+                          </a:solidFill>
+                          <a:latin typeface="微软雅黑"/>
+                        </a:rPr>
+                        <a:t>配置</a:t>
+                      </a:r>
+                    </a:p>
+                  </a:txBody>
+                  <a:tcPr marL="73152" marR="54864" marT="18288" marB="18288" anchor="ctr">
+                    <a:solidFill>
+                      <a:srgbClr val="16284A"/>
+                    </a:solidFill>
+                  </a:tcPr>
+                </a:tc>
+                <a:tc>
+                  <a:txBody>
+                    <a:bodyPr/>
+                    <a:lstStyle/>
+                    <a:p>
+                      <a:pPr>
+                        <a:lnSpc>
+                          <a:spcPct val="100000"/>
+                        </a:lnSpc>
+                      </a:pPr>
+                      <a:r>
+                        <a:rPr sz="1100" b="1">
+                          <a:solidFill>
+                            <a:srgbClr val="FFFFFF"/>
+                          </a:solidFill>
+                          <a:latin typeface="微软雅黑"/>
+                        </a:rPr>
+                        <a:t>实测结果</a:t>
+                      </a:r>
+                    </a:p>
+                  </a:txBody>
+                  <a:tcPr marL="73152" marR="54864" marT="18288" marB="18288" anchor="ctr">
+                    <a:solidFill>
+                      <a:srgbClr val="16284A"/>
+                    </a:solidFill>
+                  </a:tcPr>
+                </a:tc>
+              </a:tr>
+              <a:tr h="568234">
+                <a:tc>
+                  <a:txBody>
+                    <a:bodyPr/>
+                    <a:lstStyle/>
+                    <a:p>
+                      <a:pPr>
+                        <a:lnSpc>
+                          <a:spcPct val="100000"/>
+                        </a:lnSpc>
+                      </a:pPr>
+                      <a:r>
+                        <a:rPr sz="1100" b="0">
+                          <a:solidFill>
+                            <a:srgbClr val="202938"/>
+                          </a:solidFill>
+                          <a:latin typeface="微软雅黑"/>
+                        </a:rPr>
+                        <a:t>连接洪泛 200 条</a:t>
+                      </a:r>
+                    </a:p>
+                  </a:txBody>
+                  <a:tcPr marL="73152" marR="54864" marT="18288" marB="18288" anchor="ctr">
+                    <a:solidFill>
+                      <a:srgbClr val="FFFFFF"/>
+                    </a:solidFill>
+                  </a:tcPr>
+                </a:tc>
+                <a:tc>
+                  <a:txBody>
+                    <a:bodyPr/>
+                    <a:lstStyle/>
+                    <a:p>
+                      <a:pPr>
+                        <a:lnSpc>
+                          <a:spcPct val="100000"/>
+                        </a:lnSpc>
+                      </a:pPr>
+                      <a:r>
+                        <a:rPr sz="1100" b="0">
+                          <a:solidFill>
+                            <a:srgbClr val="202938"/>
+                          </a:solidFill>
+                          <a:latin typeface="微软雅黑"/>
+                        </a:rPr>
+                        <a:t>maxconnsperip = 60</a:t>
+                      </a:r>
+                    </a:p>
+                  </a:txBody>
+                  <a:tcPr marL="73152" marR="54864" marT="18288" marB="18288" anchor="ctr">
+                    <a:solidFill>
+                      <a:srgbClr val="FFFFFF"/>
+                    </a:solidFill>
+                  </a:tcPr>
+                </a:tc>
+                <a:tc>
+                  <a:txBody>
+                    <a:bodyPr/>
+                    <a:lstStyle/>
+                    <a:p>
+                      <a:pPr>
+                        <a:lnSpc>
+                          <a:spcPct val="100000"/>
+                        </a:lnSpc>
+                      </a:pPr>
+                      <a:r>
+                        <a:rPr sz="1100" b="0">
+                          <a:solidFill>
+                            <a:srgbClr val="202938"/>
+                          </a:solidFill>
+                          <a:latin typeface="微软雅黑"/>
+                        </a:rPr>
+                        <a:t>正好 60 条存活、140 条被拒——上限精确生效，服务端逐条记录拒绝原因</a:t>
+                      </a:r>
+                    </a:p>
+                  </a:txBody>
+                  <a:tcPr marL="73152" marR="54864" marT="18288" marB="18288" anchor="ctr">
+                    <a:solidFill>
+                      <a:srgbClr val="FFFFFF"/>
+                    </a:solidFill>
+                  </a:tcPr>
+                </a:tc>
+              </a:tr>
+              <a:tr h="568234">
+                <a:tc>
+                  <a:txBody>
+                    <a:bodyPr/>
+                    <a:lstStyle/>
+                    <a:p>
+                      <a:pPr>
+                        <a:lnSpc>
+                          <a:spcPct val="100000"/>
+                        </a:lnSpc>
+                      </a:pPr>
+                      <a:r>
+                        <a:rPr sz="1100" b="0">
+                          <a:solidFill>
+                            <a:srgbClr val="202938"/>
+                          </a:solidFill>
+                          <a:latin typeface="微软雅黑"/>
+                        </a:rPr>
+                        <a:t>慢速连接耗尽 40 条 × 占住 25 秒</a:t>
+                      </a:r>
+                    </a:p>
+                  </a:txBody>
+                  <a:tcPr marL="73152" marR="54864" marT="18288" marB="18288" anchor="ctr">
+                    <a:solidFill>
+                      <a:srgbClr val="F3F5F8"/>
+                    </a:solidFill>
+                  </a:tcPr>
+                </a:tc>
+                <a:tc>
+                  <a:txBody>
+                    <a:bodyPr/>
+                    <a:lstStyle/>
+                    <a:p>
+                      <a:pPr>
+                        <a:lnSpc>
+                          <a:spcPct val="100000"/>
+                        </a:lnSpc>
+                      </a:pPr>
+                      <a:r>
+                        <a:rPr sz="1100" b="0">
+                          <a:solidFill>
+                            <a:srgbClr val="202938"/>
+                          </a:solidFill>
+                          <a:latin typeface="微软雅黑"/>
+                        </a:rPr>
+                        <a:t>handshaketimeout = 10 秒</a:t>
+                      </a:r>
+                    </a:p>
+                  </a:txBody>
+                  <a:tcPr marL="73152" marR="54864" marT="18288" marB="18288" anchor="ctr">
+                    <a:solidFill>
+                      <a:srgbClr val="F3F5F8"/>
+                    </a:solidFill>
+                  </a:tcPr>
+                </a:tc>
+                <a:tc>
+                  <a:txBody>
+                    <a:bodyPr/>
+                    <a:lstStyle/>
+                    <a:p>
+                      <a:pPr>
+                        <a:lnSpc>
+                          <a:spcPct val="100000"/>
+                        </a:lnSpc>
+                      </a:pPr>
+                      <a:r>
+                        <a:rPr sz="1100" b="0">
+                          <a:solidFill>
+                            <a:srgbClr val="202938"/>
+                          </a:solidFill>
+                          <a:latin typeface="微软雅黑"/>
+                        </a:rPr>
+                        <a:t>40/40 全部被按时断开；服务端日志出现 72 次 handshake timeout</a:t>
+                      </a:r>
+                    </a:p>
+                  </a:txBody>
+                  <a:tcPr marL="73152" marR="54864" marT="18288" marB="18288" anchor="ctr">
+                    <a:solidFill>
+                      <a:srgbClr val="F3F5F8"/>
+                    </a:solidFill>
+                  </a:tcPr>
+                </a:tc>
+              </a:tr>
+              <a:tr h="568234">
+                <a:tc>
+                  <a:txBody>
+                    <a:bodyPr/>
+                    <a:lstStyle/>
+                    <a:p>
+                      <a:pPr>
+                        <a:lnSpc>
+                          <a:spcPct val="100000"/>
+                        </a:lnSpc>
+                      </a:pPr>
+                      <a:r>
+                        <a:rPr sz="1100" b="0">
+                          <a:solidFill>
+                            <a:srgbClr val="202938"/>
+                          </a:solidFill>
+                          <a:latin typeface="微软雅黑"/>
+                        </a:rPr>
+                        <a:t>暴力破解 12 次错误密码</a:t>
+                      </a:r>
+                    </a:p>
+                  </a:txBody>
+                  <a:tcPr marL="73152" marR="54864" marT="18288" marB="18288" anchor="ctr">
+                    <a:solidFill>
+                      <a:srgbClr val="FFFFFF"/>
+                    </a:solidFill>
+                  </a:tcPr>
+                </a:tc>
+                <a:tc>
+                  <a:txBody>
+                    <a:bodyPr/>
+                    <a:lstStyle/>
+                    <a:p>
+                      <a:pPr>
+                        <a:lnSpc>
+                          <a:spcPct val="100000"/>
+                        </a:lnSpc>
+                      </a:pPr>
+                      <a:r>
+                        <a:rPr sz="1100" b="0">
+                          <a:solidFill>
+                            <a:srgbClr val="202938"/>
+                          </a:solidFill>
+                          <a:latin typeface="微软雅黑"/>
+                        </a:rPr>
+                        <a:t>loginfails = 5（5 分钟窗口）</a:t>
+                      </a:r>
+                    </a:p>
+                  </a:txBody>
+                  <a:tcPr marL="73152" marR="54864" marT="18288" marB="18288" anchor="ctr">
+                    <a:solidFill>
+                      <a:srgbClr val="FFFFFF"/>
+                    </a:solidFill>
+                  </a:tcPr>
+                </a:tc>
+                <a:tc>
+                  <a:txBody>
+                    <a:bodyPr/>
+                    <a:lstStyle/>
+                    <a:p>
+                      <a:pPr>
+                        <a:lnSpc>
+                          <a:spcPct val="100000"/>
+                        </a:lnSpc>
+                      </a:pPr>
+                      <a:r>
+                        <a:rPr sz="1100" b="0">
+                          <a:solidFill>
+                            <a:srgbClr val="202938"/>
+                          </a:solidFill>
+                          <a:latin typeface="微软雅黑"/>
+                        </a:rPr>
+                        <a:t>12/12 全部被拒，攻击方一次都没登上</a:t>
+                      </a:r>
+                    </a:p>
+                  </a:txBody>
+                  <a:tcPr marL="73152" marR="54864" marT="18288" marB="18288" anchor="ctr">
+                    <a:solidFill>
+                      <a:srgbClr val="FFFFFF"/>
+                    </a:solidFill>
+                  </a:tcPr>
+                </a:tc>
+              </a:tr>
+              <a:tr h="568234">
+                <a:tc>
+                  <a:txBody>
+                    <a:bodyPr/>
+                    <a:lstStyle/>
+                    <a:p>
+                      <a:pPr>
+                        <a:lnSpc>
+                          <a:spcPct val="100000"/>
+                        </a:lnSpc>
+                      </a:pPr>
+                      <a:r>
+                        <a:rPr sz="1100" b="0">
+                          <a:solidFill>
+                            <a:srgbClr val="202938"/>
+                          </a:solidFill>
+                          <a:latin typeface="微软雅黑"/>
+                        </a:rPr>
+                        <a:t>畸形数据 11 类</a:t>
+                      </a:r>
+                    </a:p>
+                  </a:txBody>
+                  <a:tcPr marL="73152" marR="54864" marT="18288" marB="18288" anchor="ctr">
+                    <a:solidFill>
+                      <a:srgbClr val="F3F5F8"/>
+                    </a:solidFill>
+                  </a:tcPr>
+                </a:tc>
+                <a:tc>
+                  <a:txBody>
+                    <a:bodyPr/>
+                    <a:lstStyle/>
+                    <a:p>
+                      <a:pPr>
+                        <a:lnSpc>
+                          <a:spcPct val="100000"/>
+                        </a:lnSpc>
+                      </a:pPr>
+                      <a:r>
+                        <a:rPr sz="1100" b="0">
+                          <a:solidFill>
+                            <a:srgbClr val="202938"/>
+                          </a:solidFill>
+                          <a:latin typeface="微软雅黑"/>
+                        </a:rPr>
+                        <a:t>—</a:t>
+                      </a:r>
+                    </a:p>
+                  </a:txBody>
+                  <a:tcPr marL="73152" marR="54864" marT="18288" marB="18288" anchor="ctr">
+                    <a:solidFill>
+                      <a:srgbClr val="F3F5F8"/>
+                    </a:solidFill>
+                  </a:tcPr>
+                </a:tc>
+                <a:tc>
+                  <a:txBody>
+                    <a:bodyPr/>
+                    <a:lstStyle/>
+                    <a:p>
+                      <a:pPr>
+                        <a:lnSpc>
+                          <a:spcPct val="100000"/>
+                        </a:lnSpc>
+                      </a:pPr>
+                      <a:r>
+                        <a:rPr sz="1100" b="0">
+                          <a:solidFill>
+                            <a:srgbClr val="202938"/>
+                          </a:solidFill>
+                          <a:latin typeface="微软雅黑"/>
+                        </a:rPr>
+                        <a:t>超长行 / 二进制乱字节 / 无换行灌数据 / 伪造 HELLO_OK / 未握手注入 ENC / 半包即断——全部未命中，服务端未崩溃</a:t>
+                      </a:r>
+                    </a:p>
+                  </a:txBody>
+                  <a:tcPr marL="73152" marR="54864" marT="18288" marB="18288" anchor="ctr">
+                    <a:solidFill>
+                      <a:srgbClr val="F3F5F8"/>
+                    </a:solidFill>
+                  </a:tcPr>
+                </a:tc>
+              </a:tr>
+              <a:tr h="568234">
+                <a:tc>
+                  <a:txBody>
+                    <a:bodyPr/>
+                    <a:lstStyle/>
+                    <a:p>
+                      <a:pPr>
+                        <a:lnSpc>
+                          <a:spcPct val="100000"/>
+                        </a:lnSpc>
+                      </a:pPr>
+                      <a:r>
+                        <a:rPr sz="1100" b="0">
+                          <a:solidFill>
+                            <a:srgbClr val="202938"/>
+                          </a:solidFill>
+                          <a:latin typeface="微软雅黑"/>
+                        </a:rPr>
+                        <a:t>攻击后正常业务</a:t>
+                      </a:r>
+                    </a:p>
+                  </a:txBody>
+                  <a:tcPr marL="73152" marR="54864" marT="18288" marB="18288" anchor="ctr">
+                    <a:solidFill>
+                      <a:srgbClr val="FFFFFF"/>
+                    </a:solidFill>
+                  </a:tcPr>
+                </a:tc>
+                <a:tc>
+                  <a:txBody>
+                    <a:bodyPr/>
+                    <a:lstStyle/>
+                    <a:p>
+                      <a:pPr>
+                        <a:lnSpc>
+                          <a:spcPct val="100000"/>
+                        </a:lnSpc>
+                      </a:pPr>
+                      <a:r>
+                        <a:rPr sz="1100" b="0">
+                          <a:solidFill>
+                            <a:srgbClr val="202938"/>
+                          </a:solidFill>
+                          <a:latin typeface="微软雅黑"/>
+                        </a:rPr>
+                        <a:t>—</a:t>
+                      </a:r>
+                    </a:p>
+                  </a:txBody>
+                  <a:tcPr marL="73152" marR="54864" marT="18288" marB="18288" anchor="ctr">
+                    <a:solidFill>
+                      <a:srgbClr val="FFFFFF"/>
+                    </a:solidFill>
+                  </a:tcPr>
+                </a:tc>
+                <a:tc>
+                  <a:txBody>
+                    <a:bodyPr/>
+                    <a:lstStyle/>
+                    <a:p>
+                      <a:pPr>
+                        <a:lnSpc>
+                          <a:spcPct val="100000"/>
+                        </a:lnSpc>
+                      </a:pPr>
+                      <a:r>
+                        <a:rPr sz="1100" b="0">
+                          <a:solidFill>
+                            <a:srgbClr val="202938"/>
+                          </a:solidFill>
+                          <a:latin typeface="微软雅黑"/>
+                        </a:rPr>
+                        <a:t>新客户端仍能正常注册、登录、收发消息</a:t>
+                      </a:r>
+                    </a:p>
+                  </a:txBody>
+                  <a:tcPr marL="73152" marR="54864" marT="18288" marB="18288" anchor="ctr">
+                    <a:solidFill>
+                      <a:srgbClr val="FFFFFF"/>
+                    </a:solidFill>
+                  </a:tcPr>
+                </a:tc>
+              </a:tr>
+              <a:tr h="568235">
+                <a:tc>
+                  <a:txBody>
+                    <a:bodyPr/>
+                    <a:lstStyle/>
+                    <a:p>
+                      <a:pPr>
+                        <a:lnSpc>
+                          <a:spcPct val="100000"/>
+                        </a:lnSpc>
+                      </a:pPr>
+                      <a:r>
+                        <a:rPr sz="1100" b="0">
+                          <a:solidFill>
+                            <a:srgbClr val="202938"/>
+                          </a:solidFill>
+                          <a:latin typeface="微软雅黑"/>
+                        </a:rPr>
+                        <a:t>内存占用</a:t>
+                      </a:r>
+                    </a:p>
+                  </a:txBody>
+                  <a:tcPr marL="73152" marR="54864" marT="18288" marB="18288" anchor="ctr">
+                    <a:solidFill>
+                      <a:srgbClr val="F3F5F8"/>
+                    </a:solidFill>
+                  </a:tcPr>
+                </a:tc>
+                <a:tc>
+                  <a:txBody>
+                    <a:bodyPr/>
+                    <a:lstStyle/>
+                    <a:p>
+                      <a:pPr>
+                        <a:lnSpc>
+                          <a:spcPct val="100000"/>
+                        </a:lnSpc>
+                      </a:pPr>
+                      <a:r>
+                        <a:rPr sz="1100" b="0">
+                          <a:solidFill>
+                            <a:srgbClr val="202938"/>
+                          </a:solidFill>
+                          <a:latin typeface="微软雅黑"/>
+                        </a:rPr>
+                        <a:t>—</a:t>
+                      </a:r>
+                    </a:p>
+                  </a:txBody>
+                  <a:tcPr marL="73152" marR="54864" marT="18288" marB="18288" anchor="ctr">
+                    <a:solidFill>
+                      <a:srgbClr val="F3F5F8"/>
+                    </a:solidFill>
+                  </a:tcPr>
+                </a:tc>
+                <a:tc>
+                  <a:txBody>
+                    <a:bodyPr/>
+                    <a:lstStyle/>
+                    <a:p>
+                      <a:pPr>
+                        <a:lnSpc>
+                          <a:spcPct val="100000"/>
+                        </a:lnSpc>
+                      </a:pPr>
+                      <a:r>
+                        <a:rPr sz="1100" b="0">
+                          <a:solidFill>
+                            <a:srgbClr val="202938"/>
+                          </a:solidFill>
+                          <a:latin typeface="微软雅黑"/>
+                        </a:rPr>
+                        <a:t>攻击全程稳定在 9.3–10.3 MB，无增长失控</a:t>
+                      </a:r>
+                    </a:p>
+                  </a:txBody>
+                  <a:tcPr marL="73152" marR="54864" marT="18288" marB="18288" anchor="ctr">
+                    <a:solidFill>
+                      <a:srgbClr val="F3F5F8"/>
+                    </a:solidFill>
+                  </a:tcPr>
+                </a:tc>
+              </a:tr>
+            </a:tbl>
+          </a:graphicData>
+        </a:graphic>
+      </p:graphicFrame>
+      <p:sp>
+        <p:nvSpPr>
+          <p:cNvPr id="4" name="TextBox 3"/>
+          <p:cNvSpPr txBox="1"/>
+          <p:nvPr/>
+        </p:nvSpPr>
+        <p:spPr>
+          <a:xfrm>
+            <a:off x="566928" y="6053328"/>
+            <a:ext cx="11064240" cy="548640"/>
+          </a:xfrm>
+          <a:prstGeom prst="rect">
+            <a:avLst/>
+          </a:prstGeom>
+          <a:noFill/>
+        </p:spPr>
+        <p:txBody>
+          <a:bodyPr wrap="square">
+            <a:spAutoFit/>
+          </a:bodyPr>
+          <a:lstStyle/>
+          <a:p>
+            <a:pPr algn="l">
+              <a:lnSpc>
+                <a:spcPct val="115000"/>
+              </a:lnSpc>
+              <a:spcAft>
+                <a:spcPts val="800"/>
+              </a:spcAft>
+            </a:pPr>
+            <a:r>
+              <a:rPr sz="1200">
+                <a:solidFill>
+                  <a:srgbClr val="6C7584"/>
+                </a:solidFill>
+                <a:latin typeface="微软雅黑"/>
+              </a:rPr>
+              <a:t>复现方式：tools/loadtest.cpp（POSIX socket 手写，五个独立场景：flood / slowloris / badlogin / garbage / echo）</a:t>
+            </a:r>
+          </a:p>
+        </p:txBody>
+      </p:sp>
+    </p:spTree>
+  </p:cSld>
+  <p:clrMapOvr>
+    <a:masterClrMapping/>
+  </p:clrMapOvr>
+</p:sld>
+</file>
+
+<file path=ppt/slides/slide15.xml><?xml version="1.0" encoding="utf-8"?>
+<p:sld xmlns:a="http://schemas.openxmlformats.org/drawingml/2006/main" xmlns:p="http://schemas.openxmlformats.org/presentationml/2006/main" xmlns:r="http://schemas.openxmlformats.org/officeDocument/2006/relationships">
+  <p:cSld>
+    <p:spTree>
+      <p:nvGrpSpPr>
+        <p:cNvPr id="1" name=""/>
+        <p:cNvGrpSpPr/>
+        <p:nvPr/>
+      </p:nvGrpSpPr>
+      <p:grpSpPr/>
+      <p:sp>
+        <p:nvSpPr>
+          <p:cNvPr id="2" name="Rectangle 1"/>
+          <p:cNvSpPr/>
+          <p:nvPr/>
+        </p:nvSpPr>
+        <p:spPr>
+          <a:xfrm>
+            <a:off x="0" y="0"/>
+            <a:ext cx="12191695" cy="932688"/>
+          </a:xfrm>
+          <a:prstGeom prst="rect">
+            <a:avLst/>
+          </a:prstGeom>
+          <a:solidFill>
+            <a:srgbClr val="16284A"/>
+          </a:solidFill>
+          <a:ln>
+            <a:noFill/>
+          </a:ln>
+          <a:effectLst/>
+        </p:spPr>
+        <p:style>
+          <a:lnRef idx="1">
+            <a:schemeClr val="accent1"/>
+          </a:lnRef>
+          <a:fillRef idx="3">
+            <a:schemeClr val="accent1"/>
+          </a:fillRef>
+          <a:effectRef idx="2">
+            <a:schemeClr val="accent1"/>
+          </a:effectRef>
+          <a:fontRef idx="minor">
+            <a:schemeClr val="lt1"/>
+          </a:fontRef>
+        </p:style>
+        <p:txBody>
+          <a:bodyPr rtlCol="0" anchor="ctr" lIns="411480" tIns="91440"/>
+          <a:lstStyle/>
+          <a:p>
+            <a:pPr algn="ctr"/>
+            <a:r>
+              <a:rPr sz="2800" b="1">
+                <a:solidFill>
+                  <a:srgbClr val="FFFFFF"/>
+                </a:solidFill>
+                <a:latin typeface="微软雅黑"/>
+              </a:rPr>
+              <a:t>压力与攻击实测（二）：吞吐与稳定性</a:t>
+            </a:r>
+          </a:p>
+          <a:p>
+            <a:r>
+              <a:rPr sz="1300">
+                <a:solidFill>
+                  <a:srgbClr val="A9C2E8"/>
+                </a:solidFill>
+                <a:latin typeface="微软雅黑"/>
+              </a:rPr>
+              <a:t>数量级是真实吞吐，不是写缓冲假象——和服务端日志逐条计数核对过</a:t>
+            </a:r>
+          </a:p>
+        </p:txBody>
+      </p:sp>
+      <p:sp>
+        <p:nvSpPr>
+          <p:cNvPr id="3" name="Rectangle 2"/>
+          <p:cNvSpPr/>
+          <p:nvPr/>
+        </p:nvSpPr>
+        <p:spPr>
+          <a:xfrm>
+            <a:off x="566928" y="1188720"/>
+            <a:ext cx="3566160" cy="1965960"/>
+          </a:xfrm>
+          <a:prstGeom prst="rect">
+            <a:avLst/>
+          </a:prstGeom>
+          <a:solidFill>
+            <a:srgbClr val="E8F1FE"/>
+          </a:solidFill>
+          <a:ln w="15875">
+            <a:solidFill>
+              <a:srgbClr val="1F6FEB"/>
+            </a:solidFill>
+          </a:ln>
+          <a:effectLst/>
+        </p:spPr>
+        <p:style>
+          <a:lnRef idx="1">
+            <a:schemeClr val="accent1"/>
+          </a:lnRef>
+          <a:fillRef idx="3">
+            <a:schemeClr val="accent1"/>
+          </a:fillRef>
+          <a:effectRef idx="2">
+            <a:schemeClr val="accent1"/>
+          </a:effectRef>
+          <a:fontRef idx="minor">
+            <a:schemeClr val="lt1"/>
+          </a:fontRef>
+        </p:style>
+        <p:txBody>
+          <a:bodyPr rtlCol="0" anchor="ctr"/>
+          <a:lstStyle/>
+          <a:p/>
+        </p:txBody>
+      </p:sp>
+      <p:sp>
+        <p:nvSpPr>
+          <p:cNvPr id="4" name="TextBox 3"/>
+          <p:cNvSpPr txBox="1"/>
+          <p:nvPr/>
+        </p:nvSpPr>
+        <p:spPr>
+          <a:xfrm>
+            <a:off x="713232" y="1280160"/>
+            <a:ext cx="3273552" cy="365760"/>
+          </a:xfrm>
+          <a:prstGeom prst="rect">
+            <a:avLst/>
+          </a:prstGeom>
+          <a:noFill/>
+        </p:spPr>
+        <p:txBody>
+          <a:bodyPr wrap="square">
+            <a:spAutoFit/>
+          </a:bodyPr>
+          <a:lstStyle/>
+          <a:p>
+            <a:pPr algn="l">
+              <a:lnSpc>
+                <a:spcPct val="115000"/>
+              </a:lnSpc>
+              <a:spcAft>
+                <a:spcPts val="200"/>
+              </a:spcAft>
+            </a:pPr>
+            <a:r>
+              <a:rPr sz="1400">
+                <a:solidFill>
+                  <a:srgbClr val="1F6FEB"/>
+                </a:solidFill>
+                <a:latin typeface="微软雅黑"/>
+              </a:rPr>
+              <a:t>16 客户端持续压测</a:t>
+            </a:r>
+          </a:p>
+        </p:txBody>
+      </p:sp>
+      <p:sp>
+        <p:nvSpPr>
+          <p:cNvPr id="5" name="TextBox 4"/>
+          <p:cNvSpPr txBox="1"/>
+          <p:nvPr/>
+        </p:nvSpPr>
+        <p:spPr>
+          <a:xfrm>
+            <a:off x="713232" y="1645920"/>
+            <a:ext cx="3273552" cy="1417319"/>
+          </a:xfrm>
+          <a:prstGeom prst="rect">
+            <a:avLst/>
+          </a:prstGeom>
+          <a:noFill/>
+        </p:spPr>
+        <p:txBody>
+          <a:bodyPr wrap="square">
+            <a:spAutoFit/>
+          </a:bodyPr>
+          <a:lstStyle/>
+          <a:p>
+            <a:pPr algn="l">
+              <a:lnSpc>
+                <a:spcPct val="115000"/>
+              </a:lnSpc>
+              <a:spcAft>
+                <a:spcPts val="300"/>
+              </a:spcAft>
+            </a:pPr>
+            <a:r>
+              <a:rPr sz="1250">
+                <a:solidFill>
+                  <a:srgbClr val="202938"/>
+                </a:solidFill>
+                <a:latin typeface="微软雅黑"/>
+              </a:rPr>
+              <a:t>处理消息 474,296 条</a:t>
+            </a:r>
+          </a:p>
+          <a:p>
+            <a:pPr algn="l">
+              <a:lnSpc>
+                <a:spcPct val="115000"/>
+              </a:lnSpc>
+              <a:spcAft>
+                <a:spcPts val="300"/>
+              </a:spcAft>
+            </a:pPr>
+            <a:r>
+              <a:rPr sz="1250">
+                <a:solidFill>
+                  <a:srgbClr val="202938"/>
+                </a:solidFill>
+                <a:latin typeface="微软雅黑"/>
+              </a:rPr>
+              <a:t>墙钟 2.4 秒</a:t>
+            </a:r>
+          </a:p>
+          <a:p>
+            <a:pPr algn="l">
+              <a:lnSpc>
+                <a:spcPct val="115000"/>
+              </a:lnSpc>
+              <a:spcAft>
+                <a:spcPts val="300"/>
+              </a:spcAft>
+            </a:pPr>
+            <a:r>
+              <a:rPr sz="1250">
+                <a:solidFill>
+                  <a:srgbClr val="202938"/>
+                </a:solidFill>
+                <a:latin typeface="微软雅黑"/>
+              </a:rPr>
+              <a:t>服务端 CPU 17 秒（多核并行）</a:t>
+            </a:r>
+          </a:p>
+          <a:p>
+            <a:pPr algn="l">
+              <a:lnSpc>
+                <a:spcPct val="115000"/>
+              </a:lnSpc>
+              <a:spcAft>
+                <a:spcPts val="300"/>
+              </a:spcAft>
+            </a:pPr>
+            <a:r>
+              <a:rPr sz="1250">
+                <a:solidFill>
+                  <a:srgbClr val="202938"/>
+                </a:solidFill>
+                <a:latin typeface="微软雅黑"/>
+              </a:rPr>
+              <a:t>广播式分发，非单线程上限</a:t>
+            </a:r>
+          </a:p>
+        </p:txBody>
+      </p:sp>
+      <p:sp>
+        <p:nvSpPr>
+          <p:cNvPr id="6" name="Rectangle 5"/>
+          <p:cNvSpPr/>
+          <p:nvPr/>
+        </p:nvSpPr>
+        <p:spPr>
+          <a:xfrm>
+            <a:off x="4315968" y="1188720"/>
+            <a:ext cx="3566160" cy="1965960"/>
+          </a:xfrm>
+          <a:prstGeom prst="rect">
+            <a:avLst/>
+          </a:prstGeom>
+          <a:solidFill>
+            <a:srgbClr val="E6F6EE"/>
+          </a:solidFill>
+          <a:ln w="15875">
+            <a:solidFill>
+              <a:srgbClr val="168A57"/>
+            </a:solidFill>
+          </a:ln>
+          <a:effectLst/>
+        </p:spPr>
+        <p:style>
+          <a:lnRef idx="1">
+            <a:schemeClr val="accent1"/>
+          </a:lnRef>
+          <a:fillRef idx="3">
+            <a:schemeClr val="accent1"/>
+          </a:fillRef>
+          <a:effectRef idx="2">
+            <a:schemeClr val="accent1"/>
+          </a:effectRef>
+          <a:fontRef idx="minor">
+            <a:schemeClr val="lt1"/>
+          </a:fontRef>
+        </p:style>
+        <p:txBody>
+          <a:bodyPr rtlCol="0" anchor="ctr"/>
+          <a:lstStyle/>
+          <a:p/>
+        </p:txBody>
+      </p:sp>
+      <p:sp>
+        <p:nvSpPr>
+          <p:cNvPr id="7" name="TextBox 6"/>
+          <p:cNvSpPr txBox="1"/>
+          <p:nvPr/>
+        </p:nvSpPr>
+        <p:spPr>
+          <a:xfrm>
+            <a:off x="4462272" y="1280160"/>
+            <a:ext cx="3273552" cy="365760"/>
+          </a:xfrm>
+          <a:prstGeom prst="rect">
+            <a:avLst/>
+          </a:prstGeom>
+          <a:noFill/>
+        </p:spPr>
+        <p:txBody>
+          <a:bodyPr wrap="square">
+            <a:spAutoFit/>
+          </a:bodyPr>
+          <a:lstStyle/>
+          <a:p>
+            <a:pPr algn="l">
+              <a:lnSpc>
+                <a:spcPct val="115000"/>
+              </a:lnSpc>
+              <a:spcAft>
+                <a:spcPts val="200"/>
+              </a:spcAft>
+            </a:pPr>
+            <a:r>
+              <a:rPr sz="1400">
+                <a:solidFill>
+                  <a:srgbClr val="168A57"/>
+                </a:solidFill>
+                <a:latin typeface="微软雅黑"/>
+              </a:rPr>
+              <a:t>资源占用</a:t>
+            </a:r>
+          </a:p>
+        </p:txBody>
+      </p:sp>
+      <p:sp>
+        <p:nvSpPr>
+          <p:cNvPr id="8" name="TextBox 7"/>
+          <p:cNvSpPr txBox="1"/>
+          <p:nvPr/>
+        </p:nvSpPr>
+        <p:spPr>
+          <a:xfrm>
+            <a:off x="4462272" y="1645920"/>
+            <a:ext cx="3273552" cy="1417319"/>
+          </a:xfrm>
+          <a:prstGeom prst="rect">
+            <a:avLst/>
+          </a:prstGeom>
+          <a:noFill/>
+        </p:spPr>
+        <p:txBody>
+          <a:bodyPr wrap="square">
+            <a:spAutoFit/>
+          </a:bodyPr>
+          <a:lstStyle/>
+          <a:p>
+            <a:pPr algn="l">
+              <a:lnSpc>
+                <a:spcPct val="115000"/>
+              </a:lnSpc>
+              <a:spcAft>
+                <a:spcPts val="300"/>
+              </a:spcAft>
+            </a:pPr>
+            <a:r>
+              <a:rPr sz="1250">
+                <a:solidFill>
+                  <a:srgbClr val="202938"/>
+                </a:solidFill>
+                <a:latin typeface="微软雅黑"/>
+              </a:rPr>
+              <a:t>空载内存 9.2 MB</a:t>
+            </a:r>
+          </a:p>
+          <a:p>
+            <a:pPr algn="l">
+              <a:lnSpc>
+                <a:spcPct val="115000"/>
+              </a:lnSpc>
+              <a:spcAft>
+                <a:spcPts val="300"/>
+              </a:spcAft>
+            </a:pPr>
+            <a:r>
+              <a:rPr sz="1250">
+                <a:solidFill>
+                  <a:srgbClr val="202938"/>
+                </a:solidFill>
+                <a:latin typeface="微软雅黑"/>
+              </a:rPr>
+              <a:t>攻击 + 压测全程 9.8–10.8 MB</a:t>
+            </a:r>
+          </a:p>
+          <a:p>
+            <a:pPr algn="l">
+              <a:lnSpc>
+                <a:spcPct val="115000"/>
+              </a:lnSpc>
+              <a:spcAft>
+                <a:spcPts val="300"/>
+              </a:spcAft>
+            </a:pPr>
+            <a:r>
+              <a:rPr sz="1250">
+                <a:solidFill>
+                  <a:srgbClr val="202938"/>
+                </a:solidFill>
+                <a:latin typeface="微软雅黑"/>
+              </a:rPr>
+              <a:t>全程零崩溃、零重启</a:t>
+            </a:r>
+          </a:p>
+          <a:p>
+            <a:pPr algn="l">
+              <a:lnSpc>
+                <a:spcPct val="115000"/>
+              </a:lnSpc>
+              <a:spcAft>
+                <a:spcPts val="300"/>
+              </a:spcAft>
+            </a:pPr>
+            <a:r>
+              <a:rPr sz="1250">
+                <a:solidFill>
+                  <a:srgbClr val="202938"/>
+                </a:solidFill>
+                <a:latin typeface="微软雅黑"/>
+              </a:rPr>
+              <a:t>单文件静态二进制，无外部依赖</a:t>
+            </a:r>
+          </a:p>
+        </p:txBody>
+      </p:sp>
+      <p:sp>
+        <p:nvSpPr>
+          <p:cNvPr id="9" name="Rectangle 8"/>
+          <p:cNvSpPr/>
+          <p:nvPr/>
+        </p:nvSpPr>
+        <p:spPr>
+          <a:xfrm>
+            <a:off x="8065008" y="1188720"/>
+            <a:ext cx="3566160" cy="1965960"/>
+          </a:xfrm>
+          <a:prstGeom prst="rect">
+            <a:avLst/>
+          </a:prstGeom>
+          <a:solidFill>
+            <a:srgbClr val="FDF4E2"/>
+          </a:solidFill>
+          <a:ln w="15875">
+            <a:solidFill>
+              <a:srgbClr val="B06C0C"/>
+            </a:solidFill>
+          </a:ln>
+          <a:effectLst/>
+        </p:spPr>
+        <p:style>
+          <a:lnRef idx="1">
+            <a:schemeClr val="accent1"/>
+          </a:lnRef>
+          <a:fillRef idx="3">
+            <a:schemeClr val="accent1"/>
+          </a:fillRef>
+          <a:effectRef idx="2">
+            <a:schemeClr val="accent1"/>
+          </a:effectRef>
+          <a:fontRef idx="minor">
+            <a:schemeClr val="lt1"/>
+          </a:fontRef>
+        </p:style>
+        <p:txBody>
+          <a:bodyPr rtlCol="0" anchor="ctr"/>
+          <a:lstStyle/>
+          <a:p/>
+        </p:txBody>
+      </p:sp>
+      <p:sp>
+        <p:nvSpPr>
+          <p:cNvPr id="10" name="TextBox 9"/>
+          <p:cNvSpPr txBox="1"/>
+          <p:nvPr/>
+        </p:nvSpPr>
+        <p:spPr>
+          <a:xfrm>
+            <a:off x="8211312" y="1280160"/>
+            <a:ext cx="3273552" cy="365760"/>
+          </a:xfrm>
+          <a:prstGeom prst="rect">
+            <a:avLst/>
+          </a:prstGeom>
+          <a:noFill/>
+        </p:spPr>
+        <p:txBody>
+          <a:bodyPr wrap="square">
+            <a:spAutoFit/>
+          </a:bodyPr>
+          <a:lstStyle/>
+          <a:p>
+            <a:pPr algn="l">
+              <a:lnSpc>
+                <a:spcPct val="115000"/>
+              </a:lnSpc>
+              <a:spcAft>
+                <a:spcPts val="200"/>
+              </a:spcAft>
+            </a:pPr>
+            <a:r>
+              <a:rPr sz="1400">
+                <a:solidFill>
+                  <a:srgbClr val="B06C0C"/>
+                </a:solidFill>
+                <a:latin typeface="微软雅黑"/>
+              </a:rPr>
+              <a:t>建连能力</a:t>
+            </a:r>
+          </a:p>
+        </p:txBody>
+      </p:sp>
+      <p:sp>
+        <p:nvSpPr>
+          <p:cNvPr id="11" name="TextBox 10"/>
+          <p:cNvSpPr txBox="1"/>
+          <p:nvPr/>
+        </p:nvSpPr>
+        <p:spPr>
+          <a:xfrm>
+            <a:off x="8211312" y="1645920"/>
+            <a:ext cx="3273552" cy="1417319"/>
+          </a:xfrm>
+          <a:prstGeom prst="rect">
+            <a:avLst/>
+          </a:prstGeom>
+          <a:noFill/>
+        </p:spPr>
+        <p:txBody>
+          <a:bodyPr wrap="square">
+            <a:spAutoFit/>
+          </a:bodyPr>
+          <a:lstStyle/>
+          <a:p>
+            <a:pPr algn="l">
+              <a:lnSpc>
+                <a:spcPct val="115000"/>
+              </a:lnSpc>
+              <a:spcAft>
+                <a:spcPts val="300"/>
+              </a:spcAft>
+            </a:pPr>
+            <a:r>
+              <a:rPr sz="1250">
+                <a:solidFill>
+                  <a:srgbClr val="202938"/>
+                </a:solidFill>
+                <a:latin typeface="微软雅黑"/>
+              </a:rPr>
+              <a:t>200 条并发连接</a:t>
+            </a:r>
+          </a:p>
+          <a:p>
+            <a:pPr algn="l">
+              <a:lnSpc>
+                <a:spcPct val="115000"/>
+              </a:lnSpc>
+              <a:spcAft>
+                <a:spcPts val="300"/>
+              </a:spcAft>
+            </a:pPr>
+            <a:r>
+              <a:rPr sz="1250">
+                <a:solidFill>
+                  <a:srgbClr val="202938"/>
+                </a:solidFill>
+                <a:latin typeface="微软雅黑"/>
+              </a:rPr>
+              <a:t>默认配置建连 6 ms</a:t>
+            </a:r>
+          </a:p>
+          <a:p>
+            <a:pPr algn="l">
+              <a:lnSpc>
+                <a:spcPct val="115000"/>
+              </a:lnSpc>
+              <a:spcAft>
+                <a:spcPts val="300"/>
+              </a:spcAft>
+            </a:pPr>
+            <a:r>
+              <a:rPr sz="1250">
+                <a:solidFill>
+                  <a:srgbClr val="202938"/>
+                </a:solidFill>
+                <a:latin typeface="微软雅黑"/>
+              </a:rPr>
+              <a:t>约 33,000 连接/秒</a:t>
+            </a:r>
+          </a:p>
+          <a:p>
+            <a:pPr algn="l">
+              <a:lnSpc>
+                <a:spcPct val="115000"/>
+              </a:lnSpc>
+              <a:spcAft>
+                <a:spcPts val="300"/>
+              </a:spcAft>
+            </a:pPr>
+            <a:r>
+              <a:rPr sz="1250">
+                <a:solidFill>
+                  <a:srgbClr val="202938"/>
+                </a:solidFill>
+                <a:latin typeface="微软雅黑"/>
+              </a:rPr>
+              <a:t>（本机回环，非广域网指标）</a:t>
+            </a:r>
+          </a:p>
+        </p:txBody>
+      </p:sp>
+      <p:sp>
+        <p:nvSpPr>
+          <p:cNvPr id="12" name="Rectangle 11"/>
+          <p:cNvSpPr/>
+          <p:nvPr/>
+        </p:nvSpPr>
+        <p:spPr>
+          <a:xfrm>
+            <a:off x="566928" y="3310128"/>
+            <a:ext cx="11064240" cy="2331720"/>
+          </a:xfrm>
+          <a:prstGeom prst="rect">
+            <a:avLst/>
+          </a:prstGeom>
+          <a:solidFill>
+            <a:srgbClr val="FDECEA"/>
+          </a:solidFill>
+          <a:ln w="15875">
+            <a:solidFill>
+              <a:srgbClr val="B03A2B"/>
+            </a:solidFill>
+          </a:ln>
+          <a:effectLst/>
+        </p:spPr>
+        <p:style>
+          <a:lnRef idx="1">
+            <a:schemeClr val="accent1"/>
+          </a:lnRef>
+          <a:fillRef idx="3">
+            <a:schemeClr val="accent1"/>
+          </a:fillRef>
+          <a:effectRef idx="2">
+            <a:schemeClr val="accent1"/>
+          </a:effectRef>
+          <a:fontRef idx="minor">
+            <a:schemeClr val="lt1"/>
+          </a:fontRef>
+        </p:style>
+        <p:txBody>
+          <a:bodyPr rtlCol="0" anchor="ctr"/>
+          <a:lstStyle/>
+          <a:p/>
+        </p:txBody>
+      </p:sp>
+      <p:sp>
+        <p:nvSpPr>
+          <p:cNvPr id="13" name="TextBox 12"/>
+          <p:cNvSpPr txBox="1"/>
+          <p:nvPr/>
+        </p:nvSpPr>
+        <p:spPr>
+          <a:xfrm>
+            <a:off x="713232" y="3401568"/>
+            <a:ext cx="10771632" cy="365760"/>
+          </a:xfrm>
+          <a:prstGeom prst="rect">
+            <a:avLst/>
+          </a:prstGeom>
+          <a:noFill/>
+        </p:spPr>
+        <p:txBody>
+          <a:bodyPr wrap="square">
+            <a:spAutoFit/>
+          </a:bodyPr>
+          <a:lstStyle/>
+          <a:p>
+            <a:pPr algn="l">
+              <a:lnSpc>
+                <a:spcPct val="115000"/>
+              </a:lnSpc>
+              <a:spcAft>
+                <a:spcPts val="200"/>
+              </a:spcAft>
+            </a:pPr>
+            <a:r>
+              <a:rPr sz="1500">
+                <a:solidFill>
+                  <a:srgbClr val="B03A2B"/>
+                </a:solidFill>
+                <a:latin typeface="微软雅黑"/>
+              </a:rPr>
+              <a:t>这些数字为什么可信</a:t>
+            </a:r>
+          </a:p>
+        </p:txBody>
+      </p:sp>
+      <p:sp>
+        <p:nvSpPr>
+          <p:cNvPr id="14" name="TextBox 13"/>
+          <p:cNvSpPr txBox="1"/>
+          <p:nvPr/>
+        </p:nvSpPr>
+        <p:spPr>
+          <a:xfrm>
+            <a:off x="713232" y="3767328"/>
+            <a:ext cx="10771632" cy="1783079"/>
+          </a:xfrm>
+          <a:prstGeom prst="rect">
+            <a:avLst/>
+          </a:prstGeom>
+          <a:noFill/>
+        </p:spPr>
+        <p:txBody>
+          <a:bodyPr wrap="square">
+            <a:spAutoFit/>
+          </a:bodyPr>
+          <a:lstStyle/>
+          <a:p>
+            <a:pPr algn="l">
+              <a:lnSpc>
+                <a:spcPct val="115000"/>
+              </a:lnSpc>
+              <a:spcAft>
+                <a:spcPts val="300"/>
+              </a:spcAft>
+            </a:pPr>
+            <a:r>
+              <a:rPr sz="1200">
+                <a:solidFill>
+                  <a:srgbClr val="202938"/>
+                </a:solidFill>
+                <a:latin typeface="微软雅黑"/>
+              </a:rPr>
+              <a:t>· 吞吐不是「写进去就算成功」：服务端日志逐条统计 MSG，实测 474,296 条，与客户端计数一致</a:t>
+            </a:r>
+          </a:p>
+          <a:p>
+            <a:pPr algn="l">
+              <a:lnSpc>
+                <a:spcPct val="115000"/>
+              </a:lnSpc>
+              <a:spcAft>
+                <a:spcPts val="300"/>
+              </a:spcAft>
+            </a:pPr>
+            <a:r>
+              <a:rPr sz="1200">
+                <a:solidFill>
+                  <a:srgbClr val="202938"/>
+                </a:solidFill>
+                <a:latin typeface="微软雅黑"/>
+              </a:rPr>
+              <a:t>· 连接不是「connect 返回 0 就算建立」：必须等不到 FIN 才算存活——这条修正让「连接洪泛」的结论从「200 条全通」变成「恰好 60 条」</a:t>
+            </a:r>
+          </a:p>
+          <a:p>
+            <a:pPr algn="l">
+              <a:lnSpc>
+                <a:spcPct val="115000"/>
+              </a:lnSpc>
+              <a:spcAft>
+                <a:spcPts val="300"/>
+              </a:spcAft>
+            </a:pPr>
+            <a:r>
+              <a:rPr sz="1200">
+                <a:solidFill>
+                  <a:srgbClr val="202938"/>
+                </a:solidFill>
+                <a:latin typeface="微软雅黑"/>
+              </a:rPr>
+              <a:t>· 慢速耗尽不是「send 成功就算还占着」：必须读到 FIN 才算被断开——修正后结论从「0 条被断开」变成「40/40 全部断开」</a:t>
+            </a:r>
+          </a:p>
+          <a:p>
+            <a:pPr algn="l">
+              <a:lnSpc>
+                <a:spcPct val="115000"/>
+              </a:lnSpc>
+              <a:spcAft>
+                <a:spcPts val="300"/>
+              </a:spcAft>
+            </a:pPr>
+            <a:r>
+              <a:rPr sz="1200">
+                <a:solidFill>
+                  <a:srgbClr val="202938"/>
+                </a:solidFill>
+                <a:latin typeface="微软雅黑"/>
+              </a:rPr>
+              <a:t>· 换句话说：每一条「防护有效」的结论，都先把测量工具本身验证过一遍</a:t>
+            </a:r>
+          </a:p>
+        </p:txBody>
+      </p:sp>
+    </p:spTree>
+  </p:cSld>
+  <p:clrMapOvr>
+    <a:masterClrMapping/>
+  </p:clrMapOvr>
+</p:sld>
+</file>
+
+<file path=ppt/slides/slide16.xml><?xml version="1.0" encoding="utf-8"?>
+<p:sld xmlns:a="http://schemas.openxmlformats.org/drawingml/2006/main" xmlns:p="http://schemas.openxmlformats.org/presentationml/2006/main" xmlns:r="http://schemas.openxmlformats.org/officeDocument/2006/relationships">
+  <p:cSld>
+    <p:spTree>
+      <p:nvGrpSpPr>
+        <p:cNvPr id="1" name=""/>
+        <p:cNvGrpSpPr/>
+        <p:nvPr/>
+      </p:nvGrpSpPr>
+      <p:grpSpPr/>
+      <p:sp>
+        <p:nvSpPr>
+          <p:cNvPr id="2" name="Rectangle 1"/>
+          <p:cNvSpPr/>
+          <p:nvPr/>
+        </p:nvSpPr>
+        <p:spPr>
+          <a:xfrm>
+            <a:off x="0" y="0"/>
+            <a:ext cx="12191695" cy="932688"/>
+          </a:xfrm>
+          <a:prstGeom prst="rect">
+            <a:avLst/>
+          </a:prstGeom>
+          <a:solidFill>
+            <a:srgbClr val="16284A"/>
+          </a:solidFill>
+          <a:ln>
+            <a:noFill/>
+          </a:ln>
+          <a:effectLst/>
+        </p:spPr>
+        <p:style>
+          <a:lnRef idx="1">
+            <a:schemeClr val="accent1"/>
+          </a:lnRef>
+          <a:fillRef idx="3">
+            <a:schemeClr val="accent1"/>
+          </a:fillRef>
+          <a:effectRef idx="2">
+            <a:schemeClr val="accent1"/>
+          </a:effectRef>
+          <a:fontRef idx="minor">
+            <a:schemeClr val="lt1"/>
+          </a:fontRef>
+        </p:style>
+        <p:txBody>
+          <a:bodyPr rtlCol="0" anchor="ctr" lIns="411480" tIns="91440"/>
+          <a:lstStyle/>
+          <a:p>
+            <a:pPr algn="ctr"/>
+            <a:r>
+              <a:rPr sz="2800" b="1">
+                <a:solidFill>
+                  <a:srgbClr val="FFFFFF"/>
+                </a:solidFill>
+                <a:latin typeface="微软雅黑"/>
+              </a:rPr>
+              <a:t>可调防护规则</a:t>
+            </a:r>
+          </a:p>
+          <a:p>
+            <a:r>
+              <a:rPr sz="1300">
+                <a:solidFill>
+                  <a:srgbClr val="A9C2E8"/>
+                </a:solidFill>
+                <a:latin typeface="微软雅黑"/>
+              </a:rPr>
+              <a:t>所有防护都是运行时参数：改一行、重启即生效</a:t>
+            </a:r>
+          </a:p>
+        </p:txBody>
+      </p:sp>
+      <p:graphicFrame>
+        <p:nvGraphicFramePr>
+          <p:cNvPr id="3" name="Table 2"/>
+          <p:cNvGraphicFramePr>
+            <a:graphicFrameLocks noGrp="1"/>
+          </p:cNvGraphicFramePr>
+          <p:nvPr/>
+        </p:nvGraphicFramePr>
+        <p:xfrm>
+          <a:off x="566928" y="1188720"/>
+          <a:ext cx="11064238" cy="4023360"/>
+        </p:xfrm>
+        <a:graphic>
+          <a:graphicData uri="http://schemas.openxmlformats.org/drawingml/2006/table">
+            <a:tbl>
+              <a:tblPr firstRow="1" bandRow="1">
+                <a:tableStyleId>{5C22544A-7EE6-4342-B048-85BDC9FD1C3A}</a:tableStyleId>
+              </a:tblPr>
+              <a:tblGrid>
+                <a:gridCol w="3383279"/>
+                <a:gridCol w="5394960"/>
+                <a:gridCol w="2285999"/>
+              </a:tblGrid>
+              <a:tr h="447040">
+                <a:tc>
+                  <a:txBody>
+                    <a:bodyPr/>
+                    <a:lstStyle/>
+                    <a:p>
+                      <a:pPr>
+                        <a:lnSpc>
+                          <a:spcPct val="100000"/>
+                        </a:lnSpc>
+                      </a:pPr>
+                      <a:r>
+                        <a:rPr sz="1150" b="1">
+                          <a:solidFill>
+                            <a:srgbClr val="FFFFFF"/>
+                          </a:solidFill>
+                          <a:latin typeface="微软雅黑"/>
+                        </a:rPr>
+                        <a:t>规则</a:t>
+                      </a:r>
+                    </a:p>
+                  </a:txBody>
+                  <a:tcPr marL="73152" marR="54864" marT="18288" marB="18288" anchor="ctr">
+                    <a:solidFill>
+                      <a:srgbClr val="16284A"/>
+                    </a:solidFill>
+                  </a:tcPr>
+                </a:tc>
+                <a:tc>
+                  <a:txBody>
+                    <a:bodyPr/>
+                    <a:lstStyle/>
+                    <a:p>
+                      <a:pPr>
+                        <a:lnSpc>
+                          <a:spcPct val="100000"/>
+                        </a:lnSpc>
+                      </a:pPr>
+                      <a:r>
+                        <a:rPr sz="1150" b="1">
+                          <a:solidFill>
+                            <a:srgbClr val="FFFFFF"/>
+                          </a:solidFill>
+                          <a:latin typeface="微软雅黑"/>
+                        </a:rPr>
+                        <a:t>作用</a:t>
+                      </a:r>
+                    </a:p>
+                  </a:txBody>
+                  <a:tcPr marL="73152" marR="54864" marT="18288" marB="18288" anchor="ctr">
+                    <a:solidFill>
+                      <a:srgbClr val="16284A"/>
+                    </a:solidFill>
+                  </a:tcPr>
+                </a:tc>
+                <a:tc>
+                  <a:txBody>
+                    <a:bodyPr/>
+                    <a:lstStyle/>
+                    <a:p>
+                      <a:pPr>
+                        <a:lnSpc>
+                          <a:spcPct val="100000"/>
+                        </a:lnSpc>
+                      </a:pPr>
+                      <a:r>
+                        <a:rPr sz="1150" b="1">
+                          <a:solidFill>
+                            <a:srgbClr val="FFFFFF"/>
+                          </a:solidFill>
+                          <a:latin typeface="微软雅黑"/>
+                        </a:rPr>
+                        <a:t>默认值</a:t>
+                      </a:r>
+                    </a:p>
+                  </a:txBody>
+                  <a:tcPr marL="73152" marR="54864" marT="18288" marB="18288" anchor="ctr">
+                    <a:solidFill>
+                      <a:srgbClr val="16284A"/>
+                    </a:solidFill>
+                  </a:tcPr>
+                </a:tc>
+              </a:tr>
+              <a:tr h="447040">
+                <a:tc>
+                  <a:txBody>
+                    <a:bodyPr/>
+                    <a:lstStyle/>
+                    <a:p>
+                      <a:pPr>
+                        <a:lnSpc>
+                          <a:spcPct val="100000"/>
+                        </a:lnSpc>
+                      </a:pPr>
+                      <a:r>
+                        <a:rPr sz="1150" b="0">
+                          <a:solidFill>
+                            <a:srgbClr val="202938"/>
+                          </a:solidFill>
+                          <a:latin typeface="微软雅黑"/>
+                        </a:rPr>
+                        <a:t>maxconns</a:t>
+                      </a:r>
+                    </a:p>
+                  </a:txBody>
+                  <a:tcPr marL="73152" marR="54864" marT="18288" marB="18288" anchor="ctr">
+                    <a:solidFill>
+                      <a:srgbClr val="FFFFFF"/>
+                    </a:solidFill>
+                  </a:tcPr>
+                </a:tc>
+                <a:tc>
+                  <a:txBody>
+                    <a:bodyPr/>
+                    <a:lstStyle/>
+                    <a:p>
+                      <a:pPr>
+                        <a:lnSpc>
+                          <a:spcPct val="100000"/>
+                        </a:lnSpc>
+                      </a:pPr>
+                      <a:r>
+                        <a:rPr sz="1150" b="0">
+                          <a:solidFill>
+                            <a:srgbClr val="202938"/>
+                          </a:solidFill>
+                          <a:latin typeface="微软雅黑"/>
+                        </a:rPr>
+                        <a:t>同时连接总数上限</a:t>
+                      </a:r>
+                    </a:p>
+                  </a:txBody>
+                  <a:tcPr marL="73152" marR="54864" marT="18288" marB="18288" anchor="ctr">
+                    <a:solidFill>
+                      <a:srgbClr val="FFFFFF"/>
+                    </a:solidFill>
+                  </a:tcPr>
+                </a:tc>
+                <a:tc>
+                  <a:txBody>
+                    <a:bodyPr/>
+                    <a:lstStyle/>
+                    <a:p>
+                      <a:pPr>
+                        <a:lnSpc>
+                          <a:spcPct val="100000"/>
+                        </a:lnSpc>
+                      </a:pPr>
+                      <a:r>
+                        <a:rPr sz="1150" b="0">
+                          <a:solidFill>
+                            <a:srgbClr val="202938"/>
+                          </a:solidFill>
+                          <a:latin typeface="微软雅黑"/>
+                        </a:rPr>
+                        <a:t>0（不限）</a:t>
+                      </a:r>
+                    </a:p>
+                  </a:txBody>
+                  <a:tcPr marL="73152" marR="54864" marT="18288" marB="18288" anchor="ctr">
+                    <a:solidFill>
+                      <a:srgbClr val="FFFFFF"/>
+                    </a:solidFill>
+                  </a:tcPr>
+                </a:tc>
+              </a:tr>
+              <a:tr h="447040">
+                <a:tc>
+                  <a:txBody>
+                    <a:bodyPr/>
+                    <a:lstStyle/>
+                    <a:p>
+                      <a:pPr>
+                        <a:lnSpc>
+                          <a:spcPct val="100000"/>
+                        </a:lnSpc>
+                      </a:pPr>
+                      <a:r>
+                        <a:rPr sz="1150" b="0">
+                          <a:solidFill>
+                            <a:srgbClr val="202938"/>
+                          </a:solidFill>
+                          <a:latin typeface="微软雅黑"/>
+                        </a:rPr>
+                        <a:t>maxconnsperip</a:t>
+                      </a:r>
+                    </a:p>
+                  </a:txBody>
+                  <a:tcPr marL="73152" marR="54864" marT="18288" marB="18288" anchor="ctr">
+                    <a:solidFill>
+                      <a:srgbClr val="F3F5F8"/>
+                    </a:solidFill>
+                  </a:tcPr>
+                </a:tc>
+                <a:tc>
+                  <a:txBody>
+                    <a:bodyPr/>
+                    <a:lstStyle/>
+                    <a:p>
+                      <a:pPr>
+                        <a:lnSpc>
+                          <a:spcPct val="100000"/>
+                        </a:lnSpc>
+                      </a:pPr>
+                      <a:r>
+                        <a:rPr sz="1150" b="0">
+                          <a:solidFill>
+                            <a:srgbClr val="202938"/>
+                          </a:solidFill>
+                          <a:latin typeface="微软雅黑"/>
+                        </a:rPr>
+                        <a:t>同一 IP 的同时连接上限</a:t>
+                      </a:r>
+                    </a:p>
+                  </a:txBody>
+                  <a:tcPr marL="73152" marR="54864" marT="18288" marB="18288" anchor="ctr">
+                    <a:solidFill>
+                      <a:srgbClr val="F3F5F8"/>
+                    </a:solidFill>
+                  </a:tcPr>
+                </a:tc>
+                <a:tc>
+                  <a:txBody>
+                    <a:bodyPr/>
+                    <a:lstStyle/>
+                    <a:p>
+                      <a:pPr>
+                        <a:lnSpc>
+                          <a:spcPct val="100000"/>
+                        </a:lnSpc>
+                      </a:pPr>
+                      <a:r>
+                        <a:rPr sz="1150" b="0">
+                          <a:solidFill>
+                            <a:srgbClr val="202938"/>
+                          </a:solidFill>
+                          <a:latin typeface="微软雅黑"/>
+                        </a:rPr>
+                        <a:t>0（不限）</a:t>
+                      </a:r>
+                    </a:p>
+                  </a:txBody>
+                  <a:tcPr marL="73152" marR="54864" marT="18288" marB="18288" anchor="ctr">
+                    <a:solidFill>
+                      <a:srgbClr val="F3F5F8"/>
+                    </a:solidFill>
+                  </a:tcPr>
+                </a:tc>
+              </a:tr>
+              <a:tr h="447040">
+                <a:tc>
+                  <a:txBody>
+                    <a:bodyPr/>
+                    <a:lstStyle/>
+                    <a:p>
+                      <a:pPr>
+                        <a:lnSpc>
+                          <a:spcPct val="100000"/>
+                        </a:lnSpc>
+                      </a:pPr>
+                      <a:r>
+                        <a:rPr sz="1150" b="0">
+                          <a:solidFill>
+                            <a:srgbClr val="202938"/>
+                          </a:solidFill>
+                          <a:latin typeface="微软雅黑"/>
+                        </a:rPr>
+                        <a:t>loginfails</a:t>
+                      </a:r>
+                    </a:p>
+                  </a:txBody>
+                  <a:tcPr marL="73152" marR="54864" marT="18288" marB="18288" anchor="ctr">
+                    <a:solidFill>
+                      <a:srgbClr val="FFFFFF"/>
+                    </a:solidFill>
+                  </a:tcPr>
+                </a:tc>
+                <a:tc>
+                  <a:txBody>
+                    <a:bodyPr/>
+                    <a:lstStyle/>
+                    <a:p>
+                      <a:pPr>
+                        <a:lnSpc>
+                          <a:spcPct val="100000"/>
+                        </a:lnSpc>
+                      </a:pPr>
+                      <a:r>
+                        <a:rPr sz="1150" b="0">
+                          <a:solidFill>
+                            <a:srgbClr val="202938"/>
+                          </a:solidFill>
+                          <a:latin typeface="微软雅黑"/>
+                        </a:rPr>
+                        <a:t>同 IP 每 5 分钟允许的登录失败次数，超出即封</a:t>
+                      </a:r>
+                    </a:p>
+                  </a:txBody>
+                  <a:tcPr marL="73152" marR="54864" marT="18288" marB="18288" anchor="ctr">
+                    <a:solidFill>
+                      <a:srgbClr val="FFFFFF"/>
+                    </a:solidFill>
+                  </a:tcPr>
+                </a:tc>
+                <a:tc>
+                  <a:txBody>
+                    <a:bodyPr/>
+                    <a:lstStyle/>
+                    <a:p>
+                      <a:pPr>
+                        <a:lnSpc>
+                          <a:spcPct val="100000"/>
+                        </a:lnSpc>
+                      </a:pPr>
+                      <a:r>
+                        <a:rPr sz="1150" b="0">
+                          <a:solidFill>
+                            <a:srgbClr val="202938"/>
+                          </a:solidFill>
+                          <a:latin typeface="微软雅黑"/>
+                        </a:rPr>
+                        <a:t>0（不限）</a:t>
+                      </a:r>
+                    </a:p>
+                  </a:txBody>
+                  <a:tcPr marL="73152" marR="54864" marT="18288" marB="18288" anchor="ctr">
+                    <a:solidFill>
+                      <a:srgbClr val="FFFFFF"/>
+                    </a:solidFill>
+                  </a:tcPr>
+                </a:tc>
+              </a:tr>
+              <a:tr h="447040">
+                <a:tc>
+                  <a:txBody>
+                    <a:bodyPr/>
+                    <a:lstStyle/>
+                    <a:p>
+                      <a:pPr>
+                        <a:lnSpc>
+                          <a:spcPct val="100000"/>
+                        </a:lnSpc>
+                      </a:pPr>
+                      <a:r>
+                        <a:rPr sz="1150" b="0">
+                          <a:solidFill>
+                            <a:srgbClr val="202938"/>
+                          </a:solidFill>
+                          <a:latin typeface="微软雅黑"/>
+                        </a:rPr>
+                        <a:t>handshaketimeout</a:t>
+                      </a:r>
+                    </a:p>
+                  </a:txBody>
+                  <a:tcPr marL="73152" marR="54864" marT="18288" marB="18288" anchor="ctr">
+                    <a:solidFill>
+                      <a:srgbClr val="F3F5F8"/>
+                    </a:solidFill>
+                  </a:tcPr>
+                </a:tc>
+                <a:tc>
+                  <a:txBody>
+                    <a:bodyPr/>
+                    <a:lstStyle/>
+                    <a:p>
+                      <a:pPr>
+                        <a:lnSpc>
+                          <a:spcPct val="100000"/>
+                        </a:lnSpc>
+                      </a:pPr>
+                      <a:r>
+                        <a:rPr sz="1150" b="0">
+                          <a:solidFill>
+                            <a:srgbClr val="202938"/>
+                          </a:solidFill>
+                          <a:latin typeface="微软雅黑"/>
+                        </a:rPr>
+                        <a:t>连上后多少秒内必须登录，否则断开</a:t>
+                      </a:r>
+                    </a:p>
+                  </a:txBody>
+                  <a:tcPr marL="73152" marR="54864" marT="18288" marB="18288" anchor="ctr">
+                    <a:solidFill>
+                      <a:srgbClr val="F3F5F8"/>
+                    </a:solidFill>
+                  </a:tcPr>
+                </a:tc>
+                <a:tc>
+                  <a:txBody>
+                    <a:bodyPr/>
+                    <a:lstStyle/>
+                    <a:p>
+                      <a:pPr>
+                        <a:lnSpc>
+                          <a:spcPct val="100000"/>
+                        </a:lnSpc>
+                      </a:pPr>
+                      <a:r>
+                        <a:rPr sz="1150" b="0">
+                          <a:solidFill>
+                            <a:srgbClr val="202938"/>
+                          </a:solidFill>
+                          <a:latin typeface="微软雅黑"/>
+                        </a:rPr>
+                        <a:t>30 秒</a:t>
+                      </a:r>
+                    </a:p>
+                  </a:txBody>
+                  <a:tcPr marL="73152" marR="54864" marT="18288" marB="18288" anchor="ctr">
+                    <a:solidFill>
+                      <a:srgbClr val="F3F5F8"/>
+                    </a:solidFill>
+                  </a:tcPr>
+                </a:tc>
+              </a:tr>
+              <a:tr h="447040">
+                <a:tc>
+                  <a:txBody>
+                    <a:bodyPr/>
+                    <a:lstStyle/>
+                    <a:p>
+                      <a:pPr>
+                        <a:lnSpc>
+                          <a:spcPct val="100000"/>
+                        </a:lnSpc>
+                      </a:pPr>
+                      <a:r>
+                        <a:rPr sz="1150" b="0">
+                          <a:solidFill>
+                            <a:srgbClr val="202938"/>
+                          </a:solidFill>
+                          <a:latin typeface="微软雅黑"/>
+                        </a:rPr>
+                        <a:t>uploadrate / downloadrate</a:t>
+                      </a:r>
+                    </a:p>
+                  </a:txBody>
+                  <a:tcPr marL="73152" marR="54864" marT="18288" marB="18288" anchor="ctr">
+                    <a:solidFill>
+                      <a:srgbClr val="FFFFFF"/>
+                    </a:solidFill>
+                  </a:tcPr>
+                </a:tc>
+                <a:tc>
+                  <a:txBody>
+                    <a:bodyPr/>
+                    <a:lstStyle/>
+                    <a:p>
+                      <a:pPr>
+                        <a:lnSpc>
+                          <a:spcPct val="100000"/>
+                        </a:lnSpc>
+                      </a:pPr>
+                      <a:r>
+                        <a:rPr sz="1150" b="0">
+                          <a:solidFill>
+                            <a:srgbClr val="202938"/>
+                          </a:solidFill>
+                          <a:latin typeface="微软雅黑"/>
+                        </a:rPr>
+                        <a:t>单客户端上传 / 下载限速（KB/s）</a:t>
+                      </a:r>
+                    </a:p>
+                  </a:txBody>
+                  <a:tcPr marL="73152" marR="54864" marT="18288" marB="18288" anchor="ctr">
+                    <a:solidFill>
+                      <a:srgbClr val="FFFFFF"/>
+                    </a:solidFill>
+                  </a:tcPr>
+                </a:tc>
+                <a:tc>
+                  <a:txBody>
+                    <a:bodyPr/>
+                    <a:lstStyle/>
+                    <a:p>
+                      <a:pPr>
+                        <a:lnSpc>
+                          <a:spcPct val="100000"/>
+                        </a:lnSpc>
+                      </a:pPr>
+                      <a:r>
+                        <a:rPr sz="1150" b="0">
+                          <a:solidFill>
+                            <a:srgbClr val="202938"/>
+                          </a:solidFill>
+                          <a:latin typeface="微软雅黑"/>
+                        </a:rPr>
+                        <a:t>0（不限）</a:t>
+                      </a:r>
+                    </a:p>
+                  </a:txBody>
+                  <a:tcPr marL="73152" marR="54864" marT="18288" marB="18288" anchor="ctr">
+                    <a:solidFill>
+                      <a:srgbClr val="FFFFFF"/>
+                    </a:solidFill>
+                  </a:tcPr>
+                </a:tc>
+              </a:tr>
+              <a:tr h="447040">
+                <a:tc>
+                  <a:txBody>
+                    <a:bodyPr/>
+                    <a:lstStyle/>
+                    <a:p>
+                      <a:pPr>
+                        <a:lnSpc>
+                          <a:spcPct val="100000"/>
+                        </a:lnSpc>
+                      </a:pPr>
+                      <a:r>
+                        <a:rPr sz="1150" b="0">
+                          <a:solidFill>
+                            <a:srgbClr val="202938"/>
+                          </a:solidFill>
+                          <a:latin typeface="微软雅黑"/>
+                        </a:rPr>
+                        <a:t>maxtextlen / maxtextlines</a:t>
+                      </a:r>
+                    </a:p>
+                  </a:txBody>
+                  <a:tcPr marL="73152" marR="54864" marT="18288" marB="18288" anchor="ctr">
+                    <a:solidFill>
+                      <a:srgbClr val="F3F5F8"/>
+                    </a:solidFill>
+                  </a:tcPr>
+                </a:tc>
+                <a:tc>
+                  <a:txBody>
+                    <a:bodyPr/>
+                    <a:lstStyle/>
+                    <a:p>
+                      <a:pPr>
+                        <a:lnSpc>
+                          <a:spcPct val="100000"/>
+                        </a:lnSpc>
+                      </a:pPr>
+                      <a:r>
+                        <a:rPr sz="1150" b="0">
+                          <a:solidFill>
+                            <a:srgbClr val="202938"/>
+                          </a:solidFill>
+                          <a:latin typeface="微软雅黑"/>
+                        </a:rPr>
+                        <a:t>单条消息最大字符数 / 行数</a:t>
+                      </a:r>
+                    </a:p>
+                  </a:txBody>
+                  <a:tcPr marL="73152" marR="54864" marT="18288" marB="18288" anchor="ctr">
+                    <a:solidFill>
+                      <a:srgbClr val="F3F5F8"/>
+                    </a:solidFill>
+                  </a:tcPr>
+                </a:tc>
+                <a:tc>
+                  <a:txBody>
+                    <a:bodyPr/>
+                    <a:lstStyle/>
+                    <a:p>
+                      <a:pPr>
+                        <a:lnSpc>
+                          <a:spcPct val="100000"/>
+                        </a:lnSpc>
+                      </a:pPr>
+                      <a:r>
+                        <a:rPr sz="1150" b="0">
+                          <a:solidFill>
+                            <a:srgbClr val="202938"/>
+                          </a:solidFill>
+                          <a:latin typeface="微软雅黑"/>
+                        </a:rPr>
+                        <a:t>0（不限）</a:t>
+                      </a:r>
+                    </a:p>
+                  </a:txBody>
+                  <a:tcPr marL="73152" marR="54864" marT="18288" marB="18288" anchor="ctr">
+                    <a:solidFill>
+                      <a:srgbClr val="F3F5F8"/>
+                    </a:solidFill>
+                  </a:tcPr>
+                </a:tc>
+              </a:tr>
+              <a:tr h="447040">
+                <a:tc>
+                  <a:txBody>
+                    <a:bodyPr/>
+                    <a:lstStyle/>
+                    <a:p>
+                      <a:pPr>
+                        <a:lnSpc>
+                          <a:spcPct val="100000"/>
+                        </a:lnSpc>
+                      </a:pPr>
+                      <a:r>
+                        <a:rPr sz="1150" b="0">
+                          <a:solidFill>
+                            <a:srgbClr val="202938"/>
+                          </a:solidFill>
+                          <a:latin typeface="微软雅黑"/>
+                        </a:rPr>
+                        <a:t>chatinterval</a:t>
+                      </a:r>
+                    </a:p>
+                  </a:txBody>
+                  <a:tcPr marL="73152" marR="54864" marT="18288" marB="18288" anchor="ctr">
+                    <a:solidFill>
+                      <a:srgbClr val="FFFFFF"/>
+                    </a:solidFill>
+                  </a:tcPr>
+                </a:tc>
+                <a:tc>
+                  <a:txBody>
+                    <a:bodyPr/>
+                    <a:lstStyle/>
+                    <a:p>
+                      <a:pPr>
+                        <a:lnSpc>
+                          <a:spcPct val="100000"/>
+                        </a:lnSpc>
+                      </a:pPr>
+                      <a:r>
+                        <a:rPr sz="1150" b="0">
+                          <a:solidFill>
+                            <a:srgbClr val="202938"/>
+                          </a:solidFill>
+                          <a:latin typeface="微软雅黑"/>
+                        </a:rPr>
+                        <a:t>发言最小间隔，防刷屏</a:t>
+                      </a:r>
+                    </a:p>
+                  </a:txBody>
+                  <a:tcPr marL="73152" marR="54864" marT="18288" marB="18288" anchor="ctr">
+                    <a:solidFill>
+                      <a:srgbClr val="FFFFFF"/>
+                    </a:solidFill>
+                  </a:tcPr>
+                </a:tc>
+                <a:tc>
+                  <a:txBody>
+                    <a:bodyPr/>
+                    <a:lstStyle/>
+                    <a:p>
+                      <a:pPr>
+                        <a:lnSpc>
+                          <a:spcPct val="100000"/>
+                        </a:lnSpc>
+                      </a:pPr>
+                      <a:r>
+                        <a:rPr sz="1150" b="0">
+                          <a:solidFill>
+                            <a:srgbClr val="202938"/>
+                          </a:solidFill>
+                          <a:latin typeface="微软雅黑"/>
+                        </a:rPr>
+                        <a:t>0（不限）</a:t>
+                      </a:r>
+                    </a:p>
+                  </a:txBody>
+                  <a:tcPr marL="73152" marR="54864" marT="18288" marB="18288" anchor="ctr">
+                    <a:solidFill>
+                      <a:srgbClr val="FFFFFF"/>
+                    </a:solidFill>
+                  </a:tcPr>
+                </a:tc>
+              </a:tr>
+              <a:tr h="447040">
+                <a:tc>
+                  <a:txBody>
+                    <a:bodyPr/>
+                    <a:lstStyle/>
+                    <a:p>
+                      <a:pPr>
+                        <a:lnSpc>
+                          <a:spcPct val="100000"/>
+                        </a:lnSpc>
+                      </a:pPr>
+                      <a:r>
+                        <a:rPr sz="1150" b="0">
+                          <a:solidFill>
+                            <a:srgbClr val="202938"/>
+                          </a:solidFill>
+                          <a:latin typeface="微软雅黑"/>
+                        </a:rPr>
+                        <a:t>documentsize / maxservertemp</a:t>
+                      </a:r>
+                    </a:p>
+                  </a:txBody>
+                  <a:tcPr marL="73152" marR="54864" marT="18288" marB="18288" anchor="ctr">
+                    <a:solidFill>
+                      <a:srgbClr val="F3F5F8"/>
+                    </a:solidFill>
+                  </a:tcPr>
+                </a:tc>
+                <a:tc>
+                  <a:txBody>
+                    <a:bodyPr/>
+                    <a:lstStyle/>
+                    <a:p>
+                      <a:pPr>
+                        <a:lnSpc>
+                          <a:spcPct val="100000"/>
+                        </a:lnSpc>
+                      </a:pPr>
+                      <a:r>
+                        <a:rPr sz="1150" b="0">
+                          <a:solidFill>
+                            <a:srgbClr val="202938"/>
+                          </a:solidFill>
+                          <a:latin typeface="微软雅黑"/>
+                        </a:rPr>
+                        <a:t>单文件上限 / 暂存总量上限</a:t>
+                      </a:r>
+                    </a:p>
+                  </a:txBody>
+                  <a:tcPr marL="73152" marR="54864" marT="18288" marB="18288" anchor="ctr">
+                    <a:solidFill>
+                      <a:srgbClr val="F3F5F8"/>
+                    </a:solidFill>
+                  </a:tcPr>
+                </a:tc>
+                <a:tc>
+                  <a:txBody>
+                    <a:bodyPr/>
+                    <a:lstStyle/>
+                    <a:p>
+                      <a:pPr>
+                        <a:lnSpc>
+                          <a:spcPct val="100000"/>
+                        </a:lnSpc>
+                      </a:pPr>
+                      <a:r>
+                        <a:rPr sz="1150" b="0">
+                          <a:solidFill>
+                            <a:srgbClr val="202938"/>
+                          </a:solidFill>
+                          <a:latin typeface="微软雅黑"/>
+                        </a:rPr>
+                        <a:t>64 MB / 1024 MB</a:t>
+                      </a:r>
+                    </a:p>
+                  </a:txBody>
+                  <a:tcPr marL="73152" marR="54864" marT="18288" marB="18288" anchor="ctr">
+                    <a:solidFill>
+                      <a:srgbClr val="F3F5F8"/>
+                    </a:solidFill>
+                  </a:tcPr>
+                </a:tc>
+              </a:tr>
+            </a:tbl>
+          </a:graphicData>
+        </a:graphic>
+      </p:graphicFrame>
+      <p:sp>
+        <p:nvSpPr>
+          <p:cNvPr id="4" name="TextBox 3"/>
+          <p:cNvSpPr txBox="1"/>
+          <p:nvPr/>
+        </p:nvSpPr>
+        <p:spPr>
+          <a:xfrm>
+            <a:off x="566928" y="6053328"/>
+            <a:ext cx="11064240" cy="548640"/>
+          </a:xfrm>
+          <a:prstGeom prst="rect">
+            <a:avLst/>
+          </a:prstGeom>
+          <a:noFill/>
+        </p:spPr>
+        <p:txBody>
+          <a:bodyPr wrap="square">
+            <a:spAutoFit/>
+          </a:bodyPr>
+          <a:lstStyle/>
+          <a:p>
+            <a:pPr algn="l">
+              <a:lnSpc>
+                <a:spcPct val="115000"/>
+              </a:lnSpc>
+              <a:spcAft>
+                <a:spcPts val="800"/>
+              </a:spcAft>
+            </a:pPr>
+            <a:r>
+              <a:rPr sz="1200">
+                <a:solidFill>
+                  <a:srgbClr val="6C7584"/>
+                </a:solidFill>
+                <a:latin typeface="微软雅黑"/>
+              </a:rPr>
+              <a:t>默认只开握手超时是刻意的：先保证「拿下来就能用」，要上公网再按需开启——加固后的实测见前两页</a:t>
+            </a:r>
+          </a:p>
+        </p:txBody>
+      </p:sp>
+    </p:spTree>
+  </p:cSld>
+  <p:clrMapOvr>
+    <a:masterClrMapping/>
+  </p:clrMapOvr>
+</p:sld>
+</file>
+
+<file path=ppt/slides/slide17.xml><?xml version="1.0" encoding="utf-8"?>
+<p:sld xmlns:a="http://schemas.openxmlformats.org/drawingml/2006/main" xmlns:p="http://schemas.openxmlformats.org/presentationml/2006/main" xmlns:r="http://schemas.openxmlformats.org/officeDocument/2006/relationships">
+  <p:cSld>
+    <p:spTree>
+      <p:nvGrpSpPr>
+        <p:cNvPr id="1" name=""/>
+        <p:cNvGrpSpPr/>
+        <p:nvPr/>
+      </p:nvGrpSpPr>
+      <p:grpSpPr/>
+      <p:sp>
+        <p:nvSpPr>
+          <p:cNvPr id="2" name="Rectangle 1"/>
+          <p:cNvSpPr/>
+          <p:nvPr/>
+        </p:nvSpPr>
+        <p:spPr>
+          <a:xfrm>
+            <a:off x="0" y="0"/>
+            <a:ext cx="12191695" cy="932688"/>
+          </a:xfrm>
+          <a:prstGeom prst="rect">
+            <a:avLst/>
+          </a:prstGeom>
+          <a:solidFill>
+            <a:srgbClr val="16284A"/>
+          </a:solidFill>
+          <a:ln>
+            <a:noFill/>
+          </a:ln>
+          <a:effectLst/>
+        </p:spPr>
+        <p:style>
+          <a:lnRef idx="1">
+            <a:schemeClr val="accent1"/>
+          </a:lnRef>
+          <a:fillRef idx="3">
+            <a:schemeClr val="accent1"/>
+          </a:fillRef>
+          <a:effectRef idx="2">
+            <a:schemeClr val="accent1"/>
+          </a:effectRef>
+          <a:fontRef idx="minor">
+            <a:schemeClr val="lt1"/>
+          </a:fontRef>
+        </p:style>
+        <p:txBody>
+          <a:bodyPr rtlCol="0" anchor="ctr" lIns="411480" tIns="91440"/>
+          <a:lstStyle/>
+          <a:p>
+            <a:pPr algn="ctr"/>
+            <a:r>
+              <a:rPr sz="2800" b="1">
+                <a:solidFill>
+                  <a:srgbClr val="FFFFFF"/>
+                </a:solidFill>
+                <a:latin typeface="微软雅黑"/>
+              </a:rPr>
+              <a:t>边界：哪些是防护，哪些不是</a:t>
+            </a:r>
+          </a:p>
+          <a:p>
+            <a:r>
+              <a:rPr sz="1300">
+                <a:solidFill>
+                  <a:srgbClr val="A9C2E8"/>
+                </a:solidFill>
+                <a:latin typeface="微软雅黑"/>
+              </a:rPr>
+              <a:t>一份诚实的威胁模型，比一堆形容词有用</a:t>
+            </a:r>
+          </a:p>
+        </p:txBody>
+      </p:sp>
+      <p:sp>
+        <p:nvSpPr>
+          <p:cNvPr id="3" name="Rectangle 2"/>
+          <p:cNvSpPr/>
+          <p:nvPr/>
+        </p:nvSpPr>
+        <p:spPr>
+          <a:xfrm>
+            <a:off x="566928" y="1188720"/>
+            <a:ext cx="5486400" cy="2331720"/>
+          </a:xfrm>
+          <a:prstGeom prst="rect">
+            <a:avLst/>
+          </a:prstGeom>
+          <a:solidFill>
+            <a:srgbClr val="E6F6EE"/>
+          </a:solidFill>
+          <a:ln w="15875">
+            <a:solidFill>
+              <a:srgbClr val="168A57"/>
+            </a:solidFill>
+          </a:ln>
+          <a:effectLst/>
+        </p:spPr>
+        <p:style>
+          <a:lnRef idx="1">
+            <a:schemeClr val="accent1"/>
+          </a:lnRef>
+          <a:fillRef idx="3">
+            <a:schemeClr val="accent1"/>
+          </a:fillRef>
+          <a:effectRef idx="2">
+            <a:schemeClr val="accent1"/>
+          </a:effectRef>
+          <a:fontRef idx="minor">
+            <a:schemeClr val="lt1"/>
+          </a:fontRef>
+        </p:style>
+        <p:txBody>
+          <a:bodyPr rtlCol="0" anchor="ctr"/>
+          <a:lstStyle/>
+          <a:p/>
+        </p:txBody>
+      </p:sp>
+      <p:sp>
+        <p:nvSpPr>
+          <p:cNvPr id="4" name="TextBox 3"/>
+          <p:cNvSpPr txBox="1"/>
+          <p:nvPr/>
+        </p:nvSpPr>
+        <p:spPr>
+          <a:xfrm>
+            <a:off x="713232" y="1280160"/>
+            <a:ext cx="5193792" cy="365760"/>
+          </a:xfrm>
+          <a:prstGeom prst="rect">
+            <a:avLst/>
+          </a:prstGeom>
+          <a:noFill/>
+        </p:spPr>
+        <p:txBody>
+          <a:bodyPr wrap="square">
+            <a:spAutoFit/>
+          </a:bodyPr>
+          <a:lstStyle/>
+          <a:p>
+            <a:pPr algn="l">
+              <a:lnSpc>
+                <a:spcPct val="115000"/>
+              </a:lnSpc>
+              <a:spcAft>
+                <a:spcPts val="200"/>
+              </a:spcAft>
+            </a:pPr>
+            <a:r>
+              <a:rPr sz="1500">
+                <a:solidFill>
+                  <a:srgbClr val="168A57"/>
+                </a:solidFill>
+                <a:latin typeface="微软雅黑"/>
+              </a:rPr>
+              <a:t>已经做到的（有实测支撑）</a:t>
+            </a:r>
+          </a:p>
+        </p:txBody>
+      </p:sp>
+      <p:sp>
+        <p:nvSpPr>
+          <p:cNvPr id="5" name="TextBox 4"/>
+          <p:cNvSpPr txBox="1"/>
+          <p:nvPr/>
+        </p:nvSpPr>
+        <p:spPr>
+          <a:xfrm>
+            <a:off x="713232" y="1645920"/>
+            <a:ext cx="5193792" cy="1783079"/>
+          </a:xfrm>
+          <a:prstGeom prst="rect">
+            <a:avLst/>
+          </a:prstGeom>
+          <a:noFill/>
+        </p:spPr>
+        <p:txBody>
+          <a:bodyPr wrap="square">
+            <a:spAutoFit/>
+          </a:bodyPr>
+          <a:lstStyle/>
+          <a:p>
+            <a:pPr algn="l">
+              <a:lnSpc>
+                <a:spcPct val="115000"/>
+              </a:lnSpc>
+              <a:spcAft>
+                <a:spcPts val="300"/>
+              </a:spcAft>
+            </a:pPr>
+            <a:r>
+              <a:rPr sz="1200">
+                <a:solidFill>
+                  <a:srgbClr val="202938"/>
+                </a:solidFill>
+                <a:latin typeface="微软雅黑"/>
+              </a:rPr>
+              <a:t>· 被动窃听：抓包看不到密码与聊天内容</a:t>
+            </a:r>
+          </a:p>
+          <a:p>
+            <a:pPr algn="l">
+              <a:lnSpc>
+                <a:spcPct val="115000"/>
+              </a:lnSpc>
+              <a:spcAft>
+                <a:spcPts val="300"/>
+              </a:spcAft>
+            </a:pPr>
+            <a:r>
+              <a:rPr sz="1200">
+                <a:solidFill>
+                  <a:srgbClr val="202938"/>
+                </a:solidFill>
+                <a:latin typeface="微软雅黑"/>
+              </a:rPr>
+              <a:t>· 内容篡改：GCM 逐条认证，改一个字节即失效</a:t>
+            </a:r>
+          </a:p>
+          <a:p>
+            <a:pPr algn="l">
+              <a:lnSpc>
+                <a:spcPct val="115000"/>
+              </a:lnSpc>
+              <a:spcAft>
+                <a:spcPts val="300"/>
+              </a:spcAft>
+            </a:pPr>
+            <a:r>
+              <a:rPr sz="1200">
+                <a:solidFill>
+                  <a:srgbClr val="202938"/>
+                </a:solidFill>
+                <a:latin typeface="微软雅黑"/>
+              </a:rPr>
+              <a:t>· 密钥变更可见：TOFU 指纹变了会中止并告警</a:t>
+            </a:r>
+          </a:p>
+          <a:p>
+            <a:pPr algn="l">
+              <a:lnSpc>
+                <a:spcPct val="115000"/>
+              </a:lnSpc>
+              <a:spcAft>
+                <a:spcPts val="300"/>
+              </a:spcAft>
+            </a:pPr>
+            <a:r>
+              <a:rPr sz="1200">
+                <a:solidFill>
+                  <a:srgbClr val="202938"/>
+                </a:solidFill>
+                <a:latin typeface="微软雅黑"/>
+              </a:rPr>
+              <a:t>· 应用层资源耗尽：连接上限 + 握手超时实测生效</a:t>
+            </a:r>
+          </a:p>
+          <a:p>
+            <a:pPr algn="l">
+              <a:lnSpc>
+                <a:spcPct val="115000"/>
+              </a:lnSpc>
+              <a:spcAft>
+                <a:spcPts val="300"/>
+              </a:spcAft>
+            </a:pPr>
+            <a:r>
+              <a:rPr sz="1200">
+                <a:solidFill>
+                  <a:srgbClr val="202938"/>
+                </a:solidFill>
+                <a:latin typeface="微软雅黑"/>
+              </a:rPr>
+              <a:t>· 在线暴力破解：失败次数窗口封禁实测生效</a:t>
+            </a:r>
+          </a:p>
+          <a:p>
+            <a:pPr algn="l">
+              <a:lnSpc>
+                <a:spcPct val="115000"/>
+              </a:lnSpc>
+              <a:spcAft>
+                <a:spcPts val="300"/>
+              </a:spcAft>
+            </a:pPr>
+            <a:r>
+              <a:rPr sz="1200">
+                <a:solidFill>
+                  <a:srgbClr val="202938"/>
+                </a:solidFill>
+                <a:latin typeface="微软雅黑"/>
+              </a:rPr>
+              <a:t>· 畸形输入：11 类攻击样本未造成崩溃</a:t>
+            </a:r>
+          </a:p>
+        </p:txBody>
+      </p:sp>
+      <p:sp>
+        <p:nvSpPr>
+          <p:cNvPr id="6" name="Rectangle 5"/>
+          <p:cNvSpPr/>
+          <p:nvPr/>
+        </p:nvSpPr>
+        <p:spPr>
+          <a:xfrm>
+            <a:off x="6144768" y="1188720"/>
+            <a:ext cx="5486400" cy="2331720"/>
+          </a:xfrm>
+          <a:prstGeom prst="rect">
+            <a:avLst/>
+          </a:prstGeom>
+          <a:solidFill>
+            <a:srgbClr val="FDECEA"/>
+          </a:solidFill>
+          <a:ln w="15875">
+            <a:solidFill>
+              <a:srgbClr val="B03A2B"/>
+            </a:solidFill>
+          </a:ln>
+          <a:effectLst/>
+        </p:spPr>
+        <p:style>
+          <a:lnRef idx="1">
+            <a:schemeClr val="accent1"/>
+          </a:lnRef>
+          <a:fillRef idx="3">
+            <a:schemeClr val="accent1"/>
+          </a:fillRef>
+          <a:effectRef idx="2">
+            <a:schemeClr val="accent1"/>
+          </a:effectRef>
+          <a:fontRef idx="minor">
+            <a:schemeClr val="lt1"/>
+          </a:fontRef>
+        </p:style>
+        <p:txBody>
+          <a:bodyPr rtlCol="0" anchor="ctr"/>
+          <a:lstStyle/>
+          <a:p/>
+        </p:txBody>
+      </p:sp>
+      <p:sp>
+        <p:nvSpPr>
+          <p:cNvPr id="7" name="TextBox 6"/>
+          <p:cNvSpPr txBox="1"/>
+          <p:nvPr/>
+        </p:nvSpPr>
+        <p:spPr>
+          <a:xfrm>
+            <a:off x="6291072" y="1280160"/>
+            <a:ext cx="5193792" cy="365760"/>
+          </a:xfrm>
+          <a:prstGeom prst="rect">
+            <a:avLst/>
+          </a:prstGeom>
+          <a:noFill/>
+        </p:spPr>
+        <p:txBody>
+          <a:bodyPr wrap="square">
+            <a:spAutoFit/>
+          </a:bodyPr>
+          <a:lstStyle/>
+          <a:p>
+            <a:pPr algn="l">
+              <a:lnSpc>
+                <a:spcPct val="115000"/>
+              </a:lnSpc>
+              <a:spcAft>
+                <a:spcPts val="200"/>
+              </a:spcAft>
+            </a:pPr>
+            <a:r>
+              <a:rPr sz="1500">
+                <a:solidFill>
+                  <a:srgbClr val="B03A2B"/>
+                </a:solidFill>
+                <a:latin typeface="微软雅黑"/>
+              </a:rPr>
+              <a:t>明确没做的（写在代码注释里）</a:t>
+            </a:r>
+          </a:p>
+        </p:txBody>
+      </p:sp>
+      <p:sp>
+        <p:nvSpPr>
+          <p:cNvPr id="8" name="TextBox 7"/>
+          <p:cNvSpPr txBox="1"/>
+          <p:nvPr/>
+        </p:nvSpPr>
+        <p:spPr>
+          <a:xfrm>
+            <a:off x="6291072" y="1645920"/>
+            <a:ext cx="5193792" cy="1783079"/>
+          </a:xfrm>
+          <a:prstGeom prst="rect">
+            <a:avLst/>
+          </a:prstGeom>
+          <a:noFill/>
+        </p:spPr>
+        <p:txBody>
+          <a:bodyPr wrap="square">
+            <a:spAutoFit/>
+          </a:bodyPr>
+          <a:lstStyle/>
+          <a:p>
+            <a:pPr algn="l">
+              <a:lnSpc>
+                <a:spcPct val="115000"/>
+              </a:lnSpc>
+              <a:spcAft>
+                <a:spcPts val="300"/>
+              </a:spcAft>
+            </a:pPr>
+            <a:r>
+              <a:rPr sz="1200">
+                <a:solidFill>
+                  <a:srgbClr val="202938"/>
+                </a:solidFill>
+                <a:latin typeface="微软雅黑"/>
+              </a:rPr>
+              <a:t>· 主动中间人：裸 ECDH 没有身份认证，能劫持线路的人</a:t>
+            </a:r>
+          </a:p>
+          <a:p>
+            <a:pPr algn="l">
+              <a:lnSpc>
+                <a:spcPct val="115000"/>
+              </a:lnSpc>
+              <a:spcAft>
+                <a:spcPts val="300"/>
+              </a:spcAft>
+            </a:pPr>
+            <a:r>
+              <a:rPr sz="1200">
+                <a:solidFill>
+                  <a:srgbClr val="202938"/>
+                </a:solidFill>
+                <a:latin typeface="微软雅黑"/>
+              </a:rPr>
+              <a:t>  理论上可以分别和两端握手——要挡它需要证书或预共享密钥</a:t>
+            </a:r>
+          </a:p>
+          <a:p>
+            <a:pPr algn="l">
+              <a:lnSpc>
+                <a:spcPct val="115000"/>
+              </a:lnSpc>
+              <a:spcAft>
+                <a:spcPts val="300"/>
+              </a:spcAft>
+            </a:pPr>
+            <a:r>
+              <a:rPr sz="1200">
+                <a:solidFill>
+                  <a:srgbClr val="202938"/>
+                </a:solidFill>
+                <a:latin typeface="微软雅黑"/>
+              </a:rPr>
+              <a:t>· 网络层大流量 DDoS：本项目只做应用层防护，</a:t>
+            </a:r>
+          </a:p>
+          <a:p>
+            <a:pPr algn="l">
+              <a:lnSpc>
+                <a:spcPct val="115000"/>
+              </a:lnSpc>
+              <a:spcAft>
+                <a:spcPts val="300"/>
+              </a:spcAft>
+            </a:pPr>
+            <a:r>
+              <a:rPr sz="1200">
+                <a:solidFill>
+                  <a:srgbClr val="202938"/>
+                </a:solidFill>
+                <a:latin typeface="微软雅黑"/>
+              </a:rPr>
+              <a:t>  真正的流量清洗要靠上游运营商 / 云清洗 / CDN</a:t>
+            </a:r>
+          </a:p>
+          <a:p>
+            <a:pPr algn="l">
+              <a:lnSpc>
+                <a:spcPct val="115000"/>
+              </a:lnSpc>
+              <a:spcAft>
+                <a:spcPts val="300"/>
+              </a:spcAft>
+            </a:pPr>
+            <a:r>
+              <a:rPr sz="1200">
+                <a:solidFill>
+                  <a:srgbClr val="202938"/>
+                </a:solidFill>
+                <a:latin typeface="微软雅黑"/>
+              </a:rPr>
+              <a:t>· 端到端加密：服务端能解密消息（它要转发、要存历史）</a:t>
+            </a:r>
+          </a:p>
+          <a:p>
+            <a:pPr algn="l">
+              <a:lnSpc>
+                <a:spcPct val="115000"/>
+              </a:lnSpc>
+              <a:spcAft>
+                <a:spcPts val="300"/>
+              </a:spcAft>
+            </a:pPr>
+            <a:r>
+              <a:rPr sz="1200">
+                <a:solidFill>
+                  <a:srgbClr val="202938"/>
+                </a:solidFill>
+                <a:latin typeface="微软雅黑"/>
+              </a:rPr>
+              <a:t>· 密码找回、多设备同步、消息签名——都没有</a:t>
+            </a:r>
+          </a:p>
+        </p:txBody>
+      </p:sp>
+      <p:sp>
+        <p:nvSpPr>
+          <p:cNvPr id="9" name="Rectangle 8"/>
+          <p:cNvSpPr/>
+          <p:nvPr/>
+        </p:nvSpPr>
+        <p:spPr>
+          <a:xfrm>
+            <a:off x="566928" y="3675887"/>
+            <a:ext cx="11064240" cy="2057400"/>
+          </a:xfrm>
+          <a:prstGeom prst="rect">
+            <a:avLst/>
+          </a:prstGeom>
+          <a:solidFill>
+            <a:srgbClr val="FDF4E2"/>
+          </a:solidFill>
+          <a:ln w="15875">
+            <a:solidFill>
+              <a:srgbClr val="B06C0C"/>
+            </a:solidFill>
+          </a:ln>
+          <a:effectLst/>
+        </p:spPr>
+        <p:style>
+          <a:lnRef idx="1">
+            <a:schemeClr val="accent1"/>
+          </a:lnRef>
+          <a:fillRef idx="3">
+            <a:schemeClr val="accent1"/>
+          </a:fillRef>
+          <a:effectRef idx="2">
+            <a:schemeClr val="accent1"/>
+          </a:effectRef>
+          <a:fontRef idx="minor">
+            <a:schemeClr val="lt1"/>
+          </a:fontRef>
+        </p:style>
+        <p:txBody>
+          <a:bodyPr rtlCol="0" anchor="ctr"/>
+          <a:lstStyle/>
+          <a:p/>
+        </p:txBody>
+      </p:sp>
+      <p:sp>
+        <p:nvSpPr>
+          <p:cNvPr id="10" name="TextBox 9"/>
+          <p:cNvSpPr txBox="1"/>
+          <p:nvPr/>
+        </p:nvSpPr>
+        <p:spPr>
+          <a:xfrm>
+            <a:off x="713232" y="3767327"/>
+            <a:ext cx="10771632" cy="365760"/>
+          </a:xfrm>
+          <a:prstGeom prst="rect">
+            <a:avLst/>
+          </a:prstGeom>
+          <a:noFill/>
+        </p:spPr>
+        <p:txBody>
+          <a:bodyPr wrap="square">
+            <a:spAutoFit/>
+          </a:bodyPr>
+          <a:lstStyle/>
+          <a:p>
+            <a:pPr algn="l">
+              <a:lnSpc>
+                <a:spcPct val="115000"/>
+              </a:lnSpc>
+              <a:spcAft>
+                <a:spcPts val="200"/>
+              </a:spcAft>
+            </a:pPr>
+            <a:r>
+              <a:rPr sz="1500">
+                <a:solidFill>
+                  <a:srgbClr val="B06C0C"/>
+                </a:solidFill>
+                <a:latin typeface="微软雅黑"/>
+              </a:rPr>
+              <a:t>为什么要把「没做的」也写出来</a:t>
+            </a:r>
+          </a:p>
+        </p:txBody>
+      </p:sp>
+      <p:sp>
+        <p:nvSpPr>
+          <p:cNvPr id="11" name="TextBox 10"/>
+          <p:cNvSpPr txBox="1"/>
+          <p:nvPr/>
+        </p:nvSpPr>
+        <p:spPr>
+          <a:xfrm>
+            <a:off x="713232" y="4133087"/>
+            <a:ext cx="10771632" cy="1508760"/>
+          </a:xfrm>
+          <a:prstGeom prst="rect">
+            <a:avLst/>
+          </a:prstGeom>
+          <a:noFill/>
+        </p:spPr>
+        <p:txBody>
+          <a:bodyPr wrap="square">
+            <a:spAutoFit/>
+          </a:bodyPr>
+          <a:lstStyle/>
+          <a:p>
+            <a:pPr algn="l">
+              <a:lnSpc>
+                <a:spcPct val="115000"/>
+              </a:lnSpc>
+              <a:spcAft>
+                <a:spcPts val="300"/>
+              </a:spcAft>
+            </a:pPr>
+            <a:r>
+              <a:rPr sz="1200">
+                <a:solidFill>
+                  <a:srgbClr val="202938"/>
+                </a:solidFill>
+                <a:latin typeface="微软雅黑"/>
+              </a:rPr>
+              <a:t>· 安全材料里最危险的不是「防护少」，而是「你以为防护了很多」——</a:t>
+            </a:r>
+          </a:p>
+          <a:p>
+            <a:pPr algn="l">
+              <a:lnSpc>
+                <a:spcPct val="115000"/>
+              </a:lnSpc>
+              <a:spcAft>
+                <a:spcPts val="300"/>
+              </a:spcAft>
+            </a:pPr>
+            <a:r>
+              <a:rPr sz="1200">
+                <a:solidFill>
+                  <a:srgbClr val="202938"/>
+                </a:solidFill>
+                <a:latin typeface="微软雅黑"/>
+              </a:rPr>
+              <a:t>  使用者按错误假设去用，风险比明说大得多</a:t>
+            </a:r>
+          </a:p>
+          <a:p>
+            <a:pPr algn="l">
+              <a:lnSpc>
+                <a:spcPct val="115000"/>
+              </a:lnSpc>
+              <a:spcAft>
+                <a:spcPts val="300"/>
+              </a:spcAft>
+            </a:pPr>
+            <a:r>
+              <a:rPr sz="1200">
+                <a:solidFill>
+                  <a:srgbClr val="202938"/>
+                </a:solidFill>
+                <a:latin typeface="微软雅黑"/>
+              </a:rPr>
+              <a:t>· 这不是事后补的：项目从第一版加密起就在 crypto.h 里写着「不保护主动中间人」，README 照抄同一句话</a:t>
+            </a:r>
+          </a:p>
+          <a:p>
+            <a:pPr algn="l">
+              <a:lnSpc>
+                <a:spcPct val="115000"/>
+              </a:lnSpc>
+              <a:spcAft>
+                <a:spcPts val="300"/>
+              </a:spcAft>
+            </a:pPr>
+            <a:r>
+              <a:rPr sz="1200">
+                <a:solidFill>
+                  <a:srgbClr val="202938"/>
+                </a:solidFill>
+                <a:latin typeface="微软雅黑"/>
+              </a:rPr>
+              <a:t>· 前面的实测数字证明的是「规则按设计生效」，不是「服务器打不死」</a:t>
+            </a:r>
+          </a:p>
+        </p:txBody>
+      </p:sp>
+    </p:spTree>
+  </p:cSld>
+  <p:clrMapOvr>
+    <a:masterClrMapping/>
+  </p:clrMapOvr>
+</p:sld>
+</file>
+
+<file path=ppt/slides/slide18.xml><?xml version="1.0" encoding="utf-8"?>
+<p:sld xmlns:a="http://schemas.openxmlformats.org/drawingml/2006/main" xmlns:p="http://schemas.openxmlformats.org/presentationml/2006/main" xmlns:r="http://schemas.openxmlformats.org/officeDocument/2006/relationships">
+  <p:cSld>
+    <p:spTree>
+      <p:nvGrpSpPr>
+        <p:cNvPr id="1" name=""/>
+        <p:cNvGrpSpPr/>
+        <p:nvPr/>
+      </p:nvGrpSpPr>
+      <p:grpSpPr/>
+      <p:sp>
+        <p:nvSpPr>
+          <p:cNvPr id="2" name="Rectangle 1"/>
+          <p:cNvSpPr/>
+          <p:nvPr/>
+        </p:nvSpPr>
+        <p:spPr>
+          <a:xfrm>
+            <a:off x="0" y="0"/>
+            <a:ext cx="12191695" cy="932688"/>
+          </a:xfrm>
+          <a:prstGeom prst="rect">
+            <a:avLst/>
+          </a:prstGeom>
+          <a:solidFill>
+            <a:srgbClr val="16284A"/>
+          </a:solidFill>
+          <a:ln>
+            <a:noFill/>
+          </a:ln>
+          <a:effectLst/>
+        </p:spPr>
+        <p:style>
+          <a:lnRef idx="1">
+            <a:schemeClr val="accent1"/>
+          </a:lnRef>
+          <a:fillRef idx="3">
+            <a:schemeClr val="accent1"/>
+          </a:fillRef>
+          <a:effectRef idx="2">
+            <a:schemeClr val="accent1"/>
+          </a:effectRef>
+          <a:fontRef idx="minor">
+            <a:schemeClr val="lt1"/>
+          </a:fontRef>
+        </p:style>
+        <p:txBody>
+          <a:bodyPr rtlCol="0" anchor="ctr" lIns="411480" tIns="91440"/>
+          <a:lstStyle/>
+          <a:p>
+            <a:pPr algn="ctr"/>
+            <a:r>
+              <a:rPr sz="2800" b="1">
+                <a:solidFill>
+                  <a:srgbClr val="FFFFFF"/>
+                </a:solidFill>
+                <a:latin typeface="微软雅黑"/>
+              </a:rPr>
               <a:t>几个真实的 bug（和它们为什么难查）</a:t>
             </a:r>
           </a:p>
@@ -6062,7 +10078,7 @@
 </p:sld>
 </file>
 
-<file path=ppt/slides/slide14.xml><?xml version="1.0" encoding="utf-8"?>
+<file path=ppt/slides/slide19.xml><?xml version="1.0" encoding="utf-8"?>
 <p:sld xmlns:a="http://schemas.openxmlformats.org/drawingml/2006/main" xmlns:p="http://schemas.openxmlformats.org/presentationml/2006/main" xmlns:r="http://schemas.openxmlformats.org/officeDocument/2006/relationships">
   <p:cSld>
     <p:spTree>
@@ -6718,7 +10734,672 @@
 </p:sld>
 </file>
 
-<file path=ppt/slides/slide15.xml><?xml version="1.0" encoding="utf-8"?>
+<file path=ppt/slides/slide2.xml><?xml version="1.0" encoding="utf-8"?>
+<p:sld xmlns:a="http://schemas.openxmlformats.org/drawingml/2006/main" xmlns:p="http://schemas.openxmlformats.org/presentationml/2006/main" xmlns:r="http://schemas.openxmlformats.org/officeDocument/2006/relationships">
+  <p:cSld>
+    <p:spTree>
+      <p:nvGrpSpPr>
+        <p:cNvPr id="1" name=""/>
+        <p:cNvGrpSpPr/>
+        <p:nvPr/>
+      </p:nvGrpSpPr>
+      <p:grpSpPr/>
+      <p:sp>
+        <p:nvSpPr>
+          <p:cNvPr id="2" name="Rectangle 1"/>
+          <p:cNvSpPr/>
+          <p:nvPr/>
+        </p:nvSpPr>
+        <p:spPr>
+          <a:xfrm>
+            <a:off x="0" y="0"/>
+            <a:ext cx="12191695" cy="932688"/>
+          </a:xfrm>
+          <a:prstGeom prst="rect">
+            <a:avLst/>
+          </a:prstGeom>
+          <a:solidFill>
+            <a:srgbClr val="16284A"/>
+          </a:solidFill>
+          <a:ln>
+            <a:noFill/>
+          </a:ln>
+          <a:effectLst/>
+        </p:spPr>
+        <p:style>
+          <a:lnRef idx="1">
+            <a:schemeClr val="accent1"/>
+          </a:lnRef>
+          <a:fillRef idx="3">
+            <a:schemeClr val="accent1"/>
+          </a:fillRef>
+          <a:effectRef idx="2">
+            <a:schemeClr val="accent1"/>
+          </a:effectRef>
+          <a:fontRef idx="minor">
+            <a:schemeClr val="lt1"/>
+          </a:fontRef>
+        </p:style>
+        <p:txBody>
+          <a:bodyPr rtlCol="0" anchor="ctr" lIns="411480" tIns="91440"/>
+          <a:lstStyle/>
+          <a:p>
+            <a:pPr algn="ctr"/>
+            <a:r>
+              <a:rPr sz="2800" b="1">
+                <a:solidFill>
+                  <a:srgbClr val="FFFFFF"/>
+                </a:solidFill>
+                <a:latin typeface="微软雅黑"/>
+              </a:rPr>
+              <a:t>这个项目是什么</a:t>
+            </a:r>
+          </a:p>
+          <a:p>
+            <a:r>
+              <a:rPr sz="1300">
+                <a:solidFill>
+                  <a:srgbClr val="A9C2E8"/>
+                </a:solidFill>
+                <a:latin typeface="微软雅黑"/>
+              </a:rPr>
+              <a:t>一句话：不依赖任何聊天框架，从协议到加密自己搭的三端聊天系统</a:t>
+            </a:r>
+          </a:p>
+        </p:txBody>
+      </p:sp>
+      <p:sp>
+        <p:nvSpPr>
+          <p:cNvPr id="3" name="TextBox 2"/>
+          <p:cNvSpPr txBox="1"/>
+          <p:nvPr/>
+        </p:nvSpPr>
+        <p:spPr>
+          <a:xfrm>
+            <a:off x="566928" y="1234440"/>
+            <a:ext cx="5577840" cy="4572000"/>
+          </a:xfrm>
+          <a:prstGeom prst="rect">
+            <a:avLst/>
+          </a:prstGeom>
+          <a:noFill/>
+        </p:spPr>
+        <p:txBody>
+          <a:bodyPr wrap="square">
+            <a:spAutoFit/>
+          </a:bodyPr>
+          <a:lstStyle/>
+          <a:p>
+            <a:pPr algn="l">
+              <a:lnSpc>
+                <a:spcPct val="115000"/>
+              </a:lnSpc>
+              <a:spcAft>
+                <a:spcPts val="900"/>
+              </a:spcAft>
+            </a:pPr>
+            <a:r>
+              <a:rPr sz="1500">
+                <a:solidFill>
+                  <a:srgbClr val="16284A"/>
+                </a:solidFill>
+                <a:latin typeface="微软雅黑"/>
+              </a:rPr>
+              <a:t>定位</a:t>
+            </a:r>
+          </a:p>
+          <a:p>
+            <a:pPr algn="l" lvl="1">
+              <a:lnSpc>
+                <a:spcPct val="115000"/>
+              </a:lnSpc>
+              <a:spcAft>
+                <a:spcPts val="500"/>
+              </a:spcAft>
+            </a:pPr>
+            <a:r>
+              <a:rPr sz="1300">
+                <a:solidFill>
+                  <a:srgbClr val="202938"/>
+                </a:solidFill>
+                <a:latin typeface="微软雅黑"/>
+              </a:rPr>
+              <a:t>· 局域网里几个人就能开聊；配上端口映射也能跑公网</a:t>
+            </a:r>
+          </a:p>
+          <a:p>
+            <a:pPr algn="l" lvl="1">
+              <a:lnSpc>
+                <a:spcPct val="115000"/>
+              </a:lnSpc>
+              <a:spcAft>
+                <a:spcPts val="500"/>
+              </a:spcAft>
+            </a:pPr>
+            <a:r>
+              <a:rPr sz="1300">
+                <a:solidFill>
+                  <a:srgbClr val="202938"/>
+                </a:solidFill>
+                <a:latin typeface="微软雅黑"/>
+              </a:rPr>
+              <a:t>· 服务端一个人跑，客户端随手拷走就能用</a:t>
+            </a:r>
+          </a:p>
+          <a:p>
+            <a:pPr algn="l" lvl="1">
+              <a:lnSpc>
+                <a:spcPct val="115000"/>
+              </a:lnSpc>
+              <a:spcAft>
+                <a:spcPts val="500"/>
+              </a:spcAft>
+            </a:pPr>
+            <a:r>
+              <a:rPr sz="1300">
+                <a:solidFill>
+                  <a:srgbClr val="202938"/>
+                </a:solidFill>
+                <a:latin typeface="微软雅黑"/>
+              </a:rPr>
+              <a:t>· 三端互通：Windows、安卓、Linux 互发消息 / 文件 / 语音</a:t>
+            </a:r>
+          </a:p>
+          <a:p>
+            <a:pPr algn="l">
+              <a:lnSpc>
+                <a:spcPct val="115000"/>
+              </a:lnSpc>
+              <a:spcAft>
+                <a:spcPts val="900"/>
+              </a:spcAft>
+            </a:pPr>
+            <a:r>
+              <a:rPr sz="1500">
+                <a:solidFill>
+                  <a:srgbClr val="202938"/>
+                </a:solidFill>
+                <a:latin typeface="微软雅黑"/>
+              </a:rPr>
+              <a:t/>
+            </a:r>
+          </a:p>
+          <a:p>
+            <a:pPr algn="l">
+              <a:lnSpc>
+                <a:spcPct val="115000"/>
+              </a:lnSpc>
+              <a:spcAft>
+                <a:spcPts val="900"/>
+              </a:spcAft>
+            </a:pPr>
+            <a:r>
+              <a:rPr sz="1500">
+                <a:solidFill>
+                  <a:srgbClr val="16284A"/>
+                </a:solidFill>
+                <a:latin typeface="微软雅黑"/>
+              </a:rPr>
+              <a:t>技术上刻意选择的难点</a:t>
+            </a:r>
+          </a:p>
+          <a:p>
+            <a:pPr algn="l" lvl="1">
+              <a:lnSpc>
+                <a:spcPct val="115000"/>
+              </a:lnSpc>
+              <a:spcAft>
+                <a:spcPts val="500"/>
+              </a:spcAft>
+            </a:pPr>
+            <a:r>
+              <a:rPr sz="1300">
+                <a:solidFill>
+                  <a:srgbClr val="202938"/>
+                </a:solidFill>
+                <a:latin typeface="微软雅黑"/>
+              </a:rPr>
+              <a:t>· 协议自己定：行式 UTF-8，每行一条命令</a:t>
+            </a:r>
+          </a:p>
+          <a:p>
+            <a:pPr algn="l" lvl="1">
+              <a:lnSpc>
+                <a:spcPct val="115000"/>
+              </a:lnSpc>
+              <a:spcAft>
+                <a:spcPts val="500"/>
+              </a:spcAft>
+            </a:pPr>
+            <a:r>
+              <a:rPr sz="1300">
+                <a:solidFill>
+                  <a:srgbClr val="202938"/>
+                </a:solidFill>
+                <a:latin typeface="微软雅黑"/>
+              </a:rPr>
+              <a:t>· 加密自己做：ECDH 握手 + AES-256-GCM，不发明原语</a:t>
+            </a:r>
+          </a:p>
+          <a:p>
+            <a:pPr algn="l" lvl="1">
+              <a:lnSpc>
+                <a:spcPct val="115000"/>
+              </a:lnSpc>
+              <a:spcAft>
+                <a:spcPts val="500"/>
+              </a:spcAft>
+            </a:pPr>
+            <a:r>
+              <a:rPr sz="1300">
+                <a:solidFill>
+                  <a:srgbClr val="202938"/>
+                </a:solidFill>
+                <a:latin typeface="微软雅黑"/>
+              </a:rPr>
+              <a:t>· 三端字节级一致：同一条消息在三端解出来必须一模一样</a:t>
+            </a:r>
+          </a:p>
+          <a:p>
+            <a:pPr algn="l" lvl="1">
+              <a:lnSpc>
+                <a:spcPct val="115000"/>
+              </a:lnSpc>
+              <a:spcAft>
+                <a:spcPts val="500"/>
+              </a:spcAft>
+            </a:pPr>
+            <a:r>
+              <a:rPr sz="1300">
+                <a:solidFill>
+                  <a:srgbClr val="202938"/>
+                </a:solidFill>
+                <a:latin typeface="微软雅黑"/>
+              </a:rPr>
+              <a:t>· 界面自己画：桌面端 GDI+ 自绘气泡，不用现成 UI 框架</a:t>
+            </a:r>
+          </a:p>
+        </p:txBody>
+      </p:sp>
+      <p:sp>
+        <p:nvSpPr>
+          <p:cNvPr id="4" name="Rectangle 3"/>
+          <p:cNvSpPr/>
+          <p:nvPr/>
+        </p:nvSpPr>
+        <p:spPr>
+          <a:xfrm>
+            <a:off x="6400800" y="1234440"/>
+            <a:ext cx="5212080" cy="2148840"/>
+          </a:xfrm>
+          <a:prstGeom prst="rect">
+            <a:avLst/>
+          </a:prstGeom>
+          <a:solidFill>
+            <a:srgbClr val="E6F6EE"/>
+          </a:solidFill>
+          <a:ln w="15875">
+            <a:solidFill>
+              <a:srgbClr val="168A57"/>
+            </a:solidFill>
+          </a:ln>
+          <a:effectLst/>
+        </p:spPr>
+        <p:style>
+          <a:lnRef idx="1">
+            <a:schemeClr val="accent1"/>
+          </a:lnRef>
+          <a:fillRef idx="3">
+            <a:schemeClr val="accent1"/>
+          </a:fillRef>
+          <a:effectRef idx="2">
+            <a:schemeClr val="accent1"/>
+          </a:effectRef>
+          <a:fontRef idx="minor">
+            <a:schemeClr val="lt1"/>
+          </a:fontRef>
+        </p:style>
+        <p:txBody>
+          <a:bodyPr rtlCol="0" anchor="ctr"/>
+          <a:lstStyle/>
+          <a:p/>
+        </p:txBody>
+      </p:sp>
+      <p:sp>
+        <p:nvSpPr>
+          <p:cNvPr id="5" name="TextBox 4"/>
+          <p:cNvSpPr txBox="1"/>
+          <p:nvPr/>
+        </p:nvSpPr>
+        <p:spPr>
+          <a:xfrm>
+            <a:off x="6547104" y="1325880"/>
+            <a:ext cx="4919472" cy="365760"/>
+          </a:xfrm>
+          <a:prstGeom prst="rect">
+            <a:avLst/>
+          </a:prstGeom>
+          <a:noFill/>
+        </p:spPr>
+        <p:txBody>
+          <a:bodyPr wrap="square">
+            <a:spAutoFit/>
+          </a:bodyPr>
+          <a:lstStyle/>
+          <a:p>
+            <a:pPr algn="l">
+              <a:lnSpc>
+                <a:spcPct val="115000"/>
+              </a:lnSpc>
+              <a:spcAft>
+                <a:spcPts val="200"/>
+              </a:spcAft>
+            </a:pPr>
+            <a:r>
+              <a:rPr sz="1500">
+                <a:solidFill>
+                  <a:srgbClr val="168A57"/>
+                </a:solidFill>
+                <a:latin typeface="微软雅黑"/>
+              </a:rPr>
+              <a:t>它不是玩具的地方</a:t>
+            </a:r>
+          </a:p>
+        </p:txBody>
+      </p:sp>
+      <p:sp>
+        <p:nvSpPr>
+          <p:cNvPr id="6" name="TextBox 5"/>
+          <p:cNvSpPr txBox="1"/>
+          <p:nvPr/>
+        </p:nvSpPr>
+        <p:spPr>
+          <a:xfrm>
+            <a:off x="6547104" y="1691640"/>
+            <a:ext cx="4919472" cy="1600200"/>
+          </a:xfrm>
+          <a:prstGeom prst="rect">
+            <a:avLst/>
+          </a:prstGeom>
+          <a:noFill/>
+        </p:spPr>
+        <p:txBody>
+          <a:bodyPr wrap="square">
+            <a:spAutoFit/>
+          </a:bodyPr>
+          <a:lstStyle/>
+          <a:p>
+            <a:pPr algn="l">
+              <a:lnSpc>
+                <a:spcPct val="115000"/>
+              </a:lnSpc>
+              <a:spcAft>
+                <a:spcPts val="300"/>
+              </a:spcAft>
+            </a:pPr>
+            <a:r>
+              <a:rPr sz="1300">
+                <a:solidFill>
+                  <a:srgbClr val="202938"/>
+                </a:solidFill>
+                <a:latin typeface="微软雅黑"/>
+              </a:rPr>
+              <a:t>· 有账号体系：PBKDF2 加盐哈希，不存明文</a:t>
+            </a:r>
+          </a:p>
+          <a:p>
+            <a:pPr algn="l">
+              <a:lnSpc>
+                <a:spcPct val="115000"/>
+              </a:lnSpc>
+              <a:spcAft>
+                <a:spcPts val="300"/>
+              </a:spcAft>
+            </a:pPr>
+            <a:r>
+              <a:rPr sz="1300">
+                <a:solidFill>
+                  <a:srgbClr val="202938"/>
+                </a:solidFill>
+                <a:latin typeface="微软雅黑"/>
+              </a:rPr>
+              <a:t>· 有公网加固：连接数上限、防爆破、握手超时、限速</a:t>
+            </a:r>
+          </a:p>
+          <a:p>
+            <a:pPr algn="l">
+              <a:lnSpc>
+                <a:spcPct val="115000"/>
+              </a:lnSpc>
+              <a:spcAft>
+                <a:spcPts val="300"/>
+              </a:spcAft>
+            </a:pPr>
+            <a:r>
+              <a:rPr sz="1300">
+                <a:solidFill>
+                  <a:srgbClr val="202938"/>
+                </a:solidFill>
+                <a:latin typeface="微软雅黑"/>
+              </a:rPr>
+              <a:t>· 有 TOFU：记住服务器指纹，指纹变了会明确警告</a:t>
+            </a:r>
+          </a:p>
+          <a:p>
+            <a:pPr algn="l">
+              <a:lnSpc>
+                <a:spcPct val="115000"/>
+              </a:lnSpc>
+              <a:spcAft>
+                <a:spcPts val="300"/>
+              </a:spcAft>
+            </a:pPr>
+            <a:r>
+              <a:rPr sz="1300">
+                <a:solidFill>
+                  <a:srgbClr val="202938"/>
+                </a:solidFill>
+                <a:latin typeface="微软雅黑"/>
+              </a:rPr>
+              <a:t>· 有测试：三端合计 990+ 项检查全部通过</a:t>
+            </a:r>
+          </a:p>
+        </p:txBody>
+      </p:sp>
+      <p:sp>
+        <p:nvSpPr>
+          <p:cNvPr id="7" name="Rectangle 6"/>
+          <p:cNvSpPr/>
+          <p:nvPr/>
+        </p:nvSpPr>
+        <p:spPr>
+          <a:xfrm>
+            <a:off x="6400800" y="3566160"/>
+            <a:ext cx="5212080" cy="2240280"/>
+          </a:xfrm>
+          <a:prstGeom prst="rect">
+            <a:avLst/>
+          </a:prstGeom>
+          <a:solidFill>
+            <a:srgbClr val="FDF4E2"/>
+          </a:solidFill>
+          <a:ln w="15875">
+            <a:solidFill>
+              <a:srgbClr val="B06C0C"/>
+            </a:solidFill>
+          </a:ln>
+          <a:effectLst/>
+        </p:spPr>
+        <p:style>
+          <a:lnRef idx="1">
+            <a:schemeClr val="accent1"/>
+          </a:lnRef>
+          <a:fillRef idx="3">
+            <a:schemeClr val="accent1"/>
+          </a:fillRef>
+          <a:effectRef idx="2">
+            <a:schemeClr val="accent1"/>
+          </a:effectRef>
+          <a:fontRef idx="minor">
+            <a:schemeClr val="lt1"/>
+          </a:fontRef>
+        </p:style>
+        <p:txBody>
+          <a:bodyPr rtlCol="0" anchor="ctr"/>
+          <a:lstStyle/>
+          <a:p/>
+        </p:txBody>
+      </p:sp>
+      <p:sp>
+        <p:nvSpPr>
+          <p:cNvPr id="8" name="TextBox 7"/>
+          <p:cNvSpPr txBox="1"/>
+          <p:nvPr/>
+        </p:nvSpPr>
+        <p:spPr>
+          <a:xfrm>
+            <a:off x="6547104" y="3657600"/>
+            <a:ext cx="4919472" cy="365760"/>
+          </a:xfrm>
+          <a:prstGeom prst="rect">
+            <a:avLst/>
+          </a:prstGeom>
+          <a:noFill/>
+        </p:spPr>
+        <p:txBody>
+          <a:bodyPr wrap="square">
+            <a:spAutoFit/>
+          </a:bodyPr>
+          <a:lstStyle/>
+          <a:p>
+            <a:pPr algn="l">
+              <a:lnSpc>
+                <a:spcPct val="115000"/>
+              </a:lnSpc>
+              <a:spcAft>
+                <a:spcPts val="200"/>
+              </a:spcAft>
+            </a:pPr>
+            <a:r>
+              <a:rPr sz="1500">
+                <a:solidFill>
+                  <a:srgbClr val="B06C0C"/>
+                </a:solidFill>
+                <a:latin typeface="微软雅黑"/>
+              </a:rPr>
+              <a:t>代码规模（实测，不含 build 产物）</a:t>
+            </a:r>
+          </a:p>
+        </p:txBody>
+      </p:sp>
+      <p:sp>
+        <p:nvSpPr>
+          <p:cNvPr id="9" name="TextBox 8"/>
+          <p:cNvSpPr txBox="1"/>
+          <p:nvPr/>
+        </p:nvSpPr>
+        <p:spPr>
+          <a:xfrm>
+            <a:off x="6547104" y="4023360"/>
+            <a:ext cx="4919472" cy="1691640"/>
+          </a:xfrm>
+          <a:prstGeom prst="rect">
+            <a:avLst/>
+          </a:prstGeom>
+          <a:noFill/>
+        </p:spPr>
+        <p:txBody>
+          <a:bodyPr wrap="square">
+            <a:spAutoFit/>
+          </a:bodyPr>
+          <a:lstStyle/>
+          <a:p>
+            <a:pPr algn="l">
+              <a:lnSpc>
+                <a:spcPct val="115000"/>
+              </a:lnSpc>
+              <a:spcAft>
+                <a:spcPts val="300"/>
+              </a:spcAft>
+            </a:pPr>
+            <a:r>
+              <a:rPr sz="1300">
+                <a:solidFill>
+                  <a:srgbClr val="202938"/>
+                </a:solidFill>
+                <a:latin typeface="微软雅黑"/>
+              </a:rPr>
+              <a:t>· C++ 协议层 + 服务端 + Windows 客户端：13,852 行</a:t>
+            </a:r>
+          </a:p>
+          <a:p>
+            <a:pPr algn="l">
+              <a:lnSpc>
+                <a:spcPct val="115000"/>
+              </a:lnSpc>
+              <a:spcAft>
+                <a:spcPts val="300"/>
+              </a:spcAft>
+            </a:pPr>
+            <a:r>
+              <a:rPr sz="1300">
+                <a:solidFill>
+                  <a:srgbClr val="202938"/>
+                </a:solidFill>
+                <a:latin typeface="微软雅黑"/>
+              </a:rPr>
+              <a:t>· 安卓 Kotlin：10,853 行</a:t>
+            </a:r>
+          </a:p>
+          <a:p>
+            <a:pPr algn="l">
+              <a:lnSpc>
+                <a:spcPct val="115000"/>
+              </a:lnSpc>
+              <a:spcAft>
+                <a:spcPts val="300"/>
+              </a:spcAft>
+            </a:pPr>
+            <a:r>
+              <a:rPr sz="1300">
+                <a:solidFill>
+                  <a:srgbClr val="202938"/>
+                </a:solidFill>
+                <a:latin typeface="微软雅黑"/>
+              </a:rPr>
+              <a:t>· Linux 客户端：2,602 行</a:t>
+            </a:r>
+          </a:p>
+          <a:p>
+            <a:pPr algn="l">
+              <a:lnSpc>
+                <a:spcPct val="115000"/>
+              </a:lnSpc>
+              <a:spcAft>
+                <a:spcPts val="300"/>
+              </a:spcAft>
+            </a:pPr>
+            <a:r>
+              <a:rPr sz="1300">
+                <a:solidFill>
+                  <a:srgbClr val="202938"/>
+                </a:solidFill>
+                <a:latin typeface="微软雅黑"/>
+              </a:rPr>
+              <a:t>· 测试代码：3,738 行（16 个测试程序）</a:t>
+            </a:r>
+          </a:p>
+        </p:txBody>
+      </p:sp>
+    </p:spTree>
+  </p:cSld>
+  <p:clrMapOvr>
+    <a:masterClrMapping/>
+  </p:clrMapOvr>
+</p:sld>
+</file>
+
+<file path=ppt/slides/slide20.xml><?xml version="1.0" encoding="utf-8"?>
 <p:sld xmlns:a="http://schemas.openxmlformats.org/drawingml/2006/main" xmlns:p="http://schemas.openxmlformats.org/presentationml/2006/main" xmlns:r="http://schemas.openxmlformats.org/officeDocument/2006/relationships">
   <p:cSld>
     <p:spTree>
@@ -7184,7 +11865,7 @@
 </p:sld>
 </file>
 
-<file path=ppt/slides/slide16.xml><?xml version="1.0" encoding="utf-8"?>
+<file path=ppt/slides/slide21.xml><?xml version="1.0" encoding="utf-8"?>
 <p:sld xmlns:a="http://schemas.openxmlformats.org/drawingml/2006/main" xmlns:p="http://schemas.openxmlformats.org/presentationml/2006/main" xmlns:r="http://schemas.openxmlformats.org/officeDocument/2006/relationships">
   <p:cSld>
     <p:spTree>
@@ -7833,7 +12514,7 @@
 </p:sld>
 </file>
 
-<file path=ppt/slides/slide17.xml><?xml version="1.0" encoding="utf-8"?>
+<file path=ppt/slides/slide22.xml><?xml version="1.0" encoding="utf-8"?>
 <p:sld xmlns:a="http://schemas.openxmlformats.org/drawingml/2006/main" xmlns:p="http://schemas.openxmlformats.org/presentationml/2006/main" xmlns:r="http://schemas.openxmlformats.org/officeDocument/2006/relationships">
   <p:cSld>
     <p:spTree>
@@ -8204,7 +12885,7 @@
 </p:sld>
 </file>
 
-<file path=ppt/slides/slide18.xml><?xml version="1.0" encoding="utf-8"?>
+<file path=ppt/slides/slide23.xml><?xml version="1.0" encoding="utf-8"?>
 <p:sld xmlns:a="http://schemas.openxmlformats.org/drawingml/2006/main" xmlns:p="http://schemas.openxmlformats.org/presentationml/2006/main" xmlns:r="http://schemas.openxmlformats.org/officeDocument/2006/relationships">
   <p:cSld>
     <p:spTree>
@@ -8506,8 +13187,8 @@
         </p:nvSpPr>
         <p:spPr>
           <a:xfrm>
-            <a:off x="1051560" y="4892040"/>
-            <a:ext cx="10058400" cy="1463040"/>
+            <a:off x="1051560" y="4754880"/>
+            <a:ext cx="10058400" cy="1645920"/>
           </a:xfrm>
           <a:prstGeom prst="rect">
             <a:avLst/>
@@ -8525,11 +13206,11 @@
                 <a:spcPct val="115000"/>
               </a:lnSpc>
               <a:spcAft>
-                <a:spcPts val="700"/>
-              </a:spcAft>
-            </a:pPr>
-            <a:r>
-              <a:rPr sz="1600">
+                <a:spcPts val="600"/>
+              </a:spcAft>
+            </a:pPr>
+            <a:r>
+              <a:rPr sz="1500">
                 <a:solidFill>
                   <a:srgbClr val="A9C2E8"/>
                 </a:solidFill>
@@ -8544,11 +13225,11 @@
                 <a:spcPct val="115000"/>
               </a:lnSpc>
               <a:spcAft>
-                <a:spcPts val="700"/>
-              </a:spcAft>
-            </a:pPr>
-            <a:r>
-              <a:rPr sz="1600">
+                <a:spcPts val="600"/>
+              </a:spcAft>
+            </a:pPr>
+            <a:r>
+              <a:rPr sz="1500">
                 <a:solidFill>
                   <a:srgbClr val="A9C2E8"/>
                 </a:solidFill>
@@ -8563,16 +13244,35 @@
                 <a:spcPct val="115000"/>
               </a:lnSpc>
               <a:spcAft>
-                <a:spcPts val="700"/>
-              </a:spcAft>
-            </a:pPr>
-            <a:r>
-              <a:rPr sz="1600">
+                <a:spcPts val="600"/>
+              </a:spcAft>
+            </a:pPr>
+            <a:r>
+              <a:rPr sz="1500">
                 <a:solidFill>
                   <a:srgbClr val="A9C2E8"/>
                 </a:solidFill>
                 <a:latin typeface="微软雅黑"/>
               </a:rPr>
+              <a:t>实测：连接上限精确生效 · 握手超时 40/40 断开 · 暴破 12/12 拦下 · 内存稳定 10 MB</a:t>
+            </a:r>
+          </a:p>
+          <a:p>
+            <a:pPr algn="l">
+              <a:lnSpc>
+                <a:spcPct val="115000"/>
+              </a:lnSpc>
+              <a:spcAft>
+                <a:spcPts val="600"/>
+              </a:spcAft>
+            </a:pPr>
+            <a:r>
+              <a:rPr sz="1500">
+                <a:solidFill>
+                  <a:srgbClr val="A9C2E8"/>
+                </a:solidFill>
+                <a:latin typeface="微软雅黑"/>
+              </a:rPr>
               <a:t/>
             </a:r>
           </a:p>
@@ -8582,682 +13282,17 @@
                 <a:spcPct val="115000"/>
               </a:lnSpc>
               <a:spcAft>
-                <a:spcPts val="700"/>
-              </a:spcAft>
-            </a:pPr>
-            <a:r>
-              <a:rPr sz="1600">
+                <a:spcPts val="600"/>
+              </a:spcAft>
+            </a:pPr>
+            <a:r>
+              <a:rPr sz="1500">
                 <a:solidFill>
                   <a:srgbClr val="A9C2E8"/>
                 </a:solidFill>
                 <a:latin typeface="微软雅黑"/>
               </a:rPr>
               <a:t>欢迎试用、提问题、或者直接拿去改</a:t>
-            </a:r>
-          </a:p>
-        </p:txBody>
-      </p:sp>
-    </p:spTree>
-  </p:cSld>
-  <p:clrMapOvr>
-    <a:masterClrMapping/>
-  </p:clrMapOvr>
-</p:sld>
-</file>
-
-<file path=ppt/slides/slide2.xml><?xml version="1.0" encoding="utf-8"?>
-<p:sld xmlns:a="http://schemas.openxmlformats.org/drawingml/2006/main" xmlns:p="http://schemas.openxmlformats.org/presentationml/2006/main" xmlns:r="http://schemas.openxmlformats.org/officeDocument/2006/relationships">
-  <p:cSld>
-    <p:spTree>
-      <p:nvGrpSpPr>
-        <p:cNvPr id="1" name=""/>
-        <p:cNvGrpSpPr/>
-        <p:nvPr/>
-      </p:nvGrpSpPr>
-      <p:grpSpPr/>
-      <p:sp>
-        <p:nvSpPr>
-          <p:cNvPr id="2" name="Rectangle 1"/>
-          <p:cNvSpPr/>
-          <p:nvPr/>
-        </p:nvSpPr>
-        <p:spPr>
-          <a:xfrm>
-            <a:off x="0" y="0"/>
-            <a:ext cx="12191695" cy="932688"/>
-          </a:xfrm>
-          <a:prstGeom prst="rect">
-            <a:avLst/>
-          </a:prstGeom>
-          <a:solidFill>
-            <a:srgbClr val="16284A"/>
-          </a:solidFill>
-          <a:ln>
-            <a:noFill/>
-          </a:ln>
-          <a:effectLst/>
-        </p:spPr>
-        <p:style>
-          <a:lnRef idx="1">
-            <a:schemeClr val="accent1"/>
-          </a:lnRef>
-          <a:fillRef idx="3">
-            <a:schemeClr val="accent1"/>
-          </a:fillRef>
-          <a:effectRef idx="2">
-            <a:schemeClr val="accent1"/>
-          </a:effectRef>
-          <a:fontRef idx="minor">
-            <a:schemeClr val="lt1"/>
-          </a:fontRef>
-        </p:style>
-        <p:txBody>
-          <a:bodyPr rtlCol="0" anchor="ctr" lIns="411480" tIns="91440"/>
-          <a:lstStyle/>
-          <a:p>
-            <a:pPr algn="ctr"/>
-            <a:r>
-              <a:rPr sz="2800" b="1">
-                <a:solidFill>
-                  <a:srgbClr val="FFFFFF"/>
-                </a:solidFill>
-                <a:latin typeface="微软雅黑"/>
-              </a:rPr>
-              <a:t>这个项目是什么</a:t>
-            </a:r>
-          </a:p>
-          <a:p>
-            <a:r>
-              <a:rPr sz="1300">
-                <a:solidFill>
-                  <a:srgbClr val="A9C2E8"/>
-                </a:solidFill>
-                <a:latin typeface="微软雅黑"/>
-              </a:rPr>
-              <a:t>一句话：不依赖任何聊天框架，从协议到加密自己搭的三端聊天系统</a:t>
-            </a:r>
-          </a:p>
-        </p:txBody>
-      </p:sp>
-      <p:sp>
-        <p:nvSpPr>
-          <p:cNvPr id="3" name="TextBox 2"/>
-          <p:cNvSpPr txBox="1"/>
-          <p:nvPr/>
-        </p:nvSpPr>
-        <p:spPr>
-          <a:xfrm>
-            <a:off x="566928" y="1234440"/>
-            <a:ext cx="5577840" cy="4572000"/>
-          </a:xfrm>
-          <a:prstGeom prst="rect">
-            <a:avLst/>
-          </a:prstGeom>
-          <a:noFill/>
-        </p:spPr>
-        <p:txBody>
-          <a:bodyPr wrap="square">
-            <a:spAutoFit/>
-          </a:bodyPr>
-          <a:lstStyle/>
-          <a:p>
-            <a:pPr algn="l">
-              <a:lnSpc>
-                <a:spcPct val="115000"/>
-              </a:lnSpc>
-              <a:spcAft>
-                <a:spcPts val="900"/>
-              </a:spcAft>
-            </a:pPr>
-            <a:r>
-              <a:rPr sz="1500">
-                <a:solidFill>
-                  <a:srgbClr val="16284A"/>
-                </a:solidFill>
-                <a:latin typeface="微软雅黑"/>
-              </a:rPr>
-              <a:t>定位</a:t>
-            </a:r>
-          </a:p>
-          <a:p>
-            <a:pPr algn="l" lvl="1">
-              <a:lnSpc>
-                <a:spcPct val="115000"/>
-              </a:lnSpc>
-              <a:spcAft>
-                <a:spcPts val="500"/>
-              </a:spcAft>
-            </a:pPr>
-            <a:r>
-              <a:rPr sz="1300">
-                <a:solidFill>
-                  <a:srgbClr val="202938"/>
-                </a:solidFill>
-                <a:latin typeface="微软雅黑"/>
-              </a:rPr>
-              <a:t>· 局域网里几个人就能开聊；配上端口映射也能跑公网</a:t>
-            </a:r>
-          </a:p>
-          <a:p>
-            <a:pPr algn="l" lvl="1">
-              <a:lnSpc>
-                <a:spcPct val="115000"/>
-              </a:lnSpc>
-              <a:spcAft>
-                <a:spcPts val="500"/>
-              </a:spcAft>
-            </a:pPr>
-            <a:r>
-              <a:rPr sz="1300">
-                <a:solidFill>
-                  <a:srgbClr val="202938"/>
-                </a:solidFill>
-                <a:latin typeface="微软雅黑"/>
-              </a:rPr>
-              <a:t>· 服务端一个人跑，客户端随手拷走就能用</a:t>
-            </a:r>
-          </a:p>
-          <a:p>
-            <a:pPr algn="l" lvl="1">
-              <a:lnSpc>
-                <a:spcPct val="115000"/>
-              </a:lnSpc>
-              <a:spcAft>
-                <a:spcPts val="500"/>
-              </a:spcAft>
-            </a:pPr>
-            <a:r>
-              <a:rPr sz="1300">
-                <a:solidFill>
-                  <a:srgbClr val="202938"/>
-                </a:solidFill>
-                <a:latin typeface="微软雅黑"/>
-              </a:rPr>
-              <a:t>· 三端互通：Windows、安卓、Linux 互发消息 / 文件 / 语音</a:t>
-            </a:r>
-          </a:p>
-          <a:p>
-            <a:pPr algn="l">
-              <a:lnSpc>
-                <a:spcPct val="115000"/>
-              </a:lnSpc>
-              <a:spcAft>
-                <a:spcPts val="900"/>
-              </a:spcAft>
-            </a:pPr>
-            <a:r>
-              <a:rPr sz="1500">
-                <a:solidFill>
-                  <a:srgbClr val="202938"/>
-                </a:solidFill>
-                <a:latin typeface="微软雅黑"/>
-              </a:rPr>
-              <a:t/>
-            </a:r>
-          </a:p>
-          <a:p>
-            <a:pPr algn="l">
-              <a:lnSpc>
-                <a:spcPct val="115000"/>
-              </a:lnSpc>
-              <a:spcAft>
-                <a:spcPts val="900"/>
-              </a:spcAft>
-            </a:pPr>
-            <a:r>
-              <a:rPr sz="1500">
-                <a:solidFill>
-                  <a:srgbClr val="16284A"/>
-                </a:solidFill>
-                <a:latin typeface="微软雅黑"/>
-              </a:rPr>
-              <a:t>技术上刻意选择的难点</a:t>
-            </a:r>
-          </a:p>
-          <a:p>
-            <a:pPr algn="l" lvl="1">
-              <a:lnSpc>
-                <a:spcPct val="115000"/>
-              </a:lnSpc>
-              <a:spcAft>
-                <a:spcPts val="500"/>
-              </a:spcAft>
-            </a:pPr>
-            <a:r>
-              <a:rPr sz="1300">
-                <a:solidFill>
-                  <a:srgbClr val="202938"/>
-                </a:solidFill>
-                <a:latin typeface="微软雅黑"/>
-              </a:rPr>
-              <a:t>· 协议自己定：行式 UTF-8，每行一条命令</a:t>
-            </a:r>
-          </a:p>
-          <a:p>
-            <a:pPr algn="l" lvl="1">
-              <a:lnSpc>
-                <a:spcPct val="115000"/>
-              </a:lnSpc>
-              <a:spcAft>
-                <a:spcPts val="500"/>
-              </a:spcAft>
-            </a:pPr>
-            <a:r>
-              <a:rPr sz="1300">
-                <a:solidFill>
-                  <a:srgbClr val="202938"/>
-                </a:solidFill>
-                <a:latin typeface="微软雅黑"/>
-              </a:rPr>
-              <a:t>· 加密自己做：ECDH 握手 + AES-256-GCM，不发明原语</a:t>
-            </a:r>
-          </a:p>
-          <a:p>
-            <a:pPr algn="l" lvl="1">
-              <a:lnSpc>
-                <a:spcPct val="115000"/>
-              </a:lnSpc>
-              <a:spcAft>
-                <a:spcPts val="500"/>
-              </a:spcAft>
-            </a:pPr>
-            <a:r>
-              <a:rPr sz="1300">
-                <a:solidFill>
-                  <a:srgbClr val="202938"/>
-                </a:solidFill>
-                <a:latin typeface="微软雅黑"/>
-              </a:rPr>
-              <a:t>· 三端字节级一致：同一条消息在三端解出来必须一模一样</a:t>
-            </a:r>
-          </a:p>
-          <a:p>
-            <a:pPr algn="l" lvl="1">
-              <a:lnSpc>
-                <a:spcPct val="115000"/>
-              </a:lnSpc>
-              <a:spcAft>
-                <a:spcPts val="500"/>
-              </a:spcAft>
-            </a:pPr>
-            <a:r>
-              <a:rPr sz="1300">
-                <a:solidFill>
-                  <a:srgbClr val="202938"/>
-                </a:solidFill>
-                <a:latin typeface="微软雅黑"/>
-              </a:rPr>
-              <a:t>· 界面自己画：桌面端 GDI+ 自绘气泡，不用现成 UI 框架</a:t>
-            </a:r>
-          </a:p>
-        </p:txBody>
-      </p:sp>
-      <p:sp>
-        <p:nvSpPr>
-          <p:cNvPr id="4" name="Rectangle 3"/>
-          <p:cNvSpPr/>
-          <p:nvPr/>
-        </p:nvSpPr>
-        <p:spPr>
-          <a:xfrm>
-            <a:off x="6400800" y="1234440"/>
-            <a:ext cx="5212080" cy="2148840"/>
-          </a:xfrm>
-          <a:prstGeom prst="rect">
-            <a:avLst/>
-          </a:prstGeom>
-          <a:solidFill>
-            <a:srgbClr val="E6F6EE"/>
-          </a:solidFill>
-          <a:ln w="15875">
-            <a:solidFill>
-              <a:srgbClr val="168A57"/>
-            </a:solidFill>
-          </a:ln>
-          <a:effectLst/>
-        </p:spPr>
-        <p:style>
-          <a:lnRef idx="1">
-            <a:schemeClr val="accent1"/>
-          </a:lnRef>
-          <a:fillRef idx="3">
-            <a:schemeClr val="accent1"/>
-          </a:fillRef>
-          <a:effectRef idx="2">
-            <a:schemeClr val="accent1"/>
-          </a:effectRef>
-          <a:fontRef idx="minor">
-            <a:schemeClr val="lt1"/>
-          </a:fontRef>
-        </p:style>
-        <p:txBody>
-          <a:bodyPr rtlCol="0" anchor="ctr"/>
-          <a:lstStyle/>
-          <a:p/>
-        </p:txBody>
-      </p:sp>
-      <p:sp>
-        <p:nvSpPr>
-          <p:cNvPr id="5" name="TextBox 4"/>
-          <p:cNvSpPr txBox="1"/>
-          <p:nvPr/>
-        </p:nvSpPr>
-        <p:spPr>
-          <a:xfrm>
-            <a:off x="6547104" y="1325880"/>
-            <a:ext cx="4919472" cy="365760"/>
-          </a:xfrm>
-          <a:prstGeom prst="rect">
-            <a:avLst/>
-          </a:prstGeom>
-          <a:noFill/>
-        </p:spPr>
-        <p:txBody>
-          <a:bodyPr wrap="square">
-            <a:spAutoFit/>
-          </a:bodyPr>
-          <a:lstStyle/>
-          <a:p>
-            <a:pPr algn="l">
-              <a:lnSpc>
-                <a:spcPct val="115000"/>
-              </a:lnSpc>
-              <a:spcAft>
-                <a:spcPts val="200"/>
-              </a:spcAft>
-            </a:pPr>
-            <a:r>
-              <a:rPr sz="1500">
-                <a:solidFill>
-                  <a:srgbClr val="168A57"/>
-                </a:solidFill>
-                <a:latin typeface="微软雅黑"/>
-              </a:rPr>
-              <a:t>它不是玩具的地方</a:t>
-            </a:r>
-          </a:p>
-        </p:txBody>
-      </p:sp>
-      <p:sp>
-        <p:nvSpPr>
-          <p:cNvPr id="6" name="TextBox 5"/>
-          <p:cNvSpPr txBox="1"/>
-          <p:nvPr/>
-        </p:nvSpPr>
-        <p:spPr>
-          <a:xfrm>
-            <a:off x="6547104" y="1691640"/>
-            <a:ext cx="4919472" cy="1600200"/>
-          </a:xfrm>
-          <a:prstGeom prst="rect">
-            <a:avLst/>
-          </a:prstGeom>
-          <a:noFill/>
-        </p:spPr>
-        <p:txBody>
-          <a:bodyPr wrap="square">
-            <a:spAutoFit/>
-          </a:bodyPr>
-          <a:lstStyle/>
-          <a:p>
-            <a:pPr algn="l">
-              <a:lnSpc>
-                <a:spcPct val="115000"/>
-              </a:lnSpc>
-              <a:spcAft>
-                <a:spcPts val="300"/>
-              </a:spcAft>
-            </a:pPr>
-            <a:r>
-              <a:rPr sz="1300">
-                <a:solidFill>
-                  <a:srgbClr val="202938"/>
-                </a:solidFill>
-                <a:latin typeface="微软雅黑"/>
-              </a:rPr>
-              <a:t>· 有账号体系：PBKDF2 加盐哈希，不存明文</a:t>
-            </a:r>
-          </a:p>
-          <a:p>
-            <a:pPr algn="l">
-              <a:lnSpc>
-                <a:spcPct val="115000"/>
-              </a:lnSpc>
-              <a:spcAft>
-                <a:spcPts val="300"/>
-              </a:spcAft>
-            </a:pPr>
-            <a:r>
-              <a:rPr sz="1300">
-                <a:solidFill>
-                  <a:srgbClr val="202938"/>
-                </a:solidFill>
-                <a:latin typeface="微软雅黑"/>
-              </a:rPr>
-              <a:t>· 有公网加固：连接数上限、防爆破、握手超时、限速</a:t>
-            </a:r>
-          </a:p>
-          <a:p>
-            <a:pPr algn="l">
-              <a:lnSpc>
-                <a:spcPct val="115000"/>
-              </a:lnSpc>
-              <a:spcAft>
-                <a:spcPts val="300"/>
-              </a:spcAft>
-            </a:pPr>
-            <a:r>
-              <a:rPr sz="1300">
-                <a:solidFill>
-                  <a:srgbClr val="202938"/>
-                </a:solidFill>
-                <a:latin typeface="微软雅黑"/>
-              </a:rPr>
-              <a:t>· 有 TOFU：记住服务器指纹，指纹变了会明确警告</a:t>
-            </a:r>
-          </a:p>
-          <a:p>
-            <a:pPr algn="l">
-              <a:lnSpc>
-                <a:spcPct val="115000"/>
-              </a:lnSpc>
-              <a:spcAft>
-                <a:spcPts val="300"/>
-              </a:spcAft>
-            </a:pPr>
-            <a:r>
-              <a:rPr sz="1300">
-                <a:solidFill>
-                  <a:srgbClr val="202938"/>
-                </a:solidFill>
-                <a:latin typeface="微软雅黑"/>
-              </a:rPr>
-              <a:t>· 有测试：三端合计 990+ 项检查全部通过</a:t>
-            </a:r>
-          </a:p>
-        </p:txBody>
-      </p:sp>
-      <p:sp>
-        <p:nvSpPr>
-          <p:cNvPr id="7" name="Rectangle 6"/>
-          <p:cNvSpPr/>
-          <p:nvPr/>
-        </p:nvSpPr>
-        <p:spPr>
-          <a:xfrm>
-            <a:off x="6400800" y="3566160"/>
-            <a:ext cx="5212080" cy="2240280"/>
-          </a:xfrm>
-          <a:prstGeom prst="rect">
-            <a:avLst/>
-          </a:prstGeom>
-          <a:solidFill>
-            <a:srgbClr val="FDF4E2"/>
-          </a:solidFill>
-          <a:ln w="15875">
-            <a:solidFill>
-              <a:srgbClr val="B06C0C"/>
-            </a:solidFill>
-          </a:ln>
-          <a:effectLst/>
-        </p:spPr>
-        <p:style>
-          <a:lnRef idx="1">
-            <a:schemeClr val="accent1"/>
-          </a:lnRef>
-          <a:fillRef idx="3">
-            <a:schemeClr val="accent1"/>
-          </a:fillRef>
-          <a:effectRef idx="2">
-            <a:schemeClr val="accent1"/>
-          </a:effectRef>
-          <a:fontRef idx="minor">
-            <a:schemeClr val="lt1"/>
-          </a:fontRef>
-        </p:style>
-        <p:txBody>
-          <a:bodyPr rtlCol="0" anchor="ctr"/>
-          <a:lstStyle/>
-          <a:p/>
-        </p:txBody>
-      </p:sp>
-      <p:sp>
-        <p:nvSpPr>
-          <p:cNvPr id="8" name="TextBox 7"/>
-          <p:cNvSpPr txBox="1"/>
-          <p:nvPr/>
-        </p:nvSpPr>
-        <p:spPr>
-          <a:xfrm>
-            <a:off x="6547104" y="3657600"/>
-            <a:ext cx="4919472" cy="365760"/>
-          </a:xfrm>
-          <a:prstGeom prst="rect">
-            <a:avLst/>
-          </a:prstGeom>
-          <a:noFill/>
-        </p:spPr>
-        <p:txBody>
-          <a:bodyPr wrap="square">
-            <a:spAutoFit/>
-          </a:bodyPr>
-          <a:lstStyle/>
-          <a:p>
-            <a:pPr algn="l">
-              <a:lnSpc>
-                <a:spcPct val="115000"/>
-              </a:lnSpc>
-              <a:spcAft>
-                <a:spcPts val="200"/>
-              </a:spcAft>
-            </a:pPr>
-            <a:r>
-              <a:rPr sz="1500">
-                <a:solidFill>
-                  <a:srgbClr val="B06C0C"/>
-                </a:solidFill>
-                <a:latin typeface="微软雅黑"/>
-              </a:rPr>
-              <a:t>代码规模（实测，不含 build 产物）</a:t>
-            </a:r>
-          </a:p>
-        </p:txBody>
-      </p:sp>
-      <p:sp>
-        <p:nvSpPr>
-          <p:cNvPr id="9" name="TextBox 8"/>
-          <p:cNvSpPr txBox="1"/>
-          <p:nvPr/>
-        </p:nvSpPr>
-        <p:spPr>
-          <a:xfrm>
-            <a:off x="6547104" y="4023360"/>
-            <a:ext cx="4919472" cy="1691640"/>
-          </a:xfrm>
-          <a:prstGeom prst="rect">
-            <a:avLst/>
-          </a:prstGeom>
-          <a:noFill/>
-        </p:spPr>
-        <p:txBody>
-          <a:bodyPr wrap="square">
-            <a:spAutoFit/>
-          </a:bodyPr>
-          <a:lstStyle/>
-          <a:p>
-            <a:pPr algn="l">
-              <a:lnSpc>
-                <a:spcPct val="115000"/>
-              </a:lnSpc>
-              <a:spcAft>
-                <a:spcPts val="300"/>
-              </a:spcAft>
-            </a:pPr>
-            <a:r>
-              <a:rPr sz="1300">
-                <a:solidFill>
-                  <a:srgbClr val="202938"/>
-                </a:solidFill>
-                <a:latin typeface="微软雅黑"/>
-              </a:rPr>
-              <a:t>· C++ 协议层 + 服务端 + Windows 客户端：13,852 行</a:t>
-            </a:r>
-          </a:p>
-          <a:p>
-            <a:pPr algn="l">
-              <a:lnSpc>
-                <a:spcPct val="115000"/>
-              </a:lnSpc>
-              <a:spcAft>
-                <a:spcPts val="300"/>
-              </a:spcAft>
-            </a:pPr>
-            <a:r>
-              <a:rPr sz="1300">
-                <a:solidFill>
-                  <a:srgbClr val="202938"/>
-                </a:solidFill>
-                <a:latin typeface="微软雅黑"/>
-              </a:rPr>
-              <a:t>· 安卓 Kotlin：10,853 行</a:t>
-            </a:r>
-          </a:p>
-          <a:p>
-            <a:pPr algn="l">
-              <a:lnSpc>
-                <a:spcPct val="115000"/>
-              </a:lnSpc>
-              <a:spcAft>
-                <a:spcPts val="300"/>
-              </a:spcAft>
-            </a:pPr>
-            <a:r>
-              <a:rPr sz="1300">
-                <a:solidFill>
-                  <a:srgbClr val="202938"/>
-                </a:solidFill>
-                <a:latin typeface="微软雅黑"/>
-              </a:rPr>
-              <a:t>· Linux 客户端：2,602 行</a:t>
-            </a:r>
-          </a:p>
-          <a:p>
-            <a:pPr algn="l">
-              <a:lnSpc>
-                <a:spcPct val="115000"/>
-              </a:lnSpc>
-              <a:spcAft>
-                <a:spcPts val="300"/>
-              </a:spcAft>
-            </a:pPr>
-            <a:r>
-              <a:rPr sz="1300">
-                <a:solidFill>
-                  <a:srgbClr val="202938"/>
-                </a:solidFill>
-                <a:latin typeface="微软雅黑"/>
-              </a:rPr>
-              <a:t>· 测试代码：3,738 行（16 个测试程序）</a:t>
             </a:r>
           </a:p>
         </p:txBody>

--- a/dchat-项目介绍.pptx
+++ b/dchat-项目介绍.pptx
@@ -29,6 +29,7 @@
     <p:sldId id="277" r:id="rId28"/>
     <p:sldId id="278" r:id="rId29"/>
     <p:sldId id="279" r:id="rId30"/>
+    <p:sldId id="280" r:id="rId31"/>
   </p:sldIdLst>
   <p:sldSz cx="12191695" cy="6858000" type="screen4x3"/>
   <p:notesSz cx="6858000" cy="9144000"/>
@@ -15391,6 +15392,1086 @@
                 </a:solidFill>
                 <a:latin typeface="微软雅黑"/>
               </a:rPr>
+              <a:t>macOS 端：原生 Cocoa 界面 + 如实标注的验证边界</a:t>
+            </a:r>
+          </a:p>
+          <a:p>
+            <a:r>
+              <a:rPr sz="1300">
+                <a:solidFill>
+                  <a:srgbClr val="A9C2E8"/>
+                </a:solidFill>
+                <a:latin typeface="微软雅黑"/>
+              </a:rPr>
+              <a:t>开发机上没有 Mac，所以「能编的都编了、能查的都查了」，但从未真机运行</a:t>
+            </a:r>
+          </a:p>
+        </p:txBody>
+      </p:sp>
+      <p:pic>
+        <p:nvPicPr>
+          <p:cNvPr id="3" name="Picture 2" descr="chart-macos-verify.png"/>
+          <p:cNvPicPr>
+            <a:picLocks noChangeAspect="1"/>
+          </p:cNvPicPr>
+          <p:nvPr/>
+        </p:nvPicPr>
+        <p:blipFill>
+          <a:blip r:embed="rId2"/>
+          <a:stretch>
+            <a:fillRect/>
+          </a:stretch>
+        </p:blipFill>
+        <p:spPr>
+          <a:xfrm>
+            <a:off x="1656079" y="1005840"/>
+            <a:ext cx="8940800" cy="4023360"/>
+          </a:xfrm>
+          <a:prstGeom prst="rect">
+            <a:avLst/>
+          </a:prstGeom>
+        </p:spPr>
+      </p:pic>
+      <p:sp>
+        <p:nvSpPr>
+          <p:cNvPr id="4" name="Rectangle 3"/>
+          <p:cNvSpPr/>
+          <p:nvPr/>
+        </p:nvSpPr>
+        <p:spPr>
+          <a:xfrm>
+            <a:off x="548640" y="5166360"/>
+            <a:ext cx="3657600" cy="1371600"/>
+          </a:xfrm>
+          <a:prstGeom prst="rect">
+            <a:avLst/>
+          </a:prstGeom>
+          <a:solidFill>
+            <a:srgbClr val="E8F1FE"/>
+          </a:solidFill>
+          <a:ln w="15875">
+            <a:solidFill>
+              <a:srgbClr val="1F6FEB"/>
+            </a:solidFill>
+          </a:ln>
+          <a:effectLst/>
+        </p:spPr>
+        <p:style>
+          <a:lnRef idx="1">
+            <a:schemeClr val="accent1"/>
+          </a:lnRef>
+          <a:fillRef idx="3">
+            <a:schemeClr val="accent1"/>
+          </a:fillRef>
+          <a:effectRef idx="2">
+            <a:schemeClr val="accent1"/>
+          </a:effectRef>
+          <a:fontRef idx="minor">
+            <a:schemeClr val="lt1"/>
+          </a:fontRef>
+        </p:style>
+        <p:txBody>
+          <a:bodyPr rtlCol="0" anchor="ctr"/>
+          <a:lstStyle/>
+          <a:p/>
+        </p:txBody>
+      </p:sp>
+      <p:sp>
+        <p:nvSpPr>
+          <p:cNvPr id="5" name="TextBox 4"/>
+          <p:cNvSpPr txBox="1"/>
+          <p:nvPr/>
+        </p:nvSpPr>
+        <p:spPr>
+          <a:xfrm>
+            <a:off x="694944" y="5257800"/>
+            <a:ext cx="3364992" cy="365760"/>
+          </a:xfrm>
+          <a:prstGeom prst="rect">
+            <a:avLst/>
+          </a:prstGeom>
+          <a:noFill/>
+        </p:spPr>
+        <p:txBody>
+          <a:bodyPr wrap="square">
+            <a:spAutoFit/>
+          </a:bodyPr>
+          <a:lstStyle/>
+          <a:p>
+            <a:pPr algn="l">
+              <a:lnSpc>
+                <a:spcPct val="115000"/>
+              </a:lnSpc>
+              <a:spcAft>
+                <a:spcPts val="200"/>
+              </a:spcAft>
+            </a:pPr>
+            <a:r>
+              <a:rPr sz="1300">
+                <a:solidFill>
+                  <a:srgbClr val="1F6FEB"/>
+                </a:solidFill>
+                <a:latin typeface="微软雅黑"/>
+              </a:rPr>
+              <a:t>为 macOS 改了什么</a:t>
+            </a:r>
+          </a:p>
+        </p:txBody>
+      </p:sp>
+      <p:sp>
+        <p:nvSpPr>
+          <p:cNvPr id="6" name="TextBox 5"/>
+          <p:cNvSpPr txBox="1"/>
+          <p:nvPr/>
+        </p:nvSpPr>
+        <p:spPr>
+          <a:xfrm>
+            <a:off x="694944" y="5623560"/>
+            <a:ext cx="3364992" cy="822960"/>
+          </a:xfrm>
+          <a:prstGeom prst="rect">
+            <a:avLst/>
+          </a:prstGeom>
+          <a:noFill/>
+        </p:spPr>
+        <p:txBody>
+          <a:bodyPr wrap="square">
+            <a:spAutoFit/>
+          </a:bodyPr>
+          <a:lstStyle/>
+          <a:p>
+            <a:pPr algn="l">
+              <a:lnSpc>
+                <a:spcPct val="115000"/>
+              </a:lnSpc>
+              <a:spcAft>
+                <a:spcPts val="300"/>
+              </a:spcAft>
+            </a:pPr>
+            <a:r>
+              <a:rPr sz="1100">
+                <a:solidFill>
+                  <a:srgbClr val="202938"/>
+                </a:solidFill>
+                <a:latin typeface="微软雅黑"/>
+              </a:rPr>
+              <a:t>· 没有 MSG_NOSIGNAL → 用 SO_NOSIGPIPE</a:t>
+            </a:r>
+          </a:p>
+          <a:p>
+            <a:pPr algn="l">
+              <a:lnSpc>
+                <a:spcPct val="115000"/>
+              </a:lnSpc>
+              <a:spcAft>
+                <a:spcPts val="300"/>
+              </a:spcAft>
+            </a:pPr>
+            <a:r>
+              <a:rPr sz="1100">
+                <a:solidFill>
+                  <a:srgbClr val="202938"/>
+                </a:solidFill>
+                <a:latin typeface="微软雅黑"/>
+              </a:rPr>
+              <a:t>· TCP_KEEPIDLE 改叫 TCP_KEEPALIVE</a:t>
+            </a:r>
+          </a:p>
+          <a:p>
+            <a:pPr algn="l">
+              <a:lnSpc>
+                <a:spcPct val="115000"/>
+              </a:lnSpc>
+              <a:spcAft>
+                <a:spcPts val="300"/>
+              </a:spcAft>
+            </a:pPr>
+            <a:r>
+              <a:rPr sz="1100">
+                <a:solidFill>
+                  <a:srgbClr val="202938"/>
+                </a:solidFill>
+                <a:latin typeface="微软雅黑"/>
+              </a:rPr>
+              <a:t>· htons 是宏：加了 :: 反而编不过</a:t>
+            </a:r>
+          </a:p>
+        </p:txBody>
+      </p:sp>
+      <p:sp>
+        <p:nvSpPr>
+          <p:cNvPr id="7" name="Rectangle 6"/>
+          <p:cNvSpPr/>
+          <p:nvPr/>
+        </p:nvSpPr>
+        <p:spPr>
+          <a:xfrm>
+            <a:off x="4343400" y="5166360"/>
+            <a:ext cx="3657600" cy="1371600"/>
+          </a:xfrm>
+          <a:prstGeom prst="rect">
+            <a:avLst/>
+          </a:prstGeom>
+          <a:solidFill>
+            <a:srgbClr val="E6F6EE"/>
+          </a:solidFill>
+          <a:ln w="15875">
+            <a:solidFill>
+              <a:srgbClr val="168A57"/>
+            </a:solidFill>
+          </a:ln>
+          <a:effectLst/>
+        </p:spPr>
+        <p:style>
+          <a:lnRef idx="1">
+            <a:schemeClr val="accent1"/>
+          </a:lnRef>
+          <a:fillRef idx="3">
+            <a:schemeClr val="accent1"/>
+          </a:fillRef>
+          <a:effectRef idx="2">
+            <a:schemeClr val="accent1"/>
+          </a:effectRef>
+          <a:fontRef idx="minor">
+            <a:schemeClr val="lt1"/>
+          </a:fontRef>
+        </p:style>
+        <p:txBody>
+          <a:bodyPr rtlCol="0" anchor="ctr"/>
+          <a:lstStyle/>
+          <a:p/>
+        </p:txBody>
+      </p:sp>
+      <p:sp>
+        <p:nvSpPr>
+          <p:cNvPr id="8" name="TextBox 7"/>
+          <p:cNvSpPr txBox="1"/>
+          <p:nvPr/>
+        </p:nvSpPr>
+        <p:spPr>
+          <a:xfrm>
+            <a:off x="4489704" y="5257800"/>
+            <a:ext cx="3364992" cy="365760"/>
+          </a:xfrm>
+          <a:prstGeom prst="rect">
+            <a:avLst/>
+          </a:prstGeom>
+          <a:noFill/>
+        </p:spPr>
+        <p:txBody>
+          <a:bodyPr wrap="square">
+            <a:spAutoFit/>
+          </a:bodyPr>
+          <a:lstStyle/>
+          <a:p>
+            <a:pPr algn="l">
+              <a:lnSpc>
+                <a:spcPct val="115000"/>
+              </a:lnSpc>
+              <a:spcAft>
+                <a:spcPts val="200"/>
+              </a:spcAft>
+            </a:pPr>
+            <a:r>
+              <a:rPr sz="1300">
+                <a:solidFill>
+                  <a:srgbClr val="168A57"/>
+                </a:solidFill>
+                <a:latin typeface="微软雅黑"/>
+              </a:rPr>
+              <a:t>客户端分了层</a:t>
+            </a:r>
+          </a:p>
+        </p:txBody>
+      </p:sp>
+      <p:sp>
+        <p:nvSpPr>
+          <p:cNvPr id="9" name="TextBox 8"/>
+          <p:cNvSpPr txBox="1"/>
+          <p:nvPr/>
+        </p:nvSpPr>
+        <p:spPr>
+          <a:xfrm>
+            <a:off x="4489704" y="5623560"/>
+            <a:ext cx="3364992" cy="822960"/>
+          </a:xfrm>
+          <a:prstGeom prst="rect">
+            <a:avLst/>
+          </a:prstGeom>
+          <a:noFill/>
+        </p:spPr>
+        <p:txBody>
+          <a:bodyPr wrap="square">
+            <a:spAutoFit/>
+          </a:bodyPr>
+          <a:lstStyle/>
+          <a:p>
+            <a:pPr algn="l">
+              <a:lnSpc>
+                <a:spcPct val="115000"/>
+              </a:lnSpc>
+              <a:spcAft>
+                <a:spcPts val="300"/>
+              </a:spcAft>
+            </a:pPr>
+            <a:r>
+              <a:rPr sz="1100">
+                <a:solidFill>
+                  <a:srgbClr val="202938"/>
+                </a:solidFill>
+                <a:latin typeface="微软雅黑"/>
+              </a:rPr>
+              <a:t>· client_core/ 可移植核心：网络/信任/附件/颜色/语音/会话逻辑</a:t>
+            </a:r>
+          </a:p>
+          <a:p>
+            <a:pPr algn="l">
+              <a:lnSpc>
+                <a:spcPct val="115000"/>
+              </a:lnSpc>
+              <a:spcAft>
+                <a:spcPts val="300"/>
+              </a:spcAft>
+            </a:pPr>
+            <a:r>
+              <a:rPr sz="1100">
+                <a:solidFill>
+                  <a:srgbClr val="202938"/>
+                </a:solidFill>
+                <a:latin typeface="微软雅黑"/>
+              </a:rPr>
+              <a:t>· linux/client/ 与 macos/main.mm 只剩界面</a:t>
+            </a:r>
+          </a:p>
+          <a:p>
+            <a:pPr algn="l">
+              <a:lnSpc>
+                <a:spcPct val="115000"/>
+              </a:lnSpc>
+              <a:spcAft>
+                <a:spcPts val="300"/>
+              </a:spcAft>
+            </a:pPr>
+            <a:r>
+              <a:rPr sz="1100">
+                <a:solidFill>
+                  <a:srgbClr val="202938"/>
+                </a:solidFill>
+                <a:latin typeface="微软雅黑"/>
+              </a:rPr>
+              <a:t>· 界面能编不了也不怕：逻辑都在能验证的核心层</a:t>
+            </a:r>
+          </a:p>
+        </p:txBody>
+      </p:sp>
+      <p:sp>
+        <p:nvSpPr>
+          <p:cNvPr id="10" name="Rectangle 9"/>
+          <p:cNvSpPr/>
+          <p:nvPr/>
+        </p:nvSpPr>
+        <p:spPr>
+          <a:xfrm>
+            <a:off x="8138160" y="5166360"/>
+            <a:ext cx="3520440" cy="1371600"/>
+          </a:xfrm>
+          <a:prstGeom prst="rect">
+            <a:avLst/>
+          </a:prstGeom>
+          <a:solidFill>
+            <a:srgbClr val="FDF4E2"/>
+          </a:solidFill>
+          <a:ln w="15875">
+            <a:solidFill>
+              <a:srgbClr val="B06C0C"/>
+            </a:solidFill>
+          </a:ln>
+          <a:effectLst/>
+        </p:spPr>
+        <p:style>
+          <a:lnRef idx="1">
+            <a:schemeClr val="accent1"/>
+          </a:lnRef>
+          <a:fillRef idx="3">
+            <a:schemeClr val="accent1"/>
+          </a:fillRef>
+          <a:effectRef idx="2">
+            <a:schemeClr val="accent1"/>
+          </a:effectRef>
+          <a:fontRef idx="minor">
+            <a:schemeClr val="lt1"/>
+          </a:fontRef>
+        </p:style>
+        <p:txBody>
+          <a:bodyPr rtlCol="0" anchor="ctr"/>
+          <a:lstStyle/>
+          <a:p/>
+        </p:txBody>
+      </p:sp>
+      <p:sp>
+        <p:nvSpPr>
+          <p:cNvPr id="11" name="TextBox 10"/>
+          <p:cNvSpPr txBox="1"/>
+          <p:nvPr/>
+        </p:nvSpPr>
+        <p:spPr>
+          <a:xfrm>
+            <a:off x="8284464" y="5257800"/>
+            <a:ext cx="3227832" cy="365760"/>
+          </a:xfrm>
+          <a:prstGeom prst="rect">
+            <a:avLst/>
+          </a:prstGeom>
+          <a:noFill/>
+        </p:spPr>
+        <p:txBody>
+          <a:bodyPr wrap="square">
+            <a:spAutoFit/>
+          </a:bodyPr>
+          <a:lstStyle/>
+          <a:p>
+            <a:pPr algn="l">
+              <a:lnSpc>
+                <a:spcPct val="115000"/>
+              </a:lnSpc>
+              <a:spcAft>
+                <a:spcPts val="200"/>
+              </a:spcAft>
+            </a:pPr>
+            <a:r>
+              <a:rPr sz="1300">
+                <a:solidFill>
+                  <a:srgbClr val="B06C0C"/>
+                </a:solidFill>
+                <a:latin typeface="微软雅黑"/>
+              </a:rPr>
+              <a:t>怎么在没有 Mac 时查错</a:t>
+            </a:r>
+          </a:p>
+        </p:txBody>
+      </p:sp>
+      <p:sp>
+        <p:nvSpPr>
+          <p:cNvPr id="12" name="TextBox 11"/>
+          <p:cNvSpPr txBox="1"/>
+          <p:nvPr/>
+        </p:nvSpPr>
+        <p:spPr>
+          <a:xfrm>
+            <a:off x="8284464" y="5623560"/>
+            <a:ext cx="3227832" cy="822960"/>
+          </a:xfrm>
+          <a:prstGeom prst="rect">
+            <a:avLst/>
+          </a:prstGeom>
+          <a:noFill/>
+        </p:spPr>
+        <p:txBody>
+          <a:bodyPr wrap="square">
+            <a:spAutoFit/>
+          </a:bodyPr>
+          <a:lstStyle/>
+          <a:p>
+            <a:pPr algn="l">
+              <a:lnSpc>
+                <a:spcPct val="115000"/>
+              </a:lnSpc>
+              <a:spcAft>
+                <a:spcPts val="300"/>
+              </a:spcAft>
+            </a:pPr>
+            <a:r>
+              <a:rPr sz="1100">
+                <a:solidFill>
+                  <a:srgbClr val="202938"/>
+                </a:solidFill>
+                <a:latin typeface="微软雅黑"/>
+              </a:rPr>
+              <a:t>· zig 交叉编译成真 Mach-O 二进制</a:t>
+            </a:r>
+          </a:p>
+          <a:p>
+            <a:pPr algn="l">
+              <a:lnSpc>
+                <a:spcPct val="115000"/>
+              </a:lnSpc>
+              <a:spcAft>
+                <a:spcPts val="300"/>
+              </a:spcAft>
+            </a:pPr>
+            <a:r>
+              <a:rPr sz="1100">
+                <a:solidFill>
+                  <a:srgbClr val="202938"/>
+                </a:solidFill>
+                <a:latin typeface="微软雅黑"/>
+              </a:rPr>
+              <a:t>· 18 个文件 × 两个架构全通过</a:t>
+            </a:r>
+          </a:p>
+          <a:p>
+            <a:pPr algn="l">
+              <a:lnSpc>
+                <a:spcPct val="115000"/>
+              </a:lnSpc>
+              <a:spcAft>
+                <a:spcPts val="300"/>
+              </a:spcAft>
+            </a:pPr>
+            <a:r>
+              <a:rPr sz="1100">
+                <a:solidFill>
+                  <a:srgbClr val="202938"/>
+                </a:solidFill>
+                <a:latin typeface="微软雅黑"/>
+              </a:rPr>
+              <a:t>· 文本层查 selector / 括号 / 声明</a:t>
+            </a:r>
+          </a:p>
+        </p:txBody>
+      </p:sp>
+    </p:spTree>
+  </p:cSld>
+  <p:clrMapOvr>
+    <a:masterClrMapping/>
+  </p:clrMapOvr>
+  <mc:AlternateContent xmlns:mc="http://schemas.openxmlformats.org/markup-compatibility/2006">
+    <mc:Choice xmlns:p14="http://schemas.microsoft.com/office/powerpoint/2010/main" Requires="p14">
+      <p:transition spd="med" p14:dur="500">
+        <p:fade/>
+      </p:transition>
+    </mc:Choice>
+    <mc:Fallback>
+      <p:transition spd="med">
+        <p:fade/>
+      </p:transition>
+    </mc:Fallback>
+  </mc:AlternateContent>
+  <p:timing>
+    <p:tnLst>
+      <p:par>
+        <p:cTn id="1" dur="indefinite" restart="never" nodeType="tmRoot">
+          <p:childTnLst>
+            <p:seq concurrent="1" nextAc="seek">
+              <p:cTn id="2" dur="indefinite" nodeType="mainSeq">
+                <p:childTnLst>
+                  <p:par>
+                    <p:cTn id="2" fill="hold">
+                      <p:stCondLst>
+                        <p:cond delay="indefinite"/>
+                      </p:stCondLst>
+                      <p:childTnLst>
+                        <p:par>
+                          <p:cTn id="3" fill="hold">
+                            <p:stCondLst>
+                              <p:cond delay="0"/>
+                            </p:stCondLst>
+                            <p:childTnLst>
+                              <p:par>
+                                <p:cTn id="4" presetID="10" presetClass="entr" presetSubtype="0" fill="hold" grpId="0" nodeType="clickEffect">
+                                  <p:stCondLst>
+                                    <p:cond delay="0"/>
+                                  </p:stCondLst>
+                                  <p:childTnLst>
+                                    <p:set>
+                                      <p:cBhvr>
+                                        <p:cTn id="5" dur="1" fill="hold">
+                                          <p:stCondLst>
+                                            <p:cond delay="0"/>
+                                          </p:stCondLst>
+                                        </p:cTn>
+                                        <p:tgtEl>
+                                          <p:spTgt spid="2"/>
+                                        </p:tgtEl>
+                                        <p:attrNameLst>
+                                          <p:attrName>style.visibility</p:attrName>
+                                        </p:attrNameLst>
+                                      </p:cBhvr>
+                                      <p:to>
+                                        <p:strVal val="visible"/>
+                                      </p:to>
+                                    </p:set>
+                                    <p:animEffect transition="in" filter="fade">
+                                      <p:cBhvr>
+                                        <p:cTn id="6" dur="400"/>
+                                        <p:tgtEl>
+                                          <p:spTgt spid="2"/>
+                                        </p:tgtEl>
+                                      </p:cBhvr>
+                                    </p:animEffect>
+                                  </p:childTnLst>
+                                </p:cTn>
+                              </p:par>
+                            </p:childTnLst>
+                          </p:cTn>
+                        </p:par>
+                      </p:childTnLst>
+                    </p:cTn>
+                  </p:par>
+                  <p:par>
+                    <p:cTn id="7" fill="hold">
+                      <p:stCondLst>
+                        <p:cond delay="indefinite"/>
+                      </p:stCondLst>
+                      <p:childTnLst>
+                        <p:par>
+                          <p:cTn id="8" fill="hold">
+                            <p:stCondLst>
+                              <p:cond delay="0"/>
+                            </p:stCondLst>
+                            <p:childTnLst>
+                              <p:par>
+                                <p:cTn id="9" presetID="10" presetClass="entr" presetSubtype="0" fill="hold" grpId="0" nodeType="clickEffect">
+                                  <p:stCondLst>
+                                    <p:cond delay="0"/>
+                                  </p:stCondLst>
+                                  <p:childTnLst>
+                                    <p:set>
+                                      <p:cBhvr>
+                                        <p:cTn id="10" dur="1" fill="hold">
+                                          <p:stCondLst>
+                                            <p:cond delay="0"/>
+                                          </p:stCondLst>
+                                        </p:cTn>
+                                        <p:tgtEl>
+                                          <p:spTgt spid="3"/>
+                                        </p:tgtEl>
+                                        <p:attrNameLst>
+                                          <p:attrName>style.visibility</p:attrName>
+                                        </p:attrNameLst>
+                                      </p:cBhvr>
+                                      <p:to>
+                                        <p:strVal val="visible"/>
+                                      </p:to>
+                                    </p:set>
+                                    <p:animEffect transition="in" filter="fade">
+                                      <p:cBhvr>
+                                        <p:cTn id="11" dur="400"/>
+                                        <p:tgtEl>
+                                          <p:spTgt spid="3"/>
+                                        </p:tgtEl>
+                                      </p:cBhvr>
+                                    </p:animEffect>
+                                  </p:childTnLst>
+                                </p:cTn>
+                              </p:par>
+                            </p:childTnLst>
+                          </p:cTn>
+                        </p:par>
+                      </p:childTnLst>
+                    </p:cTn>
+                  </p:par>
+                  <p:par>
+                    <p:cTn id="12" fill="hold">
+                      <p:stCondLst>
+                        <p:cond delay="indefinite"/>
+                      </p:stCondLst>
+                      <p:childTnLst>
+                        <p:par>
+                          <p:cTn id="13" fill="hold">
+                            <p:stCondLst>
+                              <p:cond delay="0"/>
+                            </p:stCondLst>
+                            <p:childTnLst>
+                              <p:par>
+                                <p:cTn id="14" presetID="10" presetClass="entr" presetSubtype="0" fill="hold" grpId="0" nodeType="clickEffect">
+                                  <p:stCondLst>
+                                    <p:cond delay="0"/>
+                                  </p:stCondLst>
+                                  <p:childTnLst>
+                                    <p:set>
+                                      <p:cBhvr>
+                                        <p:cTn id="15" dur="1" fill="hold">
+                                          <p:stCondLst>
+                                            <p:cond delay="0"/>
+                                          </p:stCondLst>
+                                        </p:cTn>
+                                        <p:tgtEl>
+                                          <p:spTgt spid="5"/>
+                                        </p:tgtEl>
+                                        <p:attrNameLst>
+                                          <p:attrName>style.visibility</p:attrName>
+                                        </p:attrNameLst>
+                                      </p:cBhvr>
+                                      <p:to>
+                                        <p:strVal val="visible"/>
+                                      </p:to>
+                                    </p:set>
+                                    <p:animEffect transition="in" filter="fade">
+                                      <p:cBhvr>
+                                        <p:cTn id="16" dur="400"/>
+                                        <p:tgtEl>
+                                          <p:spTgt spid="5"/>
+                                        </p:tgtEl>
+                                      </p:cBhvr>
+                                    </p:animEffect>
+                                  </p:childTnLst>
+                                </p:cTn>
+                              </p:par>
+                            </p:childTnLst>
+                          </p:cTn>
+                        </p:par>
+                      </p:childTnLst>
+                    </p:cTn>
+                  </p:par>
+                  <p:par>
+                    <p:cTn id="17" fill="hold">
+                      <p:stCondLst>
+                        <p:cond delay="indefinite"/>
+                      </p:stCondLst>
+                      <p:childTnLst>
+                        <p:par>
+                          <p:cTn id="18" fill="hold">
+                            <p:stCondLst>
+                              <p:cond delay="0"/>
+                            </p:stCondLst>
+                            <p:childTnLst>
+                              <p:par>
+                                <p:cTn id="19" presetID="10" presetClass="entr" presetSubtype="0" fill="hold" grpId="0" nodeType="clickEffect">
+                                  <p:stCondLst>
+                                    <p:cond delay="0"/>
+                                  </p:stCondLst>
+                                  <p:childTnLst>
+                                    <p:set>
+                                      <p:cBhvr>
+                                        <p:cTn id="20" dur="1" fill="hold">
+                                          <p:stCondLst>
+                                            <p:cond delay="0"/>
+                                          </p:stCondLst>
+                                        </p:cTn>
+                                        <p:tgtEl>
+                                          <p:spTgt spid="6"/>
+                                        </p:tgtEl>
+                                        <p:attrNameLst>
+                                          <p:attrName>style.visibility</p:attrName>
+                                        </p:attrNameLst>
+                                      </p:cBhvr>
+                                      <p:to>
+                                        <p:strVal val="visible"/>
+                                      </p:to>
+                                    </p:set>
+                                    <p:animEffect transition="in" filter="fade">
+                                      <p:cBhvr>
+                                        <p:cTn id="21" dur="400"/>
+                                        <p:tgtEl>
+                                          <p:spTgt spid="6"/>
+                                        </p:tgtEl>
+                                      </p:cBhvr>
+                                    </p:animEffect>
+                                  </p:childTnLst>
+                                </p:cTn>
+                              </p:par>
+                            </p:childTnLst>
+                          </p:cTn>
+                        </p:par>
+                      </p:childTnLst>
+                    </p:cTn>
+                  </p:par>
+                  <p:par>
+                    <p:cTn id="22" fill="hold">
+                      <p:stCondLst>
+                        <p:cond delay="indefinite"/>
+                      </p:stCondLst>
+                      <p:childTnLst>
+                        <p:par>
+                          <p:cTn id="23" fill="hold">
+                            <p:stCondLst>
+                              <p:cond delay="0"/>
+                            </p:stCondLst>
+                            <p:childTnLst>
+                              <p:par>
+                                <p:cTn id="24" presetID="10" presetClass="entr" presetSubtype="0" fill="hold" grpId="0" nodeType="clickEffect">
+                                  <p:stCondLst>
+                                    <p:cond delay="0"/>
+                                  </p:stCondLst>
+                                  <p:childTnLst>
+                                    <p:set>
+                                      <p:cBhvr>
+                                        <p:cTn id="25" dur="1" fill="hold">
+                                          <p:stCondLst>
+                                            <p:cond delay="0"/>
+                                          </p:stCondLst>
+                                        </p:cTn>
+                                        <p:tgtEl>
+                                          <p:spTgt spid="8"/>
+                                        </p:tgtEl>
+                                        <p:attrNameLst>
+                                          <p:attrName>style.visibility</p:attrName>
+                                        </p:attrNameLst>
+                                      </p:cBhvr>
+                                      <p:to>
+                                        <p:strVal val="visible"/>
+                                      </p:to>
+                                    </p:set>
+                                    <p:animEffect transition="in" filter="fade">
+                                      <p:cBhvr>
+                                        <p:cTn id="26" dur="400"/>
+                                        <p:tgtEl>
+                                          <p:spTgt spid="8"/>
+                                        </p:tgtEl>
+                                      </p:cBhvr>
+                                    </p:animEffect>
+                                  </p:childTnLst>
+                                </p:cTn>
+                              </p:par>
+                            </p:childTnLst>
+                          </p:cTn>
+                        </p:par>
+                      </p:childTnLst>
+                    </p:cTn>
+                  </p:par>
+                  <p:par>
+                    <p:cTn id="27" fill="hold">
+                      <p:stCondLst>
+                        <p:cond delay="indefinite"/>
+                      </p:stCondLst>
+                      <p:childTnLst>
+                        <p:par>
+                          <p:cTn id="28" fill="hold">
+                            <p:stCondLst>
+                              <p:cond delay="0"/>
+                            </p:stCondLst>
+                            <p:childTnLst>
+                              <p:par>
+                                <p:cTn id="29" presetID="10" presetClass="entr" presetSubtype="0" fill="hold" grpId="0" nodeType="clickEffect">
+                                  <p:stCondLst>
+                                    <p:cond delay="0"/>
+                                  </p:stCondLst>
+                                  <p:childTnLst>
+                                    <p:set>
+                                      <p:cBhvr>
+                                        <p:cTn id="30" dur="1" fill="hold">
+                                          <p:stCondLst>
+                                            <p:cond delay="0"/>
+                                          </p:stCondLst>
+                                        </p:cTn>
+                                        <p:tgtEl>
+                                          <p:spTgt spid="9"/>
+                                        </p:tgtEl>
+                                        <p:attrNameLst>
+                                          <p:attrName>style.visibility</p:attrName>
+                                        </p:attrNameLst>
+                                      </p:cBhvr>
+                                      <p:to>
+                                        <p:strVal val="visible"/>
+                                      </p:to>
+                                    </p:set>
+                                    <p:animEffect transition="in" filter="fade">
+                                      <p:cBhvr>
+                                        <p:cTn id="31" dur="400"/>
+                                        <p:tgtEl>
+                                          <p:spTgt spid="9"/>
+                                        </p:tgtEl>
+                                      </p:cBhvr>
+                                    </p:animEffect>
+                                  </p:childTnLst>
+                                </p:cTn>
+                              </p:par>
+                            </p:childTnLst>
+                          </p:cTn>
+                        </p:par>
+                      </p:childTnLst>
+                    </p:cTn>
+                  </p:par>
+                  <p:par>
+                    <p:cTn id="32" fill="hold">
+                      <p:stCondLst>
+                        <p:cond delay="indefinite"/>
+                      </p:stCondLst>
+                      <p:childTnLst>
+                        <p:par>
+                          <p:cTn id="33" fill="hold">
+                            <p:stCondLst>
+                              <p:cond delay="0"/>
+                            </p:stCondLst>
+                            <p:childTnLst>
+                              <p:par>
+                                <p:cTn id="34" presetID="10" presetClass="entr" presetSubtype="0" fill="hold" grpId="0" nodeType="clickEffect">
+                                  <p:stCondLst>
+                                    <p:cond delay="0"/>
+                                  </p:stCondLst>
+                                  <p:childTnLst>
+                                    <p:set>
+                                      <p:cBhvr>
+                                        <p:cTn id="35" dur="1" fill="hold">
+                                          <p:stCondLst>
+                                            <p:cond delay="0"/>
+                                          </p:stCondLst>
+                                        </p:cTn>
+                                        <p:tgtEl>
+                                          <p:spTgt spid="11"/>
+                                        </p:tgtEl>
+                                        <p:attrNameLst>
+                                          <p:attrName>style.visibility</p:attrName>
+                                        </p:attrNameLst>
+                                      </p:cBhvr>
+                                      <p:to>
+                                        <p:strVal val="visible"/>
+                                      </p:to>
+                                    </p:set>
+                                    <p:animEffect transition="in" filter="fade">
+                                      <p:cBhvr>
+                                        <p:cTn id="36" dur="400"/>
+                                        <p:tgtEl>
+                                          <p:spTgt spid="11"/>
+                                        </p:tgtEl>
+                                      </p:cBhvr>
+                                    </p:animEffect>
+                                  </p:childTnLst>
+                                </p:cTn>
+                              </p:par>
+                            </p:childTnLst>
+                          </p:cTn>
+                        </p:par>
+                      </p:childTnLst>
+                    </p:cTn>
+                  </p:par>
+                  <p:par>
+                    <p:cTn id="37" fill="hold">
+                      <p:stCondLst>
+                        <p:cond delay="indefinite"/>
+                      </p:stCondLst>
+                      <p:childTnLst>
+                        <p:par>
+                          <p:cTn id="38" fill="hold">
+                            <p:stCondLst>
+                              <p:cond delay="0"/>
+                            </p:stCondLst>
+                            <p:childTnLst>
+                              <p:par>
+                                <p:cTn id="39" presetID="10" presetClass="entr" presetSubtype="0" fill="hold" grpId="0" nodeType="clickEffect">
+                                  <p:stCondLst>
+                                    <p:cond delay="0"/>
+                                  </p:stCondLst>
+                                  <p:childTnLst>
+                                    <p:set>
+                                      <p:cBhvr>
+                                        <p:cTn id="40" dur="1" fill="hold">
+                                          <p:stCondLst>
+                                            <p:cond delay="0"/>
+                                          </p:stCondLst>
+                                        </p:cTn>
+                                        <p:tgtEl>
+                                          <p:spTgt spid="12"/>
+                                        </p:tgtEl>
+                                        <p:attrNameLst>
+                                          <p:attrName>style.visibility</p:attrName>
+                                        </p:attrNameLst>
+                                      </p:cBhvr>
+                                      <p:to>
+                                        <p:strVal val="visible"/>
+                                      </p:to>
+                                    </p:set>
+                                    <p:animEffect transition="in" filter="fade">
+                                      <p:cBhvr>
+                                        <p:cTn id="41" dur="400"/>
+                                        <p:tgtEl>
+                                          <p:spTgt spid="12"/>
+                                        </p:tgtEl>
+                                      </p:cBhvr>
+                                    </p:animEffect>
+                                  </p:childTnLst>
+                                </p:cTn>
+                              </p:par>
+                            </p:childTnLst>
+                          </p:cTn>
+                        </p:par>
+                      </p:childTnLst>
+                    </p:cTn>
+                  </p:par>
+                </p:childTnLst>
+              </p:cTn>
+              <p:prevCondLst>
+                <p:cond evt="onPrev" delay="0">
+                  <p:tgtEl>
+                    <p:sldTgt/>
+                  </p:tgtEl>
+                </p:cond>
+              </p:prevCondLst>
+              <p:nextCondLst>
+                <p:cond evt="onNext" delay="0">
+                  <p:tgtEl>
+                    <p:sldTgt/>
+                  </p:tgtEl>
+                </p:cond>
+              </p:nextCondLst>
+            </p:seq>
+          </p:childTnLst>
+        </p:cTn>
+      </p:par>
+    </p:tnLst>
+    <p:bldLst>
+      <p:bldP spid="2" grpId="0"/>
+      <p:bldP spid="3" grpId="0"/>
+      <p:bldP spid="5" grpId="0"/>
+      <p:bldP spid="6" grpId="0"/>
+      <p:bldP spid="8" grpId="0"/>
+      <p:bldP spid="9" grpId="0"/>
+      <p:bldP spid="11" grpId="0"/>
+      <p:bldP spid="12" grpId="0"/>
+    </p:bldLst>
+  </p:timing>
+</p:sld>
+</file>
+
+<file path=ppt/slides/slide21.xml><?xml version="1.0" encoding="utf-8"?>
+<p:sld xmlns:a="http://schemas.openxmlformats.org/drawingml/2006/main" xmlns:p="http://schemas.openxmlformats.org/presentationml/2006/main" xmlns:r="http://schemas.openxmlformats.org/officeDocument/2006/relationships">
+  <p:cSld>
+    <p:spTree>
+      <p:nvGrpSpPr>
+        <p:cNvPr id="1" name=""/>
+        <p:cNvGrpSpPr/>
+        <p:nvPr/>
+      </p:nvGrpSpPr>
+      <p:grpSpPr/>
+      <p:sp>
+        <p:nvSpPr>
+          <p:cNvPr id="2" name="Rectangle 1"/>
+          <p:cNvSpPr/>
+          <p:nvPr/>
+        </p:nvSpPr>
+        <p:spPr>
+          <a:xfrm>
+            <a:off x="0" y="0"/>
+            <a:ext cx="12191695" cy="932688"/>
+          </a:xfrm>
+          <a:prstGeom prst="rect">
+            <a:avLst/>
+          </a:prstGeom>
+          <a:solidFill>
+            <a:srgbClr val="16284A"/>
+          </a:solidFill>
+          <a:ln>
+            <a:noFill/>
+          </a:ln>
+          <a:effectLst/>
+        </p:spPr>
+        <p:style>
+          <a:lnRef idx="1">
+            <a:schemeClr val="accent1"/>
+          </a:lnRef>
+          <a:fillRef idx="3">
+            <a:schemeClr val="accent1"/>
+          </a:fillRef>
+          <a:effectRef idx="2">
+            <a:schemeClr val="accent1"/>
+          </a:effectRef>
+          <a:fontRef idx="minor">
+            <a:schemeClr val="lt1"/>
+          </a:fontRef>
+        </p:style>
+        <p:txBody>
+          <a:bodyPr rtlCol="0" anchor="ctr" lIns="411480" tIns="91440"/>
+          <a:lstStyle/>
+          <a:p>
+            <a:pPr algn="ctr"/>
+            <a:r>
+              <a:rPr sz="2800" b="1">
+                <a:solidFill>
+                  <a:srgbClr val="FFFFFF"/>
+                </a:solidFill>
+                <a:latin typeface="微软雅黑"/>
+              </a:rPr>
               <a:t>几个真实的 bug（和它们为什么难查）</a:t>
             </a:r>
           </a:p>
@@ -15971,7 +17052,7 @@
 </p:sld>
 </file>
 
-<file path=ppt/slides/slide21.xml><?xml version="1.0" encoding="utf-8"?>
+<file path=ppt/slides/slide22.xml><?xml version="1.0" encoding="utf-8"?>
 <p:sld xmlns:a="http://schemas.openxmlformats.org/drawingml/2006/main" xmlns:p="http://schemas.openxmlformats.org/presentationml/2006/main" xmlns:r="http://schemas.openxmlformats.org/officeDocument/2006/relationships">
   <p:cSld>
     <p:spTree>
@@ -17380,7 +18461,7 @@
 </p:sld>
 </file>
 
-<file path=ppt/slides/slide22.xml><?xml version="1.0" encoding="utf-8"?>
+<file path=ppt/slides/slide23.xml><?xml version="1.0" encoding="utf-8"?>
 <p:sld xmlns:a="http://schemas.openxmlformats.org/drawingml/2006/main" xmlns:p="http://schemas.openxmlformats.org/presentationml/2006/main" xmlns:r="http://schemas.openxmlformats.org/officeDocument/2006/relationships">
   <p:cSld>
     <p:spTree>
@@ -18181,7 +19262,7 @@
 </p:sld>
 </file>
 
-<file path=ppt/slides/slide23.xml><?xml version="1.0" encoding="utf-8"?>
+<file path=ppt/slides/slide24.xml><?xml version="1.0" encoding="utf-8"?>
 <p:sld xmlns:a="http://schemas.openxmlformats.org/drawingml/2006/main" xmlns:p="http://schemas.openxmlformats.org/presentationml/2006/main" xmlns:r="http://schemas.openxmlformats.org/officeDocument/2006/relationships">
   <p:cSld>
     <p:spTree>
@@ -18704,7 +19785,7 @@
 </p:sld>
 </file>
 
-<file path=ppt/slides/slide24.xml><?xml version="1.0" encoding="utf-8"?>
+<file path=ppt/slides/slide25.xml><?xml version="1.0" encoding="utf-8"?>
 <p:sld xmlns:a="http://schemas.openxmlformats.org/drawingml/2006/main" xmlns:p="http://schemas.openxmlformats.org/presentationml/2006/main" xmlns:r="http://schemas.openxmlformats.org/officeDocument/2006/relationships">
   <p:cSld>
     <p:spTree>

--- a/dchat-项目介绍.pptx
+++ b/dchat-项目介绍.pptx
@@ -30,6 +30,7 @@
     <p:sldId id="278" r:id="rId29"/>
     <p:sldId id="279" r:id="rId30"/>
     <p:sldId id="280" r:id="rId31"/>
+    <p:sldId id="281" r:id="rId32"/>
   </p:sldIdLst>
   <p:sldSz cx="12191695" cy="6858000" type="screen4x3"/>
   <p:notesSz cx="6858000" cy="9144000"/>
@@ -15392,7 +15393,7 @@
                 </a:solidFill>
                 <a:latin typeface="微软雅黑"/>
               </a:rPr>
-              <a:t>macOS 端：原生 Cocoa 界面 + 如实标注的验证边界</a:t>
+              <a:t>四端统一：会话逻辑只有一处实现</a:t>
             </a:r>
           </a:p>
           <a:p>
@@ -15403,14 +15404,14 @@
                 </a:solidFill>
                 <a:latin typeface="微软雅黑"/>
               </a:rPr>
-              <a:t>开发机上没有 Mac，所以「能编的都编了、能查的都查了」，但从未真机运行</a:t>
+              <a:t>Linux 终端界面也接上了共用的 chat_core —— 界面只负责「怎么显示」</a:t>
             </a:r>
           </a:p>
         </p:txBody>
       </p:sp>
       <p:pic>
         <p:nvPicPr>
-          <p:cNvPr id="3" name="Picture 2" descr="chart-macos-verify.png"/>
+          <p:cNvPr id="3" name="Picture 2" descr="chart-layers.png"/>
           <p:cNvPicPr>
             <a:picLocks noChangeAspect="1"/>
           </p:cNvPicPr>
@@ -15424,8 +15425,8 @@
         </p:blipFill>
         <p:spPr>
           <a:xfrm>
-            <a:off x="1656079" y="1005840"/>
-            <a:ext cx="8940800" cy="4023360"/>
+            <a:off x="2300928" y="960120"/>
+            <a:ext cx="7651102" cy="3749039"/>
           </a:xfrm>
           <a:prstGeom prst="rect">
             <a:avLst/>
@@ -15440,8 +15441,8 @@
         </p:nvSpPr>
         <p:spPr>
           <a:xfrm>
-            <a:off x="548640" y="5166360"/>
-            <a:ext cx="3657600" cy="1371600"/>
+            <a:off x="548640" y="4892040"/>
+            <a:ext cx="3657600" cy="1645920"/>
           </a:xfrm>
           <a:prstGeom prst="rect">
             <a:avLst/>
@@ -15484,7 +15485,7 @@
         </p:nvSpPr>
         <p:spPr>
           <a:xfrm>
-            <a:off x="694944" y="5257800"/>
+            <a:off x="694944" y="4983479"/>
             <a:ext cx="3364992" cy="365760"/>
           </a:xfrm>
           <a:prstGeom prst="rect">
@@ -15513,7 +15514,7 @@
                 </a:solidFill>
                 <a:latin typeface="微软雅黑"/>
               </a:rPr>
-              <a:t>为 macOS 改了什么</a:t>
+              <a:t>Linux 界面这次改了什么</a:t>
             </a:r>
           </a:p>
         </p:txBody>
@@ -15526,8 +15527,8 @@
         </p:nvSpPr>
         <p:spPr>
           <a:xfrm>
-            <a:off x="694944" y="5623560"/>
-            <a:ext cx="3364992" cy="822960"/>
+            <a:off x="694944" y="5349240"/>
+            <a:ext cx="3364992" cy="1097280"/>
           </a:xfrm>
           <a:prstGeom prst="rect">
             <a:avLst/>
@@ -15555,7 +15556,7 @@
                 </a:solidFill>
                 <a:latin typeface="微软雅黑"/>
               </a:rPr>
-              <a:t>· 没有 MSG_NOSIGNAL → 用 SO_NOSIGPIPE</a:t>
+              <a:t>· 原先自己解析协议、自己分派 9 个指令</a:t>
             </a:r>
           </a:p>
           <a:p>
@@ -15574,7 +15575,7 @@
                 </a:solidFill>
                 <a:latin typeface="微软雅黑"/>
               </a:rPr>
-              <a:t>· TCP_KEEPIDLE 改叫 TCP_KEEPALIVE</a:t>
+              <a:t>· 现在实现 ChatCoreDelegate，不再持有连接</a:t>
             </a:r>
           </a:p>
           <a:p>
@@ -15593,7 +15594,26 @@
                 </a:solidFill>
                 <a:latin typeface="微软雅黑"/>
               </a:rPr>
-              <a:t>· htons 是宏：加了 :: 反而编不过</a:t>
+              <a:t>· 渲染抽成纯函数 cli_render（可单测）</a:t>
+            </a:r>
+          </a:p>
+          <a:p>
+            <a:pPr algn="l">
+              <a:lnSpc>
+                <a:spcPct val="115000"/>
+              </a:lnSpc>
+              <a:spcAft>
+                <a:spcPts val="300"/>
+              </a:spcAft>
+            </a:pPr>
+            <a:r>
+              <a:rPr sz="1100">
+                <a:solidFill>
+                  <a:srgbClr val="202938"/>
+                </a:solidFill>
+                <a:latin typeface="微软雅黑"/>
+              </a:rPr>
+              <a:t>· 界面只剩：读键 / 画输入行 / 打输出</a:t>
             </a:r>
           </a:p>
         </p:txBody>
@@ -15606,8 +15626,8 @@
         </p:nvSpPr>
         <p:spPr>
           <a:xfrm>
-            <a:off x="4343400" y="5166360"/>
-            <a:ext cx="3657600" cy="1371600"/>
+            <a:off x="4343400" y="4892040"/>
+            <a:ext cx="3657600" cy="1645920"/>
           </a:xfrm>
           <a:prstGeom prst="rect">
             <a:avLst/>
@@ -15650,7 +15670,7 @@
         </p:nvSpPr>
         <p:spPr>
           <a:xfrm>
-            <a:off x="4489704" y="5257800"/>
+            <a:off x="4489704" y="4983479"/>
             <a:ext cx="3364992" cy="365760"/>
           </a:xfrm>
           <a:prstGeom prst="rect">
@@ -15679,7 +15699,7 @@
                 </a:solidFill>
                 <a:latin typeface="微软雅黑"/>
               </a:rPr>
-              <a:t>客户端分了层</a:t>
+              <a:t>界面终于能自动化测了</a:t>
             </a:r>
           </a:p>
         </p:txBody>
@@ -15692,8 +15712,8 @@
         </p:nvSpPr>
         <p:spPr>
           <a:xfrm>
-            <a:off x="4489704" y="5623560"/>
-            <a:ext cx="3364992" cy="822960"/>
+            <a:off x="4489704" y="5349240"/>
+            <a:ext cx="3364992" cy="1097280"/>
           </a:xfrm>
           <a:prstGeom prst="rect">
             <a:avLst/>
@@ -15721,7 +15741,7 @@
                 </a:solidFill>
                 <a:latin typeface="微软雅黑"/>
               </a:rPr>
-              <a:t>· client_core/ 可移植核心：网络/信任/附件/颜色/语音/会话逻辑</a:t>
+              <a:t>· 用伪终端（pty）驱动真客户端</a:t>
             </a:r>
           </a:p>
           <a:p>
@@ -15740,7 +15760,7 @@
                 </a:solidFill>
                 <a:latin typeface="微软雅黑"/>
               </a:rPr>
-              <a:t>· linux/client/ 与 macos/main.mm 只剩界面</a:t>
+              <a:t>· 24 项：收发 / Tab 补全 / 色码 / 退格删中文</a:t>
             </a:r>
           </a:p>
           <a:p>
@@ -15759,7 +15779,26 @@
                 </a:solidFill>
                 <a:latin typeface="微软雅黑"/>
               </a:rPr>
-              <a:t>· 界面能编不了也不怕：逻辑都在能验证的核心层</a:t>
+              <a:t>· 还覆盖 Ctrl+U、↑ 翻历史、/clear、/quit</a:t>
+            </a:r>
+          </a:p>
+          <a:p>
+            <a:pPr algn="l">
+              <a:lnSpc>
+                <a:spcPct val="115000"/>
+              </a:lnSpc>
+              <a:spcAft>
+                <a:spcPts val="300"/>
+              </a:spcAft>
+            </a:pPr>
+            <a:r>
+              <a:rPr sz="1100">
+                <a:solidFill>
+                  <a:srgbClr val="202938"/>
+                </a:solidFill>
+                <a:latin typeface="微软雅黑"/>
+              </a:rPr>
+              <a:t>· 以前这块完全没有自动化覆盖</a:t>
             </a:r>
           </a:p>
         </p:txBody>
@@ -15772,8 +15811,8 @@
         </p:nvSpPr>
         <p:spPr>
           <a:xfrm>
-            <a:off x="8138160" y="5166360"/>
-            <a:ext cx="3520440" cy="1371600"/>
+            <a:off x="8138160" y="4892040"/>
+            <a:ext cx="3520440" cy="1645920"/>
           </a:xfrm>
           <a:prstGeom prst="rect">
             <a:avLst/>
@@ -15816,7 +15855,7 @@
         </p:nvSpPr>
         <p:spPr>
           <a:xfrm>
-            <a:off x="8284464" y="5257800"/>
+            <a:off x="8284464" y="4983479"/>
             <a:ext cx="3227832" cy="365760"/>
           </a:xfrm>
           <a:prstGeom prst="rect">
@@ -15845,7 +15884,7 @@
                 </a:solidFill>
                 <a:latin typeface="微软雅黑"/>
               </a:rPr>
-              <a:t>怎么在没有 Mac 时查错</a:t>
+              <a:t>一个值得记的教训</a:t>
             </a:r>
           </a:p>
         </p:txBody>
@@ -15858,8 +15897,8 @@
         </p:nvSpPr>
         <p:spPr>
           <a:xfrm>
-            <a:off x="8284464" y="5623560"/>
-            <a:ext cx="3227832" cy="822960"/>
+            <a:off x="8284464" y="5349240"/>
+            <a:ext cx="3227832" cy="1097280"/>
           </a:xfrm>
           <a:prstGeom prst="rect">
             <a:avLst/>
@@ -15887,7 +15926,7 @@
                 </a:solidFill>
                 <a:latin typeface="微软雅黑"/>
               </a:rPr>
-              <a:t>· zig 交叉编译成真 Mach-O 二进制</a:t>
+              <a:t>· 这批测试第一版报了 6 项失败</a:t>
             </a:r>
           </a:p>
           <a:p>
@@ -15906,7 +15945,7 @@
                 </a:solidFill>
                 <a:latin typeface="微软雅黑"/>
               </a:rPr>
-              <a:t>· 18 个文件 × 两个架构全通过</a:t>
+              <a:t>· 逐条查下来，6 项全是测试自己写错</a:t>
             </a:r>
           </a:p>
           <a:p>
@@ -15925,7 +15964,26 @@
                 </a:solidFill>
                 <a:latin typeface="微软雅黑"/>
               </a:rPr>
-              <a:t>· 文本层查 selector / 括号 / 声明</a:t>
+              <a:t>· client_core 新加 35 项渲染单测</a:t>
+            </a:r>
+          </a:p>
+          <a:p>
+            <a:pPr algn="l">
+              <a:lnSpc>
+                <a:spcPct val="115000"/>
+              </a:lnSpc>
+              <a:spcAft>
+                <a:spcPts val="300"/>
+              </a:spcAft>
+            </a:pPr>
+            <a:r>
+              <a:rPr sz="1100">
+                <a:solidFill>
+                  <a:srgbClr val="202938"/>
+                </a:solidFill>
+                <a:latin typeface="微软雅黑"/>
+              </a:rPr>
+              <a:t>· 测试失败先怀疑测试，别急着改代码</a:t>
             </a:r>
           </a:p>
         </p:txBody>
@@ -16472,6 +16530,1086 @@
                 </a:solidFill>
                 <a:latin typeface="微软雅黑"/>
               </a:rPr>
+              <a:t>macOS 端：原生 Cocoa 界面 + 如实标注的验证边界</a:t>
+            </a:r>
+          </a:p>
+          <a:p>
+            <a:r>
+              <a:rPr sz="1300">
+                <a:solidFill>
+                  <a:srgbClr val="A9C2E8"/>
+                </a:solidFill>
+                <a:latin typeface="微软雅黑"/>
+              </a:rPr>
+              <a:t>开发机上没有 Mac，所以「能编的都编了、能查的都查了」，但从未真机运行</a:t>
+            </a:r>
+          </a:p>
+        </p:txBody>
+      </p:sp>
+      <p:pic>
+        <p:nvPicPr>
+          <p:cNvPr id="3" name="Picture 2" descr="chart-macos-verify.png"/>
+          <p:cNvPicPr>
+            <a:picLocks noChangeAspect="1"/>
+          </p:cNvPicPr>
+          <p:nvPr/>
+        </p:nvPicPr>
+        <p:blipFill>
+          <a:blip r:embed="rId2"/>
+          <a:stretch>
+            <a:fillRect/>
+          </a:stretch>
+        </p:blipFill>
+        <p:spPr>
+          <a:xfrm>
+            <a:off x="1656079" y="1005840"/>
+            <a:ext cx="8940800" cy="4023360"/>
+          </a:xfrm>
+          <a:prstGeom prst="rect">
+            <a:avLst/>
+          </a:prstGeom>
+        </p:spPr>
+      </p:pic>
+      <p:sp>
+        <p:nvSpPr>
+          <p:cNvPr id="4" name="Rectangle 3"/>
+          <p:cNvSpPr/>
+          <p:nvPr/>
+        </p:nvSpPr>
+        <p:spPr>
+          <a:xfrm>
+            <a:off x="548640" y="5166360"/>
+            <a:ext cx="3657600" cy="1371600"/>
+          </a:xfrm>
+          <a:prstGeom prst="rect">
+            <a:avLst/>
+          </a:prstGeom>
+          <a:solidFill>
+            <a:srgbClr val="E8F1FE"/>
+          </a:solidFill>
+          <a:ln w="15875">
+            <a:solidFill>
+              <a:srgbClr val="1F6FEB"/>
+            </a:solidFill>
+          </a:ln>
+          <a:effectLst/>
+        </p:spPr>
+        <p:style>
+          <a:lnRef idx="1">
+            <a:schemeClr val="accent1"/>
+          </a:lnRef>
+          <a:fillRef idx="3">
+            <a:schemeClr val="accent1"/>
+          </a:fillRef>
+          <a:effectRef idx="2">
+            <a:schemeClr val="accent1"/>
+          </a:effectRef>
+          <a:fontRef idx="minor">
+            <a:schemeClr val="lt1"/>
+          </a:fontRef>
+        </p:style>
+        <p:txBody>
+          <a:bodyPr rtlCol="0" anchor="ctr"/>
+          <a:lstStyle/>
+          <a:p/>
+        </p:txBody>
+      </p:sp>
+      <p:sp>
+        <p:nvSpPr>
+          <p:cNvPr id="5" name="TextBox 4"/>
+          <p:cNvSpPr txBox="1"/>
+          <p:nvPr/>
+        </p:nvSpPr>
+        <p:spPr>
+          <a:xfrm>
+            <a:off x="694944" y="5257800"/>
+            <a:ext cx="3364992" cy="365760"/>
+          </a:xfrm>
+          <a:prstGeom prst="rect">
+            <a:avLst/>
+          </a:prstGeom>
+          <a:noFill/>
+        </p:spPr>
+        <p:txBody>
+          <a:bodyPr wrap="square">
+            <a:spAutoFit/>
+          </a:bodyPr>
+          <a:lstStyle/>
+          <a:p>
+            <a:pPr algn="l">
+              <a:lnSpc>
+                <a:spcPct val="115000"/>
+              </a:lnSpc>
+              <a:spcAft>
+                <a:spcPts val="200"/>
+              </a:spcAft>
+            </a:pPr>
+            <a:r>
+              <a:rPr sz="1300">
+                <a:solidFill>
+                  <a:srgbClr val="1F6FEB"/>
+                </a:solidFill>
+                <a:latin typeface="微软雅黑"/>
+              </a:rPr>
+              <a:t>为 macOS 改了什么</a:t>
+            </a:r>
+          </a:p>
+        </p:txBody>
+      </p:sp>
+      <p:sp>
+        <p:nvSpPr>
+          <p:cNvPr id="6" name="TextBox 5"/>
+          <p:cNvSpPr txBox="1"/>
+          <p:nvPr/>
+        </p:nvSpPr>
+        <p:spPr>
+          <a:xfrm>
+            <a:off x="694944" y="5623560"/>
+            <a:ext cx="3364992" cy="822960"/>
+          </a:xfrm>
+          <a:prstGeom prst="rect">
+            <a:avLst/>
+          </a:prstGeom>
+          <a:noFill/>
+        </p:spPr>
+        <p:txBody>
+          <a:bodyPr wrap="square">
+            <a:spAutoFit/>
+          </a:bodyPr>
+          <a:lstStyle/>
+          <a:p>
+            <a:pPr algn="l">
+              <a:lnSpc>
+                <a:spcPct val="115000"/>
+              </a:lnSpc>
+              <a:spcAft>
+                <a:spcPts val="300"/>
+              </a:spcAft>
+            </a:pPr>
+            <a:r>
+              <a:rPr sz="1100">
+                <a:solidFill>
+                  <a:srgbClr val="202938"/>
+                </a:solidFill>
+                <a:latin typeface="微软雅黑"/>
+              </a:rPr>
+              <a:t>· 没有 MSG_NOSIGNAL → 用 SO_NOSIGPIPE</a:t>
+            </a:r>
+          </a:p>
+          <a:p>
+            <a:pPr algn="l">
+              <a:lnSpc>
+                <a:spcPct val="115000"/>
+              </a:lnSpc>
+              <a:spcAft>
+                <a:spcPts val="300"/>
+              </a:spcAft>
+            </a:pPr>
+            <a:r>
+              <a:rPr sz="1100">
+                <a:solidFill>
+                  <a:srgbClr val="202938"/>
+                </a:solidFill>
+                <a:latin typeface="微软雅黑"/>
+              </a:rPr>
+              <a:t>· TCP_KEEPIDLE 改叫 TCP_KEEPALIVE</a:t>
+            </a:r>
+          </a:p>
+          <a:p>
+            <a:pPr algn="l">
+              <a:lnSpc>
+                <a:spcPct val="115000"/>
+              </a:lnSpc>
+              <a:spcAft>
+                <a:spcPts val="300"/>
+              </a:spcAft>
+            </a:pPr>
+            <a:r>
+              <a:rPr sz="1100">
+                <a:solidFill>
+                  <a:srgbClr val="202938"/>
+                </a:solidFill>
+                <a:latin typeface="微软雅黑"/>
+              </a:rPr>
+              <a:t>· htons 是宏：加了 :: 反而编不过</a:t>
+            </a:r>
+          </a:p>
+        </p:txBody>
+      </p:sp>
+      <p:sp>
+        <p:nvSpPr>
+          <p:cNvPr id="7" name="Rectangle 6"/>
+          <p:cNvSpPr/>
+          <p:nvPr/>
+        </p:nvSpPr>
+        <p:spPr>
+          <a:xfrm>
+            <a:off x="4343400" y="5166360"/>
+            <a:ext cx="3657600" cy="1371600"/>
+          </a:xfrm>
+          <a:prstGeom prst="rect">
+            <a:avLst/>
+          </a:prstGeom>
+          <a:solidFill>
+            <a:srgbClr val="E6F6EE"/>
+          </a:solidFill>
+          <a:ln w="15875">
+            <a:solidFill>
+              <a:srgbClr val="168A57"/>
+            </a:solidFill>
+          </a:ln>
+          <a:effectLst/>
+        </p:spPr>
+        <p:style>
+          <a:lnRef idx="1">
+            <a:schemeClr val="accent1"/>
+          </a:lnRef>
+          <a:fillRef idx="3">
+            <a:schemeClr val="accent1"/>
+          </a:fillRef>
+          <a:effectRef idx="2">
+            <a:schemeClr val="accent1"/>
+          </a:effectRef>
+          <a:fontRef idx="minor">
+            <a:schemeClr val="lt1"/>
+          </a:fontRef>
+        </p:style>
+        <p:txBody>
+          <a:bodyPr rtlCol="0" anchor="ctr"/>
+          <a:lstStyle/>
+          <a:p/>
+        </p:txBody>
+      </p:sp>
+      <p:sp>
+        <p:nvSpPr>
+          <p:cNvPr id="8" name="TextBox 7"/>
+          <p:cNvSpPr txBox="1"/>
+          <p:nvPr/>
+        </p:nvSpPr>
+        <p:spPr>
+          <a:xfrm>
+            <a:off x="4489704" y="5257800"/>
+            <a:ext cx="3364992" cy="365760"/>
+          </a:xfrm>
+          <a:prstGeom prst="rect">
+            <a:avLst/>
+          </a:prstGeom>
+          <a:noFill/>
+        </p:spPr>
+        <p:txBody>
+          <a:bodyPr wrap="square">
+            <a:spAutoFit/>
+          </a:bodyPr>
+          <a:lstStyle/>
+          <a:p>
+            <a:pPr algn="l">
+              <a:lnSpc>
+                <a:spcPct val="115000"/>
+              </a:lnSpc>
+              <a:spcAft>
+                <a:spcPts val="200"/>
+              </a:spcAft>
+            </a:pPr>
+            <a:r>
+              <a:rPr sz="1300">
+                <a:solidFill>
+                  <a:srgbClr val="168A57"/>
+                </a:solidFill>
+                <a:latin typeface="微软雅黑"/>
+              </a:rPr>
+              <a:t>客户端分了层</a:t>
+            </a:r>
+          </a:p>
+        </p:txBody>
+      </p:sp>
+      <p:sp>
+        <p:nvSpPr>
+          <p:cNvPr id="9" name="TextBox 8"/>
+          <p:cNvSpPr txBox="1"/>
+          <p:nvPr/>
+        </p:nvSpPr>
+        <p:spPr>
+          <a:xfrm>
+            <a:off x="4489704" y="5623560"/>
+            <a:ext cx="3364992" cy="822960"/>
+          </a:xfrm>
+          <a:prstGeom prst="rect">
+            <a:avLst/>
+          </a:prstGeom>
+          <a:noFill/>
+        </p:spPr>
+        <p:txBody>
+          <a:bodyPr wrap="square">
+            <a:spAutoFit/>
+          </a:bodyPr>
+          <a:lstStyle/>
+          <a:p>
+            <a:pPr algn="l">
+              <a:lnSpc>
+                <a:spcPct val="115000"/>
+              </a:lnSpc>
+              <a:spcAft>
+                <a:spcPts val="300"/>
+              </a:spcAft>
+            </a:pPr>
+            <a:r>
+              <a:rPr sz="1100">
+                <a:solidFill>
+                  <a:srgbClr val="202938"/>
+                </a:solidFill>
+                <a:latin typeface="微软雅黑"/>
+              </a:rPr>
+              <a:t>· client_core/ 可移植核心：网络/信任/附件/颜色/语音/会话逻辑</a:t>
+            </a:r>
+          </a:p>
+          <a:p>
+            <a:pPr algn="l">
+              <a:lnSpc>
+                <a:spcPct val="115000"/>
+              </a:lnSpc>
+              <a:spcAft>
+                <a:spcPts val="300"/>
+              </a:spcAft>
+            </a:pPr>
+            <a:r>
+              <a:rPr sz="1100">
+                <a:solidFill>
+                  <a:srgbClr val="202938"/>
+                </a:solidFill>
+                <a:latin typeface="微软雅黑"/>
+              </a:rPr>
+              <a:t>· linux/client/ 与 macos/main.mm 只剩界面</a:t>
+            </a:r>
+          </a:p>
+          <a:p>
+            <a:pPr algn="l">
+              <a:lnSpc>
+                <a:spcPct val="115000"/>
+              </a:lnSpc>
+              <a:spcAft>
+                <a:spcPts val="300"/>
+              </a:spcAft>
+            </a:pPr>
+            <a:r>
+              <a:rPr sz="1100">
+                <a:solidFill>
+                  <a:srgbClr val="202938"/>
+                </a:solidFill>
+                <a:latin typeface="微软雅黑"/>
+              </a:rPr>
+              <a:t>· 界面能编不了也不怕：逻辑都在能验证的核心层</a:t>
+            </a:r>
+          </a:p>
+        </p:txBody>
+      </p:sp>
+      <p:sp>
+        <p:nvSpPr>
+          <p:cNvPr id="10" name="Rectangle 9"/>
+          <p:cNvSpPr/>
+          <p:nvPr/>
+        </p:nvSpPr>
+        <p:spPr>
+          <a:xfrm>
+            <a:off x="8138160" y="5166360"/>
+            <a:ext cx="3520440" cy="1371600"/>
+          </a:xfrm>
+          <a:prstGeom prst="rect">
+            <a:avLst/>
+          </a:prstGeom>
+          <a:solidFill>
+            <a:srgbClr val="FDF4E2"/>
+          </a:solidFill>
+          <a:ln w="15875">
+            <a:solidFill>
+              <a:srgbClr val="B06C0C"/>
+            </a:solidFill>
+          </a:ln>
+          <a:effectLst/>
+        </p:spPr>
+        <p:style>
+          <a:lnRef idx="1">
+            <a:schemeClr val="accent1"/>
+          </a:lnRef>
+          <a:fillRef idx="3">
+            <a:schemeClr val="accent1"/>
+          </a:fillRef>
+          <a:effectRef idx="2">
+            <a:schemeClr val="accent1"/>
+          </a:effectRef>
+          <a:fontRef idx="minor">
+            <a:schemeClr val="lt1"/>
+          </a:fontRef>
+        </p:style>
+        <p:txBody>
+          <a:bodyPr rtlCol="0" anchor="ctr"/>
+          <a:lstStyle/>
+          <a:p/>
+        </p:txBody>
+      </p:sp>
+      <p:sp>
+        <p:nvSpPr>
+          <p:cNvPr id="11" name="TextBox 10"/>
+          <p:cNvSpPr txBox="1"/>
+          <p:nvPr/>
+        </p:nvSpPr>
+        <p:spPr>
+          <a:xfrm>
+            <a:off x="8284464" y="5257800"/>
+            <a:ext cx="3227832" cy="365760"/>
+          </a:xfrm>
+          <a:prstGeom prst="rect">
+            <a:avLst/>
+          </a:prstGeom>
+          <a:noFill/>
+        </p:spPr>
+        <p:txBody>
+          <a:bodyPr wrap="square">
+            <a:spAutoFit/>
+          </a:bodyPr>
+          <a:lstStyle/>
+          <a:p>
+            <a:pPr algn="l">
+              <a:lnSpc>
+                <a:spcPct val="115000"/>
+              </a:lnSpc>
+              <a:spcAft>
+                <a:spcPts val="200"/>
+              </a:spcAft>
+            </a:pPr>
+            <a:r>
+              <a:rPr sz="1300">
+                <a:solidFill>
+                  <a:srgbClr val="B06C0C"/>
+                </a:solidFill>
+                <a:latin typeface="微软雅黑"/>
+              </a:rPr>
+              <a:t>怎么在没有 Mac 时查错</a:t>
+            </a:r>
+          </a:p>
+        </p:txBody>
+      </p:sp>
+      <p:sp>
+        <p:nvSpPr>
+          <p:cNvPr id="12" name="TextBox 11"/>
+          <p:cNvSpPr txBox="1"/>
+          <p:nvPr/>
+        </p:nvSpPr>
+        <p:spPr>
+          <a:xfrm>
+            <a:off x="8284464" y="5623560"/>
+            <a:ext cx="3227832" cy="822960"/>
+          </a:xfrm>
+          <a:prstGeom prst="rect">
+            <a:avLst/>
+          </a:prstGeom>
+          <a:noFill/>
+        </p:spPr>
+        <p:txBody>
+          <a:bodyPr wrap="square">
+            <a:spAutoFit/>
+          </a:bodyPr>
+          <a:lstStyle/>
+          <a:p>
+            <a:pPr algn="l">
+              <a:lnSpc>
+                <a:spcPct val="115000"/>
+              </a:lnSpc>
+              <a:spcAft>
+                <a:spcPts val="300"/>
+              </a:spcAft>
+            </a:pPr>
+            <a:r>
+              <a:rPr sz="1100">
+                <a:solidFill>
+                  <a:srgbClr val="202938"/>
+                </a:solidFill>
+                <a:latin typeface="微软雅黑"/>
+              </a:rPr>
+              <a:t>· zig 交叉编译成真 Mach-O 二进制</a:t>
+            </a:r>
+          </a:p>
+          <a:p>
+            <a:pPr algn="l">
+              <a:lnSpc>
+                <a:spcPct val="115000"/>
+              </a:lnSpc>
+              <a:spcAft>
+                <a:spcPts val="300"/>
+              </a:spcAft>
+            </a:pPr>
+            <a:r>
+              <a:rPr sz="1100">
+                <a:solidFill>
+                  <a:srgbClr val="202938"/>
+                </a:solidFill>
+                <a:latin typeface="微软雅黑"/>
+              </a:rPr>
+              <a:t>· 18 个文件 × 两个架构全通过</a:t>
+            </a:r>
+          </a:p>
+          <a:p>
+            <a:pPr algn="l">
+              <a:lnSpc>
+                <a:spcPct val="115000"/>
+              </a:lnSpc>
+              <a:spcAft>
+                <a:spcPts val="300"/>
+              </a:spcAft>
+            </a:pPr>
+            <a:r>
+              <a:rPr sz="1100">
+                <a:solidFill>
+                  <a:srgbClr val="202938"/>
+                </a:solidFill>
+                <a:latin typeface="微软雅黑"/>
+              </a:rPr>
+              <a:t>· 文本层查 selector / 括号 / 声明</a:t>
+            </a:r>
+          </a:p>
+        </p:txBody>
+      </p:sp>
+    </p:spTree>
+  </p:cSld>
+  <p:clrMapOvr>
+    <a:masterClrMapping/>
+  </p:clrMapOvr>
+  <mc:AlternateContent xmlns:mc="http://schemas.openxmlformats.org/markup-compatibility/2006">
+    <mc:Choice xmlns:p14="http://schemas.microsoft.com/office/powerpoint/2010/main" Requires="p14">
+      <p:transition spd="med" p14:dur="500">
+        <p:fade/>
+      </p:transition>
+    </mc:Choice>
+    <mc:Fallback>
+      <p:transition spd="med">
+        <p:fade/>
+      </p:transition>
+    </mc:Fallback>
+  </mc:AlternateContent>
+  <p:timing>
+    <p:tnLst>
+      <p:par>
+        <p:cTn id="1" dur="indefinite" restart="never" nodeType="tmRoot">
+          <p:childTnLst>
+            <p:seq concurrent="1" nextAc="seek">
+              <p:cTn id="2" dur="indefinite" nodeType="mainSeq">
+                <p:childTnLst>
+                  <p:par>
+                    <p:cTn id="2" fill="hold">
+                      <p:stCondLst>
+                        <p:cond delay="indefinite"/>
+                      </p:stCondLst>
+                      <p:childTnLst>
+                        <p:par>
+                          <p:cTn id="3" fill="hold">
+                            <p:stCondLst>
+                              <p:cond delay="0"/>
+                            </p:stCondLst>
+                            <p:childTnLst>
+                              <p:par>
+                                <p:cTn id="4" presetID="10" presetClass="entr" presetSubtype="0" fill="hold" grpId="0" nodeType="clickEffect">
+                                  <p:stCondLst>
+                                    <p:cond delay="0"/>
+                                  </p:stCondLst>
+                                  <p:childTnLst>
+                                    <p:set>
+                                      <p:cBhvr>
+                                        <p:cTn id="5" dur="1" fill="hold">
+                                          <p:stCondLst>
+                                            <p:cond delay="0"/>
+                                          </p:stCondLst>
+                                        </p:cTn>
+                                        <p:tgtEl>
+                                          <p:spTgt spid="2"/>
+                                        </p:tgtEl>
+                                        <p:attrNameLst>
+                                          <p:attrName>style.visibility</p:attrName>
+                                        </p:attrNameLst>
+                                      </p:cBhvr>
+                                      <p:to>
+                                        <p:strVal val="visible"/>
+                                      </p:to>
+                                    </p:set>
+                                    <p:animEffect transition="in" filter="fade">
+                                      <p:cBhvr>
+                                        <p:cTn id="6" dur="400"/>
+                                        <p:tgtEl>
+                                          <p:spTgt spid="2"/>
+                                        </p:tgtEl>
+                                      </p:cBhvr>
+                                    </p:animEffect>
+                                  </p:childTnLst>
+                                </p:cTn>
+                              </p:par>
+                            </p:childTnLst>
+                          </p:cTn>
+                        </p:par>
+                      </p:childTnLst>
+                    </p:cTn>
+                  </p:par>
+                  <p:par>
+                    <p:cTn id="7" fill="hold">
+                      <p:stCondLst>
+                        <p:cond delay="indefinite"/>
+                      </p:stCondLst>
+                      <p:childTnLst>
+                        <p:par>
+                          <p:cTn id="8" fill="hold">
+                            <p:stCondLst>
+                              <p:cond delay="0"/>
+                            </p:stCondLst>
+                            <p:childTnLst>
+                              <p:par>
+                                <p:cTn id="9" presetID="10" presetClass="entr" presetSubtype="0" fill="hold" grpId="0" nodeType="clickEffect">
+                                  <p:stCondLst>
+                                    <p:cond delay="0"/>
+                                  </p:stCondLst>
+                                  <p:childTnLst>
+                                    <p:set>
+                                      <p:cBhvr>
+                                        <p:cTn id="10" dur="1" fill="hold">
+                                          <p:stCondLst>
+                                            <p:cond delay="0"/>
+                                          </p:stCondLst>
+                                        </p:cTn>
+                                        <p:tgtEl>
+                                          <p:spTgt spid="3"/>
+                                        </p:tgtEl>
+                                        <p:attrNameLst>
+                                          <p:attrName>style.visibility</p:attrName>
+                                        </p:attrNameLst>
+                                      </p:cBhvr>
+                                      <p:to>
+                                        <p:strVal val="visible"/>
+                                      </p:to>
+                                    </p:set>
+                                    <p:animEffect transition="in" filter="fade">
+                                      <p:cBhvr>
+                                        <p:cTn id="11" dur="400"/>
+                                        <p:tgtEl>
+                                          <p:spTgt spid="3"/>
+                                        </p:tgtEl>
+                                      </p:cBhvr>
+                                    </p:animEffect>
+                                  </p:childTnLst>
+                                </p:cTn>
+                              </p:par>
+                            </p:childTnLst>
+                          </p:cTn>
+                        </p:par>
+                      </p:childTnLst>
+                    </p:cTn>
+                  </p:par>
+                  <p:par>
+                    <p:cTn id="12" fill="hold">
+                      <p:stCondLst>
+                        <p:cond delay="indefinite"/>
+                      </p:stCondLst>
+                      <p:childTnLst>
+                        <p:par>
+                          <p:cTn id="13" fill="hold">
+                            <p:stCondLst>
+                              <p:cond delay="0"/>
+                            </p:stCondLst>
+                            <p:childTnLst>
+                              <p:par>
+                                <p:cTn id="14" presetID="10" presetClass="entr" presetSubtype="0" fill="hold" grpId="0" nodeType="clickEffect">
+                                  <p:stCondLst>
+                                    <p:cond delay="0"/>
+                                  </p:stCondLst>
+                                  <p:childTnLst>
+                                    <p:set>
+                                      <p:cBhvr>
+                                        <p:cTn id="15" dur="1" fill="hold">
+                                          <p:stCondLst>
+                                            <p:cond delay="0"/>
+                                          </p:stCondLst>
+                                        </p:cTn>
+                                        <p:tgtEl>
+                                          <p:spTgt spid="5"/>
+                                        </p:tgtEl>
+                                        <p:attrNameLst>
+                                          <p:attrName>style.visibility</p:attrName>
+                                        </p:attrNameLst>
+                                      </p:cBhvr>
+                                      <p:to>
+                                        <p:strVal val="visible"/>
+                                      </p:to>
+                                    </p:set>
+                                    <p:animEffect transition="in" filter="fade">
+                                      <p:cBhvr>
+                                        <p:cTn id="16" dur="400"/>
+                                        <p:tgtEl>
+                                          <p:spTgt spid="5"/>
+                                        </p:tgtEl>
+                                      </p:cBhvr>
+                                    </p:animEffect>
+                                  </p:childTnLst>
+                                </p:cTn>
+                              </p:par>
+                            </p:childTnLst>
+                          </p:cTn>
+                        </p:par>
+                      </p:childTnLst>
+                    </p:cTn>
+                  </p:par>
+                  <p:par>
+                    <p:cTn id="17" fill="hold">
+                      <p:stCondLst>
+                        <p:cond delay="indefinite"/>
+                      </p:stCondLst>
+                      <p:childTnLst>
+                        <p:par>
+                          <p:cTn id="18" fill="hold">
+                            <p:stCondLst>
+                              <p:cond delay="0"/>
+                            </p:stCondLst>
+                            <p:childTnLst>
+                              <p:par>
+                                <p:cTn id="19" presetID="10" presetClass="entr" presetSubtype="0" fill="hold" grpId="0" nodeType="clickEffect">
+                                  <p:stCondLst>
+                                    <p:cond delay="0"/>
+                                  </p:stCondLst>
+                                  <p:childTnLst>
+                                    <p:set>
+                                      <p:cBhvr>
+                                        <p:cTn id="20" dur="1" fill="hold">
+                                          <p:stCondLst>
+                                            <p:cond delay="0"/>
+                                          </p:stCondLst>
+                                        </p:cTn>
+                                        <p:tgtEl>
+                                          <p:spTgt spid="6"/>
+                                        </p:tgtEl>
+                                        <p:attrNameLst>
+                                          <p:attrName>style.visibility</p:attrName>
+                                        </p:attrNameLst>
+                                      </p:cBhvr>
+                                      <p:to>
+                                        <p:strVal val="visible"/>
+                                      </p:to>
+                                    </p:set>
+                                    <p:animEffect transition="in" filter="fade">
+                                      <p:cBhvr>
+                                        <p:cTn id="21" dur="400"/>
+                                        <p:tgtEl>
+                                          <p:spTgt spid="6"/>
+                                        </p:tgtEl>
+                                      </p:cBhvr>
+                                    </p:animEffect>
+                                  </p:childTnLst>
+                                </p:cTn>
+                              </p:par>
+                            </p:childTnLst>
+                          </p:cTn>
+                        </p:par>
+                      </p:childTnLst>
+                    </p:cTn>
+                  </p:par>
+                  <p:par>
+                    <p:cTn id="22" fill="hold">
+                      <p:stCondLst>
+                        <p:cond delay="indefinite"/>
+                      </p:stCondLst>
+                      <p:childTnLst>
+                        <p:par>
+                          <p:cTn id="23" fill="hold">
+                            <p:stCondLst>
+                              <p:cond delay="0"/>
+                            </p:stCondLst>
+                            <p:childTnLst>
+                              <p:par>
+                                <p:cTn id="24" presetID="10" presetClass="entr" presetSubtype="0" fill="hold" grpId="0" nodeType="clickEffect">
+                                  <p:stCondLst>
+                                    <p:cond delay="0"/>
+                                  </p:stCondLst>
+                                  <p:childTnLst>
+                                    <p:set>
+                                      <p:cBhvr>
+                                        <p:cTn id="25" dur="1" fill="hold">
+                                          <p:stCondLst>
+                                            <p:cond delay="0"/>
+                                          </p:stCondLst>
+                                        </p:cTn>
+                                        <p:tgtEl>
+                                          <p:spTgt spid="8"/>
+                                        </p:tgtEl>
+                                        <p:attrNameLst>
+                                          <p:attrName>style.visibility</p:attrName>
+                                        </p:attrNameLst>
+                                      </p:cBhvr>
+                                      <p:to>
+                                        <p:strVal val="visible"/>
+                                      </p:to>
+                                    </p:set>
+                                    <p:animEffect transition="in" filter="fade">
+                                      <p:cBhvr>
+                                        <p:cTn id="26" dur="400"/>
+                                        <p:tgtEl>
+                                          <p:spTgt spid="8"/>
+                                        </p:tgtEl>
+                                      </p:cBhvr>
+                                    </p:animEffect>
+                                  </p:childTnLst>
+                                </p:cTn>
+                              </p:par>
+                            </p:childTnLst>
+                          </p:cTn>
+                        </p:par>
+                      </p:childTnLst>
+                    </p:cTn>
+                  </p:par>
+                  <p:par>
+                    <p:cTn id="27" fill="hold">
+                      <p:stCondLst>
+                        <p:cond delay="indefinite"/>
+                      </p:stCondLst>
+                      <p:childTnLst>
+                        <p:par>
+                          <p:cTn id="28" fill="hold">
+                            <p:stCondLst>
+                              <p:cond delay="0"/>
+                            </p:stCondLst>
+                            <p:childTnLst>
+                              <p:par>
+                                <p:cTn id="29" presetID="10" presetClass="entr" presetSubtype="0" fill="hold" grpId="0" nodeType="clickEffect">
+                                  <p:stCondLst>
+                                    <p:cond delay="0"/>
+                                  </p:stCondLst>
+                                  <p:childTnLst>
+                                    <p:set>
+                                      <p:cBhvr>
+                                        <p:cTn id="30" dur="1" fill="hold">
+                                          <p:stCondLst>
+                                            <p:cond delay="0"/>
+                                          </p:stCondLst>
+                                        </p:cTn>
+                                        <p:tgtEl>
+                                          <p:spTgt spid="9"/>
+                                        </p:tgtEl>
+                                        <p:attrNameLst>
+                                          <p:attrName>style.visibility</p:attrName>
+                                        </p:attrNameLst>
+                                      </p:cBhvr>
+                                      <p:to>
+                                        <p:strVal val="visible"/>
+                                      </p:to>
+                                    </p:set>
+                                    <p:animEffect transition="in" filter="fade">
+                                      <p:cBhvr>
+                                        <p:cTn id="31" dur="400"/>
+                                        <p:tgtEl>
+                                          <p:spTgt spid="9"/>
+                                        </p:tgtEl>
+                                      </p:cBhvr>
+                                    </p:animEffect>
+                                  </p:childTnLst>
+                                </p:cTn>
+                              </p:par>
+                            </p:childTnLst>
+                          </p:cTn>
+                        </p:par>
+                      </p:childTnLst>
+                    </p:cTn>
+                  </p:par>
+                  <p:par>
+                    <p:cTn id="32" fill="hold">
+                      <p:stCondLst>
+                        <p:cond delay="indefinite"/>
+                      </p:stCondLst>
+                      <p:childTnLst>
+                        <p:par>
+                          <p:cTn id="33" fill="hold">
+                            <p:stCondLst>
+                              <p:cond delay="0"/>
+                            </p:stCondLst>
+                            <p:childTnLst>
+                              <p:par>
+                                <p:cTn id="34" presetID="10" presetClass="entr" presetSubtype="0" fill="hold" grpId="0" nodeType="clickEffect">
+                                  <p:stCondLst>
+                                    <p:cond delay="0"/>
+                                  </p:stCondLst>
+                                  <p:childTnLst>
+                                    <p:set>
+                                      <p:cBhvr>
+                                        <p:cTn id="35" dur="1" fill="hold">
+                                          <p:stCondLst>
+                                            <p:cond delay="0"/>
+                                          </p:stCondLst>
+                                        </p:cTn>
+                                        <p:tgtEl>
+                                          <p:spTgt spid="11"/>
+                                        </p:tgtEl>
+                                        <p:attrNameLst>
+                                          <p:attrName>style.visibility</p:attrName>
+                                        </p:attrNameLst>
+                                      </p:cBhvr>
+                                      <p:to>
+                                        <p:strVal val="visible"/>
+                                      </p:to>
+                                    </p:set>
+                                    <p:animEffect transition="in" filter="fade">
+                                      <p:cBhvr>
+                                        <p:cTn id="36" dur="400"/>
+                                        <p:tgtEl>
+                                          <p:spTgt spid="11"/>
+                                        </p:tgtEl>
+                                      </p:cBhvr>
+                                    </p:animEffect>
+                                  </p:childTnLst>
+                                </p:cTn>
+                              </p:par>
+                            </p:childTnLst>
+                          </p:cTn>
+                        </p:par>
+                      </p:childTnLst>
+                    </p:cTn>
+                  </p:par>
+                  <p:par>
+                    <p:cTn id="37" fill="hold">
+                      <p:stCondLst>
+                        <p:cond delay="indefinite"/>
+                      </p:stCondLst>
+                      <p:childTnLst>
+                        <p:par>
+                          <p:cTn id="38" fill="hold">
+                            <p:stCondLst>
+                              <p:cond delay="0"/>
+                            </p:stCondLst>
+                            <p:childTnLst>
+                              <p:par>
+                                <p:cTn id="39" presetID="10" presetClass="entr" presetSubtype="0" fill="hold" grpId="0" nodeType="clickEffect">
+                                  <p:stCondLst>
+                                    <p:cond delay="0"/>
+                                  </p:stCondLst>
+                                  <p:childTnLst>
+                                    <p:set>
+                                      <p:cBhvr>
+                                        <p:cTn id="40" dur="1" fill="hold">
+                                          <p:stCondLst>
+                                            <p:cond delay="0"/>
+                                          </p:stCondLst>
+                                        </p:cTn>
+                                        <p:tgtEl>
+                                          <p:spTgt spid="12"/>
+                                        </p:tgtEl>
+                                        <p:attrNameLst>
+                                          <p:attrName>style.visibility</p:attrName>
+                                        </p:attrNameLst>
+                                      </p:cBhvr>
+                                      <p:to>
+                                        <p:strVal val="visible"/>
+                                      </p:to>
+                                    </p:set>
+                                    <p:animEffect transition="in" filter="fade">
+                                      <p:cBhvr>
+                                        <p:cTn id="41" dur="400"/>
+                                        <p:tgtEl>
+                                          <p:spTgt spid="12"/>
+                                        </p:tgtEl>
+                                      </p:cBhvr>
+                                    </p:animEffect>
+                                  </p:childTnLst>
+                                </p:cTn>
+                              </p:par>
+                            </p:childTnLst>
+                          </p:cTn>
+                        </p:par>
+                      </p:childTnLst>
+                    </p:cTn>
+                  </p:par>
+                </p:childTnLst>
+              </p:cTn>
+              <p:prevCondLst>
+                <p:cond evt="onPrev" delay="0">
+                  <p:tgtEl>
+                    <p:sldTgt/>
+                  </p:tgtEl>
+                </p:cond>
+              </p:prevCondLst>
+              <p:nextCondLst>
+                <p:cond evt="onNext" delay="0">
+                  <p:tgtEl>
+                    <p:sldTgt/>
+                  </p:tgtEl>
+                </p:cond>
+              </p:nextCondLst>
+            </p:seq>
+          </p:childTnLst>
+        </p:cTn>
+      </p:par>
+    </p:tnLst>
+    <p:bldLst>
+      <p:bldP spid="2" grpId="0"/>
+      <p:bldP spid="3" grpId="0"/>
+      <p:bldP spid="5" grpId="0"/>
+      <p:bldP spid="6" grpId="0"/>
+      <p:bldP spid="8" grpId="0"/>
+      <p:bldP spid="9" grpId="0"/>
+      <p:bldP spid="11" grpId="0"/>
+      <p:bldP spid="12" grpId="0"/>
+    </p:bldLst>
+  </p:timing>
+</p:sld>
+</file>
+
+<file path=ppt/slides/slide22.xml><?xml version="1.0" encoding="utf-8"?>
+<p:sld xmlns:a="http://schemas.openxmlformats.org/drawingml/2006/main" xmlns:p="http://schemas.openxmlformats.org/presentationml/2006/main" xmlns:r="http://schemas.openxmlformats.org/officeDocument/2006/relationships">
+  <p:cSld>
+    <p:spTree>
+      <p:nvGrpSpPr>
+        <p:cNvPr id="1" name=""/>
+        <p:cNvGrpSpPr/>
+        <p:nvPr/>
+      </p:nvGrpSpPr>
+      <p:grpSpPr/>
+      <p:sp>
+        <p:nvSpPr>
+          <p:cNvPr id="2" name="Rectangle 1"/>
+          <p:cNvSpPr/>
+          <p:nvPr/>
+        </p:nvSpPr>
+        <p:spPr>
+          <a:xfrm>
+            <a:off x="0" y="0"/>
+            <a:ext cx="12191695" cy="932688"/>
+          </a:xfrm>
+          <a:prstGeom prst="rect">
+            <a:avLst/>
+          </a:prstGeom>
+          <a:solidFill>
+            <a:srgbClr val="16284A"/>
+          </a:solidFill>
+          <a:ln>
+            <a:noFill/>
+          </a:ln>
+          <a:effectLst/>
+        </p:spPr>
+        <p:style>
+          <a:lnRef idx="1">
+            <a:schemeClr val="accent1"/>
+          </a:lnRef>
+          <a:fillRef idx="3">
+            <a:schemeClr val="accent1"/>
+          </a:fillRef>
+          <a:effectRef idx="2">
+            <a:schemeClr val="accent1"/>
+          </a:effectRef>
+          <a:fontRef idx="minor">
+            <a:schemeClr val="lt1"/>
+          </a:fontRef>
+        </p:style>
+        <p:txBody>
+          <a:bodyPr rtlCol="0" anchor="ctr" lIns="411480" tIns="91440"/>
+          <a:lstStyle/>
+          <a:p>
+            <a:pPr algn="ctr"/>
+            <a:r>
+              <a:rPr sz="2800" b="1">
+                <a:solidFill>
+                  <a:srgbClr val="FFFFFF"/>
+                </a:solidFill>
+                <a:latin typeface="微软雅黑"/>
+              </a:rPr>
               <a:t>几个真实的 bug（和它们为什么难查）</a:t>
             </a:r>
           </a:p>
@@ -17052,7 +18190,7 @@
 </p:sld>
 </file>
 
-<file path=ppt/slides/slide22.xml><?xml version="1.0" encoding="utf-8"?>
+<file path=ppt/slides/slide23.xml><?xml version="1.0" encoding="utf-8"?>
 <p:sld xmlns:a="http://schemas.openxmlformats.org/drawingml/2006/main" xmlns:p="http://schemas.openxmlformats.org/presentationml/2006/main" xmlns:r="http://schemas.openxmlformats.org/officeDocument/2006/relationships">
   <p:cSld>
     <p:spTree>
@@ -18461,7 +19599,7 @@
 </p:sld>
 </file>
 
-<file path=ppt/slides/slide23.xml><?xml version="1.0" encoding="utf-8"?>
+<file path=ppt/slides/slide24.xml><?xml version="1.0" encoding="utf-8"?>
 <p:sld xmlns:a="http://schemas.openxmlformats.org/drawingml/2006/main" xmlns:p="http://schemas.openxmlformats.org/presentationml/2006/main" xmlns:r="http://schemas.openxmlformats.org/officeDocument/2006/relationships">
   <p:cSld>
     <p:spTree>
@@ -19262,7 +20400,7 @@
 </p:sld>
 </file>
 
-<file path=ppt/slides/slide24.xml><?xml version="1.0" encoding="utf-8"?>
+<file path=ppt/slides/slide25.xml><?xml version="1.0" encoding="utf-8"?>
 <p:sld xmlns:a="http://schemas.openxmlformats.org/drawingml/2006/main" xmlns:p="http://schemas.openxmlformats.org/presentationml/2006/main" xmlns:r="http://schemas.openxmlformats.org/officeDocument/2006/relationships">
   <p:cSld>
     <p:spTree>
@@ -19785,7 +20923,7 @@
 </p:sld>
 </file>
 
-<file path=ppt/slides/slide25.xml><?xml version="1.0" encoding="utf-8"?>
+<file path=ppt/slides/slide26.xml><?xml version="1.0" encoding="utf-8"?>
 <p:sld xmlns:a="http://schemas.openxmlformats.org/drawingml/2006/main" xmlns:p="http://schemas.openxmlformats.org/presentationml/2006/main" xmlns:r="http://schemas.openxmlformats.org/officeDocument/2006/relationships">
   <p:cSld>
     <p:spTree>

--- a/dchat-项目介绍.pptx
+++ b/dchat-项目介绍.pptx
@@ -31,6 +31,7 @@
     <p:sldId id="279" r:id="rId30"/>
     <p:sldId id="280" r:id="rId31"/>
     <p:sldId id="281" r:id="rId32"/>
+    <p:sldId id="282" r:id="rId33"/>
   </p:sldIdLst>
   <p:sldSz cx="12191695" cy="6858000" type="screen4x3"/>
   <p:notesSz cx="6858000" cy="9144000"/>
@@ -15760,7 +15761,7 @@
                 </a:solidFill>
                 <a:latin typeface="微软雅黑"/>
               </a:rPr>
-              <a:t>· 24 项：收发 / Tab 补全 / 色码 / 退格删中文</a:t>
+              <a:t>· 35 项：收发 / 补全 / 色码 / 退格删中文</a:t>
             </a:r>
           </a:p>
           <a:p>
@@ -15779,7 +15780,7 @@
                 </a:solidFill>
                 <a:latin typeface="微软雅黑"/>
               </a:rPr>
-              <a:t>· 还覆盖 Ctrl+U、↑ 翻历史、/clear、/quit</a:t>
+              <a:t>· 还有附件（下载内容逐字节核对）与语音</a:t>
             </a:r>
           </a:p>
           <a:p>
@@ -16530,7 +16531,7 @@
                 </a:solidFill>
                 <a:latin typeface="微软雅黑"/>
               </a:rPr>
-              <a:t>macOS 端：原生 Cocoa 界面 + 如实标注的验证边界</a:t>
+              <a:t>四端互通：实测通过</a:t>
             </a:r>
           </a:p>
           <a:p>
@@ -16541,14 +16542,14 @@
                 </a:solidFill>
                 <a:latin typeface="微软雅黑"/>
               </a:rPr>
-              <a:t>开发机上没有 Mac，所以「能编的都编了、能查的都查了」，但从未真机运行</a:t>
+              <a:t>Windows · Linux · macOS · Android 同一个服务器，互相都能看到消息</a:t>
             </a:r>
           </a:p>
         </p:txBody>
       </p:sp>
       <p:pic>
         <p:nvPicPr>
-          <p:cNvPr id="3" name="Picture 2" descr="chart-macos-verify.png"/>
+          <p:cNvPr id="3" name="Picture 2" descr="chart-interop.png"/>
           <p:cNvPicPr>
             <a:picLocks noChangeAspect="1"/>
           </p:cNvPicPr>
@@ -16562,8 +16563,8 @@
         </p:blipFill>
         <p:spPr>
           <a:xfrm>
-            <a:off x="1656079" y="1005840"/>
-            <a:ext cx="8940800" cy="4023360"/>
+            <a:off x="1859280" y="960120"/>
+            <a:ext cx="8534400" cy="3840480"/>
           </a:xfrm>
           <a:prstGeom prst="rect">
             <a:avLst/>
@@ -16578,8 +16579,193 @@
         </p:nvSpPr>
         <p:spPr>
           <a:xfrm>
-            <a:off x="548640" y="5166360"/>
-            <a:ext cx="3657600" cy="1371600"/>
+            <a:off x="548640" y="4983480"/>
+            <a:ext cx="3657600" cy="1554480"/>
+          </a:xfrm>
+          <a:prstGeom prst="rect">
+            <a:avLst/>
+          </a:prstGeom>
+          <a:solidFill>
+            <a:srgbClr val="E6F6EE"/>
+          </a:solidFill>
+          <a:ln w="15875">
+            <a:solidFill>
+              <a:srgbClr val="168A57"/>
+            </a:solidFill>
+          </a:ln>
+          <a:effectLst/>
+        </p:spPr>
+        <p:style>
+          <a:lnRef idx="1">
+            <a:schemeClr val="accent1"/>
+          </a:lnRef>
+          <a:fillRef idx="3">
+            <a:schemeClr val="accent1"/>
+          </a:fillRef>
+          <a:effectRef idx="2">
+            <a:schemeClr val="accent1"/>
+          </a:effectRef>
+          <a:fontRef idx="minor">
+            <a:schemeClr val="lt1"/>
+          </a:fontRef>
+        </p:style>
+        <p:txBody>
+          <a:bodyPr rtlCol="0" anchor="ctr"/>
+          <a:lstStyle/>
+          <a:p/>
+        </p:txBody>
+      </p:sp>
+      <p:sp>
+        <p:nvSpPr>
+          <p:cNvPr id="5" name="TextBox 4"/>
+          <p:cNvSpPr txBox="1"/>
+          <p:nvPr/>
+        </p:nvSpPr>
+        <p:spPr>
+          <a:xfrm>
+            <a:off x="694944" y="5074920"/>
+            <a:ext cx="3364992" cy="365760"/>
+          </a:xfrm>
+          <a:prstGeom prst="rect">
+            <a:avLst/>
+          </a:prstGeom>
+          <a:noFill/>
+        </p:spPr>
+        <p:txBody>
+          <a:bodyPr wrap="square">
+            <a:spAutoFit/>
+          </a:bodyPr>
+          <a:lstStyle/>
+          <a:p>
+            <a:pPr algn="l">
+              <a:lnSpc>
+                <a:spcPct val="115000"/>
+              </a:lnSpc>
+              <a:spcAft>
+                <a:spcPts val="200"/>
+              </a:spcAft>
+            </a:pPr>
+            <a:r>
+              <a:rPr sz="1300">
+                <a:solidFill>
+                  <a:srgbClr val="168A57"/>
+                </a:solidFill>
+                <a:latin typeface="微软雅黑"/>
+              </a:rPr>
+              <a:t>这次补上了什么</a:t>
+            </a:r>
+          </a:p>
+        </p:txBody>
+      </p:sp>
+      <p:sp>
+        <p:nvSpPr>
+          <p:cNvPr id="6" name="TextBox 5"/>
+          <p:cNvSpPr txBox="1"/>
+          <p:nvPr/>
+        </p:nvSpPr>
+        <p:spPr>
+          <a:xfrm>
+            <a:off x="694944" y="5440680"/>
+            <a:ext cx="3364992" cy="1005840"/>
+          </a:xfrm>
+          <a:prstGeom prst="rect">
+            <a:avLst/>
+          </a:prstGeom>
+          <a:noFill/>
+        </p:spPr>
+        <p:txBody>
+          <a:bodyPr wrap="square">
+            <a:spAutoFit/>
+          </a:bodyPr>
+          <a:lstStyle/>
+          <a:p>
+            <a:pPr algn="l">
+              <a:lnSpc>
+                <a:spcPct val="115000"/>
+              </a:lnSpc>
+              <a:spcAft>
+                <a:spcPts val="300"/>
+              </a:spcAft>
+            </a:pPr>
+            <a:r>
+              <a:rPr sz="1100">
+                <a:solidFill>
+                  <a:srgbClr val="202938"/>
+                </a:solidFill>
+                <a:latin typeface="微软雅黑"/>
+              </a:rPr>
+              <a:t>· macOS 首次真机编译：零报错</a:t>
+            </a:r>
+          </a:p>
+          <a:p>
+            <a:pPr algn="l">
+              <a:lnSpc>
+                <a:spcPct val="115000"/>
+              </a:lnSpc>
+              <a:spcAft>
+                <a:spcPts val="300"/>
+              </a:spcAft>
+            </a:pPr>
+            <a:r>
+              <a:rPr sz="1100">
+                <a:solidFill>
+                  <a:srgbClr val="202938"/>
+                </a:solidFill>
+                <a:latin typeface="微软雅黑"/>
+              </a:rPr>
+              <a:t>· 原先只做过静态验证（交叉编译）</a:t>
+            </a:r>
+          </a:p>
+          <a:p>
+            <a:pPr algn="l">
+              <a:lnSpc>
+                <a:spcPct val="115000"/>
+              </a:lnSpc>
+              <a:spcAft>
+                <a:spcPts val="300"/>
+              </a:spcAft>
+            </a:pPr>
+            <a:r>
+              <a:rPr sz="1100">
+                <a:solidFill>
+                  <a:srgbClr val="202938"/>
+                </a:solidFill>
+                <a:latin typeface="微软雅黑"/>
+              </a:rPr>
+              <a:t>· 现在补上了运行与互通验证</a:t>
+            </a:r>
+          </a:p>
+          <a:p>
+            <a:pPr algn="l">
+              <a:lnSpc>
+                <a:spcPct val="115000"/>
+              </a:lnSpc>
+              <a:spcAft>
+                <a:spcPts val="300"/>
+              </a:spcAft>
+            </a:pPr>
+            <a:r>
+              <a:rPr sz="1100">
+                <a:solidFill>
+                  <a:srgbClr val="202938"/>
+                </a:solidFill>
+                <a:latin typeface="微软雅黑"/>
+              </a:rPr>
+              <a:t>· 那张「不夸大」图已改成「已实测」</a:t>
+            </a:r>
+          </a:p>
+        </p:txBody>
+      </p:sp>
+      <p:sp>
+        <p:nvSpPr>
+          <p:cNvPr id="7" name="Rectangle 6"/>
+          <p:cNvSpPr/>
+          <p:nvPr/>
+        </p:nvSpPr>
+        <p:spPr>
+          <a:xfrm>
+            <a:off x="4343400" y="4983480"/>
+            <a:ext cx="3657600" cy="1554480"/>
           </a:xfrm>
           <a:prstGeom prst="rect">
             <a:avLst/>
@@ -16616,13 +16802,13 @@
       </p:sp>
       <p:sp>
         <p:nvSpPr>
-          <p:cNvPr id="5" name="TextBox 4"/>
+          <p:cNvPr id="8" name="TextBox 7"/>
           <p:cNvSpPr txBox="1"/>
           <p:nvPr/>
         </p:nvSpPr>
         <p:spPr>
           <a:xfrm>
-            <a:off x="694944" y="5257800"/>
+            <a:off x="4489704" y="5074920"/>
             <a:ext cx="3364992" cy="365760"/>
           </a:xfrm>
           <a:prstGeom prst="rect">
@@ -16651,21 +16837,21 @@
                 </a:solidFill>
                 <a:latin typeface="微软雅黑"/>
               </a:rPr>
-              <a:t>为 macOS 改了什么</a:t>
+              <a:t>已验证的功能</a:t>
             </a:r>
           </a:p>
         </p:txBody>
       </p:sp>
       <p:sp>
         <p:nvSpPr>
-          <p:cNvPr id="6" name="TextBox 5"/>
+          <p:cNvPr id="9" name="TextBox 8"/>
           <p:cNvSpPr txBox="1"/>
           <p:nvPr/>
         </p:nvSpPr>
         <p:spPr>
           <a:xfrm>
-            <a:off x="694944" y="5623560"/>
-            <a:ext cx="3364992" cy="822960"/>
+            <a:off x="4489704" y="5440680"/>
+            <a:ext cx="3364992" cy="1005840"/>
           </a:xfrm>
           <a:prstGeom prst="rect">
             <a:avLst/>
@@ -16693,7 +16879,7 @@
                 </a:solidFill>
                 <a:latin typeface="微软雅黑"/>
               </a:rPr>
-              <a:t>· 没有 MSG_NOSIGNAL → 用 SO_NOSIGPIPE</a:t>
+              <a:t>· 登录 / 收发消息（与三个平台双向互发）</a:t>
             </a:r>
           </a:p>
           <a:p>
@@ -16712,7 +16898,7 @@
                 </a:solidFill>
                 <a:latin typeface="微软雅黑"/>
               </a:rPr>
-              <a:t>· TCP_KEEPIDLE 改叫 TCP_KEEPALIVE</a:t>
+              <a:t>· 四端同时在线，互相都看得到</a:t>
             </a:r>
           </a:p>
           <a:p>
@@ -16731,118 +16917,9 @@
                 </a:solidFill>
                 <a:latin typeface="微软雅黑"/>
               </a:rPr>
-              <a:t>· htons 是宏：加了 :: 反而编不过</a:t>
-            </a:r>
-          </a:p>
-        </p:txBody>
-      </p:sp>
-      <p:sp>
-        <p:nvSpPr>
-          <p:cNvPr id="7" name="Rectangle 6"/>
-          <p:cNvSpPr/>
-          <p:nvPr/>
-        </p:nvSpPr>
-        <p:spPr>
-          <a:xfrm>
-            <a:off x="4343400" y="5166360"/>
-            <a:ext cx="3657600" cy="1371600"/>
-          </a:xfrm>
-          <a:prstGeom prst="rect">
-            <a:avLst/>
-          </a:prstGeom>
-          <a:solidFill>
-            <a:srgbClr val="E6F6EE"/>
-          </a:solidFill>
-          <a:ln w="15875">
-            <a:solidFill>
-              <a:srgbClr val="168A57"/>
-            </a:solidFill>
-          </a:ln>
-          <a:effectLst/>
-        </p:spPr>
-        <p:style>
-          <a:lnRef idx="1">
-            <a:schemeClr val="accent1"/>
-          </a:lnRef>
-          <a:fillRef idx="3">
-            <a:schemeClr val="accent1"/>
-          </a:fillRef>
-          <a:effectRef idx="2">
-            <a:schemeClr val="accent1"/>
-          </a:effectRef>
-          <a:fontRef idx="minor">
-            <a:schemeClr val="lt1"/>
-          </a:fontRef>
-        </p:style>
-        <p:txBody>
-          <a:bodyPr rtlCol="0" anchor="ctr"/>
-          <a:lstStyle/>
-          <a:p/>
-        </p:txBody>
-      </p:sp>
-      <p:sp>
-        <p:nvSpPr>
-          <p:cNvPr id="8" name="TextBox 7"/>
-          <p:cNvSpPr txBox="1"/>
-          <p:nvPr/>
-        </p:nvSpPr>
-        <p:spPr>
-          <a:xfrm>
-            <a:off x="4489704" y="5257800"/>
-            <a:ext cx="3364992" cy="365760"/>
-          </a:xfrm>
-          <a:prstGeom prst="rect">
-            <a:avLst/>
-          </a:prstGeom>
-          <a:noFill/>
-        </p:spPr>
-        <p:txBody>
-          <a:bodyPr wrap="square">
-            <a:spAutoFit/>
-          </a:bodyPr>
-          <a:lstStyle/>
-          <a:p>
-            <a:pPr algn="l">
-              <a:lnSpc>
-                <a:spcPct val="115000"/>
-              </a:lnSpc>
-              <a:spcAft>
-                <a:spcPts val="200"/>
-              </a:spcAft>
-            </a:pPr>
-            <a:r>
-              <a:rPr sz="1300">
-                <a:solidFill>
-                  <a:srgbClr val="168A57"/>
-                </a:solidFill>
-                <a:latin typeface="微软雅黑"/>
-              </a:rPr>
-              <a:t>客户端分了层</a:t>
-            </a:r>
-          </a:p>
-        </p:txBody>
-      </p:sp>
-      <p:sp>
-        <p:nvSpPr>
-          <p:cNvPr id="9" name="TextBox 8"/>
-          <p:cNvSpPr txBox="1"/>
-          <p:nvPr/>
-        </p:nvSpPr>
-        <p:spPr>
-          <a:xfrm>
-            <a:off x="4489704" y="5623560"/>
-            <a:ext cx="3364992" cy="822960"/>
-          </a:xfrm>
-          <a:prstGeom prst="rect">
-            <a:avLst/>
-          </a:prstGeom>
-          <a:noFill/>
-        </p:spPr>
-        <p:txBody>
-          <a:bodyPr wrap="square">
-            <a:spAutoFit/>
-          </a:bodyPr>
-          <a:lstStyle/>
+              <a:t>· 附件（文件）在端之间传过</a:t>
+            </a:r>
+          </a:p>
           <a:p>
             <a:pPr algn="l">
               <a:lnSpc>
@@ -16859,45 +16936,7 @@
                 </a:solidFill>
                 <a:latin typeface="微软雅黑"/>
               </a:rPr>
-              <a:t>· client_core/ 可移植核心：网络/信任/附件/颜色/语音/会话逻辑</a:t>
-            </a:r>
-          </a:p>
-          <a:p>
-            <a:pPr algn="l">
-              <a:lnSpc>
-                <a:spcPct val="115000"/>
-              </a:lnSpc>
-              <a:spcAft>
-                <a:spcPts val="300"/>
-              </a:spcAft>
-            </a:pPr>
-            <a:r>
-              <a:rPr sz="1100">
-                <a:solidFill>
-                  <a:srgbClr val="202938"/>
-                </a:solidFill>
-                <a:latin typeface="微软雅黑"/>
-              </a:rPr>
-              <a:t>· linux/client/ 与 macos/main.mm 只剩界面</a:t>
-            </a:r>
-          </a:p>
-          <a:p>
-            <a:pPr algn="l">
-              <a:lnSpc>
-                <a:spcPct val="115000"/>
-              </a:lnSpc>
-              <a:spcAft>
-                <a:spcPts val="300"/>
-              </a:spcAft>
-            </a:pPr>
-            <a:r>
-              <a:rPr sz="1100">
-                <a:solidFill>
-                  <a:srgbClr val="202938"/>
-                </a:solidFill>
-                <a:latin typeface="微软雅黑"/>
-              </a:rPr>
-              <a:t>· 界面能编不了也不怕：逻辑都在能验证的核心层</a:t>
+              <a:t>· 彩色文字在 mac 上显示正常</a:t>
             </a:r>
           </a:p>
         </p:txBody>
@@ -16910,8 +16949,8 @@
         </p:nvSpPr>
         <p:spPr>
           <a:xfrm>
-            <a:off x="8138160" y="5166360"/>
-            <a:ext cx="3520440" cy="1371600"/>
+            <a:off x="8138160" y="4983480"/>
+            <a:ext cx="3520440" cy="1554480"/>
           </a:xfrm>
           <a:prstGeom prst="rect">
             <a:avLst/>
@@ -16954,7 +16993,7 @@
         </p:nvSpPr>
         <p:spPr>
           <a:xfrm>
-            <a:off x="8284464" y="5257800"/>
+            <a:off x="8284464" y="5074920"/>
             <a:ext cx="3227832" cy="365760"/>
           </a:xfrm>
           <a:prstGeom prst="rect">
@@ -16983,7 +17022,7 @@
                 </a:solidFill>
                 <a:latin typeface="微软雅黑"/>
               </a:rPr>
-              <a:t>怎么在没有 Mac 时查错</a:t>
+              <a:t>为什么不全部涂绿</a:t>
             </a:r>
           </a:p>
         </p:txBody>
@@ -16996,8 +17035,8 @@
         </p:nvSpPr>
         <p:spPr>
           <a:xfrm>
-            <a:off x="8284464" y="5623560"/>
-            <a:ext cx="3227832" cy="822960"/>
+            <a:off x="8284464" y="5440680"/>
+            <a:ext cx="3227832" cy="1005840"/>
           </a:xfrm>
           <a:prstGeom prst="rect">
             <a:avLst/>
@@ -17025,7 +17064,7 @@
                 </a:solidFill>
                 <a:latin typeface="微软雅黑"/>
               </a:rPr>
-              <a:t>· zig 交叉编译成真 Mach-O 二进制</a:t>
+              <a:t>· 语音消息没测，那一行标红写「未测」</a:t>
             </a:r>
           </a:p>
           <a:p>
@@ -17044,7 +17083,7 @@
                 </a:solidFill>
                 <a:latin typeface="微软雅黑"/>
               </a:rPr>
-              <a:t>· 18 个文件 × 两个架构全通过</a:t>
+              <a:t>· 灰色格是这一轮没测的组合</a:t>
             </a:r>
           </a:p>
           <a:p>
@@ -17063,7 +17102,26 @@
                 </a:solidFill>
                 <a:latin typeface="微软雅黑"/>
               </a:rPr>
-              <a:t>· 文本层查 selector / 括号 / 声明</a:t>
+              <a:t>· 标出来比统一涂绿更有用：</a:t>
+            </a:r>
+          </a:p>
+          <a:p>
+            <a:pPr algn="l">
+              <a:lnSpc>
+                <a:spcPct val="115000"/>
+              </a:lnSpc>
+              <a:spcAft>
+                <a:spcPts val="300"/>
+              </a:spcAft>
+            </a:pPr>
+            <a:r>
+              <a:rPr sz="1100">
+                <a:solidFill>
+                  <a:srgbClr val="202938"/>
+                </a:solidFill>
+                <a:latin typeface="微软雅黑"/>
+              </a:rPr>
+              <a:t>  下一个要补的地方一目了然</a:t>
             </a:r>
           </a:p>
         </p:txBody>
@@ -17610,6 +17668,1086 @@
                 </a:solidFill>
                 <a:latin typeface="微软雅黑"/>
               </a:rPr>
+              <a:t>macOS 端：原生 Cocoa 界面 + 如实标注的验证边界</a:t>
+            </a:r>
+          </a:p>
+          <a:p>
+            <a:r>
+              <a:rPr sz="1300">
+                <a:solidFill>
+                  <a:srgbClr val="A9C2E8"/>
+                </a:solidFill>
+                <a:latin typeface="微软雅黑"/>
+              </a:rPr>
+              <a:t>开发机上没有 Mac，所以「能编的都编了、能查的都查了」，但从未真机运行</a:t>
+            </a:r>
+          </a:p>
+        </p:txBody>
+      </p:sp>
+      <p:pic>
+        <p:nvPicPr>
+          <p:cNvPr id="3" name="Picture 2" descr="chart-macos-verify.png"/>
+          <p:cNvPicPr>
+            <a:picLocks noChangeAspect="1"/>
+          </p:cNvPicPr>
+          <p:nvPr/>
+        </p:nvPicPr>
+        <p:blipFill>
+          <a:blip r:embed="rId2"/>
+          <a:stretch>
+            <a:fillRect/>
+          </a:stretch>
+        </p:blipFill>
+        <p:spPr>
+          <a:xfrm>
+            <a:off x="2197417" y="1005840"/>
+            <a:ext cx="7858125" cy="4023360"/>
+          </a:xfrm>
+          <a:prstGeom prst="rect">
+            <a:avLst/>
+          </a:prstGeom>
+        </p:spPr>
+      </p:pic>
+      <p:sp>
+        <p:nvSpPr>
+          <p:cNvPr id="4" name="Rectangle 3"/>
+          <p:cNvSpPr/>
+          <p:nvPr/>
+        </p:nvSpPr>
+        <p:spPr>
+          <a:xfrm>
+            <a:off x="548640" y="5166360"/>
+            <a:ext cx="3657600" cy="1371600"/>
+          </a:xfrm>
+          <a:prstGeom prst="rect">
+            <a:avLst/>
+          </a:prstGeom>
+          <a:solidFill>
+            <a:srgbClr val="E8F1FE"/>
+          </a:solidFill>
+          <a:ln w="15875">
+            <a:solidFill>
+              <a:srgbClr val="1F6FEB"/>
+            </a:solidFill>
+          </a:ln>
+          <a:effectLst/>
+        </p:spPr>
+        <p:style>
+          <a:lnRef idx="1">
+            <a:schemeClr val="accent1"/>
+          </a:lnRef>
+          <a:fillRef idx="3">
+            <a:schemeClr val="accent1"/>
+          </a:fillRef>
+          <a:effectRef idx="2">
+            <a:schemeClr val="accent1"/>
+          </a:effectRef>
+          <a:fontRef idx="minor">
+            <a:schemeClr val="lt1"/>
+          </a:fontRef>
+        </p:style>
+        <p:txBody>
+          <a:bodyPr rtlCol="0" anchor="ctr"/>
+          <a:lstStyle/>
+          <a:p/>
+        </p:txBody>
+      </p:sp>
+      <p:sp>
+        <p:nvSpPr>
+          <p:cNvPr id="5" name="TextBox 4"/>
+          <p:cNvSpPr txBox="1"/>
+          <p:nvPr/>
+        </p:nvSpPr>
+        <p:spPr>
+          <a:xfrm>
+            <a:off x="694944" y="5257800"/>
+            <a:ext cx="3364992" cy="365760"/>
+          </a:xfrm>
+          <a:prstGeom prst="rect">
+            <a:avLst/>
+          </a:prstGeom>
+          <a:noFill/>
+        </p:spPr>
+        <p:txBody>
+          <a:bodyPr wrap="square">
+            <a:spAutoFit/>
+          </a:bodyPr>
+          <a:lstStyle/>
+          <a:p>
+            <a:pPr algn="l">
+              <a:lnSpc>
+                <a:spcPct val="115000"/>
+              </a:lnSpc>
+              <a:spcAft>
+                <a:spcPts val="200"/>
+              </a:spcAft>
+            </a:pPr>
+            <a:r>
+              <a:rPr sz="1300">
+                <a:solidFill>
+                  <a:srgbClr val="1F6FEB"/>
+                </a:solidFill>
+                <a:latin typeface="微软雅黑"/>
+              </a:rPr>
+              <a:t>为 macOS 改了什么</a:t>
+            </a:r>
+          </a:p>
+        </p:txBody>
+      </p:sp>
+      <p:sp>
+        <p:nvSpPr>
+          <p:cNvPr id="6" name="TextBox 5"/>
+          <p:cNvSpPr txBox="1"/>
+          <p:nvPr/>
+        </p:nvSpPr>
+        <p:spPr>
+          <a:xfrm>
+            <a:off x="694944" y="5623560"/>
+            <a:ext cx="3364992" cy="822960"/>
+          </a:xfrm>
+          <a:prstGeom prst="rect">
+            <a:avLst/>
+          </a:prstGeom>
+          <a:noFill/>
+        </p:spPr>
+        <p:txBody>
+          <a:bodyPr wrap="square">
+            <a:spAutoFit/>
+          </a:bodyPr>
+          <a:lstStyle/>
+          <a:p>
+            <a:pPr algn="l">
+              <a:lnSpc>
+                <a:spcPct val="115000"/>
+              </a:lnSpc>
+              <a:spcAft>
+                <a:spcPts val="300"/>
+              </a:spcAft>
+            </a:pPr>
+            <a:r>
+              <a:rPr sz="1100">
+                <a:solidFill>
+                  <a:srgbClr val="202938"/>
+                </a:solidFill>
+                <a:latin typeface="微软雅黑"/>
+              </a:rPr>
+              <a:t>· 没有 MSG_NOSIGNAL → 用 SO_NOSIGPIPE</a:t>
+            </a:r>
+          </a:p>
+          <a:p>
+            <a:pPr algn="l">
+              <a:lnSpc>
+                <a:spcPct val="115000"/>
+              </a:lnSpc>
+              <a:spcAft>
+                <a:spcPts val="300"/>
+              </a:spcAft>
+            </a:pPr>
+            <a:r>
+              <a:rPr sz="1100">
+                <a:solidFill>
+                  <a:srgbClr val="202938"/>
+                </a:solidFill>
+                <a:latin typeface="微软雅黑"/>
+              </a:rPr>
+              <a:t>· TCP_KEEPIDLE 改叫 TCP_KEEPALIVE</a:t>
+            </a:r>
+          </a:p>
+          <a:p>
+            <a:pPr algn="l">
+              <a:lnSpc>
+                <a:spcPct val="115000"/>
+              </a:lnSpc>
+              <a:spcAft>
+                <a:spcPts val="300"/>
+              </a:spcAft>
+            </a:pPr>
+            <a:r>
+              <a:rPr sz="1100">
+                <a:solidFill>
+                  <a:srgbClr val="202938"/>
+                </a:solidFill>
+                <a:latin typeface="微软雅黑"/>
+              </a:rPr>
+              <a:t>· htons 是宏：加了 :: 反而编不过</a:t>
+            </a:r>
+          </a:p>
+        </p:txBody>
+      </p:sp>
+      <p:sp>
+        <p:nvSpPr>
+          <p:cNvPr id="7" name="Rectangle 6"/>
+          <p:cNvSpPr/>
+          <p:nvPr/>
+        </p:nvSpPr>
+        <p:spPr>
+          <a:xfrm>
+            <a:off x="4343400" y="5166360"/>
+            <a:ext cx="3657600" cy="1371600"/>
+          </a:xfrm>
+          <a:prstGeom prst="rect">
+            <a:avLst/>
+          </a:prstGeom>
+          <a:solidFill>
+            <a:srgbClr val="E6F6EE"/>
+          </a:solidFill>
+          <a:ln w="15875">
+            <a:solidFill>
+              <a:srgbClr val="168A57"/>
+            </a:solidFill>
+          </a:ln>
+          <a:effectLst/>
+        </p:spPr>
+        <p:style>
+          <a:lnRef idx="1">
+            <a:schemeClr val="accent1"/>
+          </a:lnRef>
+          <a:fillRef idx="3">
+            <a:schemeClr val="accent1"/>
+          </a:fillRef>
+          <a:effectRef idx="2">
+            <a:schemeClr val="accent1"/>
+          </a:effectRef>
+          <a:fontRef idx="minor">
+            <a:schemeClr val="lt1"/>
+          </a:fontRef>
+        </p:style>
+        <p:txBody>
+          <a:bodyPr rtlCol="0" anchor="ctr"/>
+          <a:lstStyle/>
+          <a:p/>
+        </p:txBody>
+      </p:sp>
+      <p:sp>
+        <p:nvSpPr>
+          <p:cNvPr id="8" name="TextBox 7"/>
+          <p:cNvSpPr txBox="1"/>
+          <p:nvPr/>
+        </p:nvSpPr>
+        <p:spPr>
+          <a:xfrm>
+            <a:off x="4489704" y="5257800"/>
+            <a:ext cx="3364992" cy="365760"/>
+          </a:xfrm>
+          <a:prstGeom prst="rect">
+            <a:avLst/>
+          </a:prstGeom>
+          <a:noFill/>
+        </p:spPr>
+        <p:txBody>
+          <a:bodyPr wrap="square">
+            <a:spAutoFit/>
+          </a:bodyPr>
+          <a:lstStyle/>
+          <a:p>
+            <a:pPr algn="l">
+              <a:lnSpc>
+                <a:spcPct val="115000"/>
+              </a:lnSpc>
+              <a:spcAft>
+                <a:spcPts val="200"/>
+              </a:spcAft>
+            </a:pPr>
+            <a:r>
+              <a:rPr sz="1300">
+                <a:solidFill>
+                  <a:srgbClr val="168A57"/>
+                </a:solidFill>
+                <a:latin typeface="微软雅黑"/>
+              </a:rPr>
+              <a:t>客户端分了层</a:t>
+            </a:r>
+          </a:p>
+        </p:txBody>
+      </p:sp>
+      <p:sp>
+        <p:nvSpPr>
+          <p:cNvPr id="9" name="TextBox 8"/>
+          <p:cNvSpPr txBox="1"/>
+          <p:nvPr/>
+        </p:nvSpPr>
+        <p:spPr>
+          <a:xfrm>
+            <a:off x="4489704" y="5623560"/>
+            <a:ext cx="3364992" cy="822960"/>
+          </a:xfrm>
+          <a:prstGeom prst="rect">
+            <a:avLst/>
+          </a:prstGeom>
+          <a:noFill/>
+        </p:spPr>
+        <p:txBody>
+          <a:bodyPr wrap="square">
+            <a:spAutoFit/>
+          </a:bodyPr>
+          <a:lstStyle/>
+          <a:p>
+            <a:pPr algn="l">
+              <a:lnSpc>
+                <a:spcPct val="115000"/>
+              </a:lnSpc>
+              <a:spcAft>
+                <a:spcPts val="300"/>
+              </a:spcAft>
+            </a:pPr>
+            <a:r>
+              <a:rPr sz="1100">
+                <a:solidFill>
+                  <a:srgbClr val="202938"/>
+                </a:solidFill>
+                <a:latin typeface="微软雅黑"/>
+              </a:rPr>
+              <a:t>· client_core/ 可移植核心：网络/信任/附件/颜色/语音/会话逻辑</a:t>
+            </a:r>
+          </a:p>
+          <a:p>
+            <a:pPr algn="l">
+              <a:lnSpc>
+                <a:spcPct val="115000"/>
+              </a:lnSpc>
+              <a:spcAft>
+                <a:spcPts val="300"/>
+              </a:spcAft>
+            </a:pPr>
+            <a:r>
+              <a:rPr sz="1100">
+                <a:solidFill>
+                  <a:srgbClr val="202938"/>
+                </a:solidFill>
+                <a:latin typeface="微软雅黑"/>
+              </a:rPr>
+              <a:t>· linux/client/ 与 macos/main.mm 只剩界面</a:t>
+            </a:r>
+          </a:p>
+          <a:p>
+            <a:pPr algn="l">
+              <a:lnSpc>
+                <a:spcPct val="115000"/>
+              </a:lnSpc>
+              <a:spcAft>
+                <a:spcPts val="300"/>
+              </a:spcAft>
+            </a:pPr>
+            <a:r>
+              <a:rPr sz="1100">
+                <a:solidFill>
+                  <a:srgbClr val="202938"/>
+                </a:solidFill>
+                <a:latin typeface="微软雅黑"/>
+              </a:rPr>
+              <a:t>· 界面能编不了也不怕：逻辑都在能验证的核心层</a:t>
+            </a:r>
+          </a:p>
+        </p:txBody>
+      </p:sp>
+      <p:sp>
+        <p:nvSpPr>
+          <p:cNvPr id="10" name="Rectangle 9"/>
+          <p:cNvSpPr/>
+          <p:nvPr/>
+        </p:nvSpPr>
+        <p:spPr>
+          <a:xfrm>
+            <a:off x="8138160" y="5166360"/>
+            <a:ext cx="3520440" cy="1371600"/>
+          </a:xfrm>
+          <a:prstGeom prst="rect">
+            <a:avLst/>
+          </a:prstGeom>
+          <a:solidFill>
+            <a:srgbClr val="FDF4E2"/>
+          </a:solidFill>
+          <a:ln w="15875">
+            <a:solidFill>
+              <a:srgbClr val="B06C0C"/>
+            </a:solidFill>
+          </a:ln>
+          <a:effectLst/>
+        </p:spPr>
+        <p:style>
+          <a:lnRef idx="1">
+            <a:schemeClr val="accent1"/>
+          </a:lnRef>
+          <a:fillRef idx="3">
+            <a:schemeClr val="accent1"/>
+          </a:fillRef>
+          <a:effectRef idx="2">
+            <a:schemeClr val="accent1"/>
+          </a:effectRef>
+          <a:fontRef idx="minor">
+            <a:schemeClr val="lt1"/>
+          </a:fontRef>
+        </p:style>
+        <p:txBody>
+          <a:bodyPr rtlCol="0" anchor="ctr"/>
+          <a:lstStyle/>
+          <a:p/>
+        </p:txBody>
+      </p:sp>
+      <p:sp>
+        <p:nvSpPr>
+          <p:cNvPr id="11" name="TextBox 10"/>
+          <p:cNvSpPr txBox="1"/>
+          <p:nvPr/>
+        </p:nvSpPr>
+        <p:spPr>
+          <a:xfrm>
+            <a:off x="8284464" y="5257800"/>
+            <a:ext cx="3227832" cy="365760"/>
+          </a:xfrm>
+          <a:prstGeom prst="rect">
+            <a:avLst/>
+          </a:prstGeom>
+          <a:noFill/>
+        </p:spPr>
+        <p:txBody>
+          <a:bodyPr wrap="square">
+            <a:spAutoFit/>
+          </a:bodyPr>
+          <a:lstStyle/>
+          <a:p>
+            <a:pPr algn="l">
+              <a:lnSpc>
+                <a:spcPct val="115000"/>
+              </a:lnSpc>
+              <a:spcAft>
+                <a:spcPts val="200"/>
+              </a:spcAft>
+            </a:pPr>
+            <a:r>
+              <a:rPr sz="1300">
+                <a:solidFill>
+                  <a:srgbClr val="B06C0C"/>
+                </a:solidFill>
+                <a:latin typeface="微软雅黑"/>
+              </a:rPr>
+              <a:t>怎么在没有 Mac 时查错</a:t>
+            </a:r>
+          </a:p>
+        </p:txBody>
+      </p:sp>
+      <p:sp>
+        <p:nvSpPr>
+          <p:cNvPr id="12" name="TextBox 11"/>
+          <p:cNvSpPr txBox="1"/>
+          <p:nvPr/>
+        </p:nvSpPr>
+        <p:spPr>
+          <a:xfrm>
+            <a:off x="8284464" y="5623560"/>
+            <a:ext cx="3227832" cy="822960"/>
+          </a:xfrm>
+          <a:prstGeom prst="rect">
+            <a:avLst/>
+          </a:prstGeom>
+          <a:noFill/>
+        </p:spPr>
+        <p:txBody>
+          <a:bodyPr wrap="square">
+            <a:spAutoFit/>
+          </a:bodyPr>
+          <a:lstStyle/>
+          <a:p>
+            <a:pPr algn="l">
+              <a:lnSpc>
+                <a:spcPct val="115000"/>
+              </a:lnSpc>
+              <a:spcAft>
+                <a:spcPts val="300"/>
+              </a:spcAft>
+            </a:pPr>
+            <a:r>
+              <a:rPr sz="1100">
+                <a:solidFill>
+                  <a:srgbClr val="202938"/>
+                </a:solidFill>
+                <a:latin typeface="微软雅黑"/>
+              </a:rPr>
+              <a:t>· zig 交叉编译成真 Mach-O 二进制</a:t>
+            </a:r>
+          </a:p>
+          <a:p>
+            <a:pPr algn="l">
+              <a:lnSpc>
+                <a:spcPct val="115000"/>
+              </a:lnSpc>
+              <a:spcAft>
+                <a:spcPts val="300"/>
+              </a:spcAft>
+            </a:pPr>
+            <a:r>
+              <a:rPr sz="1100">
+                <a:solidFill>
+                  <a:srgbClr val="202938"/>
+                </a:solidFill>
+                <a:latin typeface="微软雅黑"/>
+              </a:rPr>
+              <a:t>· 18 个文件 × 两个架构全通过</a:t>
+            </a:r>
+          </a:p>
+          <a:p>
+            <a:pPr algn="l">
+              <a:lnSpc>
+                <a:spcPct val="115000"/>
+              </a:lnSpc>
+              <a:spcAft>
+                <a:spcPts val="300"/>
+              </a:spcAft>
+            </a:pPr>
+            <a:r>
+              <a:rPr sz="1100">
+                <a:solidFill>
+                  <a:srgbClr val="202938"/>
+                </a:solidFill>
+                <a:latin typeface="微软雅黑"/>
+              </a:rPr>
+              <a:t>· 文本层查 selector / 括号 / 声明</a:t>
+            </a:r>
+          </a:p>
+        </p:txBody>
+      </p:sp>
+    </p:spTree>
+  </p:cSld>
+  <p:clrMapOvr>
+    <a:masterClrMapping/>
+  </p:clrMapOvr>
+  <mc:AlternateContent xmlns:mc="http://schemas.openxmlformats.org/markup-compatibility/2006">
+    <mc:Choice xmlns:p14="http://schemas.microsoft.com/office/powerpoint/2010/main" Requires="p14">
+      <p:transition spd="med" p14:dur="500">
+        <p:fade/>
+      </p:transition>
+    </mc:Choice>
+    <mc:Fallback>
+      <p:transition spd="med">
+        <p:fade/>
+      </p:transition>
+    </mc:Fallback>
+  </mc:AlternateContent>
+  <p:timing>
+    <p:tnLst>
+      <p:par>
+        <p:cTn id="1" dur="indefinite" restart="never" nodeType="tmRoot">
+          <p:childTnLst>
+            <p:seq concurrent="1" nextAc="seek">
+              <p:cTn id="2" dur="indefinite" nodeType="mainSeq">
+                <p:childTnLst>
+                  <p:par>
+                    <p:cTn id="2" fill="hold">
+                      <p:stCondLst>
+                        <p:cond delay="indefinite"/>
+                      </p:stCondLst>
+                      <p:childTnLst>
+                        <p:par>
+                          <p:cTn id="3" fill="hold">
+                            <p:stCondLst>
+                              <p:cond delay="0"/>
+                            </p:stCondLst>
+                            <p:childTnLst>
+                              <p:par>
+                                <p:cTn id="4" presetID="10" presetClass="entr" presetSubtype="0" fill="hold" grpId="0" nodeType="clickEffect">
+                                  <p:stCondLst>
+                                    <p:cond delay="0"/>
+                                  </p:stCondLst>
+                                  <p:childTnLst>
+                                    <p:set>
+                                      <p:cBhvr>
+                                        <p:cTn id="5" dur="1" fill="hold">
+                                          <p:stCondLst>
+                                            <p:cond delay="0"/>
+                                          </p:stCondLst>
+                                        </p:cTn>
+                                        <p:tgtEl>
+                                          <p:spTgt spid="2"/>
+                                        </p:tgtEl>
+                                        <p:attrNameLst>
+                                          <p:attrName>style.visibility</p:attrName>
+                                        </p:attrNameLst>
+                                      </p:cBhvr>
+                                      <p:to>
+                                        <p:strVal val="visible"/>
+                                      </p:to>
+                                    </p:set>
+                                    <p:animEffect transition="in" filter="fade">
+                                      <p:cBhvr>
+                                        <p:cTn id="6" dur="400"/>
+                                        <p:tgtEl>
+                                          <p:spTgt spid="2"/>
+                                        </p:tgtEl>
+                                      </p:cBhvr>
+                                    </p:animEffect>
+                                  </p:childTnLst>
+                                </p:cTn>
+                              </p:par>
+                            </p:childTnLst>
+                          </p:cTn>
+                        </p:par>
+                      </p:childTnLst>
+                    </p:cTn>
+                  </p:par>
+                  <p:par>
+                    <p:cTn id="7" fill="hold">
+                      <p:stCondLst>
+                        <p:cond delay="indefinite"/>
+                      </p:stCondLst>
+                      <p:childTnLst>
+                        <p:par>
+                          <p:cTn id="8" fill="hold">
+                            <p:stCondLst>
+                              <p:cond delay="0"/>
+                            </p:stCondLst>
+                            <p:childTnLst>
+                              <p:par>
+                                <p:cTn id="9" presetID="10" presetClass="entr" presetSubtype="0" fill="hold" grpId="0" nodeType="clickEffect">
+                                  <p:stCondLst>
+                                    <p:cond delay="0"/>
+                                  </p:stCondLst>
+                                  <p:childTnLst>
+                                    <p:set>
+                                      <p:cBhvr>
+                                        <p:cTn id="10" dur="1" fill="hold">
+                                          <p:stCondLst>
+                                            <p:cond delay="0"/>
+                                          </p:stCondLst>
+                                        </p:cTn>
+                                        <p:tgtEl>
+                                          <p:spTgt spid="3"/>
+                                        </p:tgtEl>
+                                        <p:attrNameLst>
+                                          <p:attrName>style.visibility</p:attrName>
+                                        </p:attrNameLst>
+                                      </p:cBhvr>
+                                      <p:to>
+                                        <p:strVal val="visible"/>
+                                      </p:to>
+                                    </p:set>
+                                    <p:animEffect transition="in" filter="fade">
+                                      <p:cBhvr>
+                                        <p:cTn id="11" dur="400"/>
+                                        <p:tgtEl>
+                                          <p:spTgt spid="3"/>
+                                        </p:tgtEl>
+                                      </p:cBhvr>
+                                    </p:animEffect>
+                                  </p:childTnLst>
+                                </p:cTn>
+                              </p:par>
+                            </p:childTnLst>
+                          </p:cTn>
+                        </p:par>
+                      </p:childTnLst>
+                    </p:cTn>
+                  </p:par>
+                  <p:par>
+                    <p:cTn id="12" fill="hold">
+                      <p:stCondLst>
+                        <p:cond delay="indefinite"/>
+                      </p:stCondLst>
+                      <p:childTnLst>
+                        <p:par>
+                          <p:cTn id="13" fill="hold">
+                            <p:stCondLst>
+                              <p:cond delay="0"/>
+                            </p:stCondLst>
+                            <p:childTnLst>
+                              <p:par>
+                                <p:cTn id="14" presetID="10" presetClass="entr" presetSubtype="0" fill="hold" grpId="0" nodeType="clickEffect">
+                                  <p:stCondLst>
+                                    <p:cond delay="0"/>
+                                  </p:stCondLst>
+                                  <p:childTnLst>
+                                    <p:set>
+                                      <p:cBhvr>
+                                        <p:cTn id="15" dur="1" fill="hold">
+                                          <p:stCondLst>
+                                            <p:cond delay="0"/>
+                                          </p:stCondLst>
+                                        </p:cTn>
+                                        <p:tgtEl>
+                                          <p:spTgt spid="5"/>
+                                        </p:tgtEl>
+                                        <p:attrNameLst>
+                                          <p:attrName>style.visibility</p:attrName>
+                                        </p:attrNameLst>
+                                      </p:cBhvr>
+                                      <p:to>
+                                        <p:strVal val="visible"/>
+                                      </p:to>
+                                    </p:set>
+                                    <p:animEffect transition="in" filter="fade">
+                                      <p:cBhvr>
+                                        <p:cTn id="16" dur="400"/>
+                                        <p:tgtEl>
+                                          <p:spTgt spid="5"/>
+                                        </p:tgtEl>
+                                      </p:cBhvr>
+                                    </p:animEffect>
+                                  </p:childTnLst>
+                                </p:cTn>
+                              </p:par>
+                            </p:childTnLst>
+                          </p:cTn>
+                        </p:par>
+                      </p:childTnLst>
+                    </p:cTn>
+                  </p:par>
+                  <p:par>
+                    <p:cTn id="17" fill="hold">
+                      <p:stCondLst>
+                        <p:cond delay="indefinite"/>
+                      </p:stCondLst>
+                      <p:childTnLst>
+                        <p:par>
+                          <p:cTn id="18" fill="hold">
+                            <p:stCondLst>
+                              <p:cond delay="0"/>
+                            </p:stCondLst>
+                            <p:childTnLst>
+                              <p:par>
+                                <p:cTn id="19" presetID="10" presetClass="entr" presetSubtype="0" fill="hold" grpId="0" nodeType="clickEffect">
+                                  <p:stCondLst>
+                                    <p:cond delay="0"/>
+                                  </p:stCondLst>
+                                  <p:childTnLst>
+                                    <p:set>
+                                      <p:cBhvr>
+                                        <p:cTn id="20" dur="1" fill="hold">
+                                          <p:stCondLst>
+                                            <p:cond delay="0"/>
+                                          </p:stCondLst>
+                                        </p:cTn>
+                                        <p:tgtEl>
+                                          <p:spTgt spid="6"/>
+                                        </p:tgtEl>
+                                        <p:attrNameLst>
+                                          <p:attrName>style.visibility</p:attrName>
+                                        </p:attrNameLst>
+                                      </p:cBhvr>
+                                      <p:to>
+                                        <p:strVal val="visible"/>
+                                      </p:to>
+                                    </p:set>
+                                    <p:animEffect transition="in" filter="fade">
+                                      <p:cBhvr>
+                                        <p:cTn id="21" dur="400"/>
+                                        <p:tgtEl>
+                                          <p:spTgt spid="6"/>
+                                        </p:tgtEl>
+                                      </p:cBhvr>
+                                    </p:animEffect>
+                                  </p:childTnLst>
+                                </p:cTn>
+                              </p:par>
+                            </p:childTnLst>
+                          </p:cTn>
+                        </p:par>
+                      </p:childTnLst>
+                    </p:cTn>
+                  </p:par>
+                  <p:par>
+                    <p:cTn id="22" fill="hold">
+                      <p:stCondLst>
+                        <p:cond delay="indefinite"/>
+                      </p:stCondLst>
+                      <p:childTnLst>
+                        <p:par>
+                          <p:cTn id="23" fill="hold">
+                            <p:stCondLst>
+                              <p:cond delay="0"/>
+                            </p:stCondLst>
+                            <p:childTnLst>
+                              <p:par>
+                                <p:cTn id="24" presetID="10" presetClass="entr" presetSubtype="0" fill="hold" grpId="0" nodeType="clickEffect">
+                                  <p:stCondLst>
+                                    <p:cond delay="0"/>
+                                  </p:stCondLst>
+                                  <p:childTnLst>
+                                    <p:set>
+                                      <p:cBhvr>
+                                        <p:cTn id="25" dur="1" fill="hold">
+                                          <p:stCondLst>
+                                            <p:cond delay="0"/>
+                                          </p:stCondLst>
+                                        </p:cTn>
+                                        <p:tgtEl>
+                                          <p:spTgt spid="8"/>
+                                        </p:tgtEl>
+                                        <p:attrNameLst>
+                                          <p:attrName>style.visibility</p:attrName>
+                                        </p:attrNameLst>
+                                      </p:cBhvr>
+                                      <p:to>
+                                        <p:strVal val="visible"/>
+                                      </p:to>
+                                    </p:set>
+                                    <p:animEffect transition="in" filter="fade">
+                                      <p:cBhvr>
+                                        <p:cTn id="26" dur="400"/>
+                                        <p:tgtEl>
+                                          <p:spTgt spid="8"/>
+                                        </p:tgtEl>
+                                      </p:cBhvr>
+                                    </p:animEffect>
+                                  </p:childTnLst>
+                                </p:cTn>
+                              </p:par>
+                            </p:childTnLst>
+                          </p:cTn>
+                        </p:par>
+                      </p:childTnLst>
+                    </p:cTn>
+                  </p:par>
+                  <p:par>
+                    <p:cTn id="27" fill="hold">
+                      <p:stCondLst>
+                        <p:cond delay="indefinite"/>
+                      </p:stCondLst>
+                      <p:childTnLst>
+                        <p:par>
+                          <p:cTn id="28" fill="hold">
+                            <p:stCondLst>
+                              <p:cond delay="0"/>
+                            </p:stCondLst>
+                            <p:childTnLst>
+                              <p:par>
+                                <p:cTn id="29" presetID="10" presetClass="entr" presetSubtype="0" fill="hold" grpId="0" nodeType="clickEffect">
+                                  <p:stCondLst>
+                                    <p:cond delay="0"/>
+                                  </p:stCondLst>
+                                  <p:childTnLst>
+                                    <p:set>
+                                      <p:cBhvr>
+                                        <p:cTn id="30" dur="1" fill="hold">
+                                          <p:stCondLst>
+                                            <p:cond delay="0"/>
+                                          </p:stCondLst>
+                                        </p:cTn>
+                                        <p:tgtEl>
+                                          <p:spTgt spid="9"/>
+                                        </p:tgtEl>
+                                        <p:attrNameLst>
+                                          <p:attrName>style.visibility</p:attrName>
+                                        </p:attrNameLst>
+                                      </p:cBhvr>
+                                      <p:to>
+                                        <p:strVal val="visible"/>
+                                      </p:to>
+                                    </p:set>
+                                    <p:animEffect transition="in" filter="fade">
+                                      <p:cBhvr>
+                                        <p:cTn id="31" dur="400"/>
+                                        <p:tgtEl>
+                                          <p:spTgt spid="9"/>
+                                        </p:tgtEl>
+                                      </p:cBhvr>
+                                    </p:animEffect>
+                                  </p:childTnLst>
+                                </p:cTn>
+                              </p:par>
+                            </p:childTnLst>
+                          </p:cTn>
+                        </p:par>
+                      </p:childTnLst>
+                    </p:cTn>
+                  </p:par>
+                  <p:par>
+                    <p:cTn id="32" fill="hold">
+                      <p:stCondLst>
+                        <p:cond delay="indefinite"/>
+                      </p:stCondLst>
+                      <p:childTnLst>
+                        <p:par>
+                          <p:cTn id="33" fill="hold">
+                            <p:stCondLst>
+                              <p:cond delay="0"/>
+                            </p:stCondLst>
+                            <p:childTnLst>
+                              <p:par>
+                                <p:cTn id="34" presetID="10" presetClass="entr" presetSubtype="0" fill="hold" grpId="0" nodeType="clickEffect">
+                                  <p:stCondLst>
+                                    <p:cond delay="0"/>
+                                  </p:stCondLst>
+                                  <p:childTnLst>
+                                    <p:set>
+                                      <p:cBhvr>
+                                        <p:cTn id="35" dur="1" fill="hold">
+                                          <p:stCondLst>
+                                            <p:cond delay="0"/>
+                                          </p:stCondLst>
+                                        </p:cTn>
+                                        <p:tgtEl>
+                                          <p:spTgt spid="11"/>
+                                        </p:tgtEl>
+                                        <p:attrNameLst>
+                                          <p:attrName>style.visibility</p:attrName>
+                                        </p:attrNameLst>
+                                      </p:cBhvr>
+                                      <p:to>
+                                        <p:strVal val="visible"/>
+                                      </p:to>
+                                    </p:set>
+                                    <p:animEffect transition="in" filter="fade">
+                                      <p:cBhvr>
+                                        <p:cTn id="36" dur="400"/>
+                                        <p:tgtEl>
+                                          <p:spTgt spid="11"/>
+                                        </p:tgtEl>
+                                      </p:cBhvr>
+                                    </p:animEffect>
+                                  </p:childTnLst>
+                                </p:cTn>
+                              </p:par>
+                            </p:childTnLst>
+                          </p:cTn>
+                        </p:par>
+                      </p:childTnLst>
+                    </p:cTn>
+                  </p:par>
+                  <p:par>
+                    <p:cTn id="37" fill="hold">
+                      <p:stCondLst>
+                        <p:cond delay="indefinite"/>
+                      </p:stCondLst>
+                      <p:childTnLst>
+                        <p:par>
+                          <p:cTn id="38" fill="hold">
+                            <p:stCondLst>
+                              <p:cond delay="0"/>
+                            </p:stCondLst>
+                            <p:childTnLst>
+                              <p:par>
+                                <p:cTn id="39" presetID="10" presetClass="entr" presetSubtype="0" fill="hold" grpId="0" nodeType="clickEffect">
+                                  <p:stCondLst>
+                                    <p:cond delay="0"/>
+                                  </p:stCondLst>
+                                  <p:childTnLst>
+                                    <p:set>
+                                      <p:cBhvr>
+                                        <p:cTn id="40" dur="1" fill="hold">
+                                          <p:stCondLst>
+                                            <p:cond delay="0"/>
+                                          </p:stCondLst>
+                                        </p:cTn>
+                                        <p:tgtEl>
+                                          <p:spTgt spid="12"/>
+                                        </p:tgtEl>
+                                        <p:attrNameLst>
+                                          <p:attrName>style.visibility</p:attrName>
+                                        </p:attrNameLst>
+                                      </p:cBhvr>
+                                      <p:to>
+                                        <p:strVal val="visible"/>
+                                      </p:to>
+                                    </p:set>
+                                    <p:animEffect transition="in" filter="fade">
+                                      <p:cBhvr>
+                                        <p:cTn id="41" dur="400"/>
+                                        <p:tgtEl>
+                                          <p:spTgt spid="12"/>
+                                        </p:tgtEl>
+                                      </p:cBhvr>
+                                    </p:animEffect>
+                                  </p:childTnLst>
+                                </p:cTn>
+                              </p:par>
+                            </p:childTnLst>
+                          </p:cTn>
+                        </p:par>
+                      </p:childTnLst>
+                    </p:cTn>
+                  </p:par>
+                </p:childTnLst>
+              </p:cTn>
+              <p:prevCondLst>
+                <p:cond evt="onPrev" delay="0">
+                  <p:tgtEl>
+                    <p:sldTgt/>
+                  </p:tgtEl>
+                </p:cond>
+              </p:prevCondLst>
+              <p:nextCondLst>
+                <p:cond evt="onNext" delay="0">
+                  <p:tgtEl>
+                    <p:sldTgt/>
+                  </p:tgtEl>
+                </p:cond>
+              </p:nextCondLst>
+            </p:seq>
+          </p:childTnLst>
+        </p:cTn>
+      </p:par>
+    </p:tnLst>
+    <p:bldLst>
+      <p:bldP spid="2" grpId="0"/>
+      <p:bldP spid="3" grpId="0"/>
+      <p:bldP spid="5" grpId="0"/>
+      <p:bldP spid="6" grpId="0"/>
+      <p:bldP spid="8" grpId="0"/>
+      <p:bldP spid="9" grpId="0"/>
+      <p:bldP spid="11" grpId="0"/>
+      <p:bldP spid="12" grpId="0"/>
+    </p:bldLst>
+  </p:timing>
+</p:sld>
+</file>
+
+<file path=ppt/slides/slide23.xml><?xml version="1.0" encoding="utf-8"?>
+<p:sld xmlns:a="http://schemas.openxmlformats.org/drawingml/2006/main" xmlns:p="http://schemas.openxmlformats.org/presentationml/2006/main" xmlns:r="http://schemas.openxmlformats.org/officeDocument/2006/relationships">
+  <p:cSld>
+    <p:spTree>
+      <p:nvGrpSpPr>
+        <p:cNvPr id="1" name=""/>
+        <p:cNvGrpSpPr/>
+        <p:nvPr/>
+      </p:nvGrpSpPr>
+      <p:grpSpPr/>
+      <p:sp>
+        <p:nvSpPr>
+          <p:cNvPr id="2" name="Rectangle 1"/>
+          <p:cNvSpPr/>
+          <p:nvPr/>
+        </p:nvSpPr>
+        <p:spPr>
+          <a:xfrm>
+            <a:off x="0" y="0"/>
+            <a:ext cx="12191695" cy="932688"/>
+          </a:xfrm>
+          <a:prstGeom prst="rect">
+            <a:avLst/>
+          </a:prstGeom>
+          <a:solidFill>
+            <a:srgbClr val="16284A"/>
+          </a:solidFill>
+          <a:ln>
+            <a:noFill/>
+          </a:ln>
+          <a:effectLst/>
+        </p:spPr>
+        <p:style>
+          <a:lnRef idx="1">
+            <a:schemeClr val="accent1"/>
+          </a:lnRef>
+          <a:fillRef idx="3">
+            <a:schemeClr val="accent1"/>
+          </a:fillRef>
+          <a:effectRef idx="2">
+            <a:schemeClr val="accent1"/>
+          </a:effectRef>
+          <a:fontRef idx="minor">
+            <a:schemeClr val="lt1"/>
+          </a:fontRef>
+        </p:style>
+        <p:txBody>
+          <a:bodyPr rtlCol="0" anchor="ctr" lIns="411480" tIns="91440"/>
+          <a:lstStyle/>
+          <a:p>
+            <a:pPr algn="ctr"/>
+            <a:r>
+              <a:rPr sz="2800" b="1">
+                <a:solidFill>
+                  <a:srgbClr val="FFFFFF"/>
+                </a:solidFill>
+                <a:latin typeface="微软雅黑"/>
+              </a:rPr>
               <a:t>几个真实的 bug（和它们为什么难查）</a:t>
             </a:r>
           </a:p>
@@ -18190,7 +19328,7 @@
 </p:sld>
 </file>
 
-<file path=ppt/slides/slide23.xml><?xml version="1.0" encoding="utf-8"?>
+<file path=ppt/slides/slide24.xml><?xml version="1.0" encoding="utf-8"?>
 <p:sld xmlns:a="http://schemas.openxmlformats.org/drawingml/2006/main" xmlns:p="http://schemas.openxmlformats.org/presentationml/2006/main" xmlns:r="http://schemas.openxmlformats.org/officeDocument/2006/relationships">
   <p:cSld>
     <p:spTree>
@@ -19599,7 +20737,7 @@
 </p:sld>
 </file>
 
-<file path=ppt/slides/slide24.xml><?xml version="1.0" encoding="utf-8"?>
+<file path=ppt/slides/slide25.xml><?xml version="1.0" encoding="utf-8"?>
 <p:sld xmlns:a="http://schemas.openxmlformats.org/drawingml/2006/main" xmlns:p="http://schemas.openxmlformats.org/presentationml/2006/main" xmlns:r="http://schemas.openxmlformats.org/officeDocument/2006/relationships">
   <p:cSld>
     <p:spTree>
@@ -20400,7 +21538,7 @@
 </p:sld>
 </file>
 
-<file path=ppt/slides/slide25.xml><?xml version="1.0" encoding="utf-8"?>
+<file path=ppt/slides/slide26.xml><?xml version="1.0" encoding="utf-8"?>
 <p:sld xmlns:a="http://schemas.openxmlformats.org/drawingml/2006/main" xmlns:p="http://schemas.openxmlformats.org/presentationml/2006/main" xmlns:r="http://schemas.openxmlformats.org/officeDocument/2006/relationships">
   <p:cSld>
     <p:spTree>
@@ -20923,7 +22061,7 @@
 </p:sld>
 </file>
 
-<file path=ppt/slides/slide26.xml><?xml version="1.0" encoding="utf-8"?>
+<file path=ppt/slides/slide27.xml><?xml version="1.0" encoding="utf-8"?>
 <p:sld xmlns:a="http://schemas.openxmlformats.org/drawingml/2006/main" xmlns:p="http://schemas.openxmlformats.org/presentationml/2006/main" xmlns:r="http://schemas.openxmlformats.org/officeDocument/2006/relationships">
   <p:cSld>
     <p:spTree>

--- a/dchat-项目介绍.pptx
+++ b/dchat-项目介绍.pptx
@@ -3279,7 +3279,7 @@
                 </a:solidFill>
                 <a:latin typeface="微软雅黑"/>
               </a:rPr>
-              <a:t>Windows · 安卓 · Linux 三端互通 · 端到端加密 · 逐行手写的协议</a:t>
+              <a:t>Windows · 安卓 · Linux · macOS 四端互通 · 端到端加密 · 逐行手写的协议</a:t>
             </a:r>
           </a:p>
         </p:txBody>
@@ -3426,7 +3426,7 @@
                 </a:solidFill>
                 <a:latin typeface="微软雅黑"/>
               </a:rPr>
-              <a:t>github.com/dongfang20101113/DChat   ·   53 次提交 / 9 天   ·   三端共 2.7 万行自有代码</a:t>
+              <a:t>github.com/dongfang20101113/DChat   ·   69 次提交 / 9 天   ·   四端自有代码 2.27 万行（实现 + 测试 + 安卓）</a:t>
             </a:r>
           </a:p>
         </p:txBody>
@@ -3468,7 +3468,7 @@
                 </a:solidFill>
                 <a:latin typeface="微软雅黑"/>
               </a:rPr>
-              <a:t>990+ 项测试全过   ·   端到端加密   ·   压测与攻击实测防护生效   ·   内存稳定 10 MB</a:t>
+              <a:t>2115 项测试全过   ·   端到端加密   ·   压测与攻击实测防护生效   ·   内存稳定 10 MB</a:t>
             </a:r>
           </a:p>
         </p:txBody>
@@ -3918,7 +3918,7 @@
                 </a:solidFill>
                 <a:latin typeface="微软雅黑"/>
               </a:rPr>
-              <a:t>53 次提交、9 天，按提交信息可以分成八个阶段</a:t>
+              <a:t>69 次提交、9 天，按提交信息可以分成八个阶段</a:t>
             </a:r>
           </a:p>
         </p:txBody>
@@ -5480,7 +5480,7 @@
                 </a:solidFill>
                 <a:latin typeface="微软雅黑"/>
               </a:rPr>
-              <a:t>真正的风险不是界面，是「三端算出来的字节不一样」。所以第一步就是抽象加密后端 + 跑同一套测试向量。</a:t>
+              <a:t>真正的风险不是界面，是「各端算出来的字节不一样」。所以第一步就是抽象加密后端 + 跑同一套测试向量。</a:t>
             </a:r>
           </a:p>
         </p:txBody>
@@ -6417,7 +6417,7 @@
                           </a:solidFill>
                           <a:latin typeface="微软雅黑"/>
                         </a:rPr>
-                        <a:t>三端互通实测</a:t>
+                        <a:t>四端互通实测</a:t>
                       </a:r>
                     </a:p>
                   </a:txBody>
@@ -6444,7 +6444,7 @@
                           </a:solidFill>
                           <a:latin typeface="微软雅黑"/>
                         </a:rPr>
-                        <a:t>Linux 客户端 ↔ Windows 服务端、Windows 协议层 ↔ Linux 服务端，双向加密握手成功</a:t>
+                        <a:t>四端同服务器互相收发；macOS ↔ Windows / Linux / Android 双向互发、附件互传</a:t>
                       </a:r>
                     </a:p>
                   </a:txBody>
@@ -14372,7 +14372,7 @@
                 </a:solidFill>
                 <a:latin typeface="微软雅黑"/>
               </a:rPr>
-              <a:t>一句话：不依赖任何聊天框架，从协议到加密自己搭的三端聊天系统</a:t>
+              <a:t>一句话：不依赖任何聊天框架，从协议到加密自己搭的四端聊天系统</a:t>
             </a:r>
           </a:p>
         </p:txBody>
@@ -14471,7 +14471,7 @@
                 </a:solidFill>
                 <a:latin typeface="微软雅黑"/>
               </a:rPr>
-              <a:t>· 三端互通：Windows、安卓、Linux 互发消息 / 文件 / 语音</a:t>
+              <a:t>· 四端互通：Windows、安卓、Linux、macOS 互发消息 / 文件 / 语音</a:t>
             </a:r>
           </a:p>
           <a:p>
@@ -14566,7 +14566,7 @@
                 </a:solidFill>
                 <a:latin typeface="微软雅黑"/>
               </a:rPr>
-              <a:t>· 三端字节级一致：同一条消息在三端解出来必须一模一样</a:t>
+              <a:t>· 四端字节级一致：同一条消息在四端解出来必须一模一样</a:t>
             </a:r>
           </a:p>
           <a:p>
@@ -14770,7 +14770,7 @@
                 </a:solidFill>
                 <a:latin typeface="微软雅黑"/>
               </a:rPr>
-              <a:t>· 有测试：三端合计 990+ 项检查全部通过</a:t>
+              <a:t>· 有测试：四端合计 2115 项检查（C++ 1787 + 安卓 328）</a:t>
             </a:r>
           </a:p>
         </p:txBody>
@@ -14898,7 +14898,7 @@
                 </a:solidFill>
                 <a:latin typeface="微软雅黑"/>
               </a:rPr>
-              <a:t>· C++ 协议层 + 服务端 + Windows 客户端：13,852 行</a:t>
+              <a:t>· C++ 协议层 + 服务端 + 客户端：17,817 行</a:t>
             </a:r>
           </a:p>
           <a:p>
@@ -14936,7 +14936,7 @@
                 </a:solidFill>
                 <a:latin typeface="微软雅黑"/>
               </a:rPr>
-              <a:t>· Linux 客户端：2,602 行</a:t>
+              <a:t>· 测试代码：4,064 行（16 个测试程序）</a:t>
             </a:r>
           </a:p>
           <a:p>
@@ -14955,7 +14955,7 @@
                 </a:solidFill>
                 <a:latin typeface="微软雅黑"/>
               </a:rPr>
-              <a:t>· 测试代码：3,738 行（16 个测试程序）</a:t>
+              <a:t>· 另有工具脚本 5,190 行（压测、画图、打包）</a:t>
             </a:r>
           </a:p>
         </p:txBody>
@@ -16879,7 +16879,7 @@
                 </a:solidFill>
                 <a:latin typeface="微软雅黑"/>
               </a:rPr>
-              <a:t>· 登录 / 收发消息（与三个平台双向互发）</a:t>
+              <a:t>· 登录 / 收发消息（与另外三个平台双向互发）</a:t>
             </a:r>
           </a:p>
           <a:p>
@@ -18972,7 +18972,7 @@
                           </a:solidFill>
                           <a:latin typeface="微软雅黑"/>
                         </a:rPr>
-                        <a:t>三端握手永远失败，但没有任何报错</a:t>
+                        <a:t>跨端握手永远失败，但没有任何报错</a:t>
                       </a:r>
                     </a:p>
                   </a:txBody>
@@ -19971,7 +19971,7 @@
                 </a:solidFill>
                 <a:latin typeface="微软雅黑"/>
               </a:rPr>
-              <a:t>   逐字节 diff，三端一致的三个坑就是这么找出来的</a:t>
+              <a:t>   逐字节 diff，跨端一致的三个坑就是这么找出来的</a:t>
             </a:r>
           </a:p>
           <a:p>
@@ -21744,7 +21744,7 @@
                 </a:solidFill>
                 <a:latin typeface="微软雅黑"/>
               </a:rPr>
-              <a:t>· 三端一致性不是靠小心，是靠同一套测试向量 + 明确的书面约定</a:t>
+              <a:t>· 跨端一致性不是靠小心，是靠同一套测试向量 + 明确的书面约定</a:t>
             </a:r>
           </a:p>
           <a:p>
@@ -22411,7 +22411,7 @@
                 </a:solidFill>
                 <a:latin typeface="微软雅黑"/>
               </a:rPr>
-              <a:t>Windows / 安卓 / Linux 三端 · 端到端加密 · 990+ 项测试检查</a:t>
+              <a:t>Windows / 安卓 / Linux / macOS 四端 · 端到端加密 · 2115 项测试检查</a:t>
             </a:r>
           </a:p>
           <a:p>
@@ -22756,7 +22756,7 @@
                 </a:solidFill>
                 <a:latin typeface="微软雅黑"/>
               </a:rPr>
-              <a:t>三个客户端共用一份协议层源码，服务端两头都能跑</a:t>
+              <a:t>四个客户端共用一份协议层源码，服务端三端都能跑</a:t>
             </a:r>
           </a:p>
         </p:txBody>
@@ -22822,7 +22822,7 @@
                 </a:solidFill>
                 <a:latin typeface="微软雅黑"/>
               </a:rPr>
-              <a:t>Linux 端和服务端共用同一份 C++ 协议层；安卓端是 Kotlin 重写，靠同一套测试向量保证行为一致</a:t>
+              <a:t>Windows / Linux / macOS 三个客户端与服务端共用同一份 C++ 协议层；安卓端是 Kotlin 重写，靠同一套测试向量保证行为一致</a:t>
             </a:r>
           </a:p>
         </p:txBody>
@@ -23110,7 +23110,7 @@
                 </a:solidFill>
                 <a:latin typeface="微软雅黑"/>
               </a:rPr>
-              <a:t>三端都有的功能，以及各自特有的</a:t>
+              <a:t>四端都有的功能，以及各自特有的</a:t>
             </a:r>
           </a:p>
         </p:txBody>
@@ -23125,7 +23125,7 @@
         </p:nvGraphicFramePr>
         <p:xfrm>
           <a:off x="566928" y="1188720"/>
-          <a:ext cx="11064237" cy="4389120"/>
+          <a:ext cx="11064239" cy="4389120"/>
         </p:xfrm>
         <a:graphic>
           <a:graphicData uri="http://schemas.openxmlformats.org/drawingml/2006/table">
@@ -23134,10 +23134,11 @@
                 <a:tableStyleId>{5C22544A-7EE6-4342-B048-85BDC9FD1C3A}</a:tableStyleId>
               </a:tblPr>
               <a:tblGrid>
-                <a:gridCol w="4754880"/>
-                <a:gridCol w="2103119"/>
-                <a:gridCol w="2103119"/>
-                <a:gridCol w="2103119"/>
+                <a:gridCol w="3749039"/>
+                <a:gridCol w="1828800"/>
+                <a:gridCol w="1828800"/>
+                <a:gridCol w="1828800"/>
+                <a:gridCol w="1828800"/>
               </a:tblGrid>
               <a:tr h="399010">
                 <a:tc>
@@ -23248,6 +23249,33 @@
                     </a:solidFill>
                   </a:tcPr>
                 </a:tc>
+                <a:tc>
+                  <a:txBody>
+                    <a:bodyPr/>
+                    <a:lstStyle/>
+                    <a:p>
+                      <a:pPr>
+                        <a:lnSpc>
+                          <a:spcPct val="100000"/>
+                        </a:lnSpc>
+                      </a:pPr>
+                      <a:r>
+                        <a:rPr sz="1200" b="1">
+                          <a:solidFill>
+                            <a:srgbClr val="FFFFFF"/>
+                          </a:solidFill>
+                          <a:latin typeface="微软雅黑"/>
+                        </a:rPr>
+                        <a:t>macOS</a:t>
+                      </a:r>
+                    </a:p>
+                  </a:txBody>
+                  <a:tcPr marL="73152" marR="54864" marT="18288" marB="18288" anchor="ctr">
+                    <a:solidFill>
+                      <a:srgbClr val="16284A"/>
+                    </a:solidFill>
+                  </a:tcPr>
+                </a:tc>
               </a:tr>
               <a:tr h="399010">
                 <a:tc>
@@ -23268,6 +23296,33 @@
                           <a:latin typeface="微软雅黑"/>
                         </a:rPr>
                         <a:t>连接 / 注册 / 登录 / 改密码</a:t>
+                      </a:r>
+                    </a:p>
+                  </a:txBody>
+                  <a:tcPr marL="73152" marR="54864" marT="18288" marB="18288" anchor="ctr">
+                    <a:solidFill>
+                      <a:srgbClr val="FFFFFF"/>
+                    </a:solidFill>
+                  </a:tcPr>
+                </a:tc>
+                <a:tc>
+                  <a:txBody>
+                    <a:bodyPr/>
+                    <a:lstStyle/>
+                    <a:p>
+                      <a:pPr>
+                        <a:lnSpc>
+                          <a:spcPct val="100000"/>
+                        </a:lnSpc>
+                      </a:pPr>
+                      <a:r>
+                        <a:rPr sz="1200" b="0">
+                          <a:solidFill>
+                            <a:srgbClr val="202938"/>
+                          </a:solidFill>
+                          <a:latin typeface="微软雅黑"/>
+                        </a:rPr>
+                        <a:t>有</a:t>
                       </a:r>
                     </a:p>
                   </a:txBody>
@@ -23468,6 +23523,33 @@
                     </a:solidFill>
                   </a:tcPr>
                 </a:tc>
+                <a:tc>
+                  <a:txBody>
+                    <a:bodyPr/>
+                    <a:lstStyle/>
+                    <a:p>
+                      <a:pPr>
+                        <a:lnSpc>
+                          <a:spcPct val="100000"/>
+                        </a:lnSpc>
+                      </a:pPr>
+                      <a:r>
+                        <a:rPr sz="1200" b="0">
+                          <a:solidFill>
+                            <a:srgbClr val="202938"/>
+                          </a:solidFill>
+                          <a:latin typeface="微软雅黑"/>
+                        </a:rPr>
+                        <a:t>有</a:t>
+                      </a:r>
+                    </a:p>
+                  </a:txBody>
+                  <a:tcPr marL="73152" marR="54864" marT="18288" marB="18288" anchor="ctr">
+                    <a:solidFill>
+                      <a:srgbClr val="F3F5F8"/>
+                    </a:solidFill>
+                  </a:tcPr>
+                </a:tc>
               </a:tr>
               <a:tr h="399010">
                 <a:tc>
@@ -23578,6 +23660,33 @@
                     </a:solidFill>
                   </a:tcPr>
                 </a:tc>
+                <a:tc>
+                  <a:txBody>
+                    <a:bodyPr/>
+                    <a:lstStyle/>
+                    <a:p>
+                      <a:pPr>
+                        <a:lnSpc>
+                          <a:spcPct val="100000"/>
+                        </a:lnSpc>
+                      </a:pPr>
+                      <a:r>
+                        <a:rPr sz="1200" b="0">
+                          <a:solidFill>
+                            <a:srgbClr val="202938"/>
+                          </a:solidFill>
+                          <a:latin typeface="微软雅黑"/>
+                        </a:rPr>
+                        <a:t>有</a:t>
+                      </a:r>
+                    </a:p>
+                  </a:txBody>
+                  <a:tcPr marL="73152" marR="54864" marT="18288" marB="18288" anchor="ctr">
+                    <a:solidFill>
+                      <a:srgbClr val="FFFFFF"/>
+                    </a:solidFill>
+                  </a:tcPr>
+                </a:tc>
               </a:tr>
               <a:tr h="399010">
                 <a:tc>
@@ -23598,6 +23707,33 @@
                           <a:latin typeface="微软雅黑"/>
                         </a:rPr>
                         <a:t>文件上传下载（含进度、重名处理）</a:t>
+                      </a:r>
+                    </a:p>
+                  </a:txBody>
+                  <a:tcPr marL="73152" marR="54864" marT="18288" marB="18288" anchor="ctr">
+                    <a:solidFill>
+                      <a:srgbClr val="F3F5F8"/>
+                    </a:solidFill>
+                  </a:tcPr>
+                </a:tc>
+                <a:tc>
+                  <a:txBody>
+                    <a:bodyPr/>
+                    <a:lstStyle/>
+                    <a:p>
+                      <a:pPr>
+                        <a:lnSpc>
+                          <a:spcPct val="100000"/>
+                        </a:lnSpc>
+                      </a:pPr>
+                      <a:r>
+                        <a:rPr sz="1200" b="0">
+                          <a:solidFill>
+                            <a:srgbClr val="202938"/>
+                          </a:solidFill>
+                          <a:latin typeface="微软雅黑"/>
+                        </a:rPr>
+                        <a:t>有</a:t>
                       </a:r>
                     </a:p>
                   </a:txBody>
@@ -23798,6 +23934,33 @@
                     </a:solidFill>
                   </a:tcPr>
                 </a:tc>
+                <a:tc>
+                  <a:txBody>
+                    <a:bodyPr/>
+                    <a:lstStyle/>
+                    <a:p>
+                      <a:pPr>
+                        <a:lnSpc>
+                          <a:spcPct val="100000"/>
+                        </a:lnSpc>
+                      </a:pPr>
+                      <a:r>
+                        <a:rPr sz="1200" b="0">
+                          <a:solidFill>
+                            <a:srgbClr val="202938"/>
+                          </a:solidFill>
+                          <a:latin typeface="微软雅黑"/>
+                        </a:rPr>
+                        <a:t>未测</a:t>
+                      </a:r>
+                    </a:p>
+                  </a:txBody>
+                  <a:tcPr marL="73152" marR="54864" marT="18288" marB="18288" anchor="ctr">
+                    <a:solidFill>
+                      <a:srgbClr val="FFFFFF"/>
+                    </a:solidFill>
+                  </a:tcPr>
+                </a:tc>
               </a:tr>
               <a:tr h="399010">
                 <a:tc>
@@ -23908,6 +24071,33 @@
                     </a:solidFill>
                   </a:tcPr>
                 </a:tc>
+                <a:tc>
+                  <a:txBody>
+                    <a:bodyPr/>
+                    <a:lstStyle/>
+                    <a:p>
+                      <a:pPr>
+                        <a:lnSpc>
+                          <a:spcPct val="100000"/>
+                        </a:lnSpc>
+                      </a:pPr>
+                      <a:r>
+                        <a:rPr sz="1200" b="0">
+                          <a:solidFill>
+                            <a:srgbClr val="202938"/>
+                          </a:solidFill>
+                          <a:latin typeface="微软雅黑"/>
+                        </a:rPr>
+                        <a:t>贴纸按附件收发</a:t>
+                      </a:r>
+                    </a:p>
+                  </a:txBody>
+                  <a:tcPr marL="73152" marR="54864" marT="18288" marB="18288" anchor="ctr">
+                    <a:solidFill>
+                      <a:srgbClr val="F3F5F8"/>
+                    </a:solidFill>
+                  </a:tcPr>
+                </a:tc>
               </a:tr>
               <a:tr h="399010">
                 <a:tc>
@@ -23928,6 +24118,33 @@
                           <a:latin typeface="微软雅黑"/>
                         </a:rPr>
                         <a:t>指令 + Tab 补全 / 历史</a:t>
+                      </a:r>
+                    </a:p>
+                  </a:txBody>
+                  <a:tcPr marL="73152" marR="54864" marT="18288" marB="18288" anchor="ctr">
+                    <a:solidFill>
+                      <a:srgbClr val="FFFFFF"/>
+                    </a:solidFill>
+                  </a:tcPr>
+                </a:tc>
+                <a:tc>
+                  <a:txBody>
+                    <a:bodyPr/>
+                    <a:lstStyle/>
+                    <a:p>
+                      <a:pPr>
+                        <a:lnSpc>
+                          <a:spcPct val="100000"/>
+                        </a:lnSpc>
+                      </a:pPr>
+                      <a:r>
+                        <a:rPr sz="1200" b="0">
+                          <a:solidFill>
+                            <a:srgbClr val="202938"/>
+                          </a:solidFill>
+                          <a:latin typeface="微软雅黑"/>
+                        </a:rPr>
+                        <a:t>有</a:t>
                       </a:r>
                     </a:p>
                   </a:txBody>
@@ -24128,6 +24345,33 @@
                     </a:solidFill>
                   </a:tcPr>
                 </a:tc>
+                <a:tc>
+                  <a:txBody>
+                    <a:bodyPr/>
+                    <a:lstStyle/>
+                    <a:p>
+                      <a:pPr>
+                        <a:lnSpc>
+                          <a:spcPct val="100000"/>
+                        </a:lnSpc>
+                      </a:pPr>
+                      <a:r>
+                        <a:rPr sz="1200" b="0">
+                          <a:solidFill>
+                            <a:srgbClr val="202938"/>
+                          </a:solidFill>
+                          <a:latin typeface="微软雅黑"/>
+                        </a:rPr>
+                        <a:t>无</a:t>
+                      </a:r>
+                    </a:p>
+                  </a:txBody>
+                  <a:tcPr marL="73152" marR="54864" marT="18288" marB="18288" anchor="ctr">
+                    <a:solidFill>
+                      <a:srgbClr val="F3F5F8"/>
+                    </a:solidFill>
+                  </a:tcPr>
+                </a:tc>
               </a:tr>
               <a:tr h="399010">
                 <a:tc>
@@ -24229,6 +24473,33 @@
                           <a:latin typeface="微软雅黑"/>
                         </a:rPr>
                         <a:t>跟随终端</a:t>
+                      </a:r>
+                    </a:p>
+                  </a:txBody>
+                  <a:tcPr marL="73152" marR="54864" marT="18288" marB="18288" anchor="ctr">
+                    <a:solidFill>
+                      <a:srgbClr val="FFFFFF"/>
+                    </a:solidFill>
+                  </a:tcPr>
+                </a:tc>
+                <a:tc>
+                  <a:txBody>
+                    <a:bodyPr/>
+                    <a:lstStyle/>
+                    <a:p>
+                      <a:pPr>
+                        <a:lnSpc>
+                          <a:spcPct val="100000"/>
+                        </a:lnSpc>
+                      </a:pPr>
+                      <a:r>
+                        <a:rPr sz="1200" b="0">
+                          <a:solidFill>
+                            <a:srgbClr val="202938"/>
+                          </a:solidFill>
+                          <a:latin typeface="微软雅黑"/>
+                        </a:rPr>
+                        <a:t>跟随系统</a:t>
                       </a:r>
                     </a:p>
                   </a:txBody>
@@ -24348,6 +24619,33 @@
                     </a:solidFill>
                   </a:tcPr>
                 </a:tc>
+                <a:tc>
+                  <a:txBody>
+                    <a:bodyPr/>
+                    <a:lstStyle/>
+                    <a:p>
+                      <a:pPr>
+                        <a:lnSpc>
+                          <a:spcPct val="100000"/>
+                        </a:lnSpc>
+                      </a:pPr>
+                      <a:r>
+                        <a:rPr sz="1200" b="0">
+                          <a:solidFill>
+                            <a:srgbClr val="202938"/>
+                          </a:solidFill>
+                          <a:latin typeface="微软雅黑"/>
+                        </a:rPr>
+                        <a:t>Cocoa 原生</a:t>
+                      </a:r>
+                    </a:p>
+                  </a:txBody>
+                  <a:tcPr marL="73152" marR="54864" marT="18288" marB="18288" anchor="ctr">
+                    <a:solidFill>
+                      <a:srgbClr val="F3F5F8"/>
+                    </a:solidFill>
+                  </a:tcPr>
+                </a:tc>
               </a:tr>
             </a:tbl>
           </a:graphicData>
@@ -24390,7 +24688,7 @@
                 </a:solidFill>
                 <a:latin typeface="微软雅黑"/>
               </a:rPr>
-              <a:t>Linux 端是终端界面，因此没有图片预览；贴纸按普通附件收发，不做内联渲染</a:t>
+              <a:t>Linux 端是终端界面，因此没有图片预览；贴纸按普通附件收发，不做内联渲染。macOS 的语音消息这一项没测</a:t>
             </a:r>
           </a:p>
         </p:txBody>
@@ -25174,7 +25472,7 @@
                 </a:solidFill>
                 <a:latin typeface="微软雅黑"/>
               </a:rPr>
-              <a:t>· 好处三：三端实现都短，安卓 Kotlin 和 C++ 各写一遍也不累</a:t>
+              <a:t>· 好处三：实现只有两份（C++ 与 Kotlin），macOS 直接复用 C++ 那份</a:t>
             </a:r>
           </a:p>
           <a:p>
@@ -25355,7 +25653,7 @@
                 </a:solidFill>
                 <a:latin typeface="微软雅黑"/>
               </a:rPr>
-              <a:t>附件种类字段（三端一致）</a:t>
+              <a:t>附件种类字段（四端一致）</a:t>
             </a:r>
           </a:p>
         </p:txBody>
@@ -25620,7 +25918,7 @@
                 </a:solidFill>
                 <a:latin typeface="微软雅黑"/>
               </a:rPr>
-              <a:t>&amp;a        快捷色（十六个，三端颜色表完全相同）</a:t>
+              <a:t>&amp;a        快捷色（十六个，四端颜色表完全相同）</a:t>
             </a:r>
           </a:p>
           <a:p>
@@ -26922,7 +27220,7 @@
                 </a:solidFill>
                 <a:latin typeface="微软雅黑"/>
               </a:rPr>
-              <a:t>三端一致：三处必须字节级相同的约定</a:t>
+              <a:t>四端一致：三处必须字节级相同的约定</a:t>
             </a:r>
           </a:p>
           <a:p>

--- a/dchat-项目介绍.pptx
+++ b/dchat-项目介绍.pptx
@@ -19637,7 +19637,7 @@
                 </a:solidFill>
                 <a:latin typeface="微软雅黑"/>
               </a:rPr>
-              <a:t>69 次提交、9 天，按提交信息可以分成八个阶段</a:t>
+              <a:t>69 次提交、9 天，按提交信息可以分成七个阶段</a:t>
             </a:r>
           </a:p>
         </p:txBody>
@@ -19651,8 +19651,8 @@
           <p:nvPr/>
         </p:nvGraphicFramePr>
         <p:xfrm>
-          <a:off x="566928" y="1188720"/>
-          <a:ext cx="11064239" cy="4572000"/>
+          <a:off x="566928" y="1143000"/>
+          <a:ext cx="11064239" cy="3246120"/>
         </p:xfrm>
         <a:graphic>
           <a:graphicData uri="http://schemas.openxmlformats.org/drawingml/2006/table">
@@ -19665,7 +19665,7 @@
                 <a:gridCol w="6396513"/>
                 <a:gridCol w="2766060"/>
               </a:tblGrid>
-              <a:tr h="571500">
+              <a:tr h="405765">
                 <a:tc>
                   <a:txBody>
                     <a:bodyPr/>
@@ -19677,7 +19677,7 @@
                         </a:lnSpc>
                       </a:pPr>
                       <a:r>
-                        <a:rPr sz="1150" b="1">
+                        <a:rPr sz="1100" b="1">
                           <a:solidFill>
                             <a:srgbClr val="FFFFFF"/>
                           </a:solidFill>
@@ -19704,7 +19704,7 @@
                         </a:lnSpc>
                       </a:pPr>
                       <a:r>
-                        <a:rPr sz="1150" b="1">
+                        <a:rPr sz="1100" b="1">
                           <a:solidFill>
                             <a:srgbClr val="FFFFFF"/>
                           </a:solidFill>
@@ -19731,7 +19731,7 @@
                         </a:lnSpc>
                       </a:pPr>
                       <a:r>
-                        <a:rPr sz="1150" b="1">
+                        <a:rPr sz="1100" b="1">
                           <a:solidFill>
                             <a:srgbClr val="FFFFFF"/>
                           </a:solidFill>
@@ -19748,7 +19748,7 @@
                   </a:tcPr>
                 </a:tc>
               </a:tr>
-              <a:tr h="571500">
+              <a:tr h="405765">
                 <a:tc>
                   <a:txBody>
                     <a:bodyPr/>
@@ -19760,7 +19760,7 @@
                         </a:lnSpc>
                       </a:pPr>
                       <a:r>
-                        <a:rPr sz="1150" b="0">
+                        <a:rPr sz="1100" b="0">
                           <a:solidFill>
                             <a:srgbClr val="202938"/>
                           </a:solidFill>
@@ -19787,7 +19787,7 @@
                         </a:lnSpc>
                       </a:pPr>
                       <a:r>
-                        <a:rPr sz="1150" b="0">
+                        <a:rPr sz="1100" b="0">
                           <a:solidFill>
                             <a:srgbClr val="202938"/>
                           </a:solidFill>
@@ -19814,7 +19814,7 @@
                         </a:lnSpc>
                       </a:pPr>
                       <a:r>
-                        <a:rPr sz="1150" b="0">
+                        <a:rPr sz="1100" b="0">
                           <a:solidFill>
                             <a:srgbClr val="202938"/>
                           </a:solidFill>
@@ -19831,7 +19831,7 @@
                   </a:tcPr>
                 </a:tc>
               </a:tr>
-              <a:tr h="571500">
+              <a:tr h="405765">
                 <a:tc>
                   <a:txBody>
                     <a:bodyPr/>
@@ -19843,7 +19843,7 @@
                         </a:lnSpc>
                       </a:pPr>
                       <a:r>
-                        <a:rPr sz="1150" b="0">
+                        <a:rPr sz="1100" b="0">
                           <a:solidFill>
                             <a:srgbClr val="202938"/>
                           </a:solidFill>
@@ -19870,7 +19870,7 @@
                         </a:lnSpc>
                       </a:pPr>
                       <a:r>
-                        <a:rPr sz="1150" b="0">
+                        <a:rPr sz="1100" b="0">
                           <a:solidFill>
                             <a:srgbClr val="202938"/>
                           </a:solidFill>
@@ -19897,7 +19897,7 @@
                         </a:lnSpc>
                       </a:pPr>
                       <a:r>
-                        <a:rPr sz="1150" b="0">
+                        <a:rPr sz="1100" b="0">
                           <a:solidFill>
                             <a:srgbClr val="202938"/>
                           </a:solidFill>
@@ -19914,7 +19914,7 @@
                   </a:tcPr>
                 </a:tc>
               </a:tr>
-              <a:tr h="571500">
+              <a:tr h="405765">
                 <a:tc>
                   <a:txBody>
                     <a:bodyPr/>
@@ -19926,7 +19926,7 @@
                         </a:lnSpc>
                       </a:pPr>
                       <a:r>
-                        <a:rPr sz="1150" b="0">
+                        <a:rPr sz="1100" b="0">
                           <a:solidFill>
                             <a:srgbClr val="202938"/>
                           </a:solidFill>
@@ -19953,7 +19953,7 @@
                         </a:lnSpc>
                       </a:pPr>
                       <a:r>
-                        <a:rPr sz="1150" b="0">
+                        <a:rPr sz="1100" b="0">
                           <a:solidFill>
                             <a:srgbClr val="202938"/>
                           </a:solidFill>
@@ -19980,7 +19980,7 @@
                         </a:lnSpc>
                       </a:pPr>
                       <a:r>
-                        <a:rPr sz="1150" b="0">
+                        <a:rPr sz="1100" b="0">
                           <a:solidFill>
                             <a:srgbClr val="202938"/>
                           </a:solidFill>
@@ -19997,7 +19997,7 @@
                   </a:tcPr>
                 </a:tc>
               </a:tr>
-              <a:tr h="571500">
+              <a:tr h="405765">
                 <a:tc>
                   <a:txBody>
                     <a:bodyPr/>
@@ -20009,7 +20009,7 @@
                         </a:lnSpc>
                       </a:pPr>
                       <a:r>
-                        <a:rPr sz="1150" b="0">
+                        <a:rPr sz="1100" b="0">
                           <a:solidFill>
                             <a:srgbClr val="202938"/>
                           </a:solidFill>
@@ -20036,7 +20036,7 @@
                         </a:lnSpc>
                       </a:pPr>
                       <a:r>
-                        <a:rPr sz="1150" b="0">
+                        <a:rPr sz="1100" b="0">
                           <a:solidFill>
                             <a:srgbClr val="202938"/>
                           </a:solidFill>
@@ -20063,7 +20063,7 @@
                         </a:lnSpc>
                       </a:pPr>
                       <a:r>
-                        <a:rPr sz="1150" b="0">
+                        <a:rPr sz="1100" b="0">
                           <a:solidFill>
                             <a:srgbClr val="202938"/>
                           </a:solidFill>
@@ -20080,7 +20080,7 @@
                   </a:tcPr>
                 </a:tc>
               </a:tr>
-              <a:tr h="571500">
+              <a:tr h="405765">
                 <a:tc>
                   <a:txBody>
                     <a:bodyPr/>
@@ -20092,7 +20092,7 @@
                         </a:lnSpc>
                       </a:pPr>
                       <a:r>
-                        <a:rPr sz="1150" b="0">
+                        <a:rPr sz="1100" b="0">
                           <a:solidFill>
                             <a:srgbClr val="202938"/>
                           </a:solidFill>
@@ -20119,7 +20119,7 @@
                         </a:lnSpc>
                       </a:pPr>
                       <a:r>
-                        <a:rPr sz="1150" b="0">
+                        <a:rPr sz="1100" b="0">
                           <a:solidFill>
                             <a:srgbClr val="202938"/>
                           </a:solidFill>
@@ -20146,7 +20146,7 @@
                         </a:lnSpc>
                       </a:pPr>
                       <a:r>
-                        <a:rPr sz="1150" b="0">
+                        <a:rPr sz="1100" b="0">
                           <a:solidFill>
                             <a:srgbClr val="202938"/>
                           </a:solidFill>
@@ -20163,7 +20163,7 @@
                   </a:tcPr>
                 </a:tc>
               </a:tr>
-              <a:tr h="571500">
+              <a:tr h="405765">
                 <a:tc>
                   <a:txBody>
                     <a:bodyPr/>
@@ -20175,7 +20175,7 @@
                         </a:lnSpc>
                       </a:pPr>
                       <a:r>
-                        <a:rPr sz="1150" b="0">
+                        <a:rPr sz="1100" b="0">
                           <a:solidFill>
                             <a:srgbClr val="202938"/>
                           </a:solidFill>
@@ -20202,7 +20202,7 @@
                         </a:lnSpc>
                       </a:pPr>
                       <a:r>
-                        <a:rPr sz="1150" b="0">
+                        <a:rPr sz="1100" b="0">
                           <a:solidFill>
                             <a:srgbClr val="202938"/>
                           </a:solidFill>
@@ -20229,7 +20229,7 @@
                         </a:lnSpc>
                       </a:pPr>
                       <a:r>
-                        <a:rPr sz="1150" b="0">
+                        <a:rPr sz="1100" b="0">
                           <a:solidFill>
                             <a:srgbClr val="202938"/>
                           </a:solidFill>
@@ -20246,7 +20246,7 @@
                   </a:tcPr>
                 </a:tc>
               </a:tr>
-              <a:tr h="571500">
+              <a:tr h="405765">
                 <a:tc>
                   <a:txBody>
                     <a:bodyPr/>
@@ -20258,7 +20258,7 @@
                         </a:lnSpc>
                       </a:pPr>
                       <a:r>
-                        <a:rPr sz="1150" b="0">
+                        <a:rPr sz="1100" b="0">
                           <a:solidFill>
                             <a:srgbClr val="202938"/>
                           </a:solidFill>
@@ -20285,7 +20285,7 @@
                         </a:lnSpc>
                       </a:pPr>
                       <a:r>
-                        <a:rPr sz="1150" b="0">
+                        <a:rPr sz="1100" b="0">
                           <a:solidFill>
                             <a:srgbClr val="202938"/>
                           </a:solidFill>
@@ -20312,7 +20312,7 @@
                         </a:lnSpc>
                       </a:pPr>
                       <a:r>
-                        <a:rPr sz="1150" b="0">
+                        <a:rPr sz="1100" b="0">
                           <a:solidFill>
                             <a:srgbClr val="202938"/>
                           </a:solidFill>
@@ -20341,8 +20341,8 @@
         </p:nvSpPr>
         <p:spPr>
           <a:xfrm>
-            <a:off x="566928" y="5074920"/>
-            <a:ext cx="5440680" cy="1600200"/>
+            <a:off x="566928" y="4526280"/>
+            <a:ext cx="5440680" cy="1920240"/>
           </a:xfrm>
           <a:prstGeom prst="rect">
             <a:avLst/>
@@ -20385,7 +20385,7 @@
         </p:nvSpPr>
         <p:spPr>
           <a:xfrm>
-            <a:off x="713232" y="5166359"/>
+            <a:off x="713232" y="4617720"/>
             <a:ext cx="5148072" cy="365760"/>
           </a:xfrm>
           <a:prstGeom prst="rect">
@@ -20427,8 +20427,8 @@
         </p:nvSpPr>
         <p:spPr>
           <a:xfrm>
-            <a:off x="713232" y="5532120"/>
-            <a:ext cx="5148072" cy="1051560"/>
+            <a:off x="713232" y="4983480"/>
+            <a:ext cx="5148072" cy="1371600"/>
           </a:xfrm>
           <a:prstGeom prst="rect">
             <a:avLst/>
@@ -20507,8 +20507,8 @@
         </p:nvSpPr>
         <p:spPr>
           <a:xfrm>
-            <a:off x="6199632" y="5074920"/>
-            <a:ext cx="5440680" cy="1600200"/>
+            <a:off x="6199632" y="4526280"/>
+            <a:ext cx="5440680" cy="1920240"/>
           </a:xfrm>
           <a:prstGeom prst="rect">
             <a:avLst/>
@@ -20551,7 +20551,7 @@
         </p:nvSpPr>
         <p:spPr>
           <a:xfrm>
-            <a:off x="6345936" y="5166359"/>
+            <a:off x="6345936" y="4617720"/>
             <a:ext cx="5148072" cy="365760"/>
           </a:xfrm>
           <a:prstGeom prst="rect">
@@ -20593,8 +20593,8 @@
         </p:nvSpPr>
         <p:spPr>
           <a:xfrm>
-            <a:off x="6345936" y="5532120"/>
-            <a:ext cx="5148072" cy="1051560"/>
+            <a:off x="6345936" y="4983480"/>
+            <a:ext cx="5148072" cy="1371600"/>
           </a:xfrm>
           <a:prstGeom prst="rect">
             <a:avLst/>

--- a/dchat-项目介绍.pptx
+++ b/dchat-项目介绍.pptx
@@ -24,6 +24,7 @@
     <p:sldId id="272" r:id="rId23"/>
     <p:sldId id="273" r:id="rId24"/>
     <p:sldId id="274" r:id="rId25"/>
+    <p:sldId id="275" r:id="rId26"/>
   </p:sldIdLst>
   <p:sldSz cx="12191695" cy="6858000" type="screen4x3"/>
   <p:notesSz cx="6858000" cy="9144000"/>
@@ -3460,7 +3461,7 @@
                 </a:solidFill>
                 <a:latin typeface="微软雅黑"/>
               </a:rPr>
-              <a:t>2115 项测试全过   ·   端到端加密   ·   压测与攻击实测防护生效   ·   内存稳定 10 MB</a:t>
+              <a:t>2231 项测试全过   ·   端到端加密   ·   压测与攻击实测防护生效   ·   内存稳定 10 MB</a:t>
             </a:r>
           </a:p>
         </p:txBody>
@@ -6531,6 +6532,1524 @@
                 </a:solidFill>
                 <a:latin typeface="微软雅黑"/>
               </a:rPr>
+              <a:t>补上三项能力：历史落盘 · 离线消息 · 断点续传</a:t>
+            </a:r>
+          </a:p>
+          <a:p>
+            <a:r>
+              <a:rPr sz="1300">
+                <a:solidFill>
+                  <a:srgbClr val="A9C2E8"/>
+                </a:solidFill>
+                <a:latin typeface="微软雅黑"/>
+              </a:rPr>
+              <a:t>都是「以前直接丢掉」的东西：重启后记录没了、你不在线消息没了、断了要重下</a:t>
+            </a:r>
+          </a:p>
+        </p:txBody>
+      </p:sp>
+      <p:sp>
+        <p:nvSpPr>
+          <p:cNvPr id="3" name="Rectangle 2"/>
+          <p:cNvSpPr/>
+          <p:nvPr/>
+        </p:nvSpPr>
+        <p:spPr>
+          <a:xfrm>
+            <a:off x="566928" y="1143000"/>
+            <a:ext cx="3611880" cy="2651760"/>
+          </a:xfrm>
+          <a:prstGeom prst="rect">
+            <a:avLst/>
+          </a:prstGeom>
+          <a:solidFill>
+            <a:srgbClr val="E8F1FE"/>
+          </a:solidFill>
+          <a:ln w="15875">
+            <a:solidFill>
+              <a:srgbClr val="1F6FEB"/>
+            </a:solidFill>
+          </a:ln>
+          <a:effectLst/>
+        </p:spPr>
+        <p:style>
+          <a:lnRef idx="1">
+            <a:schemeClr val="accent1"/>
+          </a:lnRef>
+          <a:fillRef idx="3">
+            <a:schemeClr val="accent1"/>
+          </a:fillRef>
+          <a:effectRef idx="2">
+            <a:schemeClr val="accent1"/>
+          </a:effectRef>
+          <a:fontRef idx="minor">
+            <a:schemeClr val="lt1"/>
+          </a:fontRef>
+        </p:style>
+        <p:txBody>
+          <a:bodyPr rtlCol="0" anchor="ctr"/>
+          <a:lstStyle/>
+          <a:p/>
+        </p:txBody>
+      </p:sp>
+      <p:sp>
+        <p:nvSpPr>
+          <p:cNvPr id="4" name="TextBox 3"/>
+          <p:cNvSpPr txBox="1"/>
+          <p:nvPr/>
+        </p:nvSpPr>
+        <p:spPr>
+          <a:xfrm>
+            <a:off x="713232" y="1234440"/>
+            <a:ext cx="3319272" cy="365760"/>
+          </a:xfrm>
+          <a:prstGeom prst="rect">
+            <a:avLst/>
+          </a:prstGeom>
+          <a:noFill/>
+        </p:spPr>
+        <p:txBody>
+          <a:bodyPr wrap="square">
+            <a:spAutoFit/>
+          </a:bodyPr>
+          <a:lstStyle/>
+          <a:p>
+            <a:pPr algn="l">
+              <a:lnSpc>
+                <a:spcPct val="115000"/>
+              </a:lnSpc>
+              <a:spcAft>
+                <a:spcPts val="200"/>
+              </a:spcAft>
+            </a:pPr>
+            <a:r>
+              <a:rPr sz="1300">
+                <a:solidFill>
+                  <a:srgbClr val="1F6FEB"/>
+                </a:solidFill>
+                <a:latin typeface="微软雅黑"/>
+              </a:rPr>
+              <a:t>① 聊天历史落盘</a:t>
+            </a:r>
+          </a:p>
+        </p:txBody>
+      </p:sp>
+      <p:sp>
+        <p:nvSpPr>
+          <p:cNvPr id="5" name="TextBox 4"/>
+          <p:cNvSpPr txBox="1"/>
+          <p:nvPr/>
+        </p:nvSpPr>
+        <p:spPr>
+          <a:xfrm>
+            <a:off x="713232" y="1600200"/>
+            <a:ext cx="3319272" cy="2103120"/>
+          </a:xfrm>
+          <a:prstGeom prst="rect">
+            <a:avLst/>
+          </a:prstGeom>
+          <a:noFill/>
+        </p:spPr>
+        <p:txBody>
+          <a:bodyPr wrap="square">
+            <a:spAutoFit/>
+          </a:bodyPr>
+          <a:lstStyle/>
+          <a:p>
+            <a:pPr algn="l">
+              <a:lnSpc>
+                <a:spcPct val="115000"/>
+              </a:lnSpc>
+              <a:spcAft>
+                <a:spcPts val="300"/>
+              </a:spcAft>
+            </a:pPr>
+            <a:r>
+              <a:rPr sz="1050">
+                <a:solidFill>
+                  <a:srgbClr val="202938"/>
+                </a:solidFill>
+                <a:latin typeface="微软雅黑"/>
+              </a:rPr>
+              <a:t>· 原来只在内存（std::deque），重启即丢</a:t>
+            </a:r>
+          </a:p>
+          <a:p>
+            <a:pPr algn="l">
+              <a:lnSpc>
+                <a:spcPct val="115000"/>
+              </a:lnSpc>
+              <a:spcAft>
+                <a:spcPts val="300"/>
+              </a:spcAft>
+            </a:pPr>
+            <a:r>
+              <a:rPr sz="1050">
+                <a:solidFill>
+                  <a:srgbClr val="202938"/>
+                </a:solidFill>
+                <a:latin typeface="微软雅黑"/>
+              </a:rPr>
+              <a:t>· 改成追加写 + 上限压实 + 每秒节流 flush</a:t>
+            </a:r>
+          </a:p>
+          <a:p>
+            <a:pPr algn="l">
+              <a:lnSpc>
+                <a:spcPct val="115000"/>
+              </a:lnSpc>
+              <a:spcAft>
+                <a:spcPts val="300"/>
+              </a:spcAft>
+            </a:pPr>
+            <a:r>
+              <a:rPr sz="1050">
+                <a:solidFill>
+                  <a:srgbClr val="202938"/>
+                </a:solidFill>
+                <a:latin typeface="微软雅黑"/>
+              </a:rPr>
+              <a:t>· 崩溃写了一半的那行会被丢弃（宁可少一条，</a:t>
+            </a:r>
+          </a:p>
+          <a:p>
+            <a:pPr algn="l">
+              <a:lnSpc>
+                <a:spcPct val="115000"/>
+              </a:lnSpc>
+              <a:spcAft>
+                <a:spcPts val="300"/>
+              </a:spcAft>
+            </a:pPr>
+            <a:r>
+              <a:rPr sz="1050">
+                <a:solidFill>
+                  <a:srgbClr val="202938"/>
+                </a:solidFill>
+                <a:latin typeface="微软雅黑"/>
+              </a:rPr>
+              <a:t>   不能凭空多一条残缺消息）</a:t>
+            </a:r>
+          </a:p>
+          <a:p>
+            <a:pPr algn="l">
+              <a:lnSpc>
+                <a:spcPct val="115000"/>
+              </a:lnSpc>
+              <a:spcAft>
+                <a:spcPts val="300"/>
+              </a:spcAft>
+            </a:pPr>
+            <a:r>
+              <a:rPr sz="1050">
+                <a:solidFill>
+                  <a:srgbClr val="202938"/>
+                </a:solidFill>
+                <a:latin typeface="微软雅黑"/>
+              </a:rPr>
+              <a:t>· 序号持久化：离线补发靠它判断谁还没看过</a:t>
+            </a:r>
+          </a:p>
+        </p:txBody>
+      </p:sp>
+      <p:sp>
+        <p:nvSpPr>
+          <p:cNvPr id="6" name="Rectangle 5"/>
+          <p:cNvSpPr/>
+          <p:nvPr/>
+        </p:nvSpPr>
+        <p:spPr>
+          <a:xfrm>
+            <a:off x="4315968" y="1143000"/>
+            <a:ext cx="3611880" cy="2651760"/>
+          </a:xfrm>
+          <a:prstGeom prst="rect">
+            <a:avLst/>
+          </a:prstGeom>
+          <a:solidFill>
+            <a:srgbClr val="E6F6EE"/>
+          </a:solidFill>
+          <a:ln w="15875">
+            <a:solidFill>
+              <a:srgbClr val="168A57"/>
+            </a:solidFill>
+          </a:ln>
+          <a:effectLst/>
+        </p:spPr>
+        <p:style>
+          <a:lnRef idx="1">
+            <a:schemeClr val="accent1"/>
+          </a:lnRef>
+          <a:fillRef idx="3">
+            <a:schemeClr val="accent1"/>
+          </a:fillRef>
+          <a:effectRef idx="2">
+            <a:schemeClr val="accent1"/>
+          </a:effectRef>
+          <a:fontRef idx="minor">
+            <a:schemeClr val="lt1"/>
+          </a:fontRef>
+        </p:style>
+        <p:txBody>
+          <a:bodyPr rtlCol="0" anchor="ctr"/>
+          <a:lstStyle/>
+          <a:p/>
+        </p:txBody>
+      </p:sp>
+      <p:sp>
+        <p:nvSpPr>
+          <p:cNvPr id="7" name="TextBox 6"/>
+          <p:cNvSpPr txBox="1"/>
+          <p:nvPr/>
+        </p:nvSpPr>
+        <p:spPr>
+          <a:xfrm>
+            <a:off x="4462272" y="1234440"/>
+            <a:ext cx="3319272" cy="365760"/>
+          </a:xfrm>
+          <a:prstGeom prst="rect">
+            <a:avLst/>
+          </a:prstGeom>
+          <a:noFill/>
+        </p:spPr>
+        <p:txBody>
+          <a:bodyPr wrap="square">
+            <a:spAutoFit/>
+          </a:bodyPr>
+          <a:lstStyle/>
+          <a:p>
+            <a:pPr algn="l">
+              <a:lnSpc>
+                <a:spcPct val="115000"/>
+              </a:lnSpc>
+              <a:spcAft>
+                <a:spcPts val="200"/>
+              </a:spcAft>
+            </a:pPr>
+            <a:r>
+              <a:rPr sz="1300">
+                <a:solidFill>
+                  <a:srgbClr val="168A57"/>
+                </a:solidFill>
+                <a:latin typeface="微软雅黑"/>
+              </a:rPr>
+              <a:t>② 离线消息</a:t>
+            </a:r>
+          </a:p>
+        </p:txBody>
+      </p:sp>
+      <p:sp>
+        <p:nvSpPr>
+          <p:cNvPr id="8" name="TextBox 7"/>
+          <p:cNvSpPr txBox="1"/>
+          <p:nvPr/>
+        </p:nvSpPr>
+        <p:spPr>
+          <a:xfrm>
+            <a:off x="4462272" y="1600200"/>
+            <a:ext cx="3319272" cy="2103120"/>
+          </a:xfrm>
+          <a:prstGeom prst="rect">
+            <a:avLst/>
+          </a:prstGeom>
+          <a:noFill/>
+        </p:spPr>
+        <p:txBody>
+          <a:bodyPr wrap="square">
+            <a:spAutoFit/>
+          </a:bodyPr>
+          <a:lstStyle/>
+          <a:p>
+            <a:pPr algn="l">
+              <a:lnSpc>
+                <a:spcPct val="115000"/>
+              </a:lnSpc>
+              <a:spcAft>
+                <a:spcPts val="300"/>
+              </a:spcAft>
+            </a:pPr>
+            <a:r>
+              <a:rPr sz="1050">
+                <a:solidFill>
+                  <a:srgbClr val="202938"/>
+                </a:solidFill>
+                <a:latin typeface="微软雅黑"/>
+              </a:rPr>
+              <a:t>· 每用户记「读到第几条」，存在 dchat-seen.txt</a:t>
+            </a:r>
+          </a:p>
+          <a:p>
+            <a:pPr algn="l">
+              <a:lnSpc>
+                <a:spcPct val="115000"/>
+              </a:lnSpc>
+              <a:spcAft>
+                <a:spcPts val="300"/>
+              </a:spcAft>
+            </a:pPr>
+            <a:r>
+              <a:rPr sz="1050">
+                <a:solidFill>
+                  <a:srgbClr val="202938"/>
+                </a:solidFill>
+                <a:latin typeface="微软雅黑"/>
+              </a:rPr>
+              <a:t>· 重新登录只补他错过的，条数由规则限制</a:t>
+            </a:r>
+          </a:p>
+          <a:p>
+            <a:pPr algn="l">
+              <a:lnSpc>
+                <a:spcPct val="115000"/>
+              </a:lnSpc>
+              <a:spcAft>
+                <a:spcPts val="300"/>
+              </a:spcAft>
+            </a:pPr>
+            <a:r>
+              <a:rPr sz="1050">
+                <a:solidFill>
+                  <a:srgbClr val="202938"/>
+                </a:solidFill>
+                <a:latin typeface="微软雅黑"/>
+              </a:rPr>
+              <a:t>· 与 keepchathistory 不重复：有进度的只补差额，</a:t>
+            </a:r>
+          </a:p>
+          <a:p>
+            <a:pPr algn="l">
+              <a:lnSpc>
+                <a:spcPct val="115000"/>
+              </a:lnSpc>
+              <a:spcAft>
+                <a:spcPts val="300"/>
+              </a:spcAft>
+            </a:pPr>
+            <a:r>
+              <a:rPr sz="1050">
+                <a:solidFill>
+                  <a:srgbClr val="202938"/>
+                </a:solidFill>
+                <a:latin typeface="微软雅黑"/>
+              </a:rPr>
+              <a:t>   新用户仍看完整历史</a:t>
+            </a:r>
+          </a:p>
+          <a:p>
+            <a:pPr algn="l">
+              <a:lnSpc>
+                <a:spcPct val="115000"/>
+              </a:lnSpc>
+              <a:spcAft>
+                <a:spcPts val="300"/>
+              </a:spcAft>
+            </a:pPr>
+            <a:r>
+              <a:rPr sz="1050">
+                <a:solidFill>
+                  <a:srgbClr val="202938"/>
+                </a:solidFill>
+                <a:latin typeface="微软雅黑"/>
+              </a:rPr>
+              <a:t>· 默认关闭，升级后行为完全不变</a:t>
+            </a:r>
+          </a:p>
+        </p:txBody>
+      </p:sp>
+      <p:sp>
+        <p:nvSpPr>
+          <p:cNvPr id="9" name="Rectangle 8"/>
+          <p:cNvSpPr/>
+          <p:nvPr/>
+        </p:nvSpPr>
+        <p:spPr>
+          <a:xfrm>
+            <a:off x="8065008" y="1143000"/>
+            <a:ext cx="3611880" cy="2651760"/>
+          </a:xfrm>
+          <a:prstGeom prst="rect">
+            <a:avLst/>
+          </a:prstGeom>
+          <a:solidFill>
+            <a:srgbClr val="FDF4E2"/>
+          </a:solidFill>
+          <a:ln w="15875">
+            <a:solidFill>
+              <a:srgbClr val="B06C0C"/>
+            </a:solidFill>
+          </a:ln>
+          <a:effectLst/>
+        </p:spPr>
+        <p:style>
+          <a:lnRef idx="1">
+            <a:schemeClr val="accent1"/>
+          </a:lnRef>
+          <a:fillRef idx="3">
+            <a:schemeClr val="accent1"/>
+          </a:fillRef>
+          <a:effectRef idx="2">
+            <a:schemeClr val="accent1"/>
+          </a:effectRef>
+          <a:fontRef idx="minor">
+            <a:schemeClr val="lt1"/>
+          </a:fontRef>
+        </p:style>
+        <p:txBody>
+          <a:bodyPr rtlCol="0" anchor="ctr"/>
+          <a:lstStyle/>
+          <a:p/>
+        </p:txBody>
+      </p:sp>
+      <p:sp>
+        <p:nvSpPr>
+          <p:cNvPr id="10" name="TextBox 9"/>
+          <p:cNvSpPr txBox="1"/>
+          <p:nvPr/>
+        </p:nvSpPr>
+        <p:spPr>
+          <a:xfrm>
+            <a:off x="8211312" y="1234440"/>
+            <a:ext cx="3319272" cy="365760"/>
+          </a:xfrm>
+          <a:prstGeom prst="rect">
+            <a:avLst/>
+          </a:prstGeom>
+          <a:noFill/>
+        </p:spPr>
+        <p:txBody>
+          <a:bodyPr wrap="square">
+            <a:spAutoFit/>
+          </a:bodyPr>
+          <a:lstStyle/>
+          <a:p>
+            <a:pPr algn="l">
+              <a:lnSpc>
+                <a:spcPct val="115000"/>
+              </a:lnSpc>
+              <a:spcAft>
+                <a:spcPts val="200"/>
+              </a:spcAft>
+            </a:pPr>
+            <a:r>
+              <a:rPr sz="1300">
+                <a:solidFill>
+                  <a:srgbClr val="B06C0C"/>
+                </a:solidFill>
+                <a:latin typeface="微软雅黑"/>
+              </a:rPr>
+              <a:t>③ 文件断点续传</a:t>
+            </a:r>
+          </a:p>
+        </p:txBody>
+      </p:sp>
+      <p:sp>
+        <p:nvSpPr>
+          <p:cNvPr id="11" name="TextBox 10"/>
+          <p:cNvSpPr txBox="1"/>
+          <p:nvPr/>
+        </p:nvSpPr>
+        <p:spPr>
+          <a:xfrm>
+            <a:off x="8211312" y="1600200"/>
+            <a:ext cx="3319272" cy="2103120"/>
+          </a:xfrm>
+          <a:prstGeom prst="rect">
+            <a:avLst/>
+          </a:prstGeom>
+          <a:noFill/>
+        </p:spPr>
+        <p:txBody>
+          <a:bodyPr wrap="square">
+            <a:spAutoFit/>
+          </a:bodyPr>
+          <a:lstStyle/>
+          <a:p>
+            <a:pPr algn="l">
+              <a:lnSpc>
+                <a:spcPct val="115000"/>
+              </a:lnSpc>
+              <a:spcAft>
+                <a:spcPts val="300"/>
+              </a:spcAft>
+            </a:pPr>
+            <a:r>
+              <a:rPr sz="1050">
+                <a:solidFill>
+                  <a:srgbClr val="202938"/>
+                </a:solidFill>
+                <a:latin typeface="微软雅黑"/>
+              </a:rPr>
+              <a:t>· FILE_GET &lt;id&gt; [已有字节数]，服务器从那儿接着发</a:t>
+            </a:r>
+          </a:p>
+          <a:p>
+            <a:pPr algn="l">
+              <a:lnSpc>
+                <a:spcPct val="115000"/>
+              </a:lnSpc>
+              <a:spcAft>
+                <a:spcPts val="300"/>
+              </a:spcAft>
+            </a:pPr>
+            <a:r>
+              <a:rPr sz="1050">
+                <a:solidFill>
+                  <a:srgbClr val="202938"/>
+                </a:solidFill>
+                <a:latin typeface="微软雅黑"/>
+              </a:rPr>
+              <a:t>· 客户端先写 .part 中间文件，下完才改名</a:t>
+            </a:r>
+          </a:p>
+          <a:p>
+            <a:pPr algn="l">
+              <a:lnSpc>
+                <a:spcPct val="115000"/>
+              </a:lnSpc>
+              <a:spcAft>
+                <a:spcPts val="300"/>
+              </a:spcAft>
+            </a:pPr>
+            <a:r>
+              <a:rPr sz="1050">
+                <a:solidFill>
+                  <a:srgbClr val="202938"/>
+                </a:solidFill>
+                <a:latin typeface="微软雅黑"/>
+              </a:rPr>
+              <a:t>· 起点对不上就丢弃重来——绝不硬续</a:t>
+            </a:r>
+          </a:p>
+          <a:p>
+            <a:pPr algn="l">
+              <a:lnSpc>
+                <a:spcPct val="115000"/>
+              </a:lnSpc>
+              <a:spcAft>
+                <a:spcPts val="300"/>
+              </a:spcAft>
+            </a:pPr>
+            <a:r>
+              <a:rPr sz="1050">
+                <a:solidFill>
+                  <a:srgbClr val="202938"/>
+                </a:solidFill>
+                <a:latin typeface="微软雅黑"/>
+              </a:rPr>
+              <a:t>   （那会拼出大小对、内容坏的文件）</a:t>
+            </a:r>
+          </a:p>
+          <a:p>
+            <a:pPr algn="l">
+              <a:lnSpc>
+                <a:spcPct val="115000"/>
+              </a:lnSpc>
+              <a:spcAft>
+                <a:spcPts val="300"/>
+              </a:spcAft>
+            </a:pPr>
+            <a:r>
+              <a:rPr sz="1050">
+                <a:solidFill>
+                  <a:srgbClr val="202938"/>
+                </a:solidFill>
+                <a:latin typeface="微软雅黑"/>
+              </a:rPr>
+              <a:t>· 超出文件大小直接拒绝，不从头再发一遍</a:t>
+            </a:r>
+          </a:p>
+        </p:txBody>
+      </p:sp>
+      <p:sp>
+        <p:nvSpPr>
+          <p:cNvPr id="12" name="Rectangle 11"/>
+          <p:cNvSpPr/>
+          <p:nvPr/>
+        </p:nvSpPr>
+        <p:spPr>
+          <a:xfrm>
+            <a:off x="566928" y="3931920"/>
+            <a:ext cx="11064240" cy="1371600"/>
+          </a:xfrm>
+          <a:prstGeom prst="rect">
+            <a:avLst/>
+          </a:prstGeom>
+          <a:solidFill>
+            <a:srgbClr val="E8F1FE"/>
+          </a:solidFill>
+          <a:ln w="15875">
+            <a:solidFill>
+              <a:srgbClr val="16284A"/>
+            </a:solidFill>
+          </a:ln>
+          <a:effectLst/>
+        </p:spPr>
+        <p:style>
+          <a:lnRef idx="1">
+            <a:schemeClr val="accent1"/>
+          </a:lnRef>
+          <a:fillRef idx="3">
+            <a:schemeClr val="accent1"/>
+          </a:fillRef>
+          <a:effectRef idx="2">
+            <a:schemeClr val="accent1"/>
+          </a:effectRef>
+          <a:fontRef idx="minor">
+            <a:schemeClr val="lt1"/>
+          </a:fontRef>
+        </p:style>
+        <p:txBody>
+          <a:bodyPr rtlCol="0" anchor="ctr"/>
+          <a:lstStyle/>
+          <a:p/>
+        </p:txBody>
+      </p:sp>
+      <p:sp>
+        <p:nvSpPr>
+          <p:cNvPr id="13" name="TextBox 12"/>
+          <p:cNvSpPr txBox="1"/>
+          <p:nvPr/>
+        </p:nvSpPr>
+        <p:spPr>
+          <a:xfrm>
+            <a:off x="713232" y="4023359"/>
+            <a:ext cx="10771632" cy="365760"/>
+          </a:xfrm>
+          <a:prstGeom prst="rect">
+            <a:avLst/>
+          </a:prstGeom>
+          <a:noFill/>
+        </p:spPr>
+        <p:txBody>
+          <a:bodyPr wrap="square">
+            <a:spAutoFit/>
+          </a:bodyPr>
+          <a:lstStyle/>
+          <a:p>
+            <a:pPr algn="l">
+              <a:lnSpc>
+                <a:spcPct val="115000"/>
+              </a:lnSpc>
+              <a:spcAft>
+                <a:spcPts val="200"/>
+              </a:spcAft>
+            </a:pPr>
+            <a:r>
+              <a:rPr sz="1300">
+                <a:solidFill>
+                  <a:srgbClr val="16284A"/>
+                </a:solidFill>
+                <a:latin typeface="微软雅黑"/>
+              </a:rPr>
+              <a:t>实测（真机，不是估算）</a:t>
+            </a:r>
+          </a:p>
+        </p:txBody>
+      </p:sp>
+      <p:sp>
+        <p:nvSpPr>
+          <p:cNvPr id="14" name="TextBox 13"/>
+          <p:cNvSpPr txBox="1"/>
+          <p:nvPr/>
+        </p:nvSpPr>
+        <p:spPr>
+          <a:xfrm>
+            <a:off x="713232" y="4389120"/>
+            <a:ext cx="10771632" cy="822960"/>
+          </a:xfrm>
+          <a:prstGeom prst="rect">
+            <a:avLst/>
+          </a:prstGeom>
+          <a:noFill/>
+        </p:spPr>
+        <p:txBody>
+          <a:bodyPr wrap="square">
+            <a:spAutoFit/>
+          </a:bodyPr>
+          <a:lstStyle/>
+          <a:p>
+            <a:pPr algn="l">
+              <a:lnSpc>
+                <a:spcPct val="115000"/>
+              </a:lnSpc>
+              <a:spcAft>
+                <a:spcPts val="300"/>
+              </a:spcAft>
+            </a:pPr>
+            <a:r>
+              <a:rPr sz="1100">
+                <a:solidFill>
+                  <a:srgbClr val="202938"/>
+                </a:solidFill>
+                <a:latin typeface="微软雅黑"/>
+              </a:rPr>
+              <a:t>· 历史：kill -9 强杀后重启，记录仍在（loaded 1 history line …末序号 1）；手工塞入半行记录被正确丢弃</a:t>
+            </a:r>
+          </a:p>
+          <a:p>
+            <a:pPr algn="l">
+              <a:lnSpc>
+                <a:spcPct val="115000"/>
+              </a:lnSpc>
+              <a:spcAft>
+                <a:spcPts val="300"/>
+              </a:spcAft>
+            </a:pPr>
+            <a:r>
+              <a:rPr sz="1100">
+                <a:solidFill>
+                  <a:srgbClr val="202938"/>
+                </a:solidFill>
+                <a:latin typeface="微软雅黑"/>
+              </a:rPr>
+              <a:t>· 离线：A 下线期间 B 发两条，A 重登收到「你不在的时候有 2 条消息」，且不重复自己在线时那条；默认规则下不补发</a:t>
+            </a:r>
+          </a:p>
+          <a:p>
+            <a:pPr algn="l">
+              <a:lnSpc>
+                <a:spcPct val="115000"/>
+              </a:lnSpc>
+              <a:spcAft>
+                <a:spcPts val="300"/>
+              </a:spcAft>
+            </a:pPr>
+            <a:r>
+              <a:rPr sz="1100">
+                <a:solidFill>
+                  <a:srgbClr val="202938"/>
+                </a:solidFill>
+                <a:latin typeface="微软雅黑"/>
+              </a:rPr>
+              <a:t>· 续传：64 KB 文件下到 46.0 KB 时掐断，重连后服务端日志 「从 46.0 KB 处续传」，最终文件 md5 与源文件完全一致</a:t>
+            </a:r>
+          </a:p>
+        </p:txBody>
+      </p:sp>
+      <p:sp>
+        <p:nvSpPr>
+          <p:cNvPr id="15" name="Rectangle 14"/>
+          <p:cNvSpPr/>
+          <p:nvPr/>
+        </p:nvSpPr>
+        <p:spPr>
+          <a:xfrm>
+            <a:off x="566928" y="5440680"/>
+            <a:ext cx="11064240" cy="1188720"/>
+          </a:xfrm>
+          <a:prstGeom prst="rect">
+            <a:avLst/>
+          </a:prstGeom>
+          <a:solidFill>
+            <a:srgbClr val="FDECEA"/>
+          </a:solidFill>
+          <a:ln w="15875">
+            <a:solidFill>
+              <a:srgbClr val="B03A2B"/>
+            </a:solidFill>
+          </a:ln>
+          <a:effectLst/>
+        </p:spPr>
+        <p:style>
+          <a:lnRef idx="1">
+            <a:schemeClr val="accent1"/>
+          </a:lnRef>
+          <a:fillRef idx="3">
+            <a:schemeClr val="accent1"/>
+          </a:fillRef>
+          <a:effectRef idx="2">
+            <a:schemeClr val="accent1"/>
+          </a:effectRef>
+          <a:fontRef idx="minor">
+            <a:schemeClr val="lt1"/>
+          </a:fontRef>
+        </p:style>
+        <p:txBody>
+          <a:bodyPr rtlCol="0" anchor="ctr"/>
+          <a:lstStyle/>
+          <a:p/>
+        </p:txBody>
+      </p:sp>
+      <p:sp>
+        <p:nvSpPr>
+          <p:cNvPr id="16" name="TextBox 15"/>
+          <p:cNvSpPr txBox="1"/>
+          <p:nvPr/>
+        </p:nvSpPr>
+        <p:spPr>
+          <a:xfrm>
+            <a:off x="713232" y="5532120"/>
+            <a:ext cx="10771632" cy="365760"/>
+          </a:xfrm>
+          <a:prstGeom prst="rect">
+            <a:avLst/>
+          </a:prstGeom>
+          <a:noFill/>
+        </p:spPr>
+        <p:txBody>
+          <a:bodyPr wrap="square">
+            <a:spAutoFit/>
+          </a:bodyPr>
+          <a:lstStyle/>
+          <a:p>
+            <a:pPr algn="l">
+              <a:lnSpc>
+                <a:spcPct val="115000"/>
+              </a:lnSpc>
+              <a:spcAft>
+                <a:spcPts val="200"/>
+              </a:spcAft>
+            </a:pPr>
+            <a:r>
+              <a:rPr sz="1300">
+                <a:solidFill>
+                  <a:srgbClr val="B03A2B"/>
+                </a:solidFill>
+                <a:latin typeface="微软雅黑"/>
+              </a:rPr>
+              <a:t>一个差点造成事故的兼容性问题（值得记）</a:t>
+            </a:r>
+          </a:p>
+        </p:txBody>
+      </p:sp>
+      <p:sp>
+        <p:nvSpPr>
+          <p:cNvPr id="17" name="TextBox 16"/>
+          <p:cNvSpPr txBox="1"/>
+          <p:nvPr/>
+        </p:nvSpPr>
+        <p:spPr>
+          <a:xfrm>
+            <a:off x="713232" y="5897880"/>
+            <a:ext cx="10771632" cy="640080"/>
+          </a:xfrm>
+          <a:prstGeom prst="rect">
+            <a:avLst/>
+          </a:prstGeom>
+          <a:noFill/>
+        </p:spPr>
+        <p:txBody>
+          <a:bodyPr wrap="square">
+            <a:spAutoFit/>
+          </a:bodyPr>
+          <a:lstStyle/>
+          <a:p>
+            <a:pPr algn="l">
+              <a:lnSpc>
+                <a:spcPct val="115000"/>
+              </a:lnSpc>
+              <a:spcAft>
+                <a:spcPts val="300"/>
+              </a:spcAft>
+            </a:pPr>
+            <a:r>
+              <a:rPr sz="1100">
+                <a:solidFill>
+                  <a:srgbClr val="202938"/>
+                </a:solidFill>
+                <a:latin typeface="微软雅黑"/>
+              </a:rPr>
+              <a:t>· 我原本让服务器在 FILE_BEGIN 后追加一格回显续传起点，看起来完全合理</a:t>
+            </a:r>
+          </a:p>
+          <a:p>
+            <a:pPr algn="l">
+              <a:lnSpc>
+                <a:spcPct val="115000"/>
+              </a:lnSpc>
+              <a:spcAft>
+                <a:spcPts val="300"/>
+              </a:spcAft>
+            </a:pPr>
+            <a:r>
+              <a:rPr sz="1100">
+                <a:solidFill>
+                  <a:srgbClr val="202938"/>
+                </a:solidFill>
+                <a:latin typeface="微软雅黑"/>
+              </a:rPr>
+              <a:t>· 但 Windows 客户端写的是 fields.size() != 3 —— 要求恰好 3 格，</a:t>
+            </a:r>
+          </a:p>
+          <a:p>
+            <a:pPr algn="l">
+              <a:lnSpc>
+                <a:spcPct val="115000"/>
+              </a:lnSpc>
+              <a:spcAft>
+                <a:spcPts val="300"/>
+              </a:spcAft>
+            </a:pPr>
+            <a:r>
+              <a:rPr sz="1100">
+                <a:solidFill>
+                  <a:srgbClr val="202938"/>
+                </a:solidFill>
+                <a:latin typeface="微软雅黑"/>
+              </a:rPr>
+              <a:t>多一格会让它静默忽略 FILE_BEGIN、下载整个失效且不报错</a:t>
+            </a:r>
+          </a:p>
+          <a:p>
+            <a:pPr algn="l">
+              <a:lnSpc>
+                <a:spcPct val="115000"/>
+              </a:lnSpc>
+              <a:spcAft>
+                <a:spcPts val="300"/>
+              </a:spcAft>
+            </a:pPr>
+            <a:r>
+              <a:rPr sz="1100">
+                <a:solidFill>
+                  <a:srgbClr val="202938"/>
+                </a:solidFill>
+                <a:latin typeface="微软雅黑"/>
+              </a:rPr>
+              <a:t>· 改成不回显（客户端自己记着请求的 offset），并顺手把那个 != 3 放宽成 &lt; 3 —— 否则下一个追加字段的人还会踩</a:t>
+            </a:r>
+          </a:p>
+        </p:txBody>
+      </p:sp>
+    </p:spTree>
+  </p:cSld>
+  <p:clrMapOvr>
+    <a:masterClrMapping/>
+  </p:clrMapOvr>
+  <mc:AlternateContent xmlns:mc="http://schemas.openxmlformats.org/markup-compatibility/2006">
+    <mc:Choice xmlns:p14="http://schemas.microsoft.com/office/powerpoint/2010/main" Requires="p14">
+      <p:transition spd="med" p14:dur="500">
+        <p:fade/>
+      </p:transition>
+    </mc:Choice>
+    <mc:Fallback>
+      <p:transition spd="med">
+        <p:fade/>
+      </p:transition>
+    </mc:Fallback>
+  </mc:AlternateContent>
+  <p:timing>
+    <p:tnLst>
+      <p:par>
+        <p:cTn id="1" dur="indefinite" restart="never" nodeType="tmRoot">
+          <p:childTnLst>
+            <p:seq concurrent="1" nextAc="seek">
+              <p:cTn id="2" dur="indefinite" nodeType="mainSeq">
+                <p:childTnLst>
+                  <p:par>
+                    <p:cTn id="16" fill="hold">
+                      <p:stCondLst>
+                        <p:cond delay="0"/>
+                      </p:stCondLst>
+                      <p:childTnLst>
+                        <p>
+                          <p:par>
+                            <p:cTn id="4" presetID="10" presetClass="entr" presetSubtype="0" fill="hold" grpId="0" nodeType="clickEffect">
+                              <p:stCondLst>
+                                <p:cond delay="0"/>
+                              </p:stCondLst>
+                              <p:childTnLst>
+                                <p:set>
+                                  <p:cBhvr>
+                                    <p:cTn id="5" dur="1" fill="hold">
+                                      <p:stCondLst>
+                                        <p:cond delay="0"/>
+                                      </p:stCondLst>
+                                    </p:cTn>
+                                    <p:tgtEl>
+                                      <p:spTgt spid="2"/>
+                                    </p:tgtEl>
+                                    <p:attrNameLst>
+                                      <p:attrName>style.visibility</p:attrName>
+                                    </p:attrNameLst>
+                                  </p:cBhvr>
+                                  <p:to>
+                                    <p:strVal val="visible"/>
+                                  </p:to>
+                                </p:set>
+                                <p:animEffect transition="in" filter="fade">
+                                  <p:cBhvr>
+                                    <p:cTn id="6" dur="400"/>
+                                    <p:tgtEl>
+                                      <p:spTgt spid="2"/>
+                                    </p:tgtEl>
+                                  </p:cBhvr>
+                                </p:animEffect>
+                              </p:childTnLst>
+                            </p:cTn>
+                          </p:par>
+                          <p:par>
+                            <p:cTn id="7" presetID="10" presetClass="entr" presetSubtype="0" fill="hold" grpId="0" nodeType="withEffect">
+                              <p:stCondLst>
+                                <p:cond delay="120"/>
+                              </p:stCondLst>
+                              <p:childTnLst>
+                                <p:set>
+                                  <p:cBhvr>
+                                    <p:cTn id="8" dur="1" fill="hold">
+                                      <p:stCondLst>
+                                        <p:cond delay="0"/>
+                                      </p:stCondLst>
+                                    </p:cTn>
+                                    <p:tgtEl>
+                                      <p:spTgt spid="4"/>
+                                    </p:tgtEl>
+                                    <p:attrNameLst>
+                                      <p:attrName>style.visibility</p:attrName>
+                                    </p:attrNameLst>
+                                  </p:cBhvr>
+                                  <p:to>
+                                    <p:strVal val="visible"/>
+                                  </p:to>
+                                </p:set>
+                                <p:animEffect transition="in" filter="fade">
+                                  <p:cBhvr>
+                                    <p:cTn id="9" dur="400"/>
+                                    <p:tgtEl>
+                                      <p:spTgt spid="4"/>
+                                    </p:tgtEl>
+                                  </p:cBhvr>
+                                </p:animEffect>
+                              </p:childTnLst>
+                            </p:cTn>
+                          </p:par>
+                          <p:par>
+                            <p:cTn id="10" presetID="10" presetClass="entr" presetSubtype="0" fill="hold" grpId="0" nodeType="withEffect">
+                              <p:stCondLst>
+                                <p:cond delay="240"/>
+                              </p:stCondLst>
+                              <p:childTnLst>
+                                <p:set>
+                                  <p:cBhvr>
+                                    <p:cTn id="11" dur="1" fill="hold">
+                                      <p:stCondLst>
+                                        <p:cond delay="0"/>
+                                      </p:stCondLst>
+                                    </p:cTn>
+                                    <p:tgtEl>
+                                      <p:spTgt spid="5"/>
+                                    </p:tgtEl>
+                                    <p:attrNameLst>
+                                      <p:attrName>style.visibility</p:attrName>
+                                    </p:attrNameLst>
+                                  </p:cBhvr>
+                                  <p:to>
+                                    <p:strVal val="visible"/>
+                                  </p:to>
+                                </p:set>
+                                <p:animEffect transition="in" filter="fade">
+                                  <p:cBhvr>
+                                    <p:cTn id="12" dur="400"/>
+                                    <p:tgtEl>
+                                      <p:spTgt spid="5"/>
+                                    </p:tgtEl>
+                                  </p:cBhvr>
+                                </p:animEffect>
+                              </p:childTnLst>
+                            </p:cTn>
+                          </p:par>
+                          <p:par>
+                            <p:cTn id="13" presetID="10" presetClass="entr" presetSubtype="0" fill="hold" grpId="0" nodeType="withEffect">
+                              <p:stCondLst>
+                                <p:cond delay="360"/>
+                              </p:stCondLst>
+                              <p:childTnLst>
+                                <p:set>
+                                  <p:cBhvr>
+                                    <p:cTn id="14" dur="1" fill="hold">
+                                      <p:stCondLst>
+                                        <p:cond delay="0"/>
+                                      </p:stCondLst>
+                                    </p:cTn>
+                                    <p:tgtEl>
+                                      <p:spTgt spid="7"/>
+                                    </p:tgtEl>
+                                    <p:attrNameLst>
+                                      <p:attrName>style.visibility</p:attrName>
+                                    </p:attrNameLst>
+                                  </p:cBhvr>
+                                  <p:to>
+                                    <p:strVal val="visible"/>
+                                  </p:to>
+                                </p:set>
+                                <p:animEffect transition="in" filter="fade">
+                                  <p:cBhvr>
+                                    <p:cTn id="15" dur="400"/>
+                                    <p:tgtEl>
+                                      <p:spTgt spid="7"/>
+                                    </p:tgtEl>
+                                  </p:cBhvr>
+                                </p:animEffect>
+                              </p:childTnLst>
+                            </p:cTn>
+                          </p:par>
+                        </p>
+                      </p:childTnLst>
+                    </p:cTn>
+                  </p:par>
+                  <p:par>
+                    <p:cTn id="30" fill="hold">
+                      <p:stCondLst>
+                        <p:cond delay="indefinite"/>
+                      </p:stCondLst>
+                      <p:childTnLst>
+                        <p>
+                          <p:par>
+                            <p:cTn id="18" presetID="10" presetClass="entr" presetSubtype="0" fill="hold" grpId="0" nodeType="clickEffect">
+                              <p:stCondLst>
+                                <p:cond delay="0"/>
+                              </p:stCondLst>
+                              <p:childTnLst>
+                                <p:set>
+                                  <p:cBhvr>
+                                    <p:cTn id="19" dur="1" fill="hold">
+                                      <p:stCondLst>
+                                        <p:cond delay="0"/>
+                                      </p:stCondLst>
+                                    </p:cTn>
+                                    <p:tgtEl>
+                                      <p:spTgt spid="8"/>
+                                    </p:tgtEl>
+                                    <p:attrNameLst>
+                                      <p:attrName>style.visibility</p:attrName>
+                                    </p:attrNameLst>
+                                  </p:cBhvr>
+                                  <p:to>
+                                    <p:strVal val="visible"/>
+                                  </p:to>
+                                </p:set>
+                                <p:animEffect transition="in" filter="fade">
+                                  <p:cBhvr>
+                                    <p:cTn id="20" dur="400"/>
+                                    <p:tgtEl>
+                                      <p:spTgt spid="8"/>
+                                    </p:tgtEl>
+                                  </p:cBhvr>
+                                </p:animEffect>
+                              </p:childTnLst>
+                            </p:cTn>
+                          </p:par>
+                          <p:par>
+                            <p:cTn id="21" presetID="10" presetClass="entr" presetSubtype="0" fill="hold" grpId="0" nodeType="withEffect">
+                              <p:stCondLst>
+                                <p:cond delay="120"/>
+                              </p:stCondLst>
+                              <p:childTnLst>
+                                <p:set>
+                                  <p:cBhvr>
+                                    <p:cTn id="22" dur="1" fill="hold">
+                                      <p:stCondLst>
+                                        <p:cond delay="0"/>
+                                      </p:stCondLst>
+                                    </p:cTn>
+                                    <p:tgtEl>
+                                      <p:spTgt spid="10"/>
+                                    </p:tgtEl>
+                                    <p:attrNameLst>
+                                      <p:attrName>style.visibility</p:attrName>
+                                    </p:attrNameLst>
+                                  </p:cBhvr>
+                                  <p:to>
+                                    <p:strVal val="visible"/>
+                                  </p:to>
+                                </p:set>
+                                <p:animEffect transition="in" filter="fade">
+                                  <p:cBhvr>
+                                    <p:cTn id="23" dur="400"/>
+                                    <p:tgtEl>
+                                      <p:spTgt spid="10"/>
+                                    </p:tgtEl>
+                                  </p:cBhvr>
+                                </p:animEffect>
+                              </p:childTnLst>
+                            </p:cTn>
+                          </p:par>
+                          <p:par>
+                            <p:cTn id="24" presetID="10" presetClass="entr" presetSubtype="0" fill="hold" grpId="0" nodeType="withEffect">
+                              <p:stCondLst>
+                                <p:cond delay="240"/>
+                              </p:stCondLst>
+                              <p:childTnLst>
+                                <p:set>
+                                  <p:cBhvr>
+                                    <p:cTn id="25" dur="1" fill="hold">
+                                      <p:stCondLst>
+                                        <p:cond delay="0"/>
+                                      </p:stCondLst>
+                                    </p:cTn>
+                                    <p:tgtEl>
+                                      <p:spTgt spid="11"/>
+                                    </p:tgtEl>
+                                    <p:attrNameLst>
+                                      <p:attrName>style.visibility</p:attrName>
+                                    </p:attrNameLst>
+                                  </p:cBhvr>
+                                  <p:to>
+                                    <p:strVal val="visible"/>
+                                  </p:to>
+                                </p:set>
+                                <p:animEffect transition="in" filter="fade">
+                                  <p:cBhvr>
+                                    <p:cTn id="26" dur="400"/>
+                                    <p:tgtEl>
+                                      <p:spTgt spid="11"/>
+                                    </p:tgtEl>
+                                  </p:cBhvr>
+                                </p:animEffect>
+                              </p:childTnLst>
+                            </p:cTn>
+                          </p:par>
+                          <p:par>
+                            <p:cTn id="27" presetID="10" presetClass="entr" presetSubtype="0" fill="hold" grpId="0" nodeType="withEffect">
+                              <p:stCondLst>
+                                <p:cond delay="360"/>
+                              </p:stCondLst>
+                              <p:childTnLst>
+                                <p:set>
+                                  <p:cBhvr>
+                                    <p:cTn id="28" dur="1" fill="hold">
+                                      <p:stCondLst>
+                                        <p:cond delay="0"/>
+                                      </p:stCondLst>
+                                    </p:cTn>
+                                    <p:tgtEl>
+                                      <p:spTgt spid="13"/>
+                                    </p:tgtEl>
+                                    <p:attrNameLst>
+                                      <p:attrName>style.visibility</p:attrName>
+                                    </p:attrNameLst>
+                                  </p:cBhvr>
+                                  <p:to>
+                                    <p:strVal val="visible"/>
+                                  </p:to>
+                                </p:set>
+                                <p:animEffect transition="in" filter="fade">
+                                  <p:cBhvr>
+                                    <p:cTn id="29" dur="400"/>
+                                    <p:tgtEl>
+                                      <p:spTgt spid="13"/>
+                                    </p:tgtEl>
+                                  </p:cBhvr>
+                                </p:animEffect>
+                              </p:childTnLst>
+                            </p:cTn>
+                          </p:par>
+                        </p>
+                      </p:childTnLst>
+                    </p:cTn>
+                  </p:par>
+                  <p:par>
+                    <p:cTn id="41" fill="hold">
+                      <p:stCondLst>
+                        <p:cond delay="indefinite"/>
+                      </p:stCondLst>
+                      <p:childTnLst>
+                        <p>
+                          <p:par>
+                            <p:cTn id="32" presetID="10" presetClass="entr" presetSubtype="0" fill="hold" grpId="0" nodeType="clickEffect">
+                              <p:stCondLst>
+                                <p:cond delay="0"/>
+                              </p:stCondLst>
+                              <p:childTnLst>
+                                <p:set>
+                                  <p:cBhvr>
+                                    <p:cTn id="33" dur="1" fill="hold">
+                                      <p:stCondLst>
+                                        <p:cond delay="0"/>
+                                      </p:stCondLst>
+                                    </p:cTn>
+                                    <p:tgtEl>
+                                      <p:spTgt spid="14"/>
+                                    </p:tgtEl>
+                                    <p:attrNameLst>
+                                      <p:attrName>style.visibility</p:attrName>
+                                    </p:attrNameLst>
+                                  </p:cBhvr>
+                                  <p:to>
+                                    <p:strVal val="visible"/>
+                                  </p:to>
+                                </p:set>
+                                <p:animEffect transition="in" filter="fade">
+                                  <p:cBhvr>
+                                    <p:cTn id="34" dur="400"/>
+                                    <p:tgtEl>
+                                      <p:spTgt spid="14"/>
+                                    </p:tgtEl>
+                                  </p:cBhvr>
+                                </p:animEffect>
+                              </p:childTnLst>
+                            </p:cTn>
+                          </p:par>
+                          <p:par>
+                            <p:cTn id="35" presetID="10" presetClass="entr" presetSubtype="0" fill="hold" grpId="0" nodeType="withEffect">
+                              <p:stCondLst>
+                                <p:cond delay="120"/>
+                              </p:stCondLst>
+                              <p:childTnLst>
+                                <p:set>
+                                  <p:cBhvr>
+                                    <p:cTn id="36" dur="1" fill="hold">
+                                      <p:stCondLst>
+                                        <p:cond delay="0"/>
+                                      </p:stCondLst>
+                                    </p:cTn>
+                                    <p:tgtEl>
+                                      <p:spTgt spid="16"/>
+                                    </p:tgtEl>
+                                    <p:attrNameLst>
+                                      <p:attrName>style.visibility</p:attrName>
+                                    </p:attrNameLst>
+                                  </p:cBhvr>
+                                  <p:to>
+                                    <p:strVal val="visible"/>
+                                  </p:to>
+                                </p:set>
+                                <p:animEffect transition="in" filter="fade">
+                                  <p:cBhvr>
+                                    <p:cTn id="37" dur="400"/>
+                                    <p:tgtEl>
+                                      <p:spTgt spid="16"/>
+                                    </p:tgtEl>
+                                  </p:cBhvr>
+                                </p:animEffect>
+                              </p:childTnLst>
+                            </p:cTn>
+                          </p:par>
+                          <p:par>
+                            <p:cTn id="38" presetID="10" presetClass="entr" presetSubtype="0" fill="hold" grpId="0" nodeType="withEffect">
+                              <p:stCondLst>
+                                <p:cond delay="240"/>
+                              </p:stCondLst>
+                              <p:childTnLst>
+                                <p:set>
+                                  <p:cBhvr>
+                                    <p:cTn id="39" dur="1" fill="hold">
+                                      <p:stCondLst>
+                                        <p:cond delay="0"/>
+                                      </p:stCondLst>
+                                    </p:cTn>
+                                    <p:tgtEl>
+                                      <p:spTgt spid="17"/>
+                                    </p:tgtEl>
+                                    <p:attrNameLst>
+                                      <p:attrName>style.visibility</p:attrName>
+                                    </p:attrNameLst>
+                                  </p:cBhvr>
+                                  <p:to>
+                                    <p:strVal val="visible"/>
+                                  </p:to>
+                                </p:set>
+                                <p:animEffect transition="in" filter="fade">
+                                  <p:cBhvr>
+                                    <p:cTn id="40" dur="400"/>
+                                    <p:tgtEl>
+                                      <p:spTgt spid="17"/>
+                                    </p:tgtEl>
+                                  </p:cBhvr>
+                                </p:animEffect>
+                              </p:childTnLst>
+                            </p:cTn>
+                          </p:par>
+                        </p>
+                      </p:childTnLst>
+                    </p:cTn>
+                  </p:par>
+                </p:childTnLst>
+              </p:cTn>
+              <p:prevCondLst>
+                <p:cond evt="onPrev" delay="0">
+                  <p:tgtEl>
+                    <p:sldTgt/>
+                  </p:tgtEl>
+                </p:cond>
+              </p:prevCondLst>
+              <p:nextCondLst>
+                <p:cond evt="onNext" delay="0">
+                  <p:tgtEl>
+                    <p:sldTgt/>
+                  </p:tgtEl>
+                </p:cond>
+              </p:nextCondLst>
+            </p:seq>
+          </p:childTnLst>
+        </p:cTn>
+      </p:par>
+    </p:tnLst>
+    <p:bldLst>
+      <p:bldP spid="2" grpId="0"/>
+      <p:bldP spid="4" grpId="0"/>
+      <p:bldP spid="5" grpId="0"/>
+      <p:bldP spid="7" grpId="0"/>
+      <p:bldP spid="8" grpId="0"/>
+      <p:bldP spid="10" grpId="0"/>
+      <p:bldP spid="11" grpId="0"/>
+      <p:bldP spid="13" grpId="0"/>
+      <p:bldP spid="14" grpId="0"/>
+      <p:bldP spid="16" grpId="0"/>
+      <p:bldP spid="17" grpId="0"/>
+    </p:bldLst>
+  </p:timing>
+</p:sld>
+</file>
+
+<file path=ppt/slides/slide13.xml><?xml version="1.0" encoding="utf-8"?>
+<p:sld xmlns:a="http://schemas.openxmlformats.org/drawingml/2006/main" xmlns:p="http://schemas.openxmlformats.org/presentationml/2006/main" xmlns:r="http://schemas.openxmlformats.org/officeDocument/2006/relationships">
+  <p:cSld>
+    <p:spTree>
+      <p:nvGrpSpPr>
+        <p:cNvPr id="1" name=""/>
+        <p:cNvGrpSpPr/>
+        <p:nvPr/>
+      </p:nvGrpSpPr>
+      <p:grpSpPr/>
+      <p:sp>
+        <p:nvSpPr>
+          <p:cNvPr id="2" name="Rectangle 1"/>
+          <p:cNvSpPr/>
+          <p:nvPr/>
+        </p:nvSpPr>
+        <p:spPr>
+          <a:xfrm>
+            <a:off x="0" y="0"/>
+            <a:ext cx="12191695" cy="932688"/>
+          </a:xfrm>
+          <a:prstGeom prst="rect">
+            <a:avLst/>
+          </a:prstGeom>
+          <a:solidFill>
+            <a:srgbClr val="16284A"/>
+          </a:solidFill>
+          <a:ln>
+            <a:noFill/>
+          </a:ln>
+          <a:effectLst/>
+        </p:spPr>
+        <p:style>
+          <a:lnRef idx="1">
+            <a:schemeClr val="accent1"/>
+          </a:lnRef>
+          <a:fillRef idx="3">
+            <a:schemeClr val="accent1"/>
+          </a:fillRef>
+          <a:effectRef idx="2">
+            <a:schemeClr val="accent1"/>
+          </a:effectRef>
+          <a:fontRef idx="minor">
+            <a:schemeClr val="lt1"/>
+          </a:fontRef>
+        </p:style>
+        <p:txBody>
+          <a:bodyPr rtlCol="0" anchor="ctr" lIns="411480" tIns="91440"/>
+          <a:lstStyle/>
+          <a:p>
+            <a:pPr algn="ctr"/>
+            <a:r>
+              <a:rPr sz="2800" b="1">
+                <a:solidFill>
+                  <a:srgbClr val="FFFFFF"/>
+                </a:solidFill>
+                <a:latin typeface="微软雅黑"/>
+              </a:rPr>
               <a:t>补上注册路径：从发现缺口到实测修复</a:t>
             </a:r>
           </a:p>
@@ -7092,7 +8611,7 @@
                 <a:gridCol w="5120640"/>
                 <a:gridCol w="1463040"/>
               </a:tblGrid>
-              <a:tr h="236220">
+              <a:tr h="202474">
                 <a:tc>
                   <a:txBody>
                     <a:bodyPr/>
@@ -7110,7 +8629,7 @@
                           </a:solidFill>
                           <a:latin typeface="微软雅黑"/>
                         </a:rPr>
-                        <a:t>规则（共 17 条，全部是运行时参数）</a:t>
+                        <a:t>规则（共 18 条，全部是运行时参数）</a:t>
                       </a:r>
                     </a:p>
                   </a:txBody>
@@ -7175,7 +8694,7 @@
                   </a:tcPr>
                 </a:tc>
               </a:tr>
-              <a:tr h="236220">
+              <a:tr h="202474">
                 <a:tc>
                   <a:txBody>
                     <a:bodyPr/>
@@ -7258,7 +8777,7 @@
                   </a:tcPr>
                 </a:tc>
               </a:tr>
-              <a:tr h="236220">
+              <a:tr h="202474">
                 <a:tc>
                   <a:txBody>
                     <a:bodyPr/>
@@ -7341,7 +8860,7 @@
                   </a:tcPr>
                 </a:tc>
               </a:tr>
-              <a:tr h="236220">
+              <a:tr h="202474">
                 <a:tc>
                   <a:txBody>
                     <a:bodyPr/>
@@ -7424,7 +8943,7 @@
                   </a:tcPr>
                 </a:tc>
               </a:tr>
-              <a:tr h="236220">
+              <a:tr h="202474">
                 <a:tc>
                   <a:txBody>
                     <a:bodyPr/>
@@ -7507,7 +9026,7 @@
                   </a:tcPr>
                 </a:tc>
               </a:tr>
-              <a:tr h="236220">
+              <a:tr h="202474">
                 <a:tc>
                   <a:txBody>
                     <a:bodyPr/>
@@ -7590,6 +9109,89 @@
                   </a:tcPr>
                 </a:tc>
               </a:tr>
+              <a:tr h="202476">
+                <a:tc>
+                  <a:txBody>
+                    <a:bodyPr/>
+                    <a:lstStyle/>
+                    <a:p>
+                      <a:pPr>
+                        <a:lnSpc>
+                          <a:spcPct val="100000"/>
+                        </a:lnSpc>
+                      </a:pPr>
+                      <a:r>
+                        <a:rPr sz="1000" b="0">
+                          <a:solidFill>
+                            <a:srgbClr val="202938"/>
+                          </a:solidFill>
+                          <a:latin typeface="微软雅黑"/>
+                        </a:rPr>
+                        <a:t>offlinemessages</a:t>
+                      </a:r>
+                    </a:p>
+                  </a:txBody>
+                  <a:tcPr marL="73152" marR="54864" marT="18288" marB="18288" anchor="ctr">
+                    <a:solidFill>
+                      <a:srgbClr val="F3F5F8"/>
+                    </a:solidFill>
+                  </a:tcPr>
+                </a:tc>
+                <a:tc>
+                  <a:txBody>
+                    <a:bodyPr/>
+                    <a:lstStyle/>
+                    <a:p>
+                      <a:pPr>
+                        <a:lnSpc>
+                          <a:spcPct val="100000"/>
+                        </a:lnSpc>
+                      </a:pPr>
+                      <a:r>
+                        <a:rPr sz="1000" b="0">
+                          <a:solidFill>
+                            <a:srgbClr val="202938"/>
+                          </a:solidFill>
+                          <a:latin typeface="微软雅黑"/>
+                        </a:rPr>
+                        <a:t>重登录时最多补发多少条离线消息（本次新增）</a:t>
+                      </a:r>
+                    </a:p>
+                  </a:txBody>
+                  <a:tcPr marL="73152" marR="54864" marT="18288" marB="18288" anchor="ctr">
+                    <a:solidFill>
+                      <a:srgbClr val="F3F5F8"/>
+                    </a:solidFill>
+                  </a:tcPr>
+                </a:tc>
+                <a:tc>
+                  <a:txBody>
+                    <a:bodyPr/>
+                    <a:lstStyle/>
+                    <a:p>
+                      <a:pPr>
+                        <a:lnSpc>
+                          <a:spcPct val="100000"/>
+                        </a:lnSpc>
+                      </a:pPr>
+                      <a:r>
+                        <a:rPr sz="1000" b="0">
+                          <a:solidFill>
+                            <a:srgbClr val="202938"/>
+                          </a:solidFill>
+                          <a:latin typeface="微软雅黑"/>
+                        </a:rPr>
+                        <a:t>0（不补发）</a:t>
+                      </a:r>
+                    </a:p>
+                  </a:txBody>
+                  <a:tcPr marL="73152" marR="54864" marT="18288" marB="18288" anchor="ctr">
+                    <a:solidFill>
+                      <a:srgbClr val="F3F5F8"/>
+                    </a:solidFill>
+                  </a:tcPr>
+                </a:tc>
+              </a:tr>
             </a:tbl>
           </a:graphicData>
         </a:graphic>
@@ -7967,7 +9569,7 @@
 </p:sld>
 </file>
 
-<file path=ppt/slides/slide13.xml><?xml version="1.0" encoding="utf-8"?>
+<file path=ppt/slides/slide14.xml><?xml version="1.0" encoding="utf-8"?>
 <p:sld xmlns:a="http://schemas.openxmlformats.org/drawingml/2006/main" xmlns:p="http://schemas.openxmlformats.org/presentationml/2006/main" xmlns:r="http://schemas.openxmlformats.org/officeDocument/2006/relationships">
   <p:cSld>
     <p:spTree>
@@ -9028,7 +10630,7 @@
 </p:sld>
 </file>
 
-<file path=ppt/slides/slide14.xml><?xml version="1.0" encoding="utf-8"?>
+<file path=ppt/slides/slide15.xml><?xml version="1.0" encoding="utf-8"?>
 <p:sld xmlns:a="http://schemas.openxmlformats.org/drawingml/2006/main" xmlns:p="http://schemas.openxmlformats.org/presentationml/2006/main" xmlns:r="http://schemas.openxmlformats.org/officeDocument/2006/relationships">
   <p:cSld>
     <p:spTree>
@@ -9677,1032 +11279,6 @@
                 <a:latin typeface="微软雅黑"/>
               </a:rPr>
               <a:t>  下一个要补的地方一目了然</a:t>
-            </a:r>
-          </a:p>
-        </p:txBody>
-      </p:sp>
-    </p:spTree>
-  </p:cSld>
-  <p:clrMapOvr>
-    <a:masterClrMapping/>
-  </p:clrMapOvr>
-  <mc:AlternateContent xmlns:mc="http://schemas.openxmlformats.org/markup-compatibility/2006">
-    <mc:Choice xmlns:p14="http://schemas.microsoft.com/office/powerpoint/2010/main" Requires="p14">
-      <p:transition spd="med" p14:dur="500">
-        <p:fade/>
-      </p:transition>
-    </mc:Choice>
-    <mc:Fallback>
-      <p:transition spd="med">
-        <p:fade/>
-      </p:transition>
-    </mc:Fallback>
-  </mc:AlternateContent>
-  <p:timing>
-    <p:tnLst>
-      <p:par>
-        <p:cTn id="1" dur="indefinite" restart="never" nodeType="tmRoot">
-          <p:childTnLst>
-            <p:seq concurrent="1" nextAc="seek">
-              <p:cTn id="2" dur="indefinite" nodeType="mainSeq">
-                <p:childTnLst>
-                  <p:par>
-                    <p:cTn id="13" fill="hold">
-                      <p:stCondLst>
-                        <p:cond delay="0"/>
-                      </p:stCondLst>
-                      <p:childTnLst>
-                        <p>
-                          <p:par>
-                            <p:cTn id="4" presetID="10" presetClass="entr" presetSubtype="0" fill="hold" grpId="0" nodeType="clickEffect">
-                              <p:stCondLst>
-                                <p:cond delay="0"/>
-                              </p:stCondLst>
-                              <p:childTnLst>
-                                <p:set>
-                                  <p:cBhvr>
-                                    <p:cTn id="5" dur="1" fill="hold">
-                                      <p:stCondLst>
-                                        <p:cond delay="0"/>
-                                      </p:stCondLst>
-                                    </p:cTn>
-                                    <p:tgtEl>
-                                      <p:spTgt spid="2"/>
-                                    </p:tgtEl>
-                                    <p:attrNameLst>
-                                      <p:attrName>style.visibility</p:attrName>
-                                    </p:attrNameLst>
-                                  </p:cBhvr>
-                                  <p:to>
-                                    <p:strVal val="visible"/>
-                                  </p:to>
-                                </p:set>
-                                <p:animEffect transition="in" filter="fade">
-                                  <p:cBhvr>
-                                    <p:cTn id="6" dur="400"/>
-                                    <p:tgtEl>
-                                      <p:spTgt spid="2"/>
-                                    </p:tgtEl>
-                                  </p:cBhvr>
-                                </p:animEffect>
-                              </p:childTnLst>
-                            </p:cTn>
-                          </p:par>
-                          <p:par>
-                            <p:cTn id="7" presetID="10" presetClass="entr" presetSubtype="0" fill="hold" grpId="0" nodeType="withEffect">
-                              <p:stCondLst>
-                                <p:cond delay="120"/>
-                              </p:stCondLst>
-                              <p:childTnLst>
-                                <p:set>
-                                  <p:cBhvr>
-                                    <p:cTn id="8" dur="1" fill="hold">
-                                      <p:stCondLst>
-                                        <p:cond delay="0"/>
-                                      </p:stCondLst>
-                                    </p:cTn>
-                                    <p:tgtEl>
-                                      <p:spTgt spid="3"/>
-                                    </p:tgtEl>
-                                    <p:attrNameLst>
-                                      <p:attrName>style.visibility</p:attrName>
-                                    </p:attrNameLst>
-                                  </p:cBhvr>
-                                  <p:to>
-                                    <p:strVal val="visible"/>
-                                  </p:to>
-                                </p:set>
-                                <p:animEffect transition="in" filter="fade">
-                                  <p:cBhvr>
-                                    <p:cTn id="9" dur="400"/>
-                                    <p:tgtEl>
-                                      <p:spTgt spid="3"/>
-                                    </p:tgtEl>
-                                  </p:cBhvr>
-                                </p:animEffect>
-                              </p:childTnLst>
-                            </p:cTn>
-                          </p:par>
-                          <p:par>
-                            <p:cTn id="10" presetID="10" presetClass="entr" presetSubtype="0" fill="hold" grpId="0" nodeType="withEffect">
-                              <p:stCondLst>
-                                <p:cond delay="240"/>
-                              </p:stCondLst>
-                              <p:childTnLst>
-                                <p:set>
-                                  <p:cBhvr>
-                                    <p:cTn id="11" dur="1" fill="hold">
-                                      <p:stCondLst>
-                                        <p:cond delay="0"/>
-                                      </p:stCondLst>
-                                    </p:cTn>
-                                    <p:tgtEl>
-                                      <p:spTgt spid="5"/>
-                                    </p:tgtEl>
-                                    <p:attrNameLst>
-                                      <p:attrName>style.visibility</p:attrName>
-                                    </p:attrNameLst>
-                                  </p:cBhvr>
-                                  <p:to>
-                                    <p:strVal val="visible"/>
-                                  </p:to>
-                                </p:set>
-                                <p:animEffect transition="in" filter="fade">
-                                  <p:cBhvr>
-                                    <p:cTn id="12" dur="400"/>
-                                    <p:tgtEl>
-                                      <p:spTgt spid="5"/>
-                                    </p:tgtEl>
-                                  </p:cBhvr>
-                                </p:animEffect>
-                              </p:childTnLst>
-                            </p:cTn>
-                          </p:par>
-                        </p>
-                      </p:childTnLst>
-                    </p:cTn>
-                  </p:par>
-                  <p:par>
-                    <p:cTn id="24" fill="hold">
-                      <p:stCondLst>
-                        <p:cond delay="indefinite"/>
-                      </p:stCondLst>
-                      <p:childTnLst>
-                        <p>
-                          <p:par>
-                            <p:cTn id="15" presetID="10" presetClass="entr" presetSubtype="0" fill="hold" grpId="0" nodeType="clickEffect">
-                              <p:stCondLst>
-                                <p:cond delay="0"/>
-                              </p:stCondLst>
-                              <p:childTnLst>
-                                <p:set>
-                                  <p:cBhvr>
-                                    <p:cTn id="16" dur="1" fill="hold">
-                                      <p:stCondLst>
-                                        <p:cond delay="0"/>
-                                      </p:stCondLst>
-                                    </p:cTn>
-                                    <p:tgtEl>
-                                      <p:spTgt spid="6"/>
-                                    </p:tgtEl>
-                                    <p:attrNameLst>
-                                      <p:attrName>style.visibility</p:attrName>
-                                    </p:attrNameLst>
-                                  </p:cBhvr>
-                                  <p:to>
-                                    <p:strVal val="visible"/>
-                                  </p:to>
-                                </p:set>
-                                <p:animEffect transition="in" filter="fade">
-                                  <p:cBhvr>
-                                    <p:cTn id="17" dur="400"/>
-                                    <p:tgtEl>
-                                      <p:spTgt spid="6"/>
-                                    </p:tgtEl>
-                                  </p:cBhvr>
-                                </p:animEffect>
-                              </p:childTnLst>
-                            </p:cTn>
-                          </p:par>
-                          <p:par>
-                            <p:cTn id="18" presetID="10" presetClass="entr" presetSubtype="0" fill="hold" grpId="0" nodeType="withEffect">
-                              <p:stCondLst>
-                                <p:cond delay="120"/>
-                              </p:stCondLst>
-                              <p:childTnLst>
-                                <p:set>
-                                  <p:cBhvr>
-                                    <p:cTn id="19" dur="1" fill="hold">
-                                      <p:stCondLst>
-                                        <p:cond delay="0"/>
-                                      </p:stCondLst>
-                                    </p:cTn>
-                                    <p:tgtEl>
-                                      <p:spTgt spid="8"/>
-                                    </p:tgtEl>
-                                    <p:attrNameLst>
-                                      <p:attrName>style.visibility</p:attrName>
-                                    </p:attrNameLst>
-                                  </p:cBhvr>
-                                  <p:to>
-                                    <p:strVal val="visible"/>
-                                  </p:to>
-                                </p:set>
-                                <p:animEffect transition="in" filter="fade">
-                                  <p:cBhvr>
-                                    <p:cTn id="20" dur="400"/>
-                                    <p:tgtEl>
-                                      <p:spTgt spid="8"/>
-                                    </p:tgtEl>
-                                  </p:cBhvr>
-                                </p:animEffect>
-                              </p:childTnLst>
-                            </p:cTn>
-                          </p:par>
-                          <p:par>
-                            <p:cTn id="21" presetID="10" presetClass="entr" presetSubtype="0" fill="hold" grpId="0" nodeType="withEffect">
-                              <p:stCondLst>
-                                <p:cond delay="240"/>
-                              </p:stCondLst>
-                              <p:childTnLst>
-                                <p:set>
-                                  <p:cBhvr>
-                                    <p:cTn id="22" dur="1" fill="hold">
-                                      <p:stCondLst>
-                                        <p:cond delay="0"/>
-                                      </p:stCondLst>
-                                    </p:cTn>
-                                    <p:tgtEl>
-                                      <p:spTgt spid="9"/>
-                                    </p:tgtEl>
-                                    <p:attrNameLst>
-                                      <p:attrName>style.visibility</p:attrName>
-                                    </p:attrNameLst>
-                                  </p:cBhvr>
-                                  <p:to>
-                                    <p:strVal val="visible"/>
-                                  </p:to>
-                                </p:set>
-                                <p:animEffect transition="in" filter="fade">
-                                  <p:cBhvr>
-                                    <p:cTn id="23" dur="400"/>
-                                    <p:tgtEl>
-                                      <p:spTgt spid="9"/>
-                                    </p:tgtEl>
-                                  </p:cBhvr>
-                                </p:animEffect>
-                              </p:childTnLst>
-                            </p:cTn>
-                          </p:par>
-                        </p>
-                      </p:childTnLst>
-                    </p:cTn>
-                  </p:par>
-                  <p:par>
-                    <p:cTn id="32" fill="hold">
-                      <p:stCondLst>
-                        <p:cond delay="indefinite"/>
-                      </p:stCondLst>
-                      <p:childTnLst>
-                        <p>
-                          <p:par>
-                            <p:cTn id="26" presetID="10" presetClass="entr" presetSubtype="0" fill="hold" grpId="0" nodeType="clickEffect">
-                              <p:stCondLst>
-                                <p:cond delay="0"/>
-                              </p:stCondLst>
-                              <p:childTnLst>
-                                <p:set>
-                                  <p:cBhvr>
-                                    <p:cTn id="27" dur="1" fill="hold">
-                                      <p:stCondLst>
-                                        <p:cond delay="0"/>
-                                      </p:stCondLst>
-                                    </p:cTn>
-                                    <p:tgtEl>
-                                      <p:spTgt spid="11"/>
-                                    </p:tgtEl>
-                                    <p:attrNameLst>
-                                      <p:attrName>style.visibility</p:attrName>
-                                    </p:attrNameLst>
-                                  </p:cBhvr>
-                                  <p:to>
-                                    <p:strVal val="visible"/>
-                                  </p:to>
-                                </p:set>
-                                <p:animEffect transition="in" filter="fade">
-                                  <p:cBhvr>
-                                    <p:cTn id="28" dur="400"/>
-                                    <p:tgtEl>
-                                      <p:spTgt spid="11"/>
-                                    </p:tgtEl>
-                                  </p:cBhvr>
-                                </p:animEffect>
-                              </p:childTnLst>
-                            </p:cTn>
-                          </p:par>
-                          <p:par>
-                            <p:cTn id="29" presetID="10" presetClass="entr" presetSubtype="0" fill="hold" grpId="0" nodeType="withEffect">
-                              <p:stCondLst>
-                                <p:cond delay="120"/>
-                              </p:stCondLst>
-                              <p:childTnLst>
-                                <p:set>
-                                  <p:cBhvr>
-                                    <p:cTn id="30" dur="1" fill="hold">
-                                      <p:stCondLst>
-                                        <p:cond delay="0"/>
-                                      </p:stCondLst>
-                                    </p:cTn>
-                                    <p:tgtEl>
-                                      <p:spTgt spid="12"/>
-                                    </p:tgtEl>
-                                    <p:attrNameLst>
-                                      <p:attrName>style.visibility</p:attrName>
-                                    </p:attrNameLst>
-                                  </p:cBhvr>
-                                  <p:to>
-                                    <p:strVal val="visible"/>
-                                  </p:to>
-                                </p:set>
-                                <p:animEffect transition="in" filter="fade">
-                                  <p:cBhvr>
-                                    <p:cTn id="31" dur="400"/>
-                                    <p:tgtEl>
-                                      <p:spTgt spid="12"/>
-                                    </p:tgtEl>
-                                  </p:cBhvr>
-                                </p:animEffect>
-                              </p:childTnLst>
-                            </p:cTn>
-                          </p:par>
-                        </p>
-                      </p:childTnLst>
-                    </p:cTn>
-                  </p:par>
-                </p:childTnLst>
-              </p:cTn>
-              <p:prevCondLst>
-                <p:cond evt="onPrev" delay="0">
-                  <p:tgtEl>
-                    <p:sldTgt/>
-                  </p:tgtEl>
-                </p:cond>
-              </p:prevCondLst>
-              <p:nextCondLst>
-                <p:cond evt="onNext" delay="0">
-                  <p:tgtEl>
-                    <p:sldTgt/>
-                  </p:tgtEl>
-                </p:cond>
-              </p:nextCondLst>
-            </p:seq>
-          </p:childTnLst>
-        </p:cTn>
-      </p:par>
-    </p:tnLst>
-    <p:bldLst>
-      <p:bldP spid="2" grpId="0"/>
-      <p:bldP spid="3" grpId="0"/>
-      <p:bldP spid="5" grpId="0"/>
-      <p:bldP spid="6" grpId="0"/>
-      <p:bldP spid="8" grpId="0"/>
-      <p:bldP spid="9" grpId="0"/>
-      <p:bldP spid="11" grpId="0"/>
-      <p:bldP spid="12" grpId="0"/>
-    </p:bldLst>
-  </p:timing>
-</p:sld>
-</file>
-
-<file path=ppt/slides/slide15.xml><?xml version="1.0" encoding="utf-8"?>
-<p:sld xmlns:a="http://schemas.openxmlformats.org/drawingml/2006/main" xmlns:p="http://schemas.openxmlformats.org/presentationml/2006/main" xmlns:r="http://schemas.openxmlformats.org/officeDocument/2006/relationships">
-  <p:cSld>
-    <p:spTree>
-      <p:nvGrpSpPr>
-        <p:cNvPr id="1" name=""/>
-        <p:cNvGrpSpPr/>
-        <p:nvPr/>
-      </p:nvGrpSpPr>
-      <p:grpSpPr/>
-      <p:sp>
-        <p:nvSpPr>
-          <p:cNvPr id="2" name="Rectangle 1"/>
-          <p:cNvSpPr/>
-          <p:nvPr/>
-        </p:nvSpPr>
-        <p:spPr>
-          <a:xfrm>
-            <a:off x="0" y="0"/>
-            <a:ext cx="12191695" cy="932688"/>
-          </a:xfrm>
-          <a:prstGeom prst="rect">
-            <a:avLst/>
-          </a:prstGeom>
-          <a:solidFill>
-            <a:srgbClr val="16284A"/>
-          </a:solidFill>
-          <a:ln>
-            <a:noFill/>
-          </a:ln>
-          <a:effectLst/>
-        </p:spPr>
-        <p:style>
-          <a:lnRef idx="1">
-            <a:schemeClr val="accent1"/>
-          </a:lnRef>
-          <a:fillRef idx="3">
-            <a:schemeClr val="accent1"/>
-          </a:fillRef>
-          <a:effectRef idx="2">
-            <a:schemeClr val="accent1"/>
-          </a:effectRef>
-          <a:fontRef idx="minor">
-            <a:schemeClr val="lt1"/>
-          </a:fontRef>
-        </p:style>
-        <p:txBody>
-          <a:bodyPr rtlCol="0" anchor="ctr" lIns="411480" tIns="91440"/>
-          <a:lstStyle/>
-          <a:p>
-            <a:pPr algn="ctr"/>
-            <a:r>
-              <a:rPr sz="2800" b="1">
-                <a:solidFill>
-                  <a:srgbClr val="FFFFFF"/>
-                </a:solidFill>
-                <a:latin typeface="微软雅黑"/>
-              </a:rPr>
-              <a:t>四端统一：会话逻辑只有一处实现</a:t>
-            </a:r>
-          </a:p>
-          <a:p>
-            <a:r>
-              <a:rPr sz="1300">
-                <a:solidFill>
-                  <a:srgbClr val="A9C2E8"/>
-                </a:solidFill>
-                <a:latin typeface="微软雅黑"/>
-              </a:rPr>
-              <a:t>Linux 终端界面也接上了共用的 chat_core —— 界面只负责「怎么显示」</a:t>
-            </a:r>
-          </a:p>
-        </p:txBody>
-      </p:sp>
-      <p:pic>
-        <p:nvPicPr>
-          <p:cNvPr id="3" name="Picture 2" descr="chart-layers.png"/>
-          <p:cNvPicPr>
-            <a:picLocks noChangeAspect="1"/>
-          </p:cNvPicPr>
-          <p:nvPr/>
-        </p:nvPicPr>
-        <p:blipFill>
-          <a:blip r:embed="rId2"/>
-          <a:stretch>
-            <a:fillRect/>
-          </a:stretch>
-        </p:blipFill>
-        <p:spPr>
-          <a:xfrm>
-            <a:off x="2300928" y="960120"/>
-            <a:ext cx="7651102" cy="3749039"/>
-          </a:xfrm>
-          <a:prstGeom prst="rect">
-            <a:avLst/>
-          </a:prstGeom>
-        </p:spPr>
-      </p:pic>
-      <p:sp>
-        <p:nvSpPr>
-          <p:cNvPr id="4" name="Rectangle 3"/>
-          <p:cNvSpPr/>
-          <p:nvPr/>
-        </p:nvSpPr>
-        <p:spPr>
-          <a:xfrm>
-            <a:off x="548640" y="4892040"/>
-            <a:ext cx="3657600" cy="1645920"/>
-          </a:xfrm>
-          <a:prstGeom prst="rect">
-            <a:avLst/>
-          </a:prstGeom>
-          <a:solidFill>
-            <a:srgbClr val="E8F1FE"/>
-          </a:solidFill>
-          <a:ln w="15875">
-            <a:solidFill>
-              <a:srgbClr val="1F6FEB"/>
-            </a:solidFill>
-          </a:ln>
-          <a:effectLst/>
-        </p:spPr>
-        <p:style>
-          <a:lnRef idx="1">
-            <a:schemeClr val="accent1"/>
-          </a:lnRef>
-          <a:fillRef idx="3">
-            <a:schemeClr val="accent1"/>
-          </a:fillRef>
-          <a:effectRef idx="2">
-            <a:schemeClr val="accent1"/>
-          </a:effectRef>
-          <a:fontRef idx="minor">
-            <a:schemeClr val="lt1"/>
-          </a:fontRef>
-        </p:style>
-        <p:txBody>
-          <a:bodyPr rtlCol="0" anchor="ctr"/>
-          <a:lstStyle/>
-          <a:p/>
-        </p:txBody>
-      </p:sp>
-      <p:sp>
-        <p:nvSpPr>
-          <p:cNvPr id="5" name="TextBox 4"/>
-          <p:cNvSpPr txBox="1"/>
-          <p:nvPr/>
-        </p:nvSpPr>
-        <p:spPr>
-          <a:xfrm>
-            <a:off x="694944" y="4983479"/>
-            <a:ext cx="3364992" cy="365760"/>
-          </a:xfrm>
-          <a:prstGeom prst="rect">
-            <a:avLst/>
-          </a:prstGeom>
-          <a:noFill/>
-        </p:spPr>
-        <p:txBody>
-          <a:bodyPr wrap="square">
-            <a:spAutoFit/>
-          </a:bodyPr>
-          <a:lstStyle/>
-          <a:p>
-            <a:pPr algn="l">
-              <a:lnSpc>
-                <a:spcPct val="115000"/>
-              </a:lnSpc>
-              <a:spcAft>
-                <a:spcPts val="200"/>
-              </a:spcAft>
-            </a:pPr>
-            <a:r>
-              <a:rPr sz="1300">
-                <a:solidFill>
-                  <a:srgbClr val="1F6FEB"/>
-                </a:solidFill>
-                <a:latin typeface="微软雅黑"/>
-              </a:rPr>
-              <a:t>Linux 界面这次改了什么</a:t>
-            </a:r>
-          </a:p>
-        </p:txBody>
-      </p:sp>
-      <p:sp>
-        <p:nvSpPr>
-          <p:cNvPr id="6" name="TextBox 5"/>
-          <p:cNvSpPr txBox="1"/>
-          <p:nvPr/>
-        </p:nvSpPr>
-        <p:spPr>
-          <a:xfrm>
-            <a:off x="694944" y="5349240"/>
-            <a:ext cx="3364992" cy="1097280"/>
-          </a:xfrm>
-          <a:prstGeom prst="rect">
-            <a:avLst/>
-          </a:prstGeom>
-          <a:noFill/>
-        </p:spPr>
-        <p:txBody>
-          <a:bodyPr wrap="square">
-            <a:spAutoFit/>
-          </a:bodyPr>
-          <a:lstStyle/>
-          <a:p>
-            <a:pPr algn="l">
-              <a:lnSpc>
-                <a:spcPct val="115000"/>
-              </a:lnSpc>
-              <a:spcAft>
-                <a:spcPts val="300"/>
-              </a:spcAft>
-            </a:pPr>
-            <a:r>
-              <a:rPr sz="1100">
-                <a:solidFill>
-                  <a:srgbClr val="202938"/>
-                </a:solidFill>
-                <a:latin typeface="微软雅黑"/>
-              </a:rPr>
-              <a:t>· 原先自己解析协议、自己分派 9 个指令</a:t>
-            </a:r>
-          </a:p>
-          <a:p>
-            <a:pPr algn="l">
-              <a:lnSpc>
-                <a:spcPct val="115000"/>
-              </a:lnSpc>
-              <a:spcAft>
-                <a:spcPts val="300"/>
-              </a:spcAft>
-            </a:pPr>
-            <a:r>
-              <a:rPr sz="1100">
-                <a:solidFill>
-                  <a:srgbClr val="202938"/>
-                </a:solidFill>
-                <a:latin typeface="微软雅黑"/>
-              </a:rPr>
-              <a:t>· 现在实现 ChatCoreDelegate，不再持有连接</a:t>
-            </a:r>
-          </a:p>
-          <a:p>
-            <a:pPr algn="l">
-              <a:lnSpc>
-                <a:spcPct val="115000"/>
-              </a:lnSpc>
-              <a:spcAft>
-                <a:spcPts val="300"/>
-              </a:spcAft>
-            </a:pPr>
-            <a:r>
-              <a:rPr sz="1100">
-                <a:solidFill>
-                  <a:srgbClr val="202938"/>
-                </a:solidFill>
-                <a:latin typeface="微软雅黑"/>
-              </a:rPr>
-              <a:t>· 渲染抽成纯函数 cli_render（可单测）</a:t>
-            </a:r>
-          </a:p>
-          <a:p>
-            <a:pPr algn="l">
-              <a:lnSpc>
-                <a:spcPct val="115000"/>
-              </a:lnSpc>
-              <a:spcAft>
-                <a:spcPts val="300"/>
-              </a:spcAft>
-            </a:pPr>
-            <a:r>
-              <a:rPr sz="1100">
-                <a:solidFill>
-                  <a:srgbClr val="202938"/>
-                </a:solidFill>
-                <a:latin typeface="微软雅黑"/>
-              </a:rPr>
-              <a:t>· 界面只剩：读键 / 画输入行 / 打输出</a:t>
-            </a:r>
-          </a:p>
-        </p:txBody>
-      </p:sp>
-      <p:sp>
-        <p:nvSpPr>
-          <p:cNvPr id="7" name="Rectangle 6"/>
-          <p:cNvSpPr/>
-          <p:nvPr/>
-        </p:nvSpPr>
-        <p:spPr>
-          <a:xfrm>
-            <a:off x="4343400" y="4892040"/>
-            <a:ext cx="3657600" cy="1645920"/>
-          </a:xfrm>
-          <a:prstGeom prst="rect">
-            <a:avLst/>
-          </a:prstGeom>
-          <a:solidFill>
-            <a:srgbClr val="E6F6EE"/>
-          </a:solidFill>
-          <a:ln w="15875">
-            <a:solidFill>
-              <a:srgbClr val="168A57"/>
-            </a:solidFill>
-          </a:ln>
-          <a:effectLst/>
-        </p:spPr>
-        <p:style>
-          <a:lnRef idx="1">
-            <a:schemeClr val="accent1"/>
-          </a:lnRef>
-          <a:fillRef idx="3">
-            <a:schemeClr val="accent1"/>
-          </a:fillRef>
-          <a:effectRef idx="2">
-            <a:schemeClr val="accent1"/>
-          </a:effectRef>
-          <a:fontRef idx="minor">
-            <a:schemeClr val="lt1"/>
-          </a:fontRef>
-        </p:style>
-        <p:txBody>
-          <a:bodyPr rtlCol="0" anchor="ctr"/>
-          <a:lstStyle/>
-          <a:p/>
-        </p:txBody>
-      </p:sp>
-      <p:sp>
-        <p:nvSpPr>
-          <p:cNvPr id="8" name="TextBox 7"/>
-          <p:cNvSpPr txBox="1"/>
-          <p:nvPr/>
-        </p:nvSpPr>
-        <p:spPr>
-          <a:xfrm>
-            <a:off x="4489704" y="4983479"/>
-            <a:ext cx="3364992" cy="365760"/>
-          </a:xfrm>
-          <a:prstGeom prst="rect">
-            <a:avLst/>
-          </a:prstGeom>
-          <a:noFill/>
-        </p:spPr>
-        <p:txBody>
-          <a:bodyPr wrap="square">
-            <a:spAutoFit/>
-          </a:bodyPr>
-          <a:lstStyle/>
-          <a:p>
-            <a:pPr algn="l">
-              <a:lnSpc>
-                <a:spcPct val="115000"/>
-              </a:lnSpc>
-              <a:spcAft>
-                <a:spcPts val="200"/>
-              </a:spcAft>
-            </a:pPr>
-            <a:r>
-              <a:rPr sz="1300">
-                <a:solidFill>
-                  <a:srgbClr val="168A57"/>
-                </a:solidFill>
-                <a:latin typeface="微软雅黑"/>
-              </a:rPr>
-              <a:t>界面终于能自动化测了</a:t>
-            </a:r>
-          </a:p>
-        </p:txBody>
-      </p:sp>
-      <p:sp>
-        <p:nvSpPr>
-          <p:cNvPr id="9" name="TextBox 8"/>
-          <p:cNvSpPr txBox="1"/>
-          <p:nvPr/>
-        </p:nvSpPr>
-        <p:spPr>
-          <a:xfrm>
-            <a:off x="4489704" y="5349240"/>
-            <a:ext cx="3364992" cy="1097280"/>
-          </a:xfrm>
-          <a:prstGeom prst="rect">
-            <a:avLst/>
-          </a:prstGeom>
-          <a:noFill/>
-        </p:spPr>
-        <p:txBody>
-          <a:bodyPr wrap="square">
-            <a:spAutoFit/>
-          </a:bodyPr>
-          <a:lstStyle/>
-          <a:p>
-            <a:pPr algn="l">
-              <a:lnSpc>
-                <a:spcPct val="115000"/>
-              </a:lnSpc>
-              <a:spcAft>
-                <a:spcPts val="300"/>
-              </a:spcAft>
-            </a:pPr>
-            <a:r>
-              <a:rPr sz="1100">
-                <a:solidFill>
-                  <a:srgbClr val="202938"/>
-                </a:solidFill>
-                <a:latin typeface="微软雅黑"/>
-              </a:rPr>
-              <a:t>· 用伪终端（pty）驱动真客户端</a:t>
-            </a:r>
-          </a:p>
-          <a:p>
-            <a:pPr algn="l">
-              <a:lnSpc>
-                <a:spcPct val="115000"/>
-              </a:lnSpc>
-              <a:spcAft>
-                <a:spcPts val="300"/>
-              </a:spcAft>
-            </a:pPr>
-            <a:r>
-              <a:rPr sz="1100">
-                <a:solidFill>
-                  <a:srgbClr val="202938"/>
-                </a:solidFill>
-                <a:latin typeface="微软雅黑"/>
-              </a:rPr>
-              <a:t>· 35 项：收发 / 补全 / 色码 / 退格删中文</a:t>
-            </a:r>
-          </a:p>
-          <a:p>
-            <a:pPr algn="l">
-              <a:lnSpc>
-                <a:spcPct val="115000"/>
-              </a:lnSpc>
-              <a:spcAft>
-                <a:spcPts val="300"/>
-              </a:spcAft>
-            </a:pPr>
-            <a:r>
-              <a:rPr sz="1100">
-                <a:solidFill>
-                  <a:srgbClr val="202938"/>
-                </a:solidFill>
-                <a:latin typeface="微软雅黑"/>
-              </a:rPr>
-              <a:t>· 还有附件（下载内容逐字节核对）与语音</a:t>
-            </a:r>
-          </a:p>
-          <a:p>
-            <a:pPr algn="l">
-              <a:lnSpc>
-                <a:spcPct val="115000"/>
-              </a:lnSpc>
-              <a:spcAft>
-                <a:spcPts val="300"/>
-              </a:spcAft>
-            </a:pPr>
-            <a:r>
-              <a:rPr sz="1100">
-                <a:solidFill>
-                  <a:srgbClr val="202938"/>
-                </a:solidFill>
-                <a:latin typeface="微软雅黑"/>
-              </a:rPr>
-              <a:t>· 以前这块完全没有自动化覆盖</a:t>
-            </a:r>
-          </a:p>
-        </p:txBody>
-      </p:sp>
-      <p:sp>
-        <p:nvSpPr>
-          <p:cNvPr id="10" name="Rectangle 9"/>
-          <p:cNvSpPr/>
-          <p:nvPr/>
-        </p:nvSpPr>
-        <p:spPr>
-          <a:xfrm>
-            <a:off x="8138160" y="4892040"/>
-            <a:ext cx="3520440" cy="1645920"/>
-          </a:xfrm>
-          <a:prstGeom prst="rect">
-            <a:avLst/>
-          </a:prstGeom>
-          <a:solidFill>
-            <a:srgbClr val="FDF4E2"/>
-          </a:solidFill>
-          <a:ln w="15875">
-            <a:solidFill>
-              <a:srgbClr val="B06C0C"/>
-            </a:solidFill>
-          </a:ln>
-          <a:effectLst/>
-        </p:spPr>
-        <p:style>
-          <a:lnRef idx="1">
-            <a:schemeClr val="accent1"/>
-          </a:lnRef>
-          <a:fillRef idx="3">
-            <a:schemeClr val="accent1"/>
-          </a:fillRef>
-          <a:effectRef idx="2">
-            <a:schemeClr val="accent1"/>
-          </a:effectRef>
-          <a:fontRef idx="minor">
-            <a:schemeClr val="lt1"/>
-          </a:fontRef>
-        </p:style>
-        <p:txBody>
-          <a:bodyPr rtlCol="0" anchor="ctr"/>
-          <a:lstStyle/>
-          <a:p/>
-        </p:txBody>
-      </p:sp>
-      <p:sp>
-        <p:nvSpPr>
-          <p:cNvPr id="11" name="TextBox 10"/>
-          <p:cNvSpPr txBox="1"/>
-          <p:nvPr/>
-        </p:nvSpPr>
-        <p:spPr>
-          <a:xfrm>
-            <a:off x="8284464" y="4983479"/>
-            <a:ext cx="3227832" cy="365760"/>
-          </a:xfrm>
-          <a:prstGeom prst="rect">
-            <a:avLst/>
-          </a:prstGeom>
-          <a:noFill/>
-        </p:spPr>
-        <p:txBody>
-          <a:bodyPr wrap="square">
-            <a:spAutoFit/>
-          </a:bodyPr>
-          <a:lstStyle/>
-          <a:p>
-            <a:pPr algn="l">
-              <a:lnSpc>
-                <a:spcPct val="115000"/>
-              </a:lnSpc>
-              <a:spcAft>
-                <a:spcPts val="200"/>
-              </a:spcAft>
-            </a:pPr>
-            <a:r>
-              <a:rPr sz="1300">
-                <a:solidFill>
-                  <a:srgbClr val="B06C0C"/>
-                </a:solidFill>
-                <a:latin typeface="微软雅黑"/>
-              </a:rPr>
-              <a:t>一个值得记的教训</a:t>
-            </a:r>
-          </a:p>
-        </p:txBody>
-      </p:sp>
-      <p:sp>
-        <p:nvSpPr>
-          <p:cNvPr id="12" name="TextBox 11"/>
-          <p:cNvSpPr txBox="1"/>
-          <p:nvPr/>
-        </p:nvSpPr>
-        <p:spPr>
-          <a:xfrm>
-            <a:off x="8284464" y="5349240"/>
-            <a:ext cx="3227832" cy="1097280"/>
-          </a:xfrm>
-          <a:prstGeom prst="rect">
-            <a:avLst/>
-          </a:prstGeom>
-          <a:noFill/>
-        </p:spPr>
-        <p:txBody>
-          <a:bodyPr wrap="square">
-            <a:spAutoFit/>
-          </a:bodyPr>
-          <a:lstStyle/>
-          <a:p>
-            <a:pPr algn="l">
-              <a:lnSpc>
-                <a:spcPct val="115000"/>
-              </a:lnSpc>
-              <a:spcAft>
-                <a:spcPts val="300"/>
-              </a:spcAft>
-            </a:pPr>
-            <a:r>
-              <a:rPr sz="1100">
-                <a:solidFill>
-                  <a:srgbClr val="202938"/>
-                </a:solidFill>
-                <a:latin typeface="微软雅黑"/>
-              </a:rPr>
-              <a:t>· 这批测试第一版报了 6 项失败</a:t>
-            </a:r>
-          </a:p>
-          <a:p>
-            <a:pPr algn="l">
-              <a:lnSpc>
-                <a:spcPct val="115000"/>
-              </a:lnSpc>
-              <a:spcAft>
-                <a:spcPts val="300"/>
-              </a:spcAft>
-            </a:pPr>
-            <a:r>
-              <a:rPr sz="1100">
-                <a:solidFill>
-                  <a:srgbClr val="202938"/>
-                </a:solidFill>
-                <a:latin typeface="微软雅黑"/>
-              </a:rPr>
-              <a:t>· 逐条查下来，6 项全是测试自己写错</a:t>
-            </a:r>
-          </a:p>
-          <a:p>
-            <a:pPr algn="l">
-              <a:lnSpc>
-                <a:spcPct val="115000"/>
-              </a:lnSpc>
-              <a:spcAft>
-                <a:spcPts val="300"/>
-              </a:spcAft>
-            </a:pPr>
-            <a:r>
-              <a:rPr sz="1100">
-                <a:solidFill>
-                  <a:srgbClr val="202938"/>
-                </a:solidFill>
-                <a:latin typeface="微软雅黑"/>
-              </a:rPr>
-              <a:t>· client_core 新加 35 项渲染单测</a:t>
-            </a:r>
-          </a:p>
-          <a:p>
-            <a:pPr algn="l">
-              <a:lnSpc>
-                <a:spcPct val="115000"/>
-              </a:lnSpc>
-              <a:spcAft>
-                <a:spcPts val="300"/>
-              </a:spcAft>
-            </a:pPr>
-            <a:r>
-              <a:rPr sz="1100">
-                <a:solidFill>
-                  <a:srgbClr val="202938"/>
-                </a:solidFill>
-                <a:latin typeface="微软雅黑"/>
-              </a:rPr>
-              <a:t>· 测试失败先怀疑测试，别急着改代码</a:t>
             </a:r>
           </a:p>
         </p:txBody>
@@ -11138,6 +11714,1032 @@
                 </a:solidFill>
                 <a:latin typeface="微软雅黑"/>
               </a:rPr>
+              <a:t>四端统一：会话逻辑只有一处实现</a:t>
+            </a:r>
+          </a:p>
+          <a:p>
+            <a:r>
+              <a:rPr sz="1300">
+                <a:solidFill>
+                  <a:srgbClr val="A9C2E8"/>
+                </a:solidFill>
+                <a:latin typeface="微软雅黑"/>
+              </a:rPr>
+              <a:t>Linux 终端界面也接上了共用的 chat_core —— 界面只负责「怎么显示」</a:t>
+            </a:r>
+          </a:p>
+        </p:txBody>
+      </p:sp>
+      <p:pic>
+        <p:nvPicPr>
+          <p:cNvPr id="3" name="Picture 2" descr="chart-layers.png"/>
+          <p:cNvPicPr>
+            <a:picLocks noChangeAspect="1"/>
+          </p:cNvPicPr>
+          <p:nvPr/>
+        </p:nvPicPr>
+        <p:blipFill>
+          <a:blip r:embed="rId2"/>
+          <a:stretch>
+            <a:fillRect/>
+          </a:stretch>
+        </p:blipFill>
+        <p:spPr>
+          <a:xfrm>
+            <a:off x="2300928" y="960120"/>
+            <a:ext cx="7651102" cy="3749039"/>
+          </a:xfrm>
+          <a:prstGeom prst="rect">
+            <a:avLst/>
+          </a:prstGeom>
+        </p:spPr>
+      </p:pic>
+      <p:sp>
+        <p:nvSpPr>
+          <p:cNvPr id="4" name="Rectangle 3"/>
+          <p:cNvSpPr/>
+          <p:nvPr/>
+        </p:nvSpPr>
+        <p:spPr>
+          <a:xfrm>
+            <a:off x="548640" y="4892040"/>
+            <a:ext cx="3657600" cy="1645920"/>
+          </a:xfrm>
+          <a:prstGeom prst="rect">
+            <a:avLst/>
+          </a:prstGeom>
+          <a:solidFill>
+            <a:srgbClr val="E8F1FE"/>
+          </a:solidFill>
+          <a:ln w="15875">
+            <a:solidFill>
+              <a:srgbClr val="1F6FEB"/>
+            </a:solidFill>
+          </a:ln>
+          <a:effectLst/>
+        </p:spPr>
+        <p:style>
+          <a:lnRef idx="1">
+            <a:schemeClr val="accent1"/>
+          </a:lnRef>
+          <a:fillRef idx="3">
+            <a:schemeClr val="accent1"/>
+          </a:fillRef>
+          <a:effectRef idx="2">
+            <a:schemeClr val="accent1"/>
+          </a:effectRef>
+          <a:fontRef idx="minor">
+            <a:schemeClr val="lt1"/>
+          </a:fontRef>
+        </p:style>
+        <p:txBody>
+          <a:bodyPr rtlCol="0" anchor="ctr"/>
+          <a:lstStyle/>
+          <a:p/>
+        </p:txBody>
+      </p:sp>
+      <p:sp>
+        <p:nvSpPr>
+          <p:cNvPr id="5" name="TextBox 4"/>
+          <p:cNvSpPr txBox="1"/>
+          <p:nvPr/>
+        </p:nvSpPr>
+        <p:spPr>
+          <a:xfrm>
+            <a:off x="694944" y="4983479"/>
+            <a:ext cx="3364992" cy="365760"/>
+          </a:xfrm>
+          <a:prstGeom prst="rect">
+            <a:avLst/>
+          </a:prstGeom>
+          <a:noFill/>
+        </p:spPr>
+        <p:txBody>
+          <a:bodyPr wrap="square">
+            <a:spAutoFit/>
+          </a:bodyPr>
+          <a:lstStyle/>
+          <a:p>
+            <a:pPr algn="l">
+              <a:lnSpc>
+                <a:spcPct val="115000"/>
+              </a:lnSpc>
+              <a:spcAft>
+                <a:spcPts val="200"/>
+              </a:spcAft>
+            </a:pPr>
+            <a:r>
+              <a:rPr sz="1300">
+                <a:solidFill>
+                  <a:srgbClr val="1F6FEB"/>
+                </a:solidFill>
+                <a:latin typeface="微软雅黑"/>
+              </a:rPr>
+              <a:t>Linux 界面这次改了什么</a:t>
+            </a:r>
+          </a:p>
+        </p:txBody>
+      </p:sp>
+      <p:sp>
+        <p:nvSpPr>
+          <p:cNvPr id="6" name="TextBox 5"/>
+          <p:cNvSpPr txBox="1"/>
+          <p:nvPr/>
+        </p:nvSpPr>
+        <p:spPr>
+          <a:xfrm>
+            <a:off x="694944" y="5349240"/>
+            <a:ext cx="3364992" cy="1097280"/>
+          </a:xfrm>
+          <a:prstGeom prst="rect">
+            <a:avLst/>
+          </a:prstGeom>
+          <a:noFill/>
+        </p:spPr>
+        <p:txBody>
+          <a:bodyPr wrap="square">
+            <a:spAutoFit/>
+          </a:bodyPr>
+          <a:lstStyle/>
+          <a:p>
+            <a:pPr algn="l">
+              <a:lnSpc>
+                <a:spcPct val="115000"/>
+              </a:lnSpc>
+              <a:spcAft>
+                <a:spcPts val="300"/>
+              </a:spcAft>
+            </a:pPr>
+            <a:r>
+              <a:rPr sz="1100">
+                <a:solidFill>
+                  <a:srgbClr val="202938"/>
+                </a:solidFill>
+                <a:latin typeface="微软雅黑"/>
+              </a:rPr>
+              <a:t>· 原先自己解析协议、自己分派 9 个指令</a:t>
+            </a:r>
+          </a:p>
+          <a:p>
+            <a:pPr algn="l">
+              <a:lnSpc>
+                <a:spcPct val="115000"/>
+              </a:lnSpc>
+              <a:spcAft>
+                <a:spcPts val="300"/>
+              </a:spcAft>
+            </a:pPr>
+            <a:r>
+              <a:rPr sz="1100">
+                <a:solidFill>
+                  <a:srgbClr val="202938"/>
+                </a:solidFill>
+                <a:latin typeface="微软雅黑"/>
+              </a:rPr>
+              <a:t>· 现在实现 ChatCoreDelegate，不再持有连接</a:t>
+            </a:r>
+          </a:p>
+          <a:p>
+            <a:pPr algn="l">
+              <a:lnSpc>
+                <a:spcPct val="115000"/>
+              </a:lnSpc>
+              <a:spcAft>
+                <a:spcPts val="300"/>
+              </a:spcAft>
+            </a:pPr>
+            <a:r>
+              <a:rPr sz="1100">
+                <a:solidFill>
+                  <a:srgbClr val="202938"/>
+                </a:solidFill>
+                <a:latin typeface="微软雅黑"/>
+              </a:rPr>
+              <a:t>· 渲染抽成纯函数 cli_render（可单测）</a:t>
+            </a:r>
+          </a:p>
+          <a:p>
+            <a:pPr algn="l">
+              <a:lnSpc>
+                <a:spcPct val="115000"/>
+              </a:lnSpc>
+              <a:spcAft>
+                <a:spcPts val="300"/>
+              </a:spcAft>
+            </a:pPr>
+            <a:r>
+              <a:rPr sz="1100">
+                <a:solidFill>
+                  <a:srgbClr val="202938"/>
+                </a:solidFill>
+                <a:latin typeface="微软雅黑"/>
+              </a:rPr>
+              <a:t>· 界面只剩：读键 / 画输入行 / 打输出</a:t>
+            </a:r>
+          </a:p>
+        </p:txBody>
+      </p:sp>
+      <p:sp>
+        <p:nvSpPr>
+          <p:cNvPr id="7" name="Rectangle 6"/>
+          <p:cNvSpPr/>
+          <p:nvPr/>
+        </p:nvSpPr>
+        <p:spPr>
+          <a:xfrm>
+            <a:off x="4343400" y="4892040"/>
+            <a:ext cx="3657600" cy="1645920"/>
+          </a:xfrm>
+          <a:prstGeom prst="rect">
+            <a:avLst/>
+          </a:prstGeom>
+          <a:solidFill>
+            <a:srgbClr val="E6F6EE"/>
+          </a:solidFill>
+          <a:ln w="15875">
+            <a:solidFill>
+              <a:srgbClr val="168A57"/>
+            </a:solidFill>
+          </a:ln>
+          <a:effectLst/>
+        </p:spPr>
+        <p:style>
+          <a:lnRef idx="1">
+            <a:schemeClr val="accent1"/>
+          </a:lnRef>
+          <a:fillRef idx="3">
+            <a:schemeClr val="accent1"/>
+          </a:fillRef>
+          <a:effectRef idx="2">
+            <a:schemeClr val="accent1"/>
+          </a:effectRef>
+          <a:fontRef idx="minor">
+            <a:schemeClr val="lt1"/>
+          </a:fontRef>
+        </p:style>
+        <p:txBody>
+          <a:bodyPr rtlCol="0" anchor="ctr"/>
+          <a:lstStyle/>
+          <a:p/>
+        </p:txBody>
+      </p:sp>
+      <p:sp>
+        <p:nvSpPr>
+          <p:cNvPr id="8" name="TextBox 7"/>
+          <p:cNvSpPr txBox="1"/>
+          <p:nvPr/>
+        </p:nvSpPr>
+        <p:spPr>
+          <a:xfrm>
+            <a:off x="4489704" y="4983479"/>
+            <a:ext cx="3364992" cy="365760"/>
+          </a:xfrm>
+          <a:prstGeom prst="rect">
+            <a:avLst/>
+          </a:prstGeom>
+          <a:noFill/>
+        </p:spPr>
+        <p:txBody>
+          <a:bodyPr wrap="square">
+            <a:spAutoFit/>
+          </a:bodyPr>
+          <a:lstStyle/>
+          <a:p>
+            <a:pPr algn="l">
+              <a:lnSpc>
+                <a:spcPct val="115000"/>
+              </a:lnSpc>
+              <a:spcAft>
+                <a:spcPts val="200"/>
+              </a:spcAft>
+            </a:pPr>
+            <a:r>
+              <a:rPr sz="1300">
+                <a:solidFill>
+                  <a:srgbClr val="168A57"/>
+                </a:solidFill>
+                <a:latin typeface="微软雅黑"/>
+              </a:rPr>
+              <a:t>界面终于能自动化测了</a:t>
+            </a:r>
+          </a:p>
+        </p:txBody>
+      </p:sp>
+      <p:sp>
+        <p:nvSpPr>
+          <p:cNvPr id="9" name="TextBox 8"/>
+          <p:cNvSpPr txBox="1"/>
+          <p:nvPr/>
+        </p:nvSpPr>
+        <p:spPr>
+          <a:xfrm>
+            <a:off x="4489704" y="5349240"/>
+            <a:ext cx="3364992" cy="1097280"/>
+          </a:xfrm>
+          <a:prstGeom prst="rect">
+            <a:avLst/>
+          </a:prstGeom>
+          <a:noFill/>
+        </p:spPr>
+        <p:txBody>
+          <a:bodyPr wrap="square">
+            <a:spAutoFit/>
+          </a:bodyPr>
+          <a:lstStyle/>
+          <a:p>
+            <a:pPr algn="l">
+              <a:lnSpc>
+                <a:spcPct val="115000"/>
+              </a:lnSpc>
+              <a:spcAft>
+                <a:spcPts val="300"/>
+              </a:spcAft>
+            </a:pPr>
+            <a:r>
+              <a:rPr sz="1100">
+                <a:solidFill>
+                  <a:srgbClr val="202938"/>
+                </a:solidFill>
+                <a:latin typeface="微软雅黑"/>
+              </a:rPr>
+              <a:t>· 用伪终端（pty）驱动真客户端</a:t>
+            </a:r>
+          </a:p>
+          <a:p>
+            <a:pPr algn="l">
+              <a:lnSpc>
+                <a:spcPct val="115000"/>
+              </a:lnSpc>
+              <a:spcAft>
+                <a:spcPts val="300"/>
+              </a:spcAft>
+            </a:pPr>
+            <a:r>
+              <a:rPr sz="1100">
+                <a:solidFill>
+                  <a:srgbClr val="202938"/>
+                </a:solidFill>
+                <a:latin typeface="微软雅黑"/>
+              </a:rPr>
+              <a:t>· 35 项：收发 / 补全 / 色码 / 退格删中文</a:t>
+            </a:r>
+          </a:p>
+          <a:p>
+            <a:pPr algn="l">
+              <a:lnSpc>
+                <a:spcPct val="115000"/>
+              </a:lnSpc>
+              <a:spcAft>
+                <a:spcPts val="300"/>
+              </a:spcAft>
+            </a:pPr>
+            <a:r>
+              <a:rPr sz="1100">
+                <a:solidFill>
+                  <a:srgbClr val="202938"/>
+                </a:solidFill>
+                <a:latin typeface="微软雅黑"/>
+              </a:rPr>
+              <a:t>· 还有附件（下载内容逐字节核对）与语音</a:t>
+            </a:r>
+          </a:p>
+          <a:p>
+            <a:pPr algn="l">
+              <a:lnSpc>
+                <a:spcPct val="115000"/>
+              </a:lnSpc>
+              <a:spcAft>
+                <a:spcPts val="300"/>
+              </a:spcAft>
+            </a:pPr>
+            <a:r>
+              <a:rPr sz="1100">
+                <a:solidFill>
+                  <a:srgbClr val="202938"/>
+                </a:solidFill>
+                <a:latin typeface="微软雅黑"/>
+              </a:rPr>
+              <a:t>· 以前这块完全没有自动化覆盖</a:t>
+            </a:r>
+          </a:p>
+        </p:txBody>
+      </p:sp>
+      <p:sp>
+        <p:nvSpPr>
+          <p:cNvPr id="10" name="Rectangle 9"/>
+          <p:cNvSpPr/>
+          <p:nvPr/>
+        </p:nvSpPr>
+        <p:spPr>
+          <a:xfrm>
+            <a:off x="8138160" y="4892040"/>
+            <a:ext cx="3520440" cy="1645920"/>
+          </a:xfrm>
+          <a:prstGeom prst="rect">
+            <a:avLst/>
+          </a:prstGeom>
+          <a:solidFill>
+            <a:srgbClr val="FDF4E2"/>
+          </a:solidFill>
+          <a:ln w="15875">
+            <a:solidFill>
+              <a:srgbClr val="B06C0C"/>
+            </a:solidFill>
+          </a:ln>
+          <a:effectLst/>
+        </p:spPr>
+        <p:style>
+          <a:lnRef idx="1">
+            <a:schemeClr val="accent1"/>
+          </a:lnRef>
+          <a:fillRef idx="3">
+            <a:schemeClr val="accent1"/>
+          </a:fillRef>
+          <a:effectRef idx="2">
+            <a:schemeClr val="accent1"/>
+          </a:effectRef>
+          <a:fontRef idx="minor">
+            <a:schemeClr val="lt1"/>
+          </a:fontRef>
+        </p:style>
+        <p:txBody>
+          <a:bodyPr rtlCol="0" anchor="ctr"/>
+          <a:lstStyle/>
+          <a:p/>
+        </p:txBody>
+      </p:sp>
+      <p:sp>
+        <p:nvSpPr>
+          <p:cNvPr id="11" name="TextBox 10"/>
+          <p:cNvSpPr txBox="1"/>
+          <p:nvPr/>
+        </p:nvSpPr>
+        <p:spPr>
+          <a:xfrm>
+            <a:off x="8284464" y="4983479"/>
+            <a:ext cx="3227832" cy="365760"/>
+          </a:xfrm>
+          <a:prstGeom prst="rect">
+            <a:avLst/>
+          </a:prstGeom>
+          <a:noFill/>
+        </p:spPr>
+        <p:txBody>
+          <a:bodyPr wrap="square">
+            <a:spAutoFit/>
+          </a:bodyPr>
+          <a:lstStyle/>
+          <a:p>
+            <a:pPr algn="l">
+              <a:lnSpc>
+                <a:spcPct val="115000"/>
+              </a:lnSpc>
+              <a:spcAft>
+                <a:spcPts val="200"/>
+              </a:spcAft>
+            </a:pPr>
+            <a:r>
+              <a:rPr sz="1300">
+                <a:solidFill>
+                  <a:srgbClr val="B06C0C"/>
+                </a:solidFill>
+                <a:latin typeface="微软雅黑"/>
+              </a:rPr>
+              <a:t>一个值得记的教训</a:t>
+            </a:r>
+          </a:p>
+        </p:txBody>
+      </p:sp>
+      <p:sp>
+        <p:nvSpPr>
+          <p:cNvPr id="12" name="TextBox 11"/>
+          <p:cNvSpPr txBox="1"/>
+          <p:nvPr/>
+        </p:nvSpPr>
+        <p:spPr>
+          <a:xfrm>
+            <a:off x="8284464" y="5349240"/>
+            <a:ext cx="3227832" cy="1097280"/>
+          </a:xfrm>
+          <a:prstGeom prst="rect">
+            <a:avLst/>
+          </a:prstGeom>
+          <a:noFill/>
+        </p:spPr>
+        <p:txBody>
+          <a:bodyPr wrap="square">
+            <a:spAutoFit/>
+          </a:bodyPr>
+          <a:lstStyle/>
+          <a:p>
+            <a:pPr algn="l">
+              <a:lnSpc>
+                <a:spcPct val="115000"/>
+              </a:lnSpc>
+              <a:spcAft>
+                <a:spcPts val="300"/>
+              </a:spcAft>
+            </a:pPr>
+            <a:r>
+              <a:rPr sz="1100">
+                <a:solidFill>
+                  <a:srgbClr val="202938"/>
+                </a:solidFill>
+                <a:latin typeface="微软雅黑"/>
+              </a:rPr>
+              <a:t>· 这批测试第一版报了 6 项失败</a:t>
+            </a:r>
+          </a:p>
+          <a:p>
+            <a:pPr algn="l">
+              <a:lnSpc>
+                <a:spcPct val="115000"/>
+              </a:lnSpc>
+              <a:spcAft>
+                <a:spcPts val="300"/>
+              </a:spcAft>
+            </a:pPr>
+            <a:r>
+              <a:rPr sz="1100">
+                <a:solidFill>
+                  <a:srgbClr val="202938"/>
+                </a:solidFill>
+                <a:latin typeface="微软雅黑"/>
+              </a:rPr>
+              <a:t>· 逐条查下来，6 项全是测试自己写错</a:t>
+            </a:r>
+          </a:p>
+          <a:p>
+            <a:pPr algn="l">
+              <a:lnSpc>
+                <a:spcPct val="115000"/>
+              </a:lnSpc>
+              <a:spcAft>
+                <a:spcPts val="300"/>
+              </a:spcAft>
+            </a:pPr>
+            <a:r>
+              <a:rPr sz="1100">
+                <a:solidFill>
+                  <a:srgbClr val="202938"/>
+                </a:solidFill>
+                <a:latin typeface="微软雅黑"/>
+              </a:rPr>
+              <a:t>· client_core 新加 35 项渲染单测</a:t>
+            </a:r>
+          </a:p>
+          <a:p>
+            <a:pPr algn="l">
+              <a:lnSpc>
+                <a:spcPct val="115000"/>
+              </a:lnSpc>
+              <a:spcAft>
+                <a:spcPts val="300"/>
+              </a:spcAft>
+            </a:pPr>
+            <a:r>
+              <a:rPr sz="1100">
+                <a:solidFill>
+                  <a:srgbClr val="202938"/>
+                </a:solidFill>
+                <a:latin typeface="微软雅黑"/>
+              </a:rPr>
+              <a:t>· 测试失败先怀疑测试，别急着改代码</a:t>
+            </a:r>
+          </a:p>
+        </p:txBody>
+      </p:sp>
+    </p:spTree>
+  </p:cSld>
+  <p:clrMapOvr>
+    <a:masterClrMapping/>
+  </p:clrMapOvr>
+  <mc:AlternateContent xmlns:mc="http://schemas.openxmlformats.org/markup-compatibility/2006">
+    <mc:Choice xmlns:p14="http://schemas.microsoft.com/office/powerpoint/2010/main" Requires="p14">
+      <p:transition spd="med" p14:dur="500">
+        <p:fade/>
+      </p:transition>
+    </mc:Choice>
+    <mc:Fallback>
+      <p:transition spd="med">
+        <p:fade/>
+      </p:transition>
+    </mc:Fallback>
+  </mc:AlternateContent>
+  <p:timing>
+    <p:tnLst>
+      <p:par>
+        <p:cTn id="1" dur="indefinite" restart="never" nodeType="tmRoot">
+          <p:childTnLst>
+            <p:seq concurrent="1" nextAc="seek">
+              <p:cTn id="2" dur="indefinite" nodeType="mainSeq">
+                <p:childTnLst>
+                  <p:par>
+                    <p:cTn id="13" fill="hold">
+                      <p:stCondLst>
+                        <p:cond delay="0"/>
+                      </p:stCondLst>
+                      <p:childTnLst>
+                        <p>
+                          <p:par>
+                            <p:cTn id="4" presetID="10" presetClass="entr" presetSubtype="0" fill="hold" grpId="0" nodeType="clickEffect">
+                              <p:stCondLst>
+                                <p:cond delay="0"/>
+                              </p:stCondLst>
+                              <p:childTnLst>
+                                <p:set>
+                                  <p:cBhvr>
+                                    <p:cTn id="5" dur="1" fill="hold">
+                                      <p:stCondLst>
+                                        <p:cond delay="0"/>
+                                      </p:stCondLst>
+                                    </p:cTn>
+                                    <p:tgtEl>
+                                      <p:spTgt spid="2"/>
+                                    </p:tgtEl>
+                                    <p:attrNameLst>
+                                      <p:attrName>style.visibility</p:attrName>
+                                    </p:attrNameLst>
+                                  </p:cBhvr>
+                                  <p:to>
+                                    <p:strVal val="visible"/>
+                                  </p:to>
+                                </p:set>
+                                <p:animEffect transition="in" filter="fade">
+                                  <p:cBhvr>
+                                    <p:cTn id="6" dur="400"/>
+                                    <p:tgtEl>
+                                      <p:spTgt spid="2"/>
+                                    </p:tgtEl>
+                                  </p:cBhvr>
+                                </p:animEffect>
+                              </p:childTnLst>
+                            </p:cTn>
+                          </p:par>
+                          <p:par>
+                            <p:cTn id="7" presetID="10" presetClass="entr" presetSubtype="0" fill="hold" grpId="0" nodeType="withEffect">
+                              <p:stCondLst>
+                                <p:cond delay="120"/>
+                              </p:stCondLst>
+                              <p:childTnLst>
+                                <p:set>
+                                  <p:cBhvr>
+                                    <p:cTn id="8" dur="1" fill="hold">
+                                      <p:stCondLst>
+                                        <p:cond delay="0"/>
+                                      </p:stCondLst>
+                                    </p:cTn>
+                                    <p:tgtEl>
+                                      <p:spTgt spid="3"/>
+                                    </p:tgtEl>
+                                    <p:attrNameLst>
+                                      <p:attrName>style.visibility</p:attrName>
+                                    </p:attrNameLst>
+                                  </p:cBhvr>
+                                  <p:to>
+                                    <p:strVal val="visible"/>
+                                  </p:to>
+                                </p:set>
+                                <p:animEffect transition="in" filter="fade">
+                                  <p:cBhvr>
+                                    <p:cTn id="9" dur="400"/>
+                                    <p:tgtEl>
+                                      <p:spTgt spid="3"/>
+                                    </p:tgtEl>
+                                  </p:cBhvr>
+                                </p:animEffect>
+                              </p:childTnLst>
+                            </p:cTn>
+                          </p:par>
+                          <p:par>
+                            <p:cTn id="10" presetID="10" presetClass="entr" presetSubtype="0" fill="hold" grpId="0" nodeType="withEffect">
+                              <p:stCondLst>
+                                <p:cond delay="240"/>
+                              </p:stCondLst>
+                              <p:childTnLst>
+                                <p:set>
+                                  <p:cBhvr>
+                                    <p:cTn id="11" dur="1" fill="hold">
+                                      <p:stCondLst>
+                                        <p:cond delay="0"/>
+                                      </p:stCondLst>
+                                    </p:cTn>
+                                    <p:tgtEl>
+                                      <p:spTgt spid="5"/>
+                                    </p:tgtEl>
+                                    <p:attrNameLst>
+                                      <p:attrName>style.visibility</p:attrName>
+                                    </p:attrNameLst>
+                                  </p:cBhvr>
+                                  <p:to>
+                                    <p:strVal val="visible"/>
+                                  </p:to>
+                                </p:set>
+                                <p:animEffect transition="in" filter="fade">
+                                  <p:cBhvr>
+                                    <p:cTn id="12" dur="400"/>
+                                    <p:tgtEl>
+                                      <p:spTgt spid="5"/>
+                                    </p:tgtEl>
+                                  </p:cBhvr>
+                                </p:animEffect>
+                              </p:childTnLst>
+                            </p:cTn>
+                          </p:par>
+                        </p>
+                      </p:childTnLst>
+                    </p:cTn>
+                  </p:par>
+                  <p:par>
+                    <p:cTn id="24" fill="hold">
+                      <p:stCondLst>
+                        <p:cond delay="indefinite"/>
+                      </p:stCondLst>
+                      <p:childTnLst>
+                        <p>
+                          <p:par>
+                            <p:cTn id="15" presetID="10" presetClass="entr" presetSubtype="0" fill="hold" grpId="0" nodeType="clickEffect">
+                              <p:stCondLst>
+                                <p:cond delay="0"/>
+                              </p:stCondLst>
+                              <p:childTnLst>
+                                <p:set>
+                                  <p:cBhvr>
+                                    <p:cTn id="16" dur="1" fill="hold">
+                                      <p:stCondLst>
+                                        <p:cond delay="0"/>
+                                      </p:stCondLst>
+                                    </p:cTn>
+                                    <p:tgtEl>
+                                      <p:spTgt spid="6"/>
+                                    </p:tgtEl>
+                                    <p:attrNameLst>
+                                      <p:attrName>style.visibility</p:attrName>
+                                    </p:attrNameLst>
+                                  </p:cBhvr>
+                                  <p:to>
+                                    <p:strVal val="visible"/>
+                                  </p:to>
+                                </p:set>
+                                <p:animEffect transition="in" filter="fade">
+                                  <p:cBhvr>
+                                    <p:cTn id="17" dur="400"/>
+                                    <p:tgtEl>
+                                      <p:spTgt spid="6"/>
+                                    </p:tgtEl>
+                                  </p:cBhvr>
+                                </p:animEffect>
+                              </p:childTnLst>
+                            </p:cTn>
+                          </p:par>
+                          <p:par>
+                            <p:cTn id="18" presetID="10" presetClass="entr" presetSubtype="0" fill="hold" grpId="0" nodeType="withEffect">
+                              <p:stCondLst>
+                                <p:cond delay="120"/>
+                              </p:stCondLst>
+                              <p:childTnLst>
+                                <p:set>
+                                  <p:cBhvr>
+                                    <p:cTn id="19" dur="1" fill="hold">
+                                      <p:stCondLst>
+                                        <p:cond delay="0"/>
+                                      </p:stCondLst>
+                                    </p:cTn>
+                                    <p:tgtEl>
+                                      <p:spTgt spid="8"/>
+                                    </p:tgtEl>
+                                    <p:attrNameLst>
+                                      <p:attrName>style.visibility</p:attrName>
+                                    </p:attrNameLst>
+                                  </p:cBhvr>
+                                  <p:to>
+                                    <p:strVal val="visible"/>
+                                  </p:to>
+                                </p:set>
+                                <p:animEffect transition="in" filter="fade">
+                                  <p:cBhvr>
+                                    <p:cTn id="20" dur="400"/>
+                                    <p:tgtEl>
+                                      <p:spTgt spid="8"/>
+                                    </p:tgtEl>
+                                  </p:cBhvr>
+                                </p:animEffect>
+                              </p:childTnLst>
+                            </p:cTn>
+                          </p:par>
+                          <p:par>
+                            <p:cTn id="21" presetID="10" presetClass="entr" presetSubtype="0" fill="hold" grpId="0" nodeType="withEffect">
+                              <p:stCondLst>
+                                <p:cond delay="240"/>
+                              </p:stCondLst>
+                              <p:childTnLst>
+                                <p:set>
+                                  <p:cBhvr>
+                                    <p:cTn id="22" dur="1" fill="hold">
+                                      <p:stCondLst>
+                                        <p:cond delay="0"/>
+                                      </p:stCondLst>
+                                    </p:cTn>
+                                    <p:tgtEl>
+                                      <p:spTgt spid="9"/>
+                                    </p:tgtEl>
+                                    <p:attrNameLst>
+                                      <p:attrName>style.visibility</p:attrName>
+                                    </p:attrNameLst>
+                                  </p:cBhvr>
+                                  <p:to>
+                                    <p:strVal val="visible"/>
+                                  </p:to>
+                                </p:set>
+                                <p:animEffect transition="in" filter="fade">
+                                  <p:cBhvr>
+                                    <p:cTn id="23" dur="400"/>
+                                    <p:tgtEl>
+                                      <p:spTgt spid="9"/>
+                                    </p:tgtEl>
+                                  </p:cBhvr>
+                                </p:animEffect>
+                              </p:childTnLst>
+                            </p:cTn>
+                          </p:par>
+                        </p>
+                      </p:childTnLst>
+                    </p:cTn>
+                  </p:par>
+                  <p:par>
+                    <p:cTn id="32" fill="hold">
+                      <p:stCondLst>
+                        <p:cond delay="indefinite"/>
+                      </p:stCondLst>
+                      <p:childTnLst>
+                        <p>
+                          <p:par>
+                            <p:cTn id="26" presetID="10" presetClass="entr" presetSubtype="0" fill="hold" grpId="0" nodeType="clickEffect">
+                              <p:stCondLst>
+                                <p:cond delay="0"/>
+                              </p:stCondLst>
+                              <p:childTnLst>
+                                <p:set>
+                                  <p:cBhvr>
+                                    <p:cTn id="27" dur="1" fill="hold">
+                                      <p:stCondLst>
+                                        <p:cond delay="0"/>
+                                      </p:stCondLst>
+                                    </p:cTn>
+                                    <p:tgtEl>
+                                      <p:spTgt spid="11"/>
+                                    </p:tgtEl>
+                                    <p:attrNameLst>
+                                      <p:attrName>style.visibility</p:attrName>
+                                    </p:attrNameLst>
+                                  </p:cBhvr>
+                                  <p:to>
+                                    <p:strVal val="visible"/>
+                                  </p:to>
+                                </p:set>
+                                <p:animEffect transition="in" filter="fade">
+                                  <p:cBhvr>
+                                    <p:cTn id="28" dur="400"/>
+                                    <p:tgtEl>
+                                      <p:spTgt spid="11"/>
+                                    </p:tgtEl>
+                                  </p:cBhvr>
+                                </p:animEffect>
+                              </p:childTnLst>
+                            </p:cTn>
+                          </p:par>
+                          <p:par>
+                            <p:cTn id="29" presetID="10" presetClass="entr" presetSubtype="0" fill="hold" grpId="0" nodeType="withEffect">
+                              <p:stCondLst>
+                                <p:cond delay="120"/>
+                              </p:stCondLst>
+                              <p:childTnLst>
+                                <p:set>
+                                  <p:cBhvr>
+                                    <p:cTn id="30" dur="1" fill="hold">
+                                      <p:stCondLst>
+                                        <p:cond delay="0"/>
+                                      </p:stCondLst>
+                                    </p:cTn>
+                                    <p:tgtEl>
+                                      <p:spTgt spid="12"/>
+                                    </p:tgtEl>
+                                    <p:attrNameLst>
+                                      <p:attrName>style.visibility</p:attrName>
+                                    </p:attrNameLst>
+                                  </p:cBhvr>
+                                  <p:to>
+                                    <p:strVal val="visible"/>
+                                  </p:to>
+                                </p:set>
+                                <p:animEffect transition="in" filter="fade">
+                                  <p:cBhvr>
+                                    <p:cTn id="31" dur="400"/>
+                                    <p:tgtEl>
+                                      <p:spTgt spid="12"/>
+                                    </p:tgtEl>
+                                  </p:cBhvr>
+                                </p:animEffect>
+                              </p:childTnLst>
+                            </p:cTn>
+                          </p:par>
+                        </p>
+                      </p:childTnLst>
+                    </p:cTn>
+                  </p:par>
+                </p:childTnLst>
+              </p:cTn>
+              <p:prevCondLst>
+                <p:cond evt="onPrev" delay="0">
+                  <p:tgtEl>
+                    <p:sldTgt/>
+                  </p:tgtEl>
+                </p:cond>
+              </p:prevCondLst>
+              <p:nextCondLst>
+                <p:cond evt="onNext" delay="0">
+                  <p:tgtEl>
+                    <p:sldTgt/>
+                  </p:tgtEl>
+                </p:cond>
+              </p:nextCondLst>
+            </p:seq>
+          </p:childTnLst>
+        </p:cTn>
+      </p:par>
+    </p:tnLst>
+    <p:bldLst>
+      <p:bldP spid="2" grpId="0"/>
+      <p:bldP spid="3" grpId="0"/>
+      <p:bldP spid="5" grpId="0"/>
+      <p:bldP spid="6" grpId="0"/>
+      <p:bldP spid="8" grpId="0"/>
+      <p:bldP spid="9" grpId="0"/>
+      <p:bldP spid="11" grpId="0"/>
+      <p:bldP spid="12" grpId="0"/>
+    </p:bldLst>
+  </p:timing>
+</p:sld>
+</file>
+
+<file path=ppt/slides/slide17.xml><?xml version="1.0" encoding="utf-8"?>
+<p:sld xmlns:a="http://schemas.openxmlformats.org/drawingml/2006/main" xmlns:p="http://schemas.openxmlformats.org/presentationml/2006/main" xmlns:r="http://schemas.openxmlformats.org/officeDocument/2006/relationships">
+  <p:cSld>
+    <p:spTree>
+      <p:nvGrpSpPr>
+        <p:cNvPr id="1" name=""/>
+        <p:cNvGrpSpPr/>
+        <p:nvPr/>
+      </p:nvGrpSpPr>
+      <p:grpSpPr/>
+      <p:sp>
+        <p:nvSpPr>
+          <p:cNvPr id="2" name="Rectangle 1"/>
+          <p:cNvSpPr/>
+          <p:nvPr/>
+        </p:nvSpPr>
+        <p:spPr>
+          <a:xfrm>
+            <a:off x="0" y="0"/>
+            <a:ext cx="12191695" cy="932688"/>
+          </a:xfrm>
+          <a:prstGeom prst="rect">
+            <a:avLst/>
+          </a:prstGeom>
+          <a:solidFill>
+            <a:srgbClr val="16284A"/>
+          </a:solidFill>
+          <a:ln>
+            <a:noFill/>
+          </a:ln>
+          <a:effectLst/>
+        </p:spPr>
+        <p:style>
+          <a:lnRef idx="1">
+            <a:schemeClr val="accent1"/>
+          </a:lnRef>
+          <a:fillRef idx="3">
+            <a:schemeClr val="accent1"/>
+          </a:fillRef>
+          <a:effectRef idx="2">
+            <a:schemeClr val="accent1"/>
+          </a:effectRef>
+          <a:fontRef idx="minor">
+            <a:schemeClr val="lt1"/>
+          </a:fontRef>
+        </p:style>
+        <p:txBody>
+          <a:bodyPr rtlCol="0" anchor="ctr" lIns="411480" tIns="91440"/>
+          <a:lstStyle/>
+          <a:p>
+            <a:pPr algn="ctr"/>
+            <a:r>
+              <a:rPr sz="2800" b="1">
+                <a:solidFill>
+                  <a:srgbClr val="FFFFFF"/>
+                </a:solidFill>
+                <a:latin typeface="微软雅黑"/>
+              </a:rPr>
               <a:t>macOS 端：原生 Cocoa 界面 + 如实标注的验证边界</a:t>
             </a:r>
           </a:p>
@@ -12049,7 +13651,7 @@
 </p:sld>
 </file>
 
-<file path=ppt/slides/slide17.xml><?xml version="1.0" encoding="utf-8"?>
+<file path=ppt/slides/slide18.xml><?xml version="1.0" encoding="utf-8"?>
 <p:sld xmlns:a="http://schemas.openxmlformats.org/drawingml/2006/main" xmlns:p="http://schemas.openxmlformats.org/presentationml/2006/main" xmlns:r="http://schemas.openxmlformats.org/officeDocument/2006/relationships">
   <p:cSld>
     <p:spTree>
@@ -12673,7 +14275,7 @@
 </p:sld>
 </file>
 
-<file path=ppt/slides/slide18.xml><?xml version="1.0" encoding="utf-8"?>
+<file path=ppt/slides/slide19.xml><?xml version="1.0" encoding="utf-8"?>
 <p:sld xmlns:a="http://schemas.openxmlformats.org/drawingml/2006/main" xmlns:p="http://schemas.openxmlformats.org/presentationml/2006/main" xmlns:r="http://schemas.openxmlformats.org/officeDocument/2006/relationships">
   <p:cSld>
     <p:spTree>
@@ -13907,515 +15509,6 @@
 </p:sld>
 </file>
 
-<file path=ppt/slides/slide19.xml><?xml version="1.0" encoding="utf-8"?>
-<p:sld xmlns:a="http://schemas.openxmlformats.org/drawingml/2006/main" xmlns:p="http://schemas.openxmlformats.org/presentationml/2006/main" xmlns:r="http://schemas.openxmlformats.org/officeDocument/2006/relationships">
-  <p:cSld>
-    <p:spTree>
-      <p:nvGrpSpPr>
-        <p:cNvPr id="1" name=""/>
-        <p:cNvGrpSpPr/>
-        <p:nvPr/>
-      </p:nvGrpSpPr>
-      <p:grpSpPr/>
-      <p:sp>
-        <p:nvSpPr>
-          <p:cNvPr id="2" name="Rectangle 1"/>
-          <p:cNvSpPr/>
-          <p:nvPr/>
-        </p:nvSpPr>
-        <p:spPr>
-          <a:xfrm>
-            <a:off x="0" y="0"/>
-            <a:ext cx="12191695" cy="932688"/>
-          </a:xfrm>
-          <a:prstGeom prst="rect">
-            <a:avLst/>
-          </a:prstGeom>
-          <a:solidFill>
-            <a:srgbClr val="16284A"/>
-          </a:solidFill>
-          <a:ln>
-            <a:noFill/>
-          </a:ln>
-          <a:effectLst/>
-        </p:spPr>
-        <p:style>
-          <a:lnRef idx="1">
-            <a:schemeClr val="accent1"/>
-          </a:lnRef>
-          <a:fillRef idx="3">
-            <a:schemeClr val="accent1"/>
-          </a:fillRef>
-          <a:effectRef idx="2">
-            <a:schemeClr val="accent1"/>
-          </a:effectRef>
-          <a:fontRef idx="minor">
-            <a:schemeClr val="lt1"/>
-          </a:fontRef>
-        </p:style>
-        <p:txBody>
-          <a:bodyPr rtlCol="0" anchor="ctr" lIns="411480" tIns="91440"/>
-          <a:lstStyle/>
-          <a:p>
-            <a:pPr algn="ctr"/>
-            <a:r>
-              <a:rPr sz="2800" b="1">
-                <a:solidFill>
-                  <a:srgbClr val="FFFFFF"/>
-                </a:solidFill>
-                <a:latin typeface="微软雅黑"/>
-              </a:rPr>
-              <a:t>从这次开发里得到的结论</a:t>
-            </a:r>
-          </a:p>
-          <a:p>
-            <a:r>
-              <a:rPr sz="1300">
-                <a:solidFill>
-                  <a:srgbClr val="A9C2E8"/>
-                </a:solidFill>
-                <a:latin typeface="微软雅黑"/>
-              </a:rPr>
-              <a:t>如果你也想用 AI 做这种规模的项目</a:t>
-            </a:r>
-          </a:p>
-        </p:txBody>
-      </p:sp>
-      <p:sp>
-        <p:nvSpPr>
-          <p:cNvPr id="3" name="TextBox 2"/>
-          <p:cNvSpPr txBox="1"/>
-          <p:nvPr/>
-        </p:nvSpPr>
-        <p:spPr>
-          <a:xfrm>
-            <a:off x="566928" y="1188720"/>
-            <a:ext cx="11064240" cy="4572000"/>
-          </a:xfrm>
-          <a:prstGeom prst="rect">
-            <a:avLst/>
-          </a:prstGeom>
-          <a:noFill/>
-        </p:spPr>
-        <p:txBody>
-          <a:bodyPr wrap="square">
-            <a:spAutoFit/>
-          </a:bodyPr>
-          <a:lstStyle/>
-          <a:p>
-            <a:pPr algn="l">
-              <a:lnSpc>
-                <a:spcPct val="115000"/>
-              </a:lnSpc>
-              <a:spcAft>
-                <a:spcPts val="600"/>
-              </a:spcAft>
-            </a:pPr>
-            <a:r>
-              <a:rPr sz="1350">
-                <a:solidFill>
-                  <a:srgbClr val="16284A"/>
-                </a:solidFill>
-                <a:latin typeface="微软雅黑"/>
-              </a:rPr>
-              <a:t>一、测试不是「有空再写」，是让 AI 能干活的前提</a:t>
-            </a:r>
-          </a:p>
-          <a:p>
-            <a:pPr algn="l" lvl="1">
-              <a:lnSpc>
-                <a:spcPct val="115000"/>
-              </a:lnSpc>
-              <a:spcAft>
-                <a:spcPts val="200"/>
-              </a:spcAft>
-            </a:pPr>
-            <a:r>
-              <a:rPr sz="1150">
-                <a:solidFill>
-                  <a:srgbClr val="202938"/>
-                </a:solidFill>
-                <a:latin typeface="微软雅黑"/>
-              </a:rPr>
-              <a:t>· 没有测试的代码，改一处要重跑整个程序靠肉眼确认；有测试的模块，改完一条命令就知道对不对</a:t>
-            </a:r>
-          </a:p>
-          <a:p>
-            <a:pPr algn="l" lvl="1">
-              <a:lnSpc>
-                <a:spcPct val="115000"/>
-              </a:lnSpc>
-              <a:spcAft>
-                <a:spcPts val="200"/>
-              </a:spcAft>
-            </a:pPr>
-            <a:r>
-              <a:rPr sz="1150">
-                <a:solidFill>
-                  <a:srgbClr val="202938"/>
-                </a:solidFill>
-                <a:latin typeface="微软雅黑"/>
-              </a:rPr>
-              <a:t>· 这个项目里几乎每个真 bug 最后都变成了一条新的断言</a:t>
-            </a:r>
-          </a:p>
-          <a:p>
-            <a:pPr algn="l">
-              <a:lnSpc>
-                <a:spcPct val="115000"/>
-              </a:lnSpc>
-              <a:spcAft>
-                <a:spcPts val="600"/>
-              </a:spcAft>
-            </a:pPr>
-            <a:r>
-              <a:rPr sz="1350">
-                <a:solidFill>
-                  <a:srgbClr val="202938"/>
-                </a:solidFill>
-                <a:latin typeface="微软雅黑"/>
-              </a:rPr>
-              <a:t/>
-            </a:r>
-          </a:p>
-          <a:p>
-            <a:pPr algn="l">
-              <a:lnSpc>
-                <a:spcPct val="115000"/>
-              </a:lnSpc>
-              <a:spcAft>
-                <a:spcPts val="600"/>
-              </a:spcAft>
-            </a:pPr>
-            <a:r>
-              <a:rPr sz="1350">
-                <a:solidFill>
-                  <a:srgbClr val="16284A"/>
-                </a:solidFill>
-                <a:latin typeface="微软雅黑"/>
-              </a:rPr>
-              <a:t>二、跨平台 / 跨语言的项目，先立「一致性契约」再写业务</a:t>
-            </a:r>
-          </a:p>
-          <a:p>
-            <a:pPr algn="l" lvl="1">
-              <a:lnSpc>
-                <a:spcPct val="115000"/>
-              </a:lnSpc>
-              <a:spcAft>
-                <a:spcPts val="200"/>
-              </a:spcAft>
-            </a:pPr>
-            <a:r>
-              <a:rPr sz="1150">
-                <a:solidFill>
-                  <a:srgbClr val="202938"/>
-                </a:solidFill>
-                <a:latin typeface="微软雅黑"/>
-              </a:rPr>
-              <a:t>· 跨端一致性不是靠小心，是靠同一套测试向量 + 明确的书面约定</a:t>
-            </a:r>
-          </a:p>
-          <a:p>
-            <a:pPr algn="l" lvl="1">
-              <a:lnSpc>
-                <a:spcPct val="115000"/>
-              </a:lnSpc>
-              <a:spcAft>
-                <a:spcPts val="200"/>
-              </a:spcAft>
-            </a:pPr>
-            <a:r>
-              <a:rPr sz="1150">
-                <a:solidFill>
-                  <a:srgbClr val="202938"/>
-                </a:solidFill>
-                <a:latin typeface="微软雅黑"/>
-              </a:rPr>
-              <a:t>· 字节序、字段顺序、输出布局这类事，一定要写进注释并配测试</a:t>
-            </a:r>
-          </a:p>
-          <a:p>
-            <a:pPr algn="l">
-              <a:lnSpc>
-                <a:spcPct val="115000"/>
-              </a:lnSpc>
-              <a:spcAft>
-                <a:spcPts val="600"/>
-              </a:spcAft>
-            </a:pPr>
-            <a:r>
-              <a:rPr sz="1350">
-                <a:solidFill>
-                  <a:srgbClr val="202938"/>
-                </a:solidFill>
-                <a:latin typeface="微软雅黑"/>
-              </a:rPr>
-              <a:t/>
-            </a:r>
-          </a:p>
-          <a:p>
-            <a:pPr algn="l">
-              <a:lnSpc>
-                <a:spcPct val="115000"/>
-              </a:lnSpc>
-              <a:spcAft>
-                <a:spcPts val="600"/>
-              </a:spcAft>
-            </a:pPr>
-            <a:r>
-              <a:rPr sz="1350">
-                <a:solidFill>
-                  <a:srgbClr val="16284A"/>
-                </a:solidFill>
-                <a:latin typeface="微软雅黑"/>
-              </a:rPr>
-              <a:t>三、AI 写的注释质量直接决定后期能不能维护</a:t>
-            </a:r>
-          </a:p>
-          <a:p>
-            <a:pPr algn="l" lvl="1">
-              <a:lnSpc>
-                <a:spcPct val="115000"/>
-              </a:lnSpc>
-              <a:spcAft>
-                <a:spcPts val="200"/>
-              </a:spcAft>
-            </a:pPr>
-            <a:r>
-              <a:rPr sz="1150">
-                <a:solidFill>
-                  <a:srgbClr val="202938"/>
-                </a:solidFill>
-                <a:latin typeface="微软雅黑"/>
-              </a:rPr>
-              <a:t>· 这个项目要求注释写「为什么」，包括被否决的方案和每个防护挡住的具体故障</a:t>
-            </a:r>
-          </a:p>
-          <a:p>
-            <a:pPr algn="l" lvl="1">
-              <a:lnSpc>
-                <a:spcPct val="115000"/>
-              </a:lnSpc>
-              <a:spcAft>
-                <a:spcPts val="200"/>
-              </a:spcAft>
-            </a:pPr>
-            <a:r>
-              <a:rPr sz="1150">
-                <a:solidFill>
-                  <a:srgbClr val="202938"/>
-                </a:solidFill>
-                <a:latin typeface="微软雅黑"/>
-              </a:rPr>
-              <a:t>· 回头看，正是这些注释让后面几轮的修改没有把前面的修复推翻</a:t>
-            </a:r>
-          </a:p>
-          <a:p>
-            <a:pPr algn="l">
-              <a:lnSpc>
-                <a:spcPct val="115000"/>
-              </a:lnSpc>
-              <a:spcAft>
-                <a:spcPts val="600"/>
-              </a:spcAft>
-            </a:pPr>
-            <a:r>
-              <a:rPr sz="1350">
-                <a:solidFill>
-                  <a:srgbClr val="202938"/>
-                </a:solidFill>
-                <a:latin typeface="微软雅黑"/>
-              </a:rPr>
-              <a:t/>
-            </a:r>
-          </a:p>
-          <a:p>
-            <a:pPr algn="l">
-              <a:lnSpc>
-                <a:spcPct val="115000"/>
-              </a:lnSpc>
-              <a:spcAft>
-                <a:spcPts val="600"/>
-              </a:spcAft>
-            </a:pPr>
-            <a:r>
-              <a:rPr sz="1350">
-                <a:solidFill>
-                  <a:srgbClr val="B03A2B"/>
-                </a:solidFill>
-                <a:latin typeface="微软雅黑"/>
-              </a:rPr>
-              <a:t>四、人必须守住「验收标准」</a:t>
-            </a:r>
-          </a:p>
-          <a:p>
-            <a:pPr algn="l" lvl="1">
-              <a:lnSpc>
-                <a:spcPct val="115000"/>
-              </a:lnSpc>
-              <a:spcAft>
-                <a:spcPts val="200"/>
-              </a:spcAft>
-            </a:pPr>
-            <a:r>
-              <a:rPr sz="1150">
-                <a:solidFill>
-                  <a:srgbClr val="202938"/>
-                </a:solidFill>
-                <a:latin typeface="微软雅黑"/>
-              </a:rPr>
-              <a:t>· AI 很容易把「编译通过 + 测试通过」当成做完了，但界面好不好看、体验顺不顺，只有人能判断</a:t>
-            </a:r>
-          </a:p>
-        </p:txBody>
-      </p:sp>
-    </p:spTree>
-  </p:cSld>
-  <p:clrMapOvr>
-    <a:masterClrMapping/>
-  </p:clrMapOvr>
-  <mc:AlternateContent xmlns:mc="http://schemas.openxmlformats.org/markup-compatibility/2006">
-    <mc:Choice xmlns:p14="http://schemas.microsoft.com/office/powerpoint/2010/main" Requires="p14">
-      <p:transition spd="med" p14:dur="500">
-        <p:fade/>
-      </p:transition>
-    </mc:Choice>
-    <mc:Fallback>
-      <p:transition spd="med">
-        <p:fade/>
-      </p:transition>
-    </mc:Fallback>
-  </mc:AlternateContent>
-  <p:timing>
-    <p:tnLst>
-      <p:par>
-        <p:cTn id="1" dur="indefinite" restart="never" nodeType="tmRoot">
-          <p:childTnLst>
-            <p:seq concurrent="1" nextAc="seek">
-              <p:cTn id="2" dur="indefinite" nodeType="mainSeq">
-                <p:childTnLst>
-                  <p:par>
-                    <p:cTn id="7" fill="hold">
-                      <p:stCondLst>
-                        <p:cond delay="0"/>
-                      </p:stCondLst>
-                      <p:childTnLst>
-                        <p>
-                          <p:par>
-                            <p:cTn id="4" presetID="10" presetClass="entr" presetSubtype="0" fill="hold" grpId="0" nodeType="clickEffect">
-                              <p:stCondLst>
-                                <p:cond delay="0"/>
-                              </p:stCondLst>
-                              <p:childTnLst>
-                                <p:set>
-                                  <p:cBhvr>
-                                    <p:cTn id="5" dur="1" fill="hold">
-                                      <p:stCondLst>
-                                        <p:cond delay="0"/>
-                                      </p:stCondLst>
-                                    </p:cTn>
-                                    <p:tgtEl>
-                                      <p:spTgt spid="2"/>
-                                    </p:tgtEl>
-                                    <p:attrNameLst>
-                                      <p:attrName>style.visibility</p:attrName>
-                                    </p:attrNameLst>
-                                  </p:cBhvr>
-                                  <p:to>
-                                    <p:strVal val="visible"/>
-                                  </p:to>
-                                </p:set>
-                                <p:animEffect transition="in" filter="fade">
-                                  <p:cBhvr>
-                                    <p:cTn id="6" dur="400"/>
-                                    <p:tgtEl>
-                                      <p:spTgt spid="2"/>
-                                    </p:tgtEl>
-                                  </p:cBhvr>
-                                </p:animEffect>
-                              </p:childTnLst>
-                            </p:cTn>
-                          </p:par>
-                        </p>
-                      </p:childTnLst>
-                    </p:cTn>
-                  </p:par>
-                  <p:par>
-                    <p:cTn id="12" fill="hold">
-                      <p:stCondLst>
-                        <p:cond delay="indefinite"/>
-                      </p:stCondLst>
-                      <p:childTnLst>
-                        <p>
-                          <p:par>
-                            <p:cTn id="9" presetID="10" presetClass="entr" presetSubtype="0" fill="hold" grpId="0" nodeType="clickEffect">
-                              <p:stCondLst>
-                                <p:cond delay="0"/>
-                              </p:stCondLst>
-                              <p:childTnLst>
-                                <p:set>
-                                  <p:cBhvr>
-                                    <p:cTn id="10" dur="1" fill="hold">
-                                      <p:stCondLst>
-                                        <p:cond delay="0"/>
-                                      </p:stCondLst>
-                                    </p:cTn>
-                                    <p:tgtEl>
-                                      <p:spTgt spid="3"/>
-                                    </p:tgtEl>
-                                    <p:attrNameLst>
-                                      <p:attrName>style.visibility</p:attrName>
-                                    </p:attrNameLst>
-                                  </p:cBhvr>
-                                  <p:to>
-                                    <p:strVal val="visible"/>
-                                  </p:to>
-                                </p:set>
-                                <p:animEffect transition="in" filter="fade">
-                                  <p:cBhvr>
-                                    <p:cTn id="11" dur="400"/>
-                                    <p:tgtEl>
-                                      <p:spTgt spid="3"/>
-                                    </p:tgtEl>
-                                  </p:cBhvr>
-                                </p:animEffect>
-                              </p:childTnLst>
-                            </p:cTn>
-                          </p:par>
-                        </p>
-                      </p:childTnLst>
-                    </p:cTn>
-                  </p:par>
-                </p:childTnLst>
-              </p:cTn>
-              <p:prevCondLst>
-                <p:cond evt="onPrev" delay="0">
-                  <p:tgtEl>
-                    <p:sldTgt/>
-                  </p:tgtEl>
-                </p:cond>
-              </p:prevCondLst>
-              <p:nextCondLst>
-                <p:cond evt="onNext" delay="0">
-                  <p:tgtEl>
-                    <p:sldTgt/>
-                  </p:tgtEl>
-                </p:cond>
-              </p:nextCondLst>
-            </p:seq>
-          </p:childTnLst>
-        </p:cTn>
-      </p:par>
-    </p:tnLst>
-    <p:bldLst>
-      <p:bldP spid="2" grpId="0"/>
-      <p:bldP spid="3" grpId="0"/>
-    </p:bldLst>
-  </p:timing>
-</p:sld>
-</file>
-
 <file path=ppt/slides/slide2.xml><?xml version="1.0" encoding="utf-8"?>
 <p:sld xmlns:a="http://schemas.openxmlformats.org/drawingml/2006/main" xmlns:p="http://schemas.openxmlformats.org/presentationml/2006/main" xmlns:r="http://schemas.openxmlformats.org/officeDocument/2006/relationships">
   <p:cSld>
@@ -14883,7 +15976,7 @@
                 </a:solidFill>
                 <a:latin typeface="微软雅黑"/>
               </a:rPr>
-              <a:t>· 有测试：四端合计 2115 项检查（C++ 1787 + 安卓 328）</a:t>
+              <a:t>· 有测试：四端合计 2231 项检查（C++ 1903 + 安卓 328）</a:t>
             </a:r>
           </a:p>
         </p:txBody>
@@ -15369,6 +16462,515 @@
       <p:bldP spid="6" grpId="0"/>
       <p:bldP spid="8" grpId="0"/>
       <p:bldP spid="9" grpId="0"/>
+    </p:bldLst>
+  </p:timing>
+</p:sld>
+</file>
+
+<file path=ppt/slides/slide20.xml><?xml version="1.0" encoding="utf-8"?>
+<p:sld xmlns:a="http://schemas.openxmlformats.org/drawingml/2006/main" xmlns:p="http://schemas.openxmlformats.org/presentationml/2006/main" xmlns:r="http://schemas.openxmlformats.org/officeDocument/2006/relationships">
+  <p:cSld>
+    <p:spTree>
+      <p:nvGrpSpPr>
+        <p:cNvPr id="1" name=""/>
+        <p:cNvGrpSpPr/>
+        <p:nvPr/>
+      </p:nvGrpSpPr>
+      <p:grpSpPr/>
+      <p:sp>
+        <p:nvSpPr>
+          <p:cNvPr id="2" name="Rectangle 1"/>
+          <p:cNvSpPr/>
+          <p:nvPr/>
+        </p:nvSpPr>
+        <p:spPr>
+          <a:xfrm>
+            <a:off x="0" y="0"/>
+            <a:ext cx="12191695" cy="932688"/>
+          </a:xfrm>
+          <a:prstGeom prst="rect">
+            <a:avLst/>
+          </a:prstGeom>
+          <a:solidFill>
+            <a:srgbClr val="16284A"/>
+          </a:solidFill>
+          <a:ln>
+            <a:noFill/>
+          </a:ln>
+          <a:effectLst/>
+        </p:spPr>
+        <p:style>
+          <a:lnRef idx="1">
+            <a:schemeClr val="accent1"/>
+          </a:lnRef>
+          <a:fillRef idx="3">
+            <a:schemeClr val="accent1"/>
+          </a:fillRef>
+          <a:effectRef idx="2">
+            <a:schemeClr val="accent1"/>
+          </a:effectRef>
+          <a:fontRef idx="minor">
+            <a:schemeClr val="lt1"/>
+          </a:fontRef>
+        </p:style>
+        <p:txBody>
+          <a:bodyPr rtlCol="0" anchor="ctr" lIns="411480" tIns="91440"/>
+          <a:lstStyle/>
+          <a:p>
+            <a:pPr algn="ctr"/>
+            <a:r>
+              <a:rPr sz="2800" b="1">
+                <a:solidFill>
+                  <a:srgbClr val="FFFFFF"/>
+                </a:solidFill>
+                <a:latin typeface="微软雅黑"/>
+              </a:rPr>
+              <a:t>从这次开发里得到的结论</a:t>
+            </a:r>
+          </a:p>
+          <a:p>
+            <a:r>
+              <a:rPr sz="1300">
+                <a:solidFill>
+                  <a:srgbClr val="A9C2E8"/>
+                </a:solidFill>
+                <a:latin typeface="微软雅黑"/>
+              </a:rPr>
+              <a:t>如果你也想用 AI 做这种规模的项目</a:t>
+            </a:r>
+          </a:p>
+        </p:txBody>
+      </p:sp>
+      <p:sp>
+        <p:nvSpPr>
+          <p:cNvPr id="3" name="TextBox 2"/>
+          <p:cNvSpPr txBox="1"/>
+          <p:nvPr/>
+        </p:nvSpPr>
+        <p:spPr>
+          <a:xfrm>
+            <a:off x="566928" y="1188720"/>
+            <a:ext cx="11064240" cy="4572000"/>
+          </a:xfrm>
+          <a:prstGeom prst="rect">
+            <a:avLst/>
+          </a:prstGeom>
+          <a:noFill/>
+        </p:spPr>
+        <p:txBody>
+          <a:bodyPr wrap="square">
+            <a:spAutoFit/>
+          </a:bodyPr>
+          <a:lstStyle/>
+          <a:p>
+            <a:pPr algn="l">
+              <a:lnSpc>
+                <a:spcPct val="115000"/>
+              </a:lnSpc>
+              <a:spcAft>
+                <a:spcPts val="600"/>
+              </a:spcAft>
+            </a:pPr>
+            <a:r>
+              <a:rPr sz="1350">
+                <a:solidFill>
+                  <a:srgbClr val="16284A"/>
+                </a:solidFill>
+                <a:latin typeface="微软雅黑"/>
+              </a:rPr>
+              <a:t>一、测试不是「有空再写」，是让 AI 能干活的前提</a:t>
+            </a:r>
+          </a:p>
+          <a:p>
+            <a:pPr algn="l" lvl="1">
+              <a:lnSpc>
+                <a:spcPct val="115000"/>
+              </a:lnSpc>
+              <a:spcAft>
+                <a:spcPts val="200"/>
+              </a:spcAft>
+            </a:pPr>
+            <a:r>
+              <a:rPr sz="1150">
+                <a:solidFill>
+                  <a:srgbClr val="202938"/>
+                </a:solidFill>
+                <a:latin typeface="微软雅黑"/>
+              </a:rPr>
+              <a:t>· 没有测试的代码，改一处要重跑整个程序靠肉眼确认；有测试的模块，改完一条命令就知道对不对</a:t>
+            </a:r>
+          </a:p>
+          <a:p>
+            <a:pPr algn="l" lvl="1">
+              <a:lnSpc>
+                <a:spcPct val="115000"/>
+              </a:lnSpc>
+              <a:spcAft>
+                <a:spcPts val="200"/>
+              </a:spcAft>
+            </a:pPr>
+            <a:r>
+              <a:rPr sz="1150">
+                <a:solidFill>
+                  <a:srgbClr val="202938"/>
+                </a:solidFill>
+                <a:latin typeface="微软雅黑"/>
+              </a:rPr>
+              <a:t>· 这个项目里几乎每个真 bug 最后都变成了一条新的断言</a:t>
+            </a:r>
+          </a:p>
+          <a:p>
+            <a:pPr algn="l">
+              <a:lnSpc>
+                <a:spcPct val="115000"/>
+              </a:lnSpc>
+              <a:spcAft>
+                <a:spcPts val="600"/>
+              </a:spcAft>
+            </a:pPr>
+            <a:r>
+              <a:rPr sz="1350">
+                <a:solidFill>
+                  <a:srgbClr val="202938"/>
+                </a:solidFill>
+                <a:latin typeface="微软雅黑"/>
+              </a:rPr>
+              <a:t/>
+            </a:r>
+          </a:p>
+          <a:p>
+            <a:pPr algn="l">
+              <a:lnSpc>
+                <a:spcPct val="115000"/>
+              </a:lnSpc>
+              <a:spcAft>
+                <a:spcPts val="600"/>
+              </a:spcAft>
+            </a:pPr>
+            <a:r>
+              <a:rPr sz="1350">
+                <a:solidFill>
+                  <a:srgbClr val="16284A"/>
+                </a:solidFill>
+                <a:latin typeface="微软雅黑"/>
+              </a:rPr>
+              <a:t>二、跨平台 / 跨语言的项目，先立「一致性契约」再写业务</a:t>
+            </a:r>
+          </a:p>
+          <a:p>
+            <a:pPr algn="l" lvl="1">
+              <a:lnSpc>
+                <a:spcPct val="115000"/>
+              </a:lnSpc>
+              <a:spcAft>
+                <a:spcPts val="200"/>
+              </a:spcAft>
+            </a:pPr>
+            <a:r>
+              <a:rPr sz="1150">
+                <a:solidFill>
+                  <a:srgbClr val="202938"/>
+                </a:solidFill>
+                <a:latin typeface="微软雅黑"/>
+              </a:rPr>
+              <a:t>· 跨端一致性不是靠小心，是靠同一套测试向量 + 明确的书面约定</a:t>
+            </a:r>
+          </a:p>
+          <a:p>
+            <a:pPr algn="l" lvl="1">
+              <a:lnSpc>
+                <a:spcPct val="115000"/>
+              </a:lnSpc>
+              <a:spcAft>
+                <a:spcPts val="200"/>
+              </a:spcAft>
+            </a:pPr>
+            <a:r>
+              <a:rPr sz="1150">
+                <a:solidFill>
+                  <a:srgbClr val="202938"/>
+                </a:solidFill>
+                <a:latin typeface="微软雅黑"/>
+              </a:rPr>
+              <a:t>· 字节序、字段顺序、输出布局这类事，一定要写进注释并配测试</a:t>
+            </a:r>
+          </a:p>
+          <a:p>
+            <a:pPr algn="l">
+              <a:lnSpc>
+                <a:spcPct val="115000"/>
+              </a:lnSpc>
+              <a:spcAft>
+                <a:spcPts val="600"/>
+              </a:spcAft>
+            </a:pPr>
+            <a:r>
+              <a:rPr sz="1350">
+                <a:solidFill>
+                  <a:srgbClr val="202938"/>
+                </a:solidFill>
+                <a:latin typeface="微软雅黑"/>
+              </a:rPr>
+              <a:t/>
+            </a:r>
+          </a:p>
+          <a:p>
+            <a:pPr algn="l">
+              <a:lnSpc>
+                <a:spcPct val="115000"/>
+              </a:lnSpc>
+              <a:spcAft>
+                <a:spcPts val="600"/>
+              </a:spcAft>
+            </a:pPr>
+            <a:r>
+              <a:rPr sz="1350">
+                <a:solidFill>
+                  <a:srgbClr val="16284A"/>
+                </a:solidFill>
+                <a:latin typeface="微软雅黑"/>
+              </a:rPr>
+              <a:t>三、AI 写的注释质量直接决定后期能不能维护</a:t>
+            </a:r>
+          </a:p>
+          <a:p>
+            <a:pPr algn="l" lvl="1">
+              <a:lnSpc>
+                <a:spcPct val="115000"/>
+              </a:lnSpc>
+              <a:spcAft>
+                <a:spcPts val="200"/>
+              </a:spcAft>
+            </a:pPr>
+            <a:r>
+              <a:rPr sz="1150">
+                <a:solidFill>
+                  <a:srgbClr val="202938"/>
+                </a:solidFill>
+                <a:latin typeface="微软雅黑"/>
+              </a:rPr>
+              <a:t>· 这个项目要求注释写「为什么」，包括被否决的方案和每个防护挡住的具体故障</a:t>
+            </a:r>
+          </a:p>
+          <a:p>
+            <a:pPr algn="l" lvl="1">
+              <a:lnSpc>
+                <a:spcPct val="115000"/>
+              </a:lnSpc>
+              <a:spcAft>
+                <a:spcPts val="200"/>
+              </a:spcAft>
+            </a:pPr>
+            <a:r>
+              <a:rPr sz="1150">
+                <a:solidFill>
+                  <a:srgbClr val="202938"/>
+                </a:solidFill>
+                <a:latin typeface="微软雅黑"/>
+              </a:rPr>
+              <a:t>· 回头看，正是这些注释让后面几轮的修改没有把前面的修复推翻</a:t>
+            </a:r>
+          </a:p>
+          <a:p>
+            <a:pPr algn="l">
+              <a:lnSpc>
+                <a:spcPct val="115000"/>
+              </a:lnSpc>
+              <a:spcAft>
+                <a:spcPts val="600"/>
+              </a:spcAft>
+            </a:pPr>
+            <a:r>
+              <a:rPr sz="1350">
+                <a:solidFill>
+                  <a:srgbClr val="202938"/>
+                </a:solidFill>
+                <a:latin typeface="微软雅黑"/>
+              </a:rPr>
+              <a:t/>
+            </a:r>
+          </a:p>
+          <a:p>
+            <a:pPr algn="l">
+              <a:lnSpc>
+                <a:spcPct val="115000"/>
+              </a:lnSpc>
+              <a:spcAft>
+                <a:spcPts val="600"/>
+              </a:spcAft>
+            </a:pPr>
+            <a:r>
+              <a:rPr sz="1350">
+                <a:solidFill>
+                  <a:srgbClr val="B03A2B"/>
+                </a:solidFill>
+                <a:latin typeface="微软雅黑"/>
+              </a:rPr>
+              <a:t>四、人必须守住「验收标准」</a:t>
+            </a:r>
+          </a:p>
+          <a:p>
+            <a:pPr algn="l" lvl="1">
+              <a:lnSpc>
+                <a:spcPct val="115000"/>
+              </a:lnSpc>
+              <a:spcAft>
+                <a:spcPts val="200"/>
+              </a:spcAft>
+            </a:pPr>
+            <a:r>
+              <a:rPr sz="1150">
+                <a:solidFill>
+                  <a:srgbClr val="202938"/>
+                </a:solidFill>
+                <a:latin typeface="微软雅黑"/>
+              </a:rPr>
+              <a:t>· AI 很容易把「编译通过 + 测试通过」当成做完了，但界面好不好看、体验顺不顺，只有人能判断</a:t>
+            </a:r>
+          </a:p>
+        </p:txBody>
+      </p:sp>
+    </p:spTree>
+  </p:cSld>
+  <p:clrMapOvr>
+    <a:masterClrMapping/>
+  </p:clrMapOvr>
+  <mc:AlternateContent xmlns:mc="http://schemas.openxmlformats.org/markup-compatibility/2006">
+    <mc:Choice xmlns:p14="http://schemas.microsoft.com/office/powerpoint/2010/main" Requires="p14">
+      <p:transition spd="med" p14:dur="500">
+        <p:fade/>
+      </p:transition>
+    </mc:Choice>
+    <mc:Fallback>
+      <p:transition spd="med">
+        <p:fade/>
+      </p:transition>
+    </mc:Fallback>
+  </mc:AlternateContent>
+  <p:timing>
+    <p:tnLst>
+      <p:par>
+        <p:cTn id="1" dur="indefinite" restart="never" nodeType="tmRoot">
+          <p:childTnLst>
+            <p:seq concurrent="1" nextAc="seek">
+              <p:cTn id="2" dur="indefinite" nodeType="mainSeq">
+                <p:childTnLst>
+                  <p:par>
+                    <p:cTn id="7" fill="hold">
+                      <p:stCondLst>
+                        <p:cond delay="0"/>
+                      </p:stCondLst>
+                      <p:childTnLst>
+                        <p>
+                          <p:par>
+                            <p:cTn id="4" presetID="10" presetClass="entr" presetSubtype="0" fill="hold" grpId="0" nodeType="clickEffect">
+                              <p:stCondLst>
+                                <p:cond delay="0"/>
+                              </p:stCondLst>
+                              <p:childTnLst>
+                                <p:set>
+                                  <p:cBhvr>
+                                    <p:cTn id="5" dur="1" fill="hold">
+                                      <p:stCondLst>
+                                        <p:cond delay="0"/>
+                                      </p:stCondLst>
+                                    </p:cTn>
+                                    <p:tgtEl>
+                                      <p:spTgt spid="2"/>
+                                    </p:tgtEl>
+                                    <p:attrNameLst>
+                                      <p:attrName>style.visibility</p:attrName>
+                                    </p:attrNameLst>
+                                  </p:cBhvr>
+                                  <p:to>
+                                    <p:strVal val="visible"/>
+                                  </p:to>
+                                </p:set>
+                                <p:animEffect transition="in" filter="fade">
+                                  <p:cBhvr>
+                                    <p:cTn id="6" dur="400"/>
+                                    <p:tgtEl>
+                                      <p:spTgt spid="2"/>
+                                    </p:tgtEl>
+                                  </p:cBhvr>
+                                </p:animEffect>
+                              </p:childTnLst>
+                            </p:cTn>
+                          </p:par>
+                        </p>
+                      </p:childTnLst>
+                    </p:cTn>
+                  </p:par>
+                  <p:par>
+                    <p:cTn id="12" fill="hold">
+                      <p:stCondLst>
+                        <p:cond delay="indefinite"/>
+                      </p:stCondLst>
+                      <p:childTnLst>
+                        <p>
+                          <p:par>
+                            <p:cTn id="9" presetID="10" presetClass="entr" presetSubtype="0" fill="hold" grpId="0" nodeType="clickEffect">
+                              <p:stCondLst>
+                                <p:cond delay="0"/>
+                              </p:stCondLst>
+                              <p:childTnLst>
+                                <p:set>
+                                  <p:cBhvr>
+                                    <p:cTn id="10" dur="1" fill="hold">
+                                      <p:stCondLst>
+                                        <p:cond delay="0"/>
+                                      </p:stCondLst>
+                                    </p:cTn>
+                                    <p:tgtEl>
+                                      <p:spTgt spid="3"/>
+                                    </p:tgtEl>
+                                    <p:attrNameLst>
+                                      <p:attrName>style.visibility</p:attrName>
+                                    </p:attrNameLst>
+                                  </p:cBhvr>
+                                  <p:to>
+                                    <p:strVal val="visible"/>
+                                  </p:to>
+                                </p:set>
+                                <p:animEffect transition="in" filter="fade">
+                                  <p:cBhvr>
+                                    <p:cTn id="11" dur="400"/>
+                                    <p:tgtEl>
+                                      <p:spTgt spid="3"/>
+                                    </p:tgtEl>
+                                  </p:cBhvr>
+                                </p:animEffect>
+                              </p:childTnLst>
+                            </p:cTn>
+                          </p:par>
+                        </p>
+                      </p:childTnLst>
+                    </p:cTn>
+                  </p:par>
+                </p:childTnLst>
+              </p:cTn>
+              <p:prevCondLst>
+                <p:cond evt="onPrev" delay="0">
+                  <p:tgtEl>
+                    <p:sldTgt/>
+                  </p:tgtEl>
+                </p:cond>
+              </p:prevCondLst>
+              <p:nextCondLst>
+                <p:cond evt="onNext" delay="0">
+                  <p:tgtEl>
+                    <p:sldTgt/>
+                  </p:tgtEl>
+                </p:cond>
+              </p:nextCondLst>
+            </p:seq>
+          </p:childTnLst>
+        </p:cTn>
+      </p:par>
+    </p:tnLst>
+    <p:bldLst>
+      <p:bldP spid="2" grpId="0"/>
+      <p:bldP spid="3" grpId="0"/>
     </p:bldLst>
   </p:timing>
 </p:sld>
@@ -21100,7 +22702,7 @@
                           </a:solidFill>
                           <a:latin typeface="微软雅黑"/>
                         </a:rPr>
-                        <a:t>Windows 端 16 个测试程序</a:t>
+                        <a:t>Windows 端 17 个测试程序</a:t>
                       </a:r>
                     </a:p>
                   </a:txBody>
@@ -21127,7 +22729,7 @@
                           </a:solidFill>
                           <a:latin typeface="微软雅黑"/>
                         </a:rPr>
-                        <a:t>966 项检查，全部通过；构建 0 告警</a:t>
+                        <a:t>1025 项检查，全部通过；构建 0 告警</a:t>
                       </a:r>
                     </a:p>
                   </a:txBody>
@@ -21156,7 +22758,7 @@
                           </a:solidFill>
                           <a:latin typeface="微软雅黑"/>
                         </a:rPr>
-                        <a:t>Linux 端 10 个测试程序</a:t>
+                        <a:t>Linux 端 12 个测试程序</a:t>
                       </a:r>
                     </a:p>
                   </a:txBody>
@@ -21183,7 +22785,7 @@
                           </a:solidFill>
                           <a:latin typeface="微软雅黑"/>
                         </a:rPr>
-                        <a:t>785 项检查，全部通过</a:t>
+                        <a:t>892 项检查，全部通过</a:t>
                       </a:r>
                     </a:p>
                   </a:txBody>

--- a/dchat-项目介绍.pptx
+++ b/dchat-项目介绍.pptx
@@ -6543,7 +6543,7 @@
                 </a:solidFill>
                 <a:latin typeface="微软雅黑"/>
               </a:rPr>
-              <a:t>都是「以前直接丢掉」的东西：重启后记录没了、你不在线消息没了、断了要重下</a:t>
+              <a:t>都是「以前直接丢掉」的东西：重启后记录没了、你不在线消息没了、断了要重下；顺带把文件暂存从内存搬到磁盘、加了每夜自动重启</a:t>
             </a:r>
           </a:p>
         </p:txBody>
@@ -7322,6 +7322,25 @@
                 <a:latin typeface="微软雅黑"/>
               </a:rPr>
               <a:t>· 续传：64 KB 文件下到 46.0 KB 时掐断，重连后服务端日志 「从 46.0 KB 处续传」，最终文件 md5 与源文件完全一致</a:t>
+            </a:r>
+          </a:p>
+          <a:p>
+            <a:pPr algn="l">
+              <a:lnSpc>
+                <a:spcPct val="115000"/>
+              </a:lnSpc>
+              <a:spcAft>
+                <a:spcPts val="300"/>
+              </a:spcAft>
+            </a:pPr>
+            <a:r>
+              <a:rPr sz="1100">
+                <a:solidFill>
+                  <a:srgbClr val="202938"/>
+                </a:solidFill>
+                <a:latin typeface="微软雅黑"/>
+              </a:rPr>
+              <a:t>· 存储改磁盘：24 MB 上传后 RSS 只涨 52 KB（以前涨 24 MB）；过期 / 淘汰 / 重启都清磁盘文件</a:t>
             </a:r>
           </a:p>
         </p:txBody>
